--- a/ADG/06장/6장_PhysicalStandby생성_OMF방식.pptx
+++ b/ADG/06장/6장_PhysicalStandby생성_OMF방식.pptx
@@ -5758,7 +5758,17 @@
                 </a:solidFill>
                 <a:latin typeface="맑은 고딕"/>
               </a:rPr>
-              <a:t>•  OMF 이름 : `o1_mf_system_1b50qfn7_.dbf`</a:t>
+              <a:t>•  OMF 이름 : </a:t>
+            </a:r>
+            <a:r>
+              <a:rPr sz="1700" b="0">
+                <a:solidFill>
+                  <a:srgbClr val="222222"/>
+                </a:solidFill>
+                <a:latin typeface="Consolas"/>
+                <a:cs typeface="Consolas"/>
+              </a:rPr>
+              <a:t>o1_mf_system_1b50qfn7_.dbf</a:t>
             </a:r>
           </a:p>
           <a:p>
@@ -5774,7 +5784,26 @@
                 </a:solidFill>
                 <a:latin typeface="맑은 고딕"/>
               </a:rPr>
-              <a:t>•  `1b50qfn7` — 매번 새로 생성되는 유일 문자열</a:t>
+              <a:t>•  </a:t>
+            </a:r>
+            <a:r>
+              <a:rPr sz="1700" b="0">
+                <a:solidFill>
+                  <a:srgbClr val="222222"/>
+                </a:solidFill>
+                <a:latin typeface="Consolas"/>
+                <a:cs typeface="Consolas"/>
+              </a:rPr>
+              <a:t>1b50qfn7</a:t>
+            </a:r>
+            <a:r>
+              <a:rPr sz="1700" b="0">
+                <a:solidFill>
+                  <a:srgbClr val="222222"/>
+                </a:solidFill>
+                <a:latin typeface="맑은 고딕"/>
+              </a:rPr>
+              <a:t> — 매번 새로 생성되는 유일 문자열</a:t>
             </a:r>
           </a:p>
           <a:p>
@@ -6240,7 +6269,17 @@
                 </a:solidFill>
                 <a:latin typeface="맑은 고딕"/>
               </a:rPr>
-              <a:t>•  `db_create_file_dest=/u03/nosuchdir`</a:t>
+              <a:t>•  </a:t>
+            </a:r>
+            <a:r>
+              <a:rPr sz="1700" b="0">
+                <a:solidFill>
+                  <a:srgbClr val="222222"/>
+                </a:solidFill>
+                <a:latin typeface="Consolas"/>
+                <a:cs typeface="Consolas"/>
+              </a:rPr>
+              <a:t>db_create_file_dest=/u03/nosuchdir</a:t>
             </a:r>
           </a:p>
           <a:p>
@@ -6256,7 +6295,26 @@
                 </a:solidFill>
                 <a:latin typeface="맑은 고딕"/>
               </a:rPr>
-              <a:t>•  `ORA-01261` 값을 경로로 해석할 수 없다</a:t>
+              <a:t>•  </a:t>
+            </a:r>
+            <a:r>
+              <a:rPr sz="1700" b="0">
+                <a:solidFill>
+                  <a:srgbClr val="222222"/>
+                </a:solidFill>
+                <a:latin typeface="Consolas"/>
+                <a:cs typeface="Consolas"/>
+              </a:rPr>
+              <a:t>ORA-01261</a:t>
+            </a:r>
+            <a:r>
+              <a:rPr sz="1700" b="0">
+                <a:solidFill>
+                  <a:srgbClr val="222222"/>
+                </a:solidFill>
+                <a:latin typeface="맑은 고딕"/>
+              </a:rPr>
+              <a:t> 값을 경로로 해석할 수 없다</a:t>
             </a:r>
           </a:p>
           <a:p>
@@ -6272,7 +6330,26 @@
                 </a:solidFill>
                 <a:latin typeface="맑은 고딕"/>
               </a:rPr>
-              <a:t>•  `ORA-01262` stat() 실패</a:t>
+              <a:t>•  </a:t>
+            </a:r>
+            <a:r>
+              <a:rPr sz="1700" b="0">
+                <a:solidFill>
+                  <a:srgbClr val="222222"/>
+                </a:solidFill>
+                <a:latin typeface="Consolas"/>
+                <a:cs typeface="Consolas"/>
+              </a:rPr>
+              <a:t>ORA-01262</a:t>
+            </a:r>
+            <a:r>
+              <a:rPr sz="1700" b="0">
+                <a:solidFill>
+                  <a:srgbClr val="222222"/>
+                </a:solidFill>
+                <a:latin typeface="맑은 고딕"/>
+              </a:rPr>
+              <a:t> stat() 실패</a:t>
             </a:r>
           </a:p>
           <a:p>
@@ -6288,7 +6365,26 @@
                 </a:solidFill>
                 <a:latin typeface="맑은 고딕"/>
               </a:rPr>
-              <a:t>•  `Linux-x86_64 Error: 2` ENOENT — 운영체제 오류 번호가 그대로</a:t>
+              <a:t>•  </a:t>
+            </a:r>
+            <a:r>
+              <a:rPr sz="1700" b="0">
+                <a:solidFill>
+                  <a:srgbClr val="222222"/>
+                </a:solidFill>
+                <a:latin typeface="Consolas"/>
+                <a:cs typeface="Consolas"/>
+              </a:rPr>
+              <a:t>Linux-x86_64 Error: 2</a:t>
+            </a:r>
+            <a:r>
+              <a:rPr sz="1700" b="0">
+                <a:solidFill>
+                  <a:srgbClr val="222222"/>
+                </a:solidFill>
+                <a:latin typeface="맑은 고딕"/>
+              </a:rPr>
+              <a:t> ENOENT — 운영체제 오류 번호가 그대로</a:t>
             </a:r>
           </a:p>
           <a:p>
@@ -6304,7 +6400,26 @@
                 </a:solidFill>
                 <a:latin typeface="맑은 고딕"/>
               </a:rPr>
-              <a:t>•  `ORA-01034` 결과적으로 인스턴스가 없다</a:t>
+              <a:t>•  </a:t>
+            </a:r>
+            <a:r>
+              <a:rPr sz="1700" b="0">
+                <a:solidFill>
+                  <a:srgbClr val="222222"/>
+                </a:solidFill>
+                <a:latin typeface="Consolas"/>
+                <a:cs typeface="Consolas"/>
+              </a:rPr>
+              <a:t>ORA-01034</a:t>
+            </a:r>
+            <a:r>
+              <a:rPr sz="1700" b="0">
+                <a:solidFill>
+                  <a:srgbClr val="222222"/>
+                </a:solidFill>
+                <a:latin typeface="맑은 고딕"/>
+              </a:rPr>
+              <a:t> 결과적으로 인스턴스가 없다</a:t>
             </a:r>
           </a:p>
         </p:txBody>
@@ -6483,7 +6598,37 @@
                 </a:solidFill>
                 <a:latin typeface="맑은 고딕"/>
               </a:rPr>
-              <a:t>•  `RMAN-03002: failure of **allocate** command`</a:t>
+              <a:t>•  </a:t>
+            </a:r>
+            <a:r>
+              <a:rPr sz="1700" b="0">
+                <a:solidFill>
+                  <a:srgbClr val="222222"/>
+                </a:solidFill>
+                <a:latin typeface="Consolas"/>
+                <a:cs typeface="Consolas"/>
+              </a:rPr>
+              <a:t>RMAN-03002: failure of </a:t>
+            </a:r>
+            <a:r>
+              <a:rPr sz="1700" b="1">
+                <a:solidFill>
+                  <a:srgbClr val="222222"/>
+                </a:solidFill>
+                <a:latin typeface="Consolas"/>
+                <a:cs typeface="Consolas"/>
+              </a:rPr>
+              <a:t>allocate</a:t>
+            </a:r>
+            <a:r>
+              <a:rPr sz="1700" b="0">
+                <a:solidFill>
+                  <a:srgbClr val="222222"/>
+                </a:solidFill>
+                <a:latin typeface="Consolas"/>
+                <a:cs typeface="Consolas"/>
+              </a:rPr>
+              <a:t> command</a:t>
             </a:r>
           </a:p>
           <a:p>
@@ -6499,7 +6644,26 @@
                 </a:solidFill>
                 <a:latin typeface="맑은 고딕"/>
               </a:rPr>
-              <a:t>•  5장은 모두 `failure of Duplicate Db command`였다</a:t>
+              <a:t>•  5장은 모두 </a:t>
+            </a:r>
+            <a:r>
+              <a:rPr sz="1700" b="0">
+                <a:solidFill>
+                  <a:srgbClr val="222222"/>
+                </a:solidFill>
+                <a:latin typeface="Consolas"/>
+                <a:cs typeface="Consolas"/>
+              </a:rPr>
+              <a:t>failure of Duplicate Db command</a:t>
+            </a:r>
+            <a:r>
+              <a:rPr sz="1700" b="0">
+                <a:solidFill>
+                  <a:srgbClr val="222222"/>
+                </a:solidFill>
+                <a:latin typeface="맑은 고딕"/>
+              </a:rPr>
+              <a:t>였다</a:t>
             </a:r>
           </a:p>
           <a:p>
@@ -6515,7 +6679,26 @@
                 </a:solidFill>
                 <a:latin typeface="맑은 고딕"/>
               </a:rPr>
-              <a:t>•  `RMAN-06403` 접속을 얻지 못했다</a:t>
+              <a:t>•  </a:t>
+            </a:r>
+            <a:r>
+              <a:rPr sz="1700" b="0">
+                <a:solidFill>
+                  <a:srgbClr val="222222"/>
+                </a:solidFill>
+                <a:latin typeface="Consolas"/>
+                <a:cs typeface="Consolas"/>
+              </a:rPr>
+              <a:t>RMAN-06403</a:t>
+            </a:r>
+            <a:r>
+              <a:rPr sz="1700" b="0">
+                <a:solidFill>
+                  <a:srgbClr val="222222"/>
+                </a:solidFill>
+                <a:latin typeface="맑은 고딕"/>
+              </a:rPr>
+              <a:t> 접속을 얻지 못했다</a:t>
             </a:r>
           </a:p>
           <a:p>
@@ -6531,7 +6714,35 @@
                 </a:solidFill>
                 <a:latin typeface="맑은 고딕"/>
               </a:rPr>
-              <a:t>•  `ORA-27101: shared memory realm does not exist` — **SGA가 없다**</a:t>
+              <a:t>•  </a:t>
+            </a:r>
+            <a:r>
+              <a:rPr sz="1700" b="0">
+                <a:solidFill>
+                  <a:srgbClr val="222222"/>
+                </a:solidFill>
+                <a:latin typeface="Consolas"/>
+                <a:cs typeface="Consolas"/>
+              </a:rPr>
+              <a:t>ORA-27101: shared memory realm does not exist</a:t>
+            </a:r>
+            <a:r>
+              <a:rPr sz="1700" b="0">
+                <a:solidFill>
+                  <a:srgbClr val="222222"/>
+                </a:solidFill>
+                <a:latin typeface="맑은 고딕"/>
+              </a:rPr>
+              <a:t> — </a:t>
+            </a:r>
+            <a:r>
+              <a:rPr sz="1700" b="1">
+                <a:solidFill>
+                  <a:srgbClr val="222222"/>
+                </a:solidFill>
+                <a:latin typeface="맑은 고딕"/>
+              </a:rPr>
+              <a:t>SGA가 없다</a:t>
             </a:r>
           </a:p>
         </p:txBody>
@@ -6710,7 +6921,26 @@
                 </a:solidFill>
                 <a:latin typeface="맑은 고딕"/>
               </a:rPr>
-              <a:t>•  `db_create_file_dest`도 convert도 주지 않으면</a:t>
+              <a:t>•  </a:t>
+            </a:r>
+            <a:r>
+              <a:rPr sz="1700" b="0">
+                <a:solidFill>
+                  <a:srgbClr val="222222"/>
+                </a:solidFill>
+                <a:latin typeface="Consolas"/>
+                <a:cs typeface="Consolas"/>
+              </a:rPr>
+              <a:t>db_create_file_dest</a:t>
+            </a:r>
+            <a:r>
+              <a:rPr sz="1700" b="0">
+                <a:solidFill>
+                  <a:srgbClr val="222222"/>
+                </a:solidFill>
+                <a:latin typeface="맑은 고딕"/>
+              </a:rPr>
+              <a:t>도 convert도 주지 않으면</a:t>
             </a:r>
           </a:p>
           <a:p>
@@ -6726,7 +6956,17 @@
                 </a:solidFill>
                 <a:latin typeface="맑은 고딕"/>
               </a:rPr>
-              <a:t>•  `RMAN-05538: warning: implicitly using DB_FILE_NAME_CONVERT`</a:t>
+              <a:t>•  </a:t>
+            </a:r>
+            <a:r>
+              <a:rPr sz="1700" b="0">
+                <a:solidFill>
+                  <a:srgbClr val="222222"/>
+                </a:solidFill>
+                <a:latin typeface="Consolas"/>
+                <a:cs typeface="Consolas"/>
+              </a:rPr>
+              <a:t>RMAN-05538: warning: implicitly using DB_FILE_NAME_CONVERT</a:t>
             </a:r>
           </a:p>
           <a:p>
@@ -6742,7 +6982,36 @@
                 </a:solidFill>
                 <a:latin typeface="맑은 고딕"/>
               </a:rPr>
-              <a:t>•  `RMAN-05001` 11줄, 경로는 전부 `.../Chicago/...`</a:t>
+              <a:t>•  </a:t>
+            </a:r>
+            <a:r>
+              <a:rPr sz="1700" b="0">
+                <a:solidFill>
+                  <a:srgbClr val="222222"/>
+                </a:solidFill>
+                <a:latin typeface="Consolas"/>
+                <a:cs typeface="Consolas"/>
+              </a:rPr>
+              <a:t>RMAN-05001</a:t>
+            </a:r>
+            <a:r>
+              <a:rPr sz="1700" b="0">
+                <a:solidFill>
+                  <a:srgbClr val="222222"/>
+                </a:solidFill>
+                <a:latin typeface="맑은 고딕"/>
+              </a:rPr>
+              <a:t> 11줄, 경로는 전부 </a:t>
+            </a:r>
+            <a:r>
+              <a:rPr sz="1700" b="0">
+                <a:solidFill>
+                  <a:srgbClr val="222222"/>
+                </a:solidFill>
+                <a:latin typeface="Consolas"/>
+                <a:cs typeface="Consolas"/>
+              </a:rPr>
+              <a:t>.../Chicago/...</a:t>
             </a:r>
           </a:p>
           <a:p>
@@ -6758,7 +7027,16 @@
                 </a:solidFill>
                 <a:latin typeface="맑은 고딕"/>
               </a:rPr>
-              <a:t>•  5장 첫 번째 실패와 **완전히 동일**</a:t>
+              <a:t>•  5장 첫 번째 실패와 </a:t>
+            </a:r>
+            <a:r>
+              <a:rPr sz="1700" b="1">
+                <a:solidFill>
+                  <a:srgbClr val="222222"/>
+                </a:solidFill>
+                <a:latin typeface="맑은 고딕"/>
+              </a:rPr>
+              <a:t>완전히 동일</a:t>
             </a:r>
           </a:p>
         </p:txBody>
@@ -6953,7 +7231,16 @@
                 </a:solidFill>
                 <a:latin typeface="맑은 고딕"/>
               </a:rPr>
-              <a:t>•  6장 : 인스턴스 기동 전 또는 마운트 직후 실패 → **잔재 없음**</a:t>
+              <a:t>•  6장 : 인스턴스 기동 전 또는 마운트 직후 실패 → </a:t>
+            </a:r>
+            <a:r>
+              <a:rPr sz="1700" b="1">
+                <a:solidFill>
+                  <a:srgbClr val="222222"/>
+                </a:solidFill>
+                <a:latin typeface="맑은 고딕"/>
+              </a:rPr>
+              <a:t>잔재 없음</a:t>
             </a:r>
           </a:p>
           <a:p>
@@ -6969,7 +7256,26 @@
                 </a:solidFill>
                 <a:latin typeface="맑은 고딕"/>
               </a:rPr>
-              <a:t>•  근거 : `DB_CREATE_FILE_DEST`는 stat()으로 검증된다</a:t>
+              <a:t>•  근거 : </a:t>
+            </a:r>
+            <a:r>
+              <a:rPr sz="1700" b="0">
+                <a:solidFill>
+                  <a:srgbClr val="222222"/>
+                </a:solidFill>
+                <a:latin typeface="Consolas"/>
+                <a:cs typeface="Consolas"/>
+              </a:rPr>
+              <a:t>DB_CREATE_FILE_DEST</a:t>
+            </a:r>
+            <a:r>
+              <a:rPr sz="1700" b="0">
+                <a:solidFill>
+                  <a:srgbClr val="222222"/>
+                </a:solidFill>
+                <a:latin typeface="맑은 고딕"/>
+              </a:rPr>
+              <a:t>는 stat()으로 검증된다</a:t>
             </a:r>
           </a:p>
           <a:p>
@@ -7419,7 +7725,17 @@
                 </a:solidFill>
                 <a:latin typeface="맑은 고딕"/>
               </a:rPr>
-              <a:t>•  `rc=0`</a:t>
+              <a:t>•  </a:t>
+            </a:r>
+            <a:r>
+              <a:rPr sz="1700" b="0">
+                <a:solidFill>
+                  <a:srgbClr val="222222"/>
+                </a:solidFill>
+                <a:latin typeface="Consolas"/>
+                <a:cs typeface="Consolas"/>
+              </a:rPr>
+              <a:t>rc=0</a:t>
             </a:r>
           </a:p>
           <a:p>
@@ -7435,7 +7751,35 @@
                 </a:solidFill>
                 <a:latin typeface="맑은 고딕"/>
               </a:rPr>
-              <a:t>•  `grep -cE 'RMAN-|ORA-'` = **0**</a:t>
+              <a:t>•  </a:t>
+            </a:r>
+            <a:r>
+              <a:rPr sz="1700" b="0">
+                <a:solidFill>
+                  <a:srgbClr val="222222"/>
+                </a:solidFill>
+                <a:latin typeface="Consolas"/>
+                <a:cs typeface="Consolas"/>
+              </a:rPr>
+              <a:t>grep -cE 'RMAN-|ORA-'</a:t>
+            </a:r>
+            <a:r>
+              <a:rPr sz="1700" b="0">
+                <a:solidFill>
+                  <a:srgbClr val="222222"/>
+                </a:solidFill>
+                <a:latin typeface="맑은 고딕"/>
+              </a:rPr>
+              <a:t> = </a:t>
+            </a:r>
+            <a:r>
+              <a:rPr sz="1700" b="1">
+                <a:solidFill>
+                  <a:srgbClr val="222222"/>
+                </a:solidFill>
+                <a:latin typeface="맑은 고딕"/>
+              </a:rPr>
+              <a:t>0</a:t>
             </a:r>
           </a:p>
           <a:p>
@@ -7451,7 +7795,26 @@
                 </a:solidFill>
                 <a:latin typeface="맑은 고딕"/>
               </a:rPr>
-              <a:t>•  `Finished Duplicate Db` 존재</a:t>
+              <a:t>•  </a:t>
+            </a:r>
+            <a:r>
+              <a:rPr sz="1700" b="0">
+                <a:solidFill>
+                  <a:srgbClr val="222222"/>
+                </a:solidFill>
+                <a:latin typeface="Consolas"/>
+                <a:cs typeface="Consolas"/>
+              </a:rPr>
+              <a:t>Finished Duplicate Db</a:t>
+            </a:r>
+            <a:r>
+              <a:rPr sz="1700" b="0">
+                <a:solidFill>
+                  <a:srgbClr val="222222"/>
+                </a:solidFill>
+                <a:latin typeface="맑은 고딕"/>
+              </a:rPr>
+              <a:t> 존재</a:t>
             </a:r>
           </a:p>
           <a:p>
@@ -7646,7 +8009,17 @@
                 </a:solidFill>
                 <a:latin typeface="맑은 고딕"/>
               </a:rPr>
-              <a:t>•  `input  .../Chicago/sysaux01.dbf`</a:t>
+              <a:t>•  </a:t>
+            </a:r>
+            <a:r>
+              <a:rPr sz="1700" b="0">
+                <a:solidFill>
+                  <a:srgbClr val="222222"/>
+                </a:solidFill>
+                <a:latin typeface="Consolas"/>
+                <a:cs typeface="Consolas"/>
+              </a:rPr>
+              <a:t>input  .../Chicago/sysaux01.dbf</a:t>
             </a:r>
           </a:p>
           <a:p>
@@ -7662,7 +8035,17 @@
                 </a:solidFill>
                 <a:latin typeface="맑은 고딕"/>
               </a:rPr>
-              <a:t>•  `output .../BOSTON/datafile/o1_mf_sysaux_1c50qfn7_.dbf`</a:t>
+              <a:t>•  </a:t>
+            </a:r>
+            <a:r>
+              <a:rPr sz="1700" b="0">
+                <a:solidFill>
+                  <a:srgbClr val="222222"/>
+                </a:solidFill>
+                <a:latin typeface="Consolas"/>
+                <a:cs typeface="Consolas"/>
+              </a:rPr>
+              <a:t>output .../BOSTON/datafile/o1_mf_sysaux_1c50qfn7_.dbf</a:t>
             </a:r>
           </a:p>
           <a:p>
@@ -7889,7 +8272,17 @@
                 </a:solidFill>
                 <a:latin typeface="맑은 고딕"/>
               </a:rPr>
-              <a:t>•  `RMAN-05537: ... auxiliary instance is started with spfile cannot use SPFILE clause`</a:t>
+              <a:t>•  </a:t>
+            </a:r>
+            <a:r>
+              <a:rPr sz="1700" b="0">
+                <a:solidFill>
+                  <a:srgbClr val="222222"/>
+                </a:solidFill>
+                <a:latin typeface="Consolas"/>
+                <a:cs typeface="Consolas"/>
+              </a:rPr>
+              <a:t>RMAN-05537: ... auxiliary instance is started with spfile cannot use SPFILE clause</a:t>
             </a:r>
           </a:p>
           <a:p>
@@ -7905,7 +8298,16 @@
                 </a:solidFill>
                 <a:latin typeface="맑은 고딕"/>
               </a:rPr>
-              <a:t>•  5장의 RMAN-05500(마운트 상태)과 **다른 오류**</a:t>
+              <a:t>•  5장의 RMAN-05500(마운트 상태)과 </a:t>
+            </a:r>
+            <a:r>
+              <a:rPr sz="1700" b="1">
+                <a:solidFill>
+                  <a:srgbClr val="222222"/>
+                </a:solidFill>
+                <a:latin typeface="맑은 고딕"/>
+              </a:rPr>
+              <a:t>다른 오류</a:t>
             </a:r>
           </a:p>
           <a:p>
@@ -8093,7 +8495,26 @@
                 </a:solidFill>
                 <a:latin typeface="맑은 고딕"/>
               </a:rPr>
-              <a:t>•  `DB_CREATE_FILE_DEST`가 잘못됐을 때와 없을 때의 오류를 구분한다.</a:t>
+              <a:t>•  </a:t>
+            </a:r>
+            <a:r>
+              <a:rPr sz="1600" b="0">
+                <a:solidFill>
+                  <a:srgbClr val="222222"/>
+                </a:solidFill>
+                <a:latin typeface="Consolas"/>
+                <a:cs typeface="Consolas"/>
+              </a:rPr>
+              <a:t>DB_CREATE_FILE_DEST</a:t>
+            </a:r>
+            <a:r>
+              <a:rPr sz="1600" b="0">
+                <a:solidFill>
+                  <a:srgbClr val="222222"/>
+                </a:solidFill>
+                <a:latin typeface="맑은 고딕"/>
+              </a:rPr>
+              <a:t>가 잘못됐을 때와 없을 때의 오류를 구분한다.</a:t>
             </a:r>
           </a:p>
           <a:p>
@@ -8591,7 +9012,17 @@
                 </a:solidFill>
                 <a:latin typeface="맑은 고딕"/>
               </a:rPr>
-              <a:t>•  `/u03/app/oracle/oradata/BOSTON/`</a:t>
+              <a:t>•  </a:t>
+            </a:r>
+            <a:r>
+              <a:rPr sz="1700" b="0">
+                <a:solidFill>
+                  <a:srgbClr val="222222"/>
+                </a:solidFill>
+                <a:latin typeface="Consolas"/>
+                <a:cs typeface="Consolas"/>
+              </a:rPr>
+              <a:t>/u03/app/oracle/oradata/BOSTON/</a:t>
             </a:r>
           </a:p>
           <a:p>
@@ -8607,7 +9038,36 @@
                 </a:solidFill>
                 <a:latin typeface="맑은 고딕"/>
               </a:rPr>
-              <a:t>•  `BOSTON/datafile` · `BOSTON/onlinelog`</a:t>
+              <a:t>•  </a:t>
+            </a:r>
+            <a:r>
+              <a:rPr sz="1700" b="0">
+                <a:solidFill>
+                  <a:srgbClr val="222222"/>
+                </a:solidFill>
+                <a:latin typeface="Consolas"/>
+                <a:cs typeface="Consolas"/>
+              </a:rPr>
+              <a:t>BOSTON/datafile</a:t>
+            </a:r>
+            <a:r>
+              <a:rPr sz="1700" b="0">
+                <a:solidFill>
+                  <a:srgbClr val="222222"/>
+                </a:solidFill>
+                <a:latin typeface="맑은 고딕"/>
+              </a:rPr>
+              <a:t> · </a:t>
+            </a:r>
+            <a:r>
+              <a:rPr sz="1700" b="0">
+                <a:solidFill>
+                  <a:srgbClr val="222222"/>
+                </a:solidFill>
+                <a:latin typeface="Consolas"/>
+                <a:cs typeface="Consolas"/>
+              </a:rPr>
+              <a:t>BOSTON/onlinelog</a:t>
             </a:r>
           </a:p>
           <a:p>
@@ -8623,7 +9083,17 @@
                 </a:solidFill>
                 <a:latin typeface="맑은 고딕"/>
               </a:rPr>
-              <a:t>•  `BOSTON/59F036501C3B321DE0633CE110ACEFEB/datafile`</a:t>
+              <a:t>•  </a:t>
+            </a:r>
+            <a:r>
+              <a:rPr sz="1700" b="0">
+                <a:solidFill>
+                  <a:srgbClr val="222222"/>
+                </a:solidFill>
+                <a:latin typeface="Consolas"/>
+                <a:cs typeface="Consolas"/>
+              </a:rPr>
+              <a:t>BOSTON/59F036501C3B321DE0633CE110ACEFEB/datafile</a:t>
             </a:r>
           </a:p>
           <a:p>
@@ -8639,7 +9109,17 @@
                 </a:solidFill>
                 <a:latin typeface="맑은 고딕"/>
               </a:rPr>
-              <a:t>•  `BOSTON/59F053E76FBD3BA1E0633CE110ACE7E5/datafile`</a:t>
+              <a:t>•  </a:t>
+            </a:r>
+            <a:r>
+              <a:rPr sz="1700" b="0">
+                <a:solidFill>
+                  <a:srgbClr val="222222"/>
+                </a:solidFill>
+                <a:latin typeface="Consolas"/>
+                <a:cs typeface="Consolas"/>
+              </a:rPr>
+              <a:t>BOSTON/59F053E76FBD3BA1E0633CE110ACE7E5/datafile</a:t>
             </a:r>
           </a:p>
         </p:txBody>
@@ -8818,7 +9298,36 @@
                 </a:solidFill>
                 <a:latin typeface="맑은 고딕"/>
               </a:rPr>
-              <a:t>•  `DB_NAME`을 썼다면 Standby 디렉터리도 `CHICAGO`</a:t>
+              <a:t>•  </a:t>
+            </a:r>
+            <a:r>
+              <a:rPr sz="1700" b="0">
+                <a:solidFill>
+                  <a:srgbClr val="222222"/>
+                </a:solidFill>
+                <a:latin typeface="Consolas"/>
+                <a:cs typeface="Consolas"/>
+              </a:rPr>
+              <a:t>DB_NAME</a:t>
+            </a:r>
+            <a:r>
+              <a:rPr sz="1700" b="0">
+                <a:solidFill>
+                  <a:srgbClr val="222222"/>
+                </a:solidFill>
+                <a:latin typeface="맑은 고딕"/>
+              </a:rPr>
+              <a:t>을 썼다면 Standby 디렉터리도 </a:t>
+            </a:r>
+            <a:r>
+              <a:rPr sz="1700" b="0">
+                <a:solidFill>
+                  <a:srgbClr val="222222"/>
+                </a:solidFill>
+                <a:latin typeface="Consolas"/>
+                <a:cs typeface="Consolas"/>
+              </a:rPr>
+              <a:t>CHICAGO</a:t>
             </a:r>
           </a:p>
           <a:p>
@@ -8866,7 +9375,26 @@
                 </a:solidFill>
                 <a:latin typeface="맑은 고딕"/>
               </a:rPr>
-              <a:t>•  `DB_UNIQUE_NAME`만 다르게 주면 자동 분리</a:t>
+              <a:t>•  </a:t>
+            </a:r>
+            <a:r>
+              <a:rPr sz="1700" b="0">
+                <a:solidFill>
+                  <a:srgbClr val="222222"/>
+                </a:solidFill>
+                <a:latin typeface="Consolas"/>
+                <a:cs typeface="Consolas"/>
+              </a:rPr>
+              <a:t>DB_UNIQUE_NAME</a:t>
+            </a:r>
+            <a:r>
+              <a:rPr sz="1700" b="0">
+                <a:solidFill>
+                  <a:srgbClr val="222222"/>
+                </a:solidFill>
+                <a:latin typeface="맑은 고딕"/>
+              </a:rPr>
+              <a:t>만 다르게 주면 자동 분리</a:t>
             </a:r>
           </a:p>
         </p:txBody>
@@ -9045,7 +9573,26 @@
                 </a:solidFill>
                 <a:latin typeface="맑은 고딕"/>
               </a:rPr>
-              <a:t>•  `V$PDBS.GUID`와 디렉터리 이름이 일치한다</a:t>
+              <a:t>•  </a:t>
+            </a:r>
+            <a:r>
+              <a:rPr sz="1700" b="0">
+                <a:solidFill>
+                  <a:srgbClr val="222222"/>
+                </a:solidFill>
+                <a:latin typeface="Consolas"/>
+                <a:cs typeface="Consolas"/>
+              </a:rPr>
+              <a:t>V$PDBS.GUID</a:t>
+            </a:r>
+            <a:r>
+              <a:rPr sz="1700" b="0">
+                <a:solidFill>
+                  <a:srgbClr val="222222"/>
+                </a:solidFill>
+                <a:latin typeface="맑은 고딕"/>
+              </a:rPr>
+              <a:t>와 디렉터리 이름이 일치한다</a:t>
             </a:r>
           </a:p>
           <a:p>
@@ -9061,7 +9608,45 @@
                 </a:solidFill>
                 <a:latin typeface="맑은 고딕"/>
               </a:rPr>
-              <a:t>•  `59F0365...` = PDB$SEED / `59F053E...` = CHICAGO_PDB1</a:t>
+              <a:t>•  </a:t>
+            </a:r>
+            <a:r>
+              <a:rPr sz="1700" b="0">
+                <a:solidFill>
+                  <a:srgbClr val="222222"/>
+                </a:solidFill>
+                <a:latin typeface="Consolas"/>
+                <a:cs typeface="Consolas"/>
+              </a:rPr>
+              <a:t>59F0365...</a:t>
+            </a:r>
+            <a:r>
+              <a:rPr sz="1700" b="0">
+                <a:solidFill>
+                  <a:srgbClr val="222222"/>
+                </a:solidFill>
+                <a:latin typeface="맑은 고딕"/>
+              </a:rPr>
+              <a:t> = PDB$SEED / </a:t>
+            </a:r>
+            <a:r>
+              <a:rPr sz="1700" b="0">
+                <a:solidFill>
+                  <a:srgbClr val="222222"/>
+                </a:solidFill>
+                <a:latin typeface="Consolas"/>
+                <a:cs typeface="Consolas"/>
+              </a:rPr>
+              <a:t>59F053E...</a:t>
+            </a:r>
+            <a:r>
+              <a:rPr sz="1700" b="0">
+                <a:solidFill>
+                  <a:srgbClr val="222222"/>
+                </a:solidFill>
+                <a:latin typeface="맑은 고딕"/>
+              </a:rPr>
+              <a:t> = CHICAGO_PDB1</a:t>
             </a:r>
           </a:p>
           <a:p>
@@ -9077,7 +9662,16 @@
                 </a:solidFill>
                 <a:latin typeface="맑은 고딕"/>
               </a:rPr>
-              <a:t>•  **Primary와 Standby의 GUID가 완전히 같다**</a:t>
+              <a:t>•  </a:t>
+            </a:r>
+            <a:r>
+              <a:rPr sz="1700" b="1">
+                <a:solidFill>
+                  <a:srgbClr val="222222"/>
+                </a:solidFill>
+                <a:latin typeface="맑은 고딕"/>
+              </a:rPr>
+              <a:t>Primary와 Standby의 GUID가 완전히 같다</a:t>
             </a:r>
           </a:p>
           <a:p>
@@ -9272,7 +9866,26 @@
                 </a:solidFill>
                 <a:latin typeface="맑은 고딕"/>
               </a:rPr>
-              <a:t>•  `o1_mf` OMF 고정 접두어</a:t>
+              <a:t>•  </a:t>
+            </a:r>
+            <a:r>
+              <a:rPr sz="1700" b="0">
+                <a:solidFill>
+                  <a:srgbClr val="222222"/>
+                </a:solidFill>
+                <a:latin typeface="Consolas"/>
+                <a:cs typeface="Consolas"/>
+              </a:rPr>
+              <a:t>o1_mf</a:t>
+            </a:r>
+            <a:r>
+              <a:rPr sz="1700" b="0">
+                <a:solidFill>
+                  <a:srgbClr val="222222"/>
+                </a:solidFill>
+                <a:latin typeface="맑은 고딕"/>
+              </a:rPr>
+              <a:t> OMF 고정 접두어</a:t>
             </a:r>
           </a:p>
           <a:p>
@@ -9288,7 +9901,26 @@
                 </a:solidFill>
                 <a:latin typeface="맑은 고딕"/>
               </a:rPr>
-              <a:t>•  `sysaux` 테이블스페이스 이름 (로그는 그룹 번호)</a:t>
+              <a:t>•  </a:t>
+            </a:r>
+            <a:r>
+              <a:rPr sz="1700" b="0">
+                <a:solidFill>
+                  <a:srgbClr val="222222"/>
+                </a:solidFill>
+                <a:latin typeface="Consolas"/>
+                <a:cs typeface="Consolas"/>
+              </a:rPr>
+              <a:t>sysaux</a:t>
+            </a:r>
+            <a:r>
+              <a:rPr sz="1700" b="0">
+                <a:solidFill>
+                  <a:srgbClr val="222222"/>
+                </a:solidFill>
+                <a:latin typeface="맑은 고딕"/>
+              </a:rPr>
+              <a:t> 테이블스페이스 이름 (로그는 그룹 번호)</a:t>
             </a:r>
           </a:p>
           <a:p>
@@ -9304,7 +9936,26 @@
                 </a:solidFill>
                 <a:latin typeface="맑은 고딕"/>
               </a:rPr>
-              <a:t>•  `1c50qfn7` 유일 문자열 — 매번 다르다</a:t>
+              <a:t>•  </a:t>
+            </a:r>
+            <a:r>
+              <a:rPr sz="1700" b="0">
+                <a:solidFill>
+                  <a:srgbClr val="222222"/>
+                </a:solidFill>
+                <a:latin typeface="Consolas"/>
+                <a:cs typeface="Consolas"/>
+              </a:rPr>
+              <a:t>1c50qfn7</a:t>
+            </a:r>
+            <a:r>
+              <a:rPr sz="1700" b="0">
+                <a:solidFill>
+                  <a:srgbClr val="222222"/>
+                </a:solidFill>
+                <a:latin typeface="맑은 고딕"/>
+              </a:rPr>
+              <a:t> 유일 문자열 — 매번 다르다</a:t>
             </a:r>
           </a:p>
           <a:p>
@@ -9320,7 +9971,64 @@
                 </a:solidFill>
                 <a:latin typeface="맑은 고딕"/>
               </a:rPr>
-              <a:t>•  `.dbf` 데이터 / `.log` 로그 / `.tmp` 임시</a:t>
+              <a:t>•  </a:t>
+            </a:r>
+            <a:r>
+              <a:rPr sz="1700" b="0">
+                <a:solidFill>
+                  <a:srgbClr val="222222"/>
+                </a:solidFill>
+                <a:latin typeface="Consolas"/>
+                <a:cs typeface="Consolas"/>
+              </a:rPr>
+              <a:t>.dbf</a:t>
+            </a:r>
+            <a:r>
+              <a:rPr sz="1700" b="0">
+                <a:solidFill>
+                  <a:srgbClr val="222222"/>
+                </a:solidFill>
+                <a:latin typeface="맑은 고딕"/>
+              </a:rPr>
+              <a:t> 데이터 / </a:t>
+            </a:r>
+            <a:r>
+              <a:rPr sz="1700" b="0">
+                <a:solidFill>
+                  <a:srgbClr val="222222"/>
+                </a:solidFill>
+                <a:latin typeface="Consolas"/>
+                <a:cs typeface="Consolas"/>
+              </a:rPr>
+              <a:t>.log</a:t>
+            </a:r>
+            <a:r>
+              <a:rPr sz="1700" b="0">
+                <a:solidFill>
+                  <a:srgbClr val="222222"/>
+                </a:solidFill>
+                <a:latin typeface="맑은 고딕"/>
+              </a:rPr>
+              <a:t> 로그 / </a:t>
+            </a:r>
+            <a:r>
+              <a:rPr sz="1700" b="0">
+                <a:solidFill>
+                  <a:srgbClr val="222222"/>
+                </a:solidFill>
+                <a:latin typeface="Consolas"/>
+                <a:cs typeface="Consolas"/>
+              </a:rPr>
+              <a:t>.tmp</a:t>
+            </a:r>
+            <a:r>
+              <a:rPr sz="1700" b="0">
+                <a:solidFill>
+                  <a:srgbClr val="222222"/>
+                </a:solidFill>
+                <a:latin typeface="맑은 고딕"/>
+              </a:rPr>
+              <a:t> 임시</a:t>
             </a:r>
           </a:p>
           <a:p>
@@ -9336,7 +10044,44 @@
                 </a:solidFill>
                 <a:latin typeface="맑은 고딕"/>
               </a:rPr>
-              <a:t>•  **파일 번호는 이름에 없다** → `V$DATAFILE` 조회</a:t>
+              <a:t>•  </a:t>
+            </a:r>
+            <a:r>
+              <a:rPr sz="1700" b="1">
+                <a:solidFill>
+                  <a:srgbClr val="222222"/>
+                </a:solidFill>
+                <a:latin typeface="맑은 고딕"/>
+              </a:rPr>
+              <a:t>파일 번호는 이름에 없다</a:t>
+            </a:r>
+            <a:r>
+              <a:rPr sz="1700" b="0">
+                <a:solidFill>
+                  <a:srgbClr val="222222"/>
+                </a:solidFill>
+                <a:latin typeface="맑은 고딕"/>
+              </a:rPr>
+              <a:t> → </a:t>
+            </a:r>
+            <a:r>
+              <a:rPr sz="1700" b="0">
+                <a:solidFill>
+                  <a:srgbClr val="222222"/>
+                </a:solidFill>
+                <a:latin typeface="Consolas"/>
+                <a:cs typeface="Consolas"/>
+              </a:rPr>
+              <a:t>V$DATAFILE</a:t>
+            </a:r>
+            <a:r>
+              <a:rPr sz="1700" b="0">
+                <a:solidFill>
+                  <a:srgbClr val="222222"/>
+                </a:solidFill>
+                <a:latin typeface="맑은 고딕"/>
+              </a:rPr>
+              <a:t> 조회</a:t>
             </a:r>
           </a:p>
         </p:txBody>
@@ -9515,7 +10260,44 @@
                 </a:solidFill>
                 <a:latin typeface="맑은 고딕"/>
               </a:rPr>
-              <a:t>•  `V$LOGFILE` **14행** — 5장에서는 7행</a:t>
+              <a:t>•  </a:t>
+            </a:r>
+            <a:r>
+              <a:rPr sz="1700" b="0">
+                <a:solidFill>
+                  <a:srgbClr val="222222"/>
+                </a:solidFill>
+                <a:latin typeface="Consolas"/>
+                <a:cs typeface="Consolas"/>
+              </a:rPr>
+              <a:t>V$LOGFILE</a:t>
+            </a:r>
+            <a:r>
+              <a:rPr sz="1700" b="0">
+                <a:solidFill>
+                  <a:srgbClr val="222222"/>
+                </a:solidFill>
+                <a:latin typeface="맑은 고딕"/>
+              </a:rPr>
+              <a:t> </a:t>
+            </a:r>
+            <a:r>
+              <a:rPr sz="1700" b="1">
+                <a:solidFill>
+                  <a:srgbClr val="222222"/>
+                </a:solidFill>
+                <a:latin typeface="맑은 고딕"/>
+              </a:rPr>
+              <a:t>14행</a:t>
+            </a:r>
+            <a:r>
+              <a:rPr sz="1700" b="0">
+                <a:solidFill>
+                  <a:srgbClr val="222222"/>
+                </a:solidFill>
+                <a:latin typeface="맑은 고딕"/>
+              </a:rPr>
+              <a:t> — 5장에서는 7행</a:t>
             </a:r>
           </a:p>
           <a:p>
@@ -9547,7 +10329,35 @@
                 </a:solidFill>
                 <a:latin typeface="맑은 고딕"/>
               </a:rPr>
-              <a:t>•  한 벌은 `DB_CREATE_FILE_DEST`, 다른 한 벌은 **FRA**</a:t>
+              <a:t>•  한 벌은 </a:t>
+            </a:r>
+            <a:r>
+              <a:rPr sz="1700" b="0">
+                <a:solidFill>
+                  <a:srgbClr val="222222"/>
+                </a:solidFill>
+                <a:latin typeface="Consolas"/>
+                <a:cs typeface="Consolas"/>
+              </a:rPr>
+              <a:t>DB_CREATE_FILE_DEST</a:t>
+            </a:r>
+            <a:r>
+              <a:rPr sz="1700" b="0">
+                <a:solidFill>
+                  <a:srgbClr val="222222"/>
+                </a:solidFill>
+                <a:latin typeface="맑은 고딕"/>
+              </a:rPr>
+              <a:t>, 다른 한 벌은 </a:t>
+            </a:r>
+            <a:r>
+              <a:rPr sz="1700" b="1">
+                <a:solidFill>
+                  <a:srgbClr val="222222"/>
+                </a:solidFill>
+                <a:latin typeface="맑은 고딕"/>
+              </a:rPr>
+              <a:t>FRA</a:t>
             </a:r>
           </a:p>
           <a:p>
@@ -9563,7 +10373,26 @@
                 </a:solidFill>
                 <a:latin typeface="맑은 고딕"/>
               </a:rPr>
-              <a:t>•  조건 : `DB_CREATE_ONLINE_LOG_DEST_n` 미지정 + FRA 설정</a:t>
+              <a:t>•  조건 : </a:t>
+            </a:r>
+            <a:r>
+              <a:rPr sz="1700" b="0">
+                <a:solidFill>
+                  <a:srgbClr val="222222"/>
+                </a:solidFill>
+                <a:latin typeface="Consolas"/>
+                <a:cs typeface="Consolas"/>
+              </a:rPr>
+              <a:t>DB_CREATE_ONLINE_LOG_DEST_n</a:t>
+            </a:r>
+            <a:r>
+              <a:rPr sz="1700" b="0">
+                <a:solidFill>
+                  <a:srgbClr val="222222"/>
+                </a:solidFill>
+                <a:latin typeface="맑은 고딕"/>
+              </a:rPr>
+              <a:t> 미지정 + FRA 설정</a:t>
             </a:r>
           </a:p>
         </p:txBody>
@@ -9997,7 +10826,17 @@
                 </a:solidFill>
                 <a:latin typeface="맑은 고딕"/>
               </a:rPr>
-              <a:t>•  `/u03/app/oracle/oradata/Chicago/control01.ctl`</a:t>
+              <a:t>•  </a:t>
+            </a:r>
+            <a:r>
+              <a:rPr sz="1700" b="0">
+                <a:solidFill>
+                  <a:srgbClr val="222222"/>
+                </a:solidFill>
+                <a:latin typeface="Consolas"/>
+                <a:cs typeface="Consolas"/>
+              </a:rPr>
+              <a:t>/u03/app/oracle/oradata/Chicago/control01.ctl</a:t>
             </a:r>
           </a:p>
           <a:p>
@@ -10013,7 +10852,17 @@
                 </a:solidFill>
                 <a:latin typeface="맑은 고딕"/>
               </a:rPr>
-              <a:t>•  `/u03/app/oracle/fast_recovery_area/CHICAGO/control02.ctl`</a:t>
+              <a:t>•  </a:t>
+            </a:r>
+            <a:r>
+              <a:rPr sz="1700" b="0">
+                <a:solidFill>
+                  <a:srgbClr val="222222"/>
+                </a:solidFill>
+                <a:latin typeface="Consolas"/>
+                <a:cs typeface="Consolas"/>
+              </a:rPr>
+              <a:t>/u03/app/oracle/fast_recovery_area/CHICAGO/control02.ctl</a:t>
             </a:r>
           </a:p>
           <a:p>
@@ -10224,7 +11073,26 @@
                 </a:solidFill>
                 <a:latin typeface="맑은 고딕"/>
               </a:rPr>
-              <a:t>•  `CONTROL_FILES`는 Primary spfile에 값이 있다</a:t>
+              <a:t>•  </a:t>
+            </a:r>
+            <a:r>
+              <a:rPr sz="1700" b="0">
+                <a:solidFill>
+                  <a:srgbClr val="222222"/>
+                </a:solidFill>
+                <a:latin typeface="Consolas"/>
+                <a:cs typeface="Consolas"/>
+              </a:rPr>
+              <a:t>CONTROL_FILES</a:t>
+            </a:r>
+            <a:r>
+              <a:rPr sz="1700" b="0">
+                <a:solidFill>
+                  <a:srgbClr val="222222"/>
+                </a:solidFill>
+                <a:latin typeface="맑은 고딕"/>
+              </a:rPr>
+              <a:t>는 Primary spfile에 값이 있다</a:t>
             </a:r>
           </a:p>
           <a:p>
@@ -10256,7 +11124,45 @@
                 </a:solidFill>
                 <a:latin typeface="맑은 고딕"/>
               </a:rPr>
-              <a:t>•  스크립트에 `set control_files`도 `parameter_value_convert`도 없다</a:t>
+              <a:t>•  스크립트에 </a:t>
+            </a:r>
+            <a:r>
+              <a:rPr sz="1700" b="0">
+                <a:solidFill>
+                  <a:srgbClr val="222222"/>
+                </a:solidFill>
+                <a:latin typeface="Consolas"/>
+                <a:cs typeface="Consolas"/>
+              </a:rPr>
+              <a:t>set control_files</a:t>
+            </a:r>
+            <a:r>
+              <a:rPr sz="1700" b="0">
+                <a:solidFill>
+                  <a:srgbClr val="222222"/>
+                </a:solidFill>
+                <a:latin typeface="맑은 고딕"/>
+              </a:rPr>
+              <a:t>도 </a:t>
+            </a:r>
+            <a:r>
+              <a:rPr sz="1700" b="0">
+                <a:solidFill>
+                  <a:srgbClr val="222222"/>
+                </a:solidFill>
+                <a:latin typeface="Consolas"/>
+                <a:cs typeface="Consolas"/>
+              </a:rPr>
+              <a:t>parameter_value_convert</a:t>
+            </a:r>
+            <a:r>
+              <a:rPr sz="1700" b="0">
+                <a:solidFill>
+                  <a:srgbClr val="222222"/>
+                </a:solidFill>
+                <a:latin typeface="맑은 고딕"/>
+              </a:rPr>
+              <a:t>도 없다</a:t>
             </a:r>
           </a:p>
           <a:p>
@@ -10272,7 +11178,26 @@
                 </a:solidFill>
                 <a:latin typeface="맑은 고딕"/>
               </a:rPr>
-              <a:t>•  **`CONTROL_FILES`에 값이 있으면 OMF는 개입하지 않는다**</a:t>
+              <a:t>•  </a:t>
+            </a:r>
+            <a:r>
+              <a:rPr sz="1700" b="1">
+                <a:solidFill>
+                  <a:srgbClr val="222222"/>
+                </a:solidFill>
+                <a:latin typeface="Consolas"/>
+                <a:cs typeface="Consolas"/>
+              </a:rPr>
+              <a:t>CONTROL_FILES</a:t>
+            </a:r>
+            <a:r>
+              <a:rPr sz="1700" b="1">
+                <a:solidFill>
+                  <a:srgbClr val="222222"/>
+                </a:solidFill>
+                <a:latin typeface="맑은 고딕"/>
+              </a:rPr>
+              <a:t>에 값이 있으면 OMF는 개입하지 않는다</a:t>
             </a:r>
           </a:p>
         </p:txBody>
@@ -10451,7 +11376,25 @@
                 </a:solidFill>
                 <a:latin typeface="맑은 고딕"/>
               </a:rPr>
-              <a:t>•  **오해** — 운영자가 Primary 잔재로 오인해 지울 수 있다</a:t>
+              <a:t>•  </a:t>
+            </a:r>
+            <a:r>
+              <a:rPr sz="1700" b="1">
+                <a:solidFill>
+                  <a:srgbClr val="222222"/>
+                </a:solidFill>
+                <a:latin typeface="맑은 고딕"/>
+              </a:rPr>
+              <a:t>오해</a:t>
+            </a:r>
+            <a:r>
+              <a:rPr sz="1700" b="0">
+                <a:solidFill>
+                  <a:srgbClr val="222222"/>
+                </a:solidFill>
+                <a:latin typeface="맑은 고딕"/>
+              </a:rPr>
+              <a:t> — 운영자가 Primary 잔재로 오인해 지울 수 있다</a:t>
             </a:r>
           </a:p>
           <a:p>
@@ -10467,7 +11410,25 @@
                 </a:solidFill>
                 <a:latin typeface="맑은 고딕"/>
               </a:rPr>
-              <a:t>•  **정리 누락** — 폐기 시 BOSTON만 지우면 컨트롤 파일이 남는다</a:t>
+              <a:t>•  </a:t>
+            </a:r>
+            <a:r>
+              <a:rPr sz="1700" b="1">
+                <a:solidFill>
+                  <a:srgbClr val="222222"/>
+                </a:solidFill>
+                <a:latin typeface="맑은 고딕"/>
+              </a:rPr>
+              <a:t>정리 누락</a:t>
+            </a:r>
+            <a:r>
+              <a:rPr sz="1700" b="0">
+                <a:solidFill>
+                  <a:srgbClr val="222222"/>
+                </a:solidFill>
+                <a:latin typeface="맑은 고딕"/>
+              </a:rPr>
+              <a:t> — 폐기 시 BOSTON만 지우면 컨트롤 파일이 남는다</a:t>
             </a:r>
           </a:p>
           <a:p>
@@ -10483,7 +11444,25 @@
                 </a:solidFill>
                 <a:latin typeface="맑은 고딕"/>
               </a:rPr>
-              <a:t>•  **일관성 붕괴** — OMF를 쓰기로 했으면 예외가 없는 편이 낫다</a:t>
+              <a:t>•  </a:t>
+            </a:r>
+            <a:r>
+              <a:rPr sz="1700" b="1">
+                <a:solidFill>
+                  <a:srgbClr val="222222"/>
+                </a:solidFill>
+                <a:latin typeface="맑은 고딕"/>
+              </a:rPr>
+              <a:t>일관성 붕괴</a:t>
+            </a:r>
+            <a:r>
+              <a:rPr sz="1700" b="0">
+                <a:solidFill>
+                  <a:srgbClr val="222222"/>
+                </a:solidFill>
+                <a:latin typeface="맑은 고딕"/>
+              </a:rPr>
+              <a:t> — OMF를 쓰기로 했으면 예외가 없는 편이 낫다</a:t>
             </a:r>
           </a:p>
           <a:p>
@@ -10930,7 +11909,26 @@
                 </a:solidFill>
                 <a:latin typeface="맑은 고딕"/>
               </a:rPr>
-              <a:t>•  ① `mkdir -p .../BOSTON/controlfile` (양쪽)</a:t>
+              <a:t>•  ① </a:t>
+            </a:r>
+            <a:r>
+              <a:rPr sz="1700" b="0">
+                <a:solidFill>
+                  <a:srgbClr val="222222"/>
+                </a:solidFill>
+                <a:latin typeface="Consolas"/>
+                <a:cs typeface="Consolas"/>
+              </a:rPr>
+              <a:t>mkdir -p .../BOSTON/controlfile</a:t>
+            </a:r>
+            <a:r>
+              <a:rPr sz="1700" b="0">
+                <a:solidFill>
+                  <a:srgbClr val="222222"/>
+                </a:solidFill>
+                <a:latin typeface="맑은 고딕"/>
+              </a:rPr>
+              <a:t> (양쪽)</a:t>
             </a:r>
           </a:p>
           <a:p>
@@ -10946,7 +11944,17 @@
                 </a:solidFill>
                 <a:latin typeface="맑은 고딕"/>
               </a:rPr>
-              <a:t>•  ② `ALTER SYSTEM SET control_files=... SCOPE=SPFILE`</a:t>
+              <a:t>•  ② </a:t>
+            </a:r>
+            <a:r>
+              <a:rPr sz="1700" b="0">
+                <a:solidFill>
+                  <a:srgbClr val="222222"/>
+                </a:solidFill>
+                <a:latin typeface="Consolas"/>
+                <a:cs typeface="Consolas"/>
+              </a:rPr>
+              <a:t>ALTER SYSTEM SET control_files=... SCOPE=SPFILE</a:t>
             </a:r>
           </a:p>
           <a:p>
@@ -10962,7 +11970,17 @@
                 </a:solidFill>
                 <a:latin typeface="맑은 고딕"/>
               </a:rPr>
-              <a:t>•  ③ 적용 중지 → `SHUTDOWN IMMEDIATE`</a:t>
+              <a:t>•  ③ 적용 중지 → </a:t>
+            </a:r>
+            <a:r>
+              <a:rPr sz="1700" b="0">
+                <a:solidFill>
+                  <a:srgbClr val="222222"/>
+                </a:solidFill>
+                <a:latin typeface="Consolas"/>
+                <a:cs typeface="Consolas"/>
+              </a:rPr>
+              <a:t>SHUTDOWN IMMEDIATE</a:t>
             </a:r>
           </a:p>
           <a:p>
@@ -10978,7 +11996,45 @@
                 </a:solidFill>
                 <a:latin typeface="맑은 고딕"/>
               </a:rPr>
-              <a:t>•  ④ `mv`로 파일 이동 → `STARTUP MOUNT` → ADG 복귀</a:t>
+              <a:t>•  ④ </a:t>
+            </a:r>
+            <a:r>
+              <a:rPr sz="1700" b="0">
+                <a:solidFill>
+                  <a:srgbClr val="222222"/>
+                </a:solidFill>
+                <a:latin typeface="Consolas"/>
+                <a:cs typeface="Consolas"/>
+              </a:rPr>
+              <a:t>mv</a:t>
+            </a:r>
+            <a:r>
+              <a:rPr sz="1700" b="0">
+                <a:solidFill>
+                  <a:srgbClr val="222222"/>
+                </a:solidFill>
+                <a:latin typeface="맑은 고딕"/>
+              </a:rPr>
+              <a:t>로 파일 이동 → </a:t>
+            </a:r>
+            <a:r>
+              <a:rPr sz="1700" b="0">
+                <a:solidFill>
+                  <a:srgbClr val="222222"/>
+                </a:solidFill>
+                <a:latin typeface="Consolas"/>
+                <a:cs typeface="Consolas"/>
+              </a:rPr>
+              <a:t>STARTUP MOUNT</a:t>
+            </a:r>
+            <a:r>
+              <a:rPr sz="1700" b="0">
+                <a:solidFill>
+                  <a:srgbClr val="222222"/>
+                </a:solidFill>
+                <a:latin typeface="맑은 고딕"/>
+              </a:rPr>
+              <a:t> → ADG 복귀</a:t>
             </a:r>
           </a:p>
           <a:p>
@@ -10994,7 +12050,17 @@
                 </a:solidFill>
                 <a:latin typeface="맑은 고딕"/>
               </a:rPr>
-              <a:t>•  순서를 어기면 `ORA-00205`</a:t>
+              <a:t>•  순서를 어기면 </a:t>
+            </a:r>
+            <a:r>
+              <a:rPr sz="1700" b="0">
+                <a:solidFill>
+                  <a:srgbClr val="222222"/>
+                </a:solidFill>
+                <a:latin typeface="Consolas"/>
+                <a:cs typeface="Consolas"/>
+              </a:rPr>
+              <a:t>ORA-00205</a:t>
             </a:r>
           </a:p>
         </p:txBody>
@@ -11173,7 +12239,17 @@
                 </a:solidFill>
                 <a:latin typeface="맑은 고딕"/>
               </a:rPr>
-              <a:t>•  `set control_files = '.../BOSTON/controlfile/control01.ctl', '...'`</a:t>
+              <a:t>•  </a:t>
+            </a:r>
+            <a:r>
+              <a:rPr sz="1700" b="0">
+                <a:solidFill>
+                  <a:srgbClr val="222222"/>
+                </a:solidFill>
+                <a:latin typeface="Consolas"/>
+                <a:cs typeface="Consolas"/>
+              </a:rPr>
+              <a:t>set control_files = '.../BOSTON/controlfile/control01.ctl', '...'</a:t>
             </a:r>
           </a:p>
           <a:p>
@@ -11655,7 +12731,35 @@
                 </a:solidFill>
                 <a:latin typeface="맑은 고딕"/>
               </a:rPr>
-              <a:t>•  `create spfile from pfile='.../initboston.ora'` → **ORA-32002**</a:t>
+              <a:t>•  </a:t>
+            </a:r>
+            <a:r>
+              <a:rPr sz="1700" b="0">
+                <a:solidFill>
+                  <a:srgbClr val="222222"/>
+                </a:solidFill>
+                <a:latin typeface="Consolas"/>
+                <a:cs typeface="Consolas"/>
+              </a:rPr>
+              <a:t>create spfile from pfile='.../initboston.ora'</a:t>
+            </a:r>
+            <a:r>
+              <a:rPr sz="1700" b="0">
+                <a:solidFill>
+                  <a:srgbClr val="222222"/>
+                </a:solidFill>
+                <a:latin typeface="맑은 고딕"/>
+              </a:rPr>
+              <a:t> → </a:t>
+            </a:r>
+            <a:r>
+              <a:rPr sz="1700" b="1">
+                <a:solidFill>
+                  <a:srgbClr val="222222"/>
+                </a:solidFill>
+                <a:latin typeface="맑은 고딕"/>
+              </a:rPr>
+              <a:t>ORA-32002</a:t>
             </a:r>
           </a:p>
           <a:p>
@@ -11687,7 +12791,102 @@
                 </a:solidFill>
                 <a:latin typeface="맑은 고딕"/>
               </a:rPr>
-              <a:t>•  사라졌을 값 : `db_unique_name` · `fal_server` · `log_archive_config` · `standby_file_management` · `control_files` 등</a:t>
+              <a:t>•  사라졌을 값 : </a:t>
+            </a:r>
+            <a:r>
+              <a:rPr sz="1700" b="0">
+                <a:solidFill>
+                  <a:srgbClr val="222222"/>
+                </a:solidFill>
+                <a:latin typeface="Consolas"/>
+                <a:cs typeface="Consolas"/>
+              </a:rPr>
+              <a:t>db_unique_name</a:t>
+            </a:r>
+            <a:r>
+              <a:rPr sz="1700" b="0">
+                <a:solidFill>
+                  <a:srgbClr val="222222"/>
+                </a:solidFill>
+                <a:latin typeface="맑은 고딕"/>
+              </a:rPr>
+              <a:t> · </a:t>
+            </a:r>
+            <a:r>
+              <a:rPr sz="1700" b="0">
+                <a:solidFill>
+                  <a:srgbClr val="222222"/>
+                </a:solidFill>
+                <a:latin typeface="Consolas"/>
+                <a:cs typeface="Consolas"/>
+              </a:rPr>
+              <a:t>fal_server</a:t>
+            </a:r>
+            <a:r>
+              <a:rPr sz="1700" b="0">
+                <a:solidFill>
+                  <a:srgbClr val="222222"/>
+                </a:solidFill>
+                <a:latin typeface="맑은 고딕"/>
+              </a:rPr>
+              <a:t> · </a:t>
+            </a:r>
+            <a:r>
+              <a:rPr sz="1700" b="0">
+                <a:solidFill>
+                  <a:srgbClr val="222222"/>
+                </a:solidFill>
+                <a:latin typeface="Consolas"/>
+                <a:cs typeface="Consolas"/>
+              </a:rPr>
+              <a:t>log_archive_config</a:t>
+            </a:r>
+            <a:r>
+              <a:rPr sz="1700" b="0">
+                <a:solidFill>
+                  <a:srgbClr val="222222"/>
+                </a:solidFill>
+                <a:latin typeface="맑은 고딕"/>
+              </a:rPr>
+              <a:t> · </a:t>
+            </a:r>
+            <a:r>
+              <a:rPr sz="1700" b="0">
+                <a:solidFill>
+                  <a:srgbClr val="222222"/>
+                </a:solidFill>
+                <a:latin typeface="Consolas"/>
+                <a:cs typeface="Consolas"/>
+              </a:rPr>
+              <a:t>standby_file_management</a:t>
+            </a:r>
+            <a:r>
+              <a:rPr sz="1700" b="0">
+                <a:solidFill>
+                  <a:srgbClr val="222222"/>
+                </a:solidFill>
+                <a:latin typeface="맑은 고딕"/>
+              </a:rPr>
+              <a:t> · </a:t>
+            </a:r>
+            <a:r>
+              <a:rPr sz="1700" b="0">
+                <a:solidFill>
+                  <a:srgbClr val="222222"/>
+                </a:solidFill>
+                <a:latin typeface="Consolas"/>
+                <a:cs typeface="Consolas"/>
+              </a:rPr>
+              <a:t>control_files</a:t>
+            </a:r>
+            <a:r>
+              <a:rPr sz="1700" b="0">
+                <a:solidFill>
+                  <a:srgbClr val="222222"/>
+                </a:solidFill>
+                <a:latin typeface="맑은 고딕"/>
+              </a:rPr>
+              <a:t> 등</a:t>
             </a:r>
           </a:p>
           <a:p>
@@ -11703,7 +12902,45 @@
                 </a:solidFill>
                 <a:latin typeface="맑은 고딕"/>
               </a:rPr>
-              <a:t>•  이어지는 `shutdown` / `startup`까지 갔다면 구성이 해체된다</a:t>
+              <a:t>•  이어지는 </a:t>
+            </a:r>
+            <a:r>
+              <a:rPr sz="1700" b="0">
+                <a:solidFill>
+                  <a:srgbClr val="222222"/>
+                </a:solidFill>
+                <a:latin typeface="Consolas"/>
+                <a:cs typeface="Consolas"/>
+              </a:rPr>
+              <a:t>shutdown</a:t>
+            </a:r>
+            <a:r>
+              <a:rPr sz="1700" b="0">
+                <a:solidFill>
+                  <a:srgbClr val="222222"/>
+                </a:solidFill>
+                <a:latin typeface="맑은 고딕"/>
+              </a:rPr>
+              <a:t> / </a:t>
+            </a:r>
+            <a:r>
+              <a:rPr sz="1700" b="0">
+                <a:solidFill>
+                  <a:srgbClr val="222222"/>
+                </a:solidFill>
+                <a:latin typeface="Consolas"/>
+                <a:cs typeface="Consolas"/>
+              </a:rPr>
+              <a:t>startup</a:t>
+            </a:r>
+            <a:r>
+              <a:rPr sz="1700" b="0">
+                <a:solidFill>
+                  <a:srgbClr val="222222"/>
+                </a:solidFill>
+                <a:latin typeface="맑은 고딕"/>
+              </a:rPr>
+              <a:t>까지 갔다면 구성이 해체된다</a:t>
             </a:r>
           </a:p>
         </p:txBody>
@@ -11898,7 +13135,16 @@
                 </a:solidFill>
                 <a:latin typeface="맑은 고딕"/>
               </a:rPr>
-              <a:t>•  같은 것 : **데이터 파일 개수 11개 · 번호 · 크기**</a:t>
+              <a:t>•  같은 것 : </a:t>
+            </a:r>
+            <a:r>
+              <a:rPr sz="1700" b="1">
+                <a:solidFill>
+                  <a:srgbClr val="222222"/>
+                </a:solidFill>
+                <a:latin typeface="맑은 고딕"/>
+              </a:rPr>
+              <a:t>데이터 파일 개수 11개 · 번호 · 크기</a:t>
             </a:r>
           </a:p>
           <a:p>
@@ -12141,7 +13387,25 @@
                 </a:solidFill>
                 <a:latin typeface="맑은 고딕"/>
               </a:rPr>
-              <a:t>•  둘 다 주면 **OMF가 이긴다** (convert는 무시된다)</a:t>
+              <a:t>•  둘 다 주면 </a:t>
+            </a:r>
+            <a:r>
+              <a:rPr sz="1700" b="1">
+                <a:solidFill>
+                  <a:srgbClr val="222222"/>
+                </a:solidFill>
+                <a:latin typeface="맑은 고딕"/>
+              </a:rPr>
+              <a:t>OMF가 이긴다</a:t>
+            </a:r>
+            <a:r>
+              <a:rPr sz="1700" b="0">
+                <a:solidFill>
+                  <a:srgbClr val="222222"/>
+                </a:solidFill>
+                <a:latin typeface="맑은 고딕"/>
+              </a:rPr>
+              <a:t> (convert는 무시된다)</a:t>
             </a:r>
           </a:p>
           <a:p>
@@ -12336,7 +13600,26 @@
                 </a:solidFill>
                 <a:latin typeface="맑은 고딕"/>
               </a:rPr>
-              <a:t>•  boston : `READ ONLY WITH APPLY`, DBID 1852041610</a:t>
+              <a:t>•  boston : </a:t>
+            </a:r>
+            <a:r>
+              <a:rPr sz="1700" b="0">
+                <a:solidFill>
+                  <a:srgbClr val="222222"/>
+                </a:solidFill>
+                <a:latin typeface="Consolas"/>
+                <a:cs typeface="Consolas"/>
+              </a:rPr>
+              <a:t>READ ONLY WITH APPLY</a:t>
+            </a:r>
+            <a:r>
+              <a:rPr sz="1700" b="0">
+                <a:solidFill>
+                  <a:srgbClr val="222222"/>
+                </a:solidFill>
+                <a:latin typeface="맑은 고딕"/>
+              </a:rPr>
+              <a:t>, DBID 1852041610</a:t>
             </a:r>
           </a:p>
           <a:p>
@@ -12352,7 +13635,17 @@
                 </a:solidFill>
                 <a:latin typeface="맑은 고딕"/>
               </a:rPr>
-              <a:t>•  데이터 파일 `/u03/app/oracle/oradata/BOSTON/**/o1_mf_*.dbf`</a:t>
+              <a:t>•  데이터 파일 </a:t>
+            </a:r>
+            <a:r>
+              <a:rPr sz="1700" b="0">
+                <a:solidFill>
+                  <a:srgbClr val="222222"/>
+                </a:solidFill>
+                <a:latin typeface="Consolas"/>
+                <a:cs typeface="Consolas"/>
+              </a:rPr>
+              <a:t>/u03/app/oracle/oradata/BOSTON/**/o1_mf_*.dbf</a:t>
             </a:r>
           </a:p>
           <a:p>
@@ -12368,7 +13661,26 @@
                 </a:solidFill>
                 <a:latin typeface="맑은 고딕"/>
               </a:rPr>
-              <a:t>•  컨트롤 파일 `BOSTON/controlfile/` (교정 완료)</a:t>
+              <a:t>•  컨트롤 파일 </a:t>
+            </a:r>
+            <a:r>
+              <a:rPr sz="1700" b="0">
+                <a:solidFill>
+                  <a:srgbClr val="222222"/>
+                </a:solidFill>
+                <a:latin typeface="Consolas"/>
+                <a:cs typeface="Consolas"/>
+              </a:rPr>
+              <a:t>BOSTON/controlfile/</a:t>
+            </a:r>
+            <a:r>
+              <a:rPr sz="1700" b="0">
+                <a:solidFill>
+                  <a:srgbClr val="222222"/>
+                </a:solidFill>
+                <a:latin typeface="맑은 고딕"/>
+              </a:rPr>
+              <a:t> (교정 완료)</a:t>
             </a:r>
           </a:p>
           <a:p>
@@ -12524,7 +13836,26 @@
                 </a:solidFill>
                 <a:latin typeface="맑은 고딕"/>
               </a:rPr>
-              <a:t>•  Q1. `NOFILENAMECHECK`가 OMF 방식에서 필요 없는 이유를 파일 이름 규칙과 연결해 설명하라.</a:t>
+              <a:t>•  Q1. </a:t>
+            </a:r>
+            <a:r>
+              <a:rPr sz="1600" b="0">
+                <a:solidFill>
+                  <a:srgbClr val="222222"/>
+                </a:solidFill>
+                <a:latin typeface="Consolas"/>
+                <a:cs typeface="Consolas"/>
+              </a:rPr>
+              <a:t>NOFILENAMECHECK</a:t>
+            </a:r>
+            <a:r>
+              <a:rPr sz="1600" b="0">
+                <a:solidFill>
+                  <a:srgbClr val="222222"/>
+                </a:solidFill>
+                <a:latin typeface="맑은 고딕"/>
+              </a:rPr>
+              <a:t>가 OMF 방식에서 필요 없는 이유를 파일 이름 규칙과 연결해 설명하라.</a:t>
             </a:r>
           </a:p>
           <a:p>
@@ -12540,7 +13871,26 @@
                 </a:solidFill>
                 <a:latin typeface="맑은 고딕"/>
               </a:rPr>
-              <a:t>•  Q2. `db_create_file_dest`에 없는 경로를 주었을 때와 아예 주지 않았을 때의 오류가 어떻게 다른가?</a:t>
+              <a:t>•  Q2. </a:t>
+            </a:r>
+            <a:r>
+              <a:rPr sz="1600" b="0">
+                <a:solidFill>
+                  <a:srgbClr val="222222"/>
+                </a:solidFill>
+                <a:latin typeface="Consolas"/>
+                <a:cs typeface="Consolas"/>
+              </a:rPr>
+              <a:t>db_create_file_dest</a:t>
+            </a:r>
+            <a:r>
+              <a:rPr sz="1600" b="0">
+                <a:solidFill>
+                  <a:srgbClr val="222222"/>
+                </a:solidFill>
+                <a:latin typeface="맑은 고딕"/>
+              </a:rPr>
+              <a:t>에 없는 경로를 주었을 때와 아예 주지 않았을 때의 오류가 어떻게 다른가?</a:t>
             </a:r>
           </a:p>
           <a:p>
@@ -12556,7 +13906,64 @@
                 </a:solidFill>
                 <a:latin typeface="맑은 고딕"/>
               </a:rPr>
-              <a:t>•  Q3. `BOSTON` 디렉터리 이름이 `DB_NAME`이 아니라 `DB_UNIQUE_NAME`에서 온다는 사실이 왜 중요한가?</a:t>
+              <a:t>•  Q3. </a:t>
+            </a:r>
+            <a:r>
+              <a:rPr sz="1600" b="0">
+                <a:solidFill>
+                  <a:srgbClr val="222222"/>
+                </a:solidFill>
+                <a:latin typeface="Consolas"/>
+                <a:cs typeface="Consolas"/>
+              </a:rPr>
+              <a:t>BOSTON</a:t>
+            </a:r>
+            <a:r>
+              <a:rPr sz="1600" b="0">
+                <a:solidFill>
+                  <a:srgbClr val="222222"/>
+                </a:solidFill>
+                <a:latin typeface="맑은 고딕"/>
+              </a:rPr>
+              <a:t> 디렉터리 이름이 </a:t>
+            </a:r>
+            <a:r>
+              <a:rPr sz="1600" b="0">
+                <a:solidFill>
+                  <a:srgbClr val="222222"/>
+                </a:solidFill>
+                <a:latin typeface="Consolas"/>
+                <a:cs typeface="Consolas"/>
+              </a:rPr>
+              <a:t>DB_NAME</a:t>
+            </a:r>
+            <a:r>
+              <a:rPr sz="1600" b="0">
+                <a:solidFill>
+                  <a:srgbClr val="222222"/>
+                </a:solidFill>
+                <a:latin typeface="맑은 고딕"/>
+              </a:rPr>
+              <a:t>이 아니라 </a:t>
+            </a:r>
+            <a:r>
+              <a:rPr sz="1600" b="0">
+                <a:solidFill>
+                  <a:srgbClr val="222222"/>
+                </a:solidFill>
+                <a:latin typeface="Consolas"/>
+                <a:cs typeface="Consolas"/>
+              </a:rPr>
+              <a:t>DB_UNIQUE_NAME</a:t>
+            </a:r>
+            <a:r>
+              <a:rPr sz="1600" b="0">
+                <a:solidFill>
+                  <a:srgbClr val="222222"/>
+                </a:solidFill>
+                <a:latin typeface="맑은 고딕"/>
+              </a:rPr>
+              <a:t>에서 온다는 사실이 왜 중요한가?</a:t>
             </a:r>
           </a:p>
           <a:p>
@@ -12744,7 +14151,26 @@
                 </a:solidFill>
                 <a:latin typeface="맑은 고딕"/>
               </a:rPr>
-              <a:t>•  OMF는 `DB_CREATE_FILE_DEST` 하나로 파일 배치를 오라클에 맡긴다. 켜고 끄는 스위치가 아니라 파일 단위 규칙이다.</a:t>
+              <a:t>•  OMF는 </a:t>
+            </a:r>
+            <a:r>
+              <a:rPr sz="1600" b="0">
+                <a:solidFill>
+                  <a:srgbClr val="222222"/>
+                </a:solidFill>
+                <a:latin typeface="Consolas"/>
+                <a:cs typeface="Consolas"/>
+              </a:rPr>
+              <a:t>DB_CREATE_FILE_DEST</a:t>
+            </a:r>
+            <a:r>
+              <a:rPr sz="1600" b="0">
+                <a:solidFill>
+                  <a:srgbClr val="222222"/>
+                </a:solidFill>
+                <a:latin typeface="맑은 고딕"/>
+              </a:rPr>
+              <a:t> 하나로 파일 배치를 오라클에 맡긴다. 켜고 끄는 스위치가 아니라 파일 단위 규칙이다.</a:t>
             </a:r>
           </a:p>
           <a:p>
@@ -12776,7 +14202,26 @@
                 </a:solidFill>
                 <a:latin typeface="맑은 고딕"/>
               </a:rPr>
-              <a:t>•  스크립트에서 다섯 절이 사라지고 세 절이 생긴다. `set control_files`만 대체 수단이 없다.</a:t>
+              <a:t>•  스크립트에서 다섯 절이 사라지고 세 절이 생긴다. </a:t>
+            </a:r>
+            <a:r>
+              <a:rPr sz="1600" b="0">
+                <a:solidFill>
+                  <a:srgbClr val="222222"/>
+                </a:solidFill>
+                <a:latin typeface="Consolas"/>
+                <a:cs typeface="Consolas"/>
+              </a:rPr>
+              <a:t>set control_files</a:t>
+            </a:r>
+            <a:r>
+              <a:rPr sz="1600" b="0">
+                <a:solidFill>
+                  <a:srgbClr val="222222"/>
+                </a:solidFill>
+                <a:latin typeface="맑은 고딕"/>
+              </a:rPr>
+              <a:t>만 대체 수단이 없다.</a:t>
             </a:r>
           </a:p>
           <a:p>
@@ -12792,7 +14237,26 @@
                 </a:solidFill>
                 <a:latin typeface="맑은 고딕"/>
               </a:rPr>
-              <a:t>•  `NOFILENAMECHECK`가 불필요한 이유는 OMF 이름의 유일 문자열 때문에 충돌이 불가능해서다.</a:t>
+              <a:t>•  </a:t>
+            </a:r>
+            <a:r>
+              <a:rPr sz="1600" b="0">
+                <a:solidFill>
+                  <a:srgbClr val="222222"/>
+                </a:solidFill>
+                <a:latin typeface="Consolas"/>
+                <a:cs typeface="Consolas"/>
+              </a:rPr>
+              <a:t>NOFILENAMECHECK</a:t>
+            </a:r>
+            <a:r>
+              <a:rPr sz="1600" b="0">
+                <a:solidFill>
+                  <a:srgbClr val="222222"/>
+                </a:solidFill>
+                <a:latin typeface="맑은 고딕"/>
+              </a:rPr>
+              <a:t>가 불필요한 이유는 OMF 이름의 유일 문자열 때문에 충돌이 불가능해서다.</a:t>
             </a:r>
           </a:p>
           <a:p>
@@ -12808,7 +14272,26 @@
                 </a:solidFill>
                 <a:latin typeface="맑은 고딕"/>
               </a:rPr>
-              <a:t>•  없는 경로 → 인스턴스가 뜨지 않는다. ORA-01261 + ORA-01262 + `Linux-x86_64 Error: 2` + ORA-01034.</a:t>
+              <a:t>•  없는 경로 → 인스턴스가 뜨지 않는다. ORA-01261 + ORA-01262 + </a:t>
+            </a:r>
+            <a:r>
+              <a:rPr sz="1600" b="0">
+                <a:solidFill>
+                  <a:srgbClr val="222222"/>
+                </a:solidFill>
+                <a:latin typeface="Consolas"/>
+                <a:cs typeface="Consolas"/>
+              </a:rPr>
+              <a:t>Linux-x86_64 Error: 2</a:t>
+            </a:r>
+            <a:r>
+              <a:rPr sz="1600" b="0">
+                <a:solidFill>
+                  <a:srgbClr val="222222"/>
+                </a:solidFill>
+                <a:latin typeface="맑은 고딕"/>
+              </a:rPr>
+              <a:t> + ORA-01034.</a:t>
             </a:r>
           </a:p>
           <a:p>
@@ -12824,7 +14307,26 @@
                 </a:solidFill>
                 <a:latin typeface="맑은 고딕"/>
               </a:rPr>
-              <a:t>•  `Linux-x86_64 Error: 2`는 ENOENT(경로 없음), 13은 EACCES(권한). 이 숫자가 진단의 분기점이다.</a:t>
+              <a:t>•  </a:t>
+            </a:r>
+            <a:r>
+              <a:rPr sz="1600" b="0">
+                <a:solidFill>
+                  <a:srgbClr val="222222"/>
+                </a:solidFill>
+                <a:latin typeface="Consolas"/>
+                <a:cs typeface="Consolas"/>
+              </a:rPr>
+              <a:t>Linux-x86_64 Error: 2</a:t>
+            </a:r>
+            <a:r>
+              <a:rPr sz="1600" b="0">
+                <a:solidFill>
+                  <a:srgbClr val="222222"/>
+                </a:solidFill>
+                <a:latin typeface="맑은 고딕"/>
+              </a:rPr>
+              <a:t>는 ENOENT(경로 없음), 13은 EACCES(권한). 이 숫자가 진단의 분기점이다.</a:t>
             </a:r>
           </a:p>
           <a:p>
@@ -12840,7 +14342,26 @@
                 </a:solidFill>
                 <a:latin typeface="맑은 고딕"/>
               </a:rPr>
-              <a:t>•  인스턴스가 없으면 RMAN은 `failure of allocate command` + RMAN-06403 + ORA-27101로 끝난다.</a:t>
+              <a:t>•  인스턴스가 없으면 RMAN은 </a:t>
+            </a:r>
+            <a:r>
+              <a:rPr sz="1600" b="0">
+                <a:solidFill>
+                  <a:srgbClr val="222222"/>
+                </a:solidFill>
+                <a:latin typeface="Consolas"/>
+                <a:cs typeface="Consolas"/>
+              </a:rPr>
+              <a:t>failure of allocate command</a:t>
+            </a:r>
+            <a:r>
+              <a:rPr sz="1600" b="0">
+                <a:solidFill>
+                  <a:srgbClr val="222222"/>
+                </a:solidFill>
+                <a:latin typeface="맑은 고딕"/>
+              </a:rPr>
+              <a:t> + RMAN-06403 + ORA-27101로 끝난다.</a:t>
             </a:r>
           </a:p>
           <a:p>
@@ -12872,7 +14393,26 @@
                 </a:solidFill>
                 <a:latin typeface="맑은 고딕"/>
               </a:rPr>
-              <a:t>•  성공 실행은 390줄, `rc=0`, 오류 0줄, 49번 Starting / 383번 Finished.</a:t>
+              <a:t>•  성공 실행은 390줄, </a:t>
+            </a:r>
+            <a:r>
+              <a:rPr sz="1600" b="0">
+                <a:solidFill>
+                  <a:srgbClr val="222222"/>
+                </a:solidFill>
+                <a:latin typeface="Consolas"/>
+                <a:cs typeface="Consolas"/>
+              </a:rPr>
+              <a:t>rc=0</a:t>
+            </a:r>
+            <a:r>
+              <a:rPr sz="1600" b="0">
+                <a:solidFill>
+                  <a:srgbClr val="222222"/>
+                </a:solidFill>
+                <a:latin typeface="맑은 고딕"/>
+              </a:rPr>
+              <a:t>, 오류 0줄, 49번 Starting / 383번 Finished.</a:t>
             </a:r>
           </a:p>
           <a:p>
@@ -12904,7 +14444,26 @@
                 </a:solidFill>
                 <a:latin typeface="맑은 고딕"/>
               </a:rPr>
-              <a:t>•  OMF는 mkdir 없이 여덟 개 디렉터리를 만든다. 최상위는 `DB_UNIQUE_NAME`의 대문자.</a:t>
+              <a:t>•  OMF는 mkdir 없이 여덟 개 디렉터리를 만든다. 최상위는 </a:t>
+            </a:r>
+            <a:r>
+              <a:rPr sz="1600" b="0">
+                <a:solidFill>
+                  <a:srgbClr val="222222"/>
+                </a:solidFill>
+                <a:latin typeface="Consolas"/>
+                <a:cs typeface="Consolas"/>
+              </a:rPr>
+              <a:t>DB_UNIQUE_NAME</a:t>
+            </a:r>
+            <a:r>
+              <a:rPr sz="1600" b="0">
+                <a:solidFill>
+                  <a:srgbClr val="222222"/>
+                </a:solidFill>
+                <a:latin typeface="맑은 고딕"/>
+              </a:rPr>
+              <a:t>의 대문자.</a:t>
             </a:r>
           </a:p>
           <a:p>
@@ -12936,7 +14495,26 @@
                 </a:solidFill>
                 <a:latin typeface="맑은 고딕"/>
               </a:rPr>
-              <a:t>•  이름 규칙은 `o1_mf_&lt;테이블스페이스&gt;_&lt;유일문자열&gt;_.&lt;확장자&gt;`. 파일 번호는 이름에 없다.</a:t>
+              <a:t>•  이름 규칙은 </a:t>
+            </a:r>
+            <a:r>
+              <a:rPr sz="1600" b="0">
+                <a:solidFill>
+                  <a:srgbClr val="222222"/>
+                </a:solidFill>
+                <a:latin typeface="Consolas"/>
+                <a:cs typeface="Consolas"/>
+              </a:rPr>
+              <a:t>o1_mf_&lt;테이블스페이스&gt;_&lt;유일문자열&gt;_.&lt;확장자&gt;</a:t>
+            </a:r>
+            <a:r>
+              <a:rPr sz="1600" b="0">
+                <a:solidFill>
+                  <a:srgbClr val="222222"/>
+                </a:solidFill>
+                <a:latin typeface="맑은 고딕"/>
+              </a:rPr>
+              <a:t>. 파일 번호는 이름에 없다.</a:t>
             </a:r>
           </a:p>
           <a:p>
@@ -12968,7 +14546,64 @@
                 </a:solidFill>
                 <a:latin typeface="맑은 고딕"/>
               </a:rPr>
-              <a:t>•  컨트롤 파일은 예외다. `CONTROL_FILES`가 상속되어 Standby에 `Chicago`·`CHICAGO`가 생긴다.</a:t>
+              <a:t>•  컨트롤 파일은 예외다. </a:t>
+            </a:r>
+            <a:r>
+              <a:rPr sz="1600" b="0">
+                <a:solidFill>
+                  <a:srgbClr val="222222"/>
+                </a:solidFill>
+                <a:latin typeface="Consolas"/>
+                <a:cs typeface="Consolas"/>
+              </a:rPr>
+              <a:t>CONTROL_FILES</a:t>
+            </a:r>
+            <a:r>
+              <a:rPr sz="1600" b="0">
+                <a:solidFill>
+                  <a:srgbClr val="222222"/>
+                </a:solidFill>
+                <a:latin typeface="맑은 고딕"/>
+              </a:rPr>
+              <a:t>가 상속되어 Standby에 </a:t>
+            </a:r>
+            <a:r>
+              <a:rPr sz="1600" b="0">
+                <a:solidFill>
+                  <a:srgbClr val="222222"/>
+                </a:solidFill>
+                <a:latin typeface="Consolas"/>
+                <a:cs typeface="Consolas"/>
+              </a:rPr>
+              <a:t>Chicago</a:t>
+            </a:r>
+            <a:r>
+              <a:rPr sz="1600" b="0">
+                <a:solidFill>
+                  <a:srgbClr val="222222"/>
+                </a:solidFill>
+                <a:latin typeface="맑은 고딕"/>
+              </a:rPr>
+              <a:t>·</a:t>
+            </a:r>
+            <a:r>
+              <a:rPr sz="1600" b="0">
+                <a:solidFill>
+                  <a:srgbClr val="222222"/>
+                </a:solidFill>
+                <a:latin typeface="Consolas"/>
+                <a:cs typeface="Consolas"/>
+              </a:rPr>
+              <a:t>CHICAGO</a:t>
+            </a:r>
+            <a:r>
+              <a:rPr sz="1600" b="0">
+                <a:solidFill>
+                  <a:srgbClr val="222222"/>
+                </a:solidFill>
+                <a:latin typeface="맑은 고딕"/>
+              </a:rPr>
+              <a:t>가 생긴다.</a:t>
             </a:r>
           </a:p>
           <a:p>
@@ -12984,7 +14619,26 @@
                 </a:solidFill>
                 <a:latin typeface="맑은 고딕"/>
               </a:rPr>
-              <a:t>•  교정 순서는 SCOPE=SPFILE 변경 → 종료 → `mv` → 기동. 어기면 ORA-00205.</a:t>
+              <a:t>•  교정 순서는 SCOPE=SPFILE 변경 → 종료 → </a:t>
+            </a:r>
+            <a:r>
+              <a:rPr sz="1600" b="0">
+                <a:solidFill>
+                  <a:srgbClr val="222222"/>
+                </a:solidFill>
+                <a:latin typeface="Consolas"/>
+                <a:cs typeface="Consolas"/>
+              </a:rPr>
+              <a:t>mv</a:t>
+            </a:r>
+            <a:r>
+              <a:rPr sz="1600" b="0">
+                <a:solidFill>
+                  <a:srgbClr val="222222"/>
+                </a:solidFill>
+                <a:latin typeface="맑은 고딕"/>
+              </a:rPr>
+              <a:t> → 기동. 어기면 ORA-00205.</a:t>
             </a:r>
           </a:p>
           <a:p>
@@ -13000,7 +14654,26 @@
                 </a:solidFill>
                 <a:latin typeface="맑은 고딕"/>
               </a:rPr>
-              <a:t>•  가이드의 `create spfile from pfile`은 ORA-32002로 막힌다. 성공했다면 구성이 해체됐을 것이다.</a:t>
+              <a:t>•  가이드의 </a:t>
+            </a:r>
+            <a:r>
+              <a:rPr sz="1600" b="0">
+                <a:solidFill>
+                  <a:srgbClr val="222222"/>
+                </a:solidFill>
+                <a:latin typeface="Consolas"/>
+                <a:cs typeface="Consolas"/>
+              </a:rPr>
+              <a:t>create spfile from pfile</a:t>
+            </a:r>
+            <a:r>
+              <a:rPr sz="1600" b="0">
+                <a:solidFill>
+                  <a:srgbClr val="222222"/>
+                </a:solidFill>
+                <a:latin typeface="맑은 고딕"/>
+              </a:rPr>
+              <a:t>은 ORA-32002로 막힌다. 성공했다면 구성이 해체됐을 것이다.</a:t>
             </a:r>
           </a:p>
           <a:p>
@@ -13702,7 +15375,26 @@
                 </a:solidFill>
                 <a:latin typeface="맑은 고딕"/>
               </a:rPr>
-              <a:t>•  5장 두 번째 실패 — `pdbseed` 디렉터리가 없어 ORA-19505</a:t>
+              <a:t>•  5장 두 번째 실패 — </a:t>
+            </a:r>
+            <a:r>
+              <a:rPr sz="1700" b="0">
+                <a:solidFill>
+                  <a:srgbClr val="222222"/>
+                </a:solidFill>
+                <a:latin typeface="Consolas"/>
+                <a:cs typeface="Consolas"/>
+              </a:rPr>
+              <a:t>pdbseed</a:t>
+            </a:r>
+            <a:r>
+              <a:rPr sz="1700" b="0">
+                <a:solidFill>
+                  <a:srgbClr val="222222"/>
+                </a:solidFill>
+                <a:latin typeface="맑은 고딕"/>
+              </a:rPr>
+              <a:t> 디렉터리가 없어 ORA-19505</a:t>
             </a:r>
           </a:p>
           <a:p>
@@ -13929,7 +15621,36 @@
                 </a:solidFill>
                 <a:latin typeface="맑은 고딕"/>
               </a:rPr>
-              <a:t>•  `DB_CREATE_FILE_DEST` — 데이터·임시 파일. 실습 `/u03/app/oracle/oradata`</a:t>
+              <a:t>•  </a:t>
+            </a:r>
+            <a:r>
+              <a:rPr sz="1700" b="0">
+                <a:solidFill>
+                  <a:srgbClr val="222222"/>
+                </a:solidFill>
+                <a:latin typeface="Consolas"/>
+                <a:cs typeface="Consolas"/>
+              </a:rPr>
+              <a:t>DB_CREATE_FILE_DEST</a:t>
+            </a:r>
+            <a:r>
+              <a:rPr sz="1700" b="0">
+                <a:solidFill>
+                  <a:srgbClr val="222222"/>
+                </a:solidFill>
+                <a:latin typeface="맑은 고딕"/>
+              </a:rPr>
+              <a:t> — 데이터·임시 파일. 실습 </a:t>
+            </a:r>
+            <a:r>
+              <a:rPr sz="1700" b="0">
+                <a:solidFill>
+                  <a:srgbClr val="222222"/>
+                </a:solidFill>
+                <a:latin typeface="Consolas"/>
+                <a:cs typeface="Consolas"/>
+              </a:rPr>
+              <a:t>/u03/app/oracle/oradata</a:t>
             </a:r>
           </a:p>
           <a:p>
@@ -13945,7 +15666,35 @@
                 </a:solidFill>
                 <a:latin typeface="맑은 고딕"/>
               </a:rPr>
-              <a:t>•  `DB_CREATE_ONLINE_LOG_DEST_n` — 온라인 로그·컨트롤 파일. **미지정**</a:t>
+              <a:t>•  </a:t>
+            </a:r>
+            <a:r>
+              <a:rPr sz="1700" b="0">
+                <a:solidFill>
+                  <a:srgbClr val="222222"/>
+                </a:solidFill>
+                <a:latin typeface="Consolas"/>
+                <a:cs typeface="Consolas"/>
+              </a:rPr>
+              <a:t>DB_CREATE_ONLINE_LOG_DEST_n</a:t>
+            </a:r>
+            <a:r>
+              <a:rPr sz="1700" b="0">
+                <a:solidFill>
+                  <a:srgbClr val="222222"/>
+                </a:solidFill>
+                <a:latin typeface="맑은 고딕"/>
+              </a:rPr>
+              <a:t> — 온라인 로그·컨트롤 파일. </a:t>
+            </a:r>
+            <a:r>
+              <a:rPr sz="1700" b="1">
+                <a:solidFill>
+                  <a:srgbClr val="222222"/>
+                </a:solidFill>
+                <a:latin typeface="맑은 고딕"/>
+              </a:rPr>
+              <a:t>미지정</a:t>
             </a:r>
           </a:p>
           <a:p>
@@ -13961,7 +15710,26 @@
                 </a:solidFill>
                 <a:latin typeface="맑은 고딕"/>
               </a:rPr>
-              <a:t>•  `DB_RECOVERY_FILE_DEST` — FRA. 실습 15GB</a:t>
+              <a:t>•  </a:t>
+            </a:r>
+            <a:r>
+              <a:rPr sz="1700" b="0">
+                <a:solidFill>
+                  <a:srgbClr val="222222"/>
+                </a:solidFill>
+                <a:latin typeface="Consolas"/>
+                <a:cs typeface="Consolas"/>
+              </a:rPr>
+              <a:t>DB_RECOVERY_FILE_DEST</a:t>
+            </a:r>
+            <a:r>
+              <a:rPr sz="1700" b="0">
+                <a:solidFill>
+                  <a:srgbClr val="222222"/>
+                </a:solidFill>
+                <a:latin typeface="맑은 고딕"/>
+              </a:rPr>
+              <a:t> — FRA. 실습 15GB</a:t>
             </a:r>
           </a:p>
           <a:p>
@@ -13977,7 +15745,26 @@
                 </a:solidFill>
                 <a:latin typeface="맑은 고딕"/>
               </a:rPr>
-              <a:t>•  로그 목적지를 지정하지 않으면 `DB_CREATE_FILE_DEST` 아래로 간다</a:t>
+              <a:t>•  로그 목적지를 지정하지 않으면 </a:t>
+            </a:r>
+            <a:r>
+              <a:rPr sz="1700" b="0">
+                <a:solidFill>
+                  <a:srgbClr val="222222"/>
+                </a:solidFill>
+                <a:latin typeface="Consolas"/>
+                <a:cs typeface="Consolas"/>
+              </a:rPr>
+              <a:t>DB_CREATE_FILE_DEST</a:t>
+            </a:r>
+            <a:r>
+              <a:rPr sz="1700" b="0">
+                <a:solidFill>
+                  <a:srgbClr val="222222"/>
+                </a:solidFill>
+                <a:latin typeface="맑은 고딕"/>
+              </a:rPr>
+              <a:t> 아래로 간다</a:t>
             </a:r>
           </a:p>
         </p:txBody>
@@ -14156,7 +15943,26 @@
                 </a:solidFill>
                 <a:latin typeface="맑은 고딕"/>
               </a:rPr>
-              <a:t>•  `DB_CREATE_FILE_DEST`에 값이 있으면 그 이후 만들어지는 파일이 OMF</a:t>
+              <a:t>•  </a:t>
+            </a:r>
+            <a:r>
+              <a:rPr sz="1700" b="0">
+                <a:solidFill>
+                  <a:srgbClr val="222222"/>
+                </a:solidFill>
+                <a:latin typeface="Consolas"/>
+                <a:cs typeface="Consolas"/>
+              </a:rPr>
+              <a:t>DB_CREATE_FILE_DEST</a:t>
+            </a:r>
+            <a:r>
+              <a:rPr sz="1700" b="0">
+                <a:solidFill>
+                  <a:srgbClr val="222222"/>
+                </a:solidFill>
+                <a:latin typeface="맑은 고딕"/>
+              </a:rPr>
+              <a:t>에 값이 있으면 그 이후 만들어지는 파일이 OMF</a:t>
             </a:r>
           </a:p>
           <a:p>
@@ -14638,7 +16444,93 @@
                 </a:solidFill>
                 <a:latin typeface="맑은 고딕"/>
               </a:rPr>
-              <a:t>•  사라짐 : `parameter_value_convert` · `db_file_name_convert` · `log_file_name_convert` · `control_files` · `nofilenamecheck`</a:t>
+              <a:t>•  사라짐 : </a:t>
+            </a:r>
+            <a:r>
+              <a:rPr sz="1700" b="0">
+                <a:solidFill>
+                  <a:srgbClr val="222222"/>
+                </a:solidFill>
+                <a:latin typeface="Consolas"/>
+                <a:cs typeface="Consolas"/>
+              </a:rPr>
+              <a:t>parameter_value_convert</a:t>
+            </a:r>
+            <a:r>
+              <a:rPr sz="1700" b="0">
+                <a:solidFill>
+                  <a:srgbClr val="222222"/>
+                </a:solidFill>
+                <a:latin typeface="맑은 고딕"/>
+              </a:rPr>
+              <a:t> · </a:t>
+            </a:r>
+            <a:r>
+              <a:rPr sz="1700" b="0">
+                <a:solidFill>
+                  <a:srgbClr val="222222"/>
+                </a:solidFill>
+                <a:latin typeface="Consolas"/>
+                <a:cs typeface="Consolas"/>
+              </a:rPr>
+              <a:t>db_file_name_convert</a:t>
+            </a:r>
+            <a:r>
+              <a:rPr sz="1700" b="0">
+                <a:solidFill>
+                  <a:srgbClr val="222222"/>
+                </a:solidFill>
+                <a:latin typeface="맑은 고딕"/>
+              </a:rPr>
+              <a:t> · </a:t>
+            </a:r>
+            <a:r>
+              <a:rPr sz="1700" b="0">
+                <a:solidFill>
+                  <a:srgbClr val="222222"/>
+                </a:solidFill>
+                <a:latin typeface="Consolas"/>
+                <a:cs typeface="Consolas"/>
+              </a:rPr>
+              <a:t>log_file_name_convert</a:t>
+            </a:r>
+            <a:r>
+              <a:rPr sz="1700" b="0">
+                <a:solidFill>
+                  <a:srgbClr val="222222"/>
+                </a:solidFill>
+                <a:latin typeface="맑은 고딕"/>
+              </a:rPr>
+              <a:t> · </a:t>
+            </a:r>
+            <a:r>
+              <a:rPr sz="1700" b="0">
+                <a:solidFill>
+                  <a:srgbClr val="222222"/>
+                </a:solidFill>
+                <a:latin typeface="Consolas"/>
+                <a:cs typeface="Consolas"/>
+              </a:rPr>
+              <a:t>control_files</a:t>
+            </a:r>
+            <a:r>
+              <a:rPr sz="1700" b="0">
+                <a:solidFill>
+                  <a:srgbClr val="222222"/>
+                </a:solidFill>
+                <a:latin typeface="맑은 고딕"/>
+              </a:rPr>
+              <a:t> · </a:t>
+            </a:r>
+            <a:r>
+              <a:rPr sz="1700" b="0">
+                <a:solidFill>
+                  <a:srgbClr val="222222"/>
+                </a:solidFill>
+                <a:latin typeface="Consolas"/>
+                <a:cs typeface="Consolas"/>
+              </a:rPr>
+              <a:t>nofilenamecheck</a:t>
             </a:r>
           </a:p>
           <a:p>
@@ -14654,7 +16546,55 @@
                 </a:solidFill>
                 <a:latin typeface="맑은 고딕"/>
               </a:rPr>
-              <a:t>•  생김 : `db_create_file_dest` · `db_recovery_file_dest` · `db_recovery_file_dest_size`</a:t>
+              <a:t>•  생김 : </a:t>
+            </a:r>
+            <a:r>
+              <a:rPr sz="1700" b="0">
+                <a:solidFill>
+                  <a:srgbClr val="222222"/>
+                </a:solidFill>
+                <a:latin typeface="Consolas"/>
+                <a:cs typeface="Consolas"/>
+              </a:rPr>
+              <a:t>db_create_file_dest</a:t>
+            </a:r>
+            <a:r>
+              <a:rPr sz="1700" b="0">
+                <a:solidFill>
+                  <a:srgbClr val="222222"/>
+                </a:solidFill>
+                <a:latin typeface="맑은 고딕"/>
+              </a:rPr>
+              <a:t> · </a:t>
+            </a:r>
+            <a:r>
+              <a:rPr sz="1700" b="0">
+                <a:solidFill>
+                  <a:srgbClr val="222222"/>
+                </a:solidFill>
+                <a:latin typeface="Consolas"/>
+                <a:cs typeface="Consolas"/>
+              </a:rPr>
+              <a:t>db_recovery_file_dest</a:t>
+            </a:r>
+            <a:r>
+              <a:rPr sz="1700" b="0">
+                <a:solidFill>
+                  <a:srgbClr val="222222"/>
+                </a:solidFill>
+                <a:latin typeface="맑은 고딕"/>
+              </a:rPr>
+              <a:t> · </a:t>
+            </a:r>
+            <a:r>
+              <a:rPr sz="1700" b="0">
+                <a:solidFill>
+                  <a:srgbClr val="222222"/>
+                </a:solidFill>
+                <a:latin typeface="Consolas"/>
+                <a:cs typeface="Consolas"/>
+              </a:rPr>
+              <a:t>db_recovery_file_dest_size</a:t>
             </a:r>
           </a:p>
           <a:p>
@@ -14670,7 +16610,26 @@
                 </a:solidFill>
                 <a:latin typeface="맑은 고딕"/>
               </a:rPr>
-              <a:t>•  두 convert를 `db_create_file_dest` 하나가 대신한다</a:t>
+              <a:t>•  두 convert를 </a:t>
+            </a:r>
+            <a:r>
+              <a:rPr sz="1700" b="0">
+                <a:solidFill>
+                  <a:srgbClr val="222222"/>
+                </a:solidFill>
+                <a:latin typeface="Consolas"/>
+                <a:cs typeface="Consolas"/>
+              </a:rPr>
+              <a:t>db_create_file_dest</a:t>
+            </a:r>
+            <a:r>
+              <a:rPr sz="1700" b="0">
+                <a:solidFill>
+                  <a:srgbClr val="222222"/>
+                </a:solidFill>
+                <a:latin typeface="맑은 고딕"/>
+              </a:rPr>
+              <a:t> 하나가 대신한다</a:t>
             </a:r>
           </a:p>
           <a:p>
@@ -14686,7 +16645,44 @@
                 </a:solidFill>
                 <a:latin typeface="맑은 고딕"/>
               </a:rPr>
-              <a:t>•  `set control_files`만은 대신하는 것이 **없다** → 6.7절</a:t>
+              <a:t>•  </a:t>
+            </a:r>
+            <a:r>
+              <a:rPr sz="1700" b="0">
+                <a:solidFill>
+                  <a:srgbClr val="222222"/>
+                </a:solidFill>
+                <a:latin typeface="Consolas"/>
+                <a:cs typeface="Consolas"/>
+              </a:rPr>
+              <a:t>set control_files</a:t>
+            </a:r>
+            <a:r>
+              <a:rPr sz="1700" b="0">
+                <a:solidFill>
+                  <a:srgbClr val="222222"/>
+                </a:solidFill>
+                <a:latin typeface="맑은 고딕"/>
+              </a:rPr>
+              <a:t>만은 대신하는 것이 </a:t>
+            </a:r>
+            <a:r>
+              <a:rPr sz="1700" b="1">
+                <a:solidFill>
+                  <a:srgbClr val="222222"/>
+                </a:solidFill>
+                <a:latin typeface="맑은 고딕"/>
+              </a:rPr>
+              <a:t>없다</a:t>
+            </a:r>
+            <a:r>
+              <a:rPr sz="1700" b="0">
+                <a:solidFill>
+                  <a:srgbClr val="222222"/>
+                </a:solidFill>
+                <a:latin typeface="맑은 고딕"/>
+              </a:rPr>
+              <a:t> → 6.7절</a:t>
             </a:r>
           </a:p>
         </p:txBody>

--- a/ADG/06장/6장_PhysicalStandby생성_OMF방식.pptx
+++ b/ADG/06장/6장_PhysicalStandby생성_OMF방식.pptx
@@ -44,6 +44,20 @@
     <p:sldId id="292" r:id="rId44"/>
     <p:sldId id="293" r:id="rId45"/>
     <p:sldId id="294" r:id="rId46"/>
+    <p:sldId id="295" r:id="rId47"/>
+    <p:sldId id="296" r:id="rId48"/>
+    <p:sldId id="297" r:id="rId49"/>
+    <p:sldId id="298" r:id="rId50"/>
+    <p:sldId id="299" r:id="rId51"/>
+    <p:sldId id="300" r:id="rId52"/>
+    <p:sldId id="301" r:id="rId53"/>
+    <p:sldId id="302" r:id="rId54"/>
+    <p:sldId id="303" r:id="rId55"/>
+    <p:sldId id="304" r:id="rId56"/>
+    <p:sldId id="305" r:id="rId57"/>
+    <p:sldId id="306" r:id="rId58"/>
+    <p:sldId id="307" r:id="rId59"/>
+    <p:sldId id="308" r:id="rId60"/>
   </p:sldIdLst>
   <p:sldSz cx="12191695" cy="6858000" type="screen4x3"/>
   <p:notesSz cx="6858000" cy="9144000"/>
@@ -540,7 +554,7 @@
           <a:lstStyle/>
           <a:p>
             <a:r>
-              <a:t>5장의 두 번째 실패를 실수로만 보면 배울 것이 없습니다. 그것은 방식의 성격입니다. 경로를 사람이 정하면 그 경로가 실제로 존재하는지도 사람이 책임져야 합니다. 한 번 만들고 끝나는 일이 아니라 PDB를 추가할 때마다 되살아나는 부담입니다. STANDBY_FILE_MANAGEMENT가 AUTO여도 디렉터리까지 만들어 주지는 않습니다. 이 장은 그 책임을 오라클에 넘기는 방식을 다룹니다. 넘긴 만큼 통제를 잃는데, 무엇을 잃는지도 함께 봅니다.</a:t>
+              <a:t>5장에서 DUPLICATE가 실패했던 경우를 떠올려 보면 거의 모두 파일 이름과 경로 문제였습니다. 치환 쌍이 PDB 디렉터리를 놓쳤거나, 치환 결과 디렉터리를 만들어 두지 않았거나, 같은 이름 때문에 이름 검사에 걸린 경우입니다. 이 일들은 Standby를 한 번 만들고 끝나지도 않습니다. Primary 쪽에 새 마운트 지점이 생기면 Standby의 규칙도 고쳐야 하고, 파라미터 길이 제한 255자에 걸리는 일도 생깁니다. OMF는 이 작업을 데이터베이스 쪽으로 옮겨 놓은 기능입니다.</a:t>
             </a:r>
           </a:p>
         </p:txBody>
@@ -610,7 +624,7 @@
           <a:lstStyle/>
           <a:p>
             <a:r>
-              <a:t>5장의 418줄보다 28줄 짧습니다. 스크립트에서 사라진 절들만큼 처리 단계가 줄어든 결과입니다. 큰 의미는 없지만 두 로그를 비교해 볼 때 참고가 됩니다. 판정 기준 세 가지는 방식과 무관하게 동일합니다. 종료 코드, 오류 줄 개수, 완료 줄의 존재입니다. 이 세 가지를 확인하는 데 5초면 충분하고, 오류가 있을 때만 그 줄 번호 앞뒤를 읽습니다. 390줄이든 418줄이든 처음부터 읽는 것은 마지막 수단입니다.</a:t>
+              <a:t>경로를 한 단계씩 읽으면 많은 정보가 나옵니다. 최상위는 관리자가 준 위치이고, 그 아래가 데이터베이스를 구분하는 DB_UNIQUE_NAME, 그 아래가 파일 종류입니다. CDB라면 PDB 파일 앞에 32자리 GUID 디렉터리가 하나 더 들어가고, 루트 컨테이너 파일은 GUID 없이 바로 datafile 아래에 있습니다. FRA 쪽 아카이브 로그와 백업은 날짜 디렉터리로 한 번 더 나뉘어서, 특정 날짜의 아카이브를 찾을 때 경로만 보고도 범위를 좁힐 수 있습니다.</a:t>
             </a:r>
           </a:p>
         </p:txBody>
@@ -680,7 +694,7 @@
           <a:lstStyle/>
           <a:p>
             <a:r>
-              <a:t>input 쪽은 사람이 정한 이름, output 쪽은 오라클이 정한 이름입니다. 5장에서는 system01.dbf가 system01.dbf로 그대로 갔고 앞의 경로만 달랐습니다. 여기서는 이름 자체가 다릅니다. 이것이 두 방식의 가장 눈에 띄는 차이입니다. 그리고 261번 줄을 보면 BOSTON 아래에 서른두 자리 16진수로 된 디렉터리가 있습니다. 처음 보면 무엇인지 알 수 없는 이름인데, 다음 절에서 정체를 밝힙니다. 미리 말씀드리면 PDB와 관련이 있습니다.</a:t>
+              <a:t>DB_NAME으로 디렉터리를 만들었다면 Primary와 Standby가 같은 CHICAGO 디렉터리를 쓰게 되고, 한 서버에 둘을 올리면 충돌합니다. DB_UNIQUE_NAME은 구성 안에서 데이터베이스마다 다른 값이라 이 문제가 없습니다. PDB는 이름이 바뀌거나 다른 CDB로 옮겨질 수 있어서 바뀌지 않는 GUID를 씁니다. 물리 Standby는 블록 복제본이므로 GUID도 Primary와 같고, 그래서 두 서버의 파일을 대조할 때 GUID 부분이 좋은 기준이 됩니다. 대신 어느 PDB인지는 V$PDBS를 조회해야 압니다.</a:t>
             </a:r>
           </a:p>
         </p:txBody>
@@ -750,7 +764,7 @@
           <a:lstStyle/>
           <a:p>
             <a:r>
-              <a:t>첫 실행이 오래 걸려 실패한 줄 알고 다시 돌리는 실수는 생각보다 흔합니다. 이때 나오는 오류가 5장과 다릅니다. SPFILE 절은 "지금부터 spfile을 만들겠다"는 지시인데, 상대가 이미 그 spfile로 돌고 있으면 성립하지 않습니다. 중요한 것은 Standby가 멀쩡하다는 사실입니다. 채널은 할당되고 Starting Duplicate Db까지 갔지만 파일을 건드리기 전에 중단됐습니다. 실측에서 실패 직후에도 READ ONLY WITH APPLY, MRP0 APPLYING_LOG, 목적지 VALID였습니다.</a:t>
+              <a:t>고유 문자열은 파일을 만들 때마다 새로 생기므로 같은 테이블스페이스에 파일을 여러 번 추가해도 이름이 겹치지 않습니다. 대신 system01.dbf처럼 이름에 들어 있던 번호 정보가 사라집니다. 파일 번호를 알려면 V$DATAFILE을 봐야 하고, 온라인 로그와 SRL은 이름 형식이 같아서 V$LOGFILE의 TYPE 열로 구분합니다. 확장자는 도움이 됩니다. 임시 파일이 .tmp로 끝나서 데이터 파일과 같은 디렉터리에 있어도 쉽게 가려집니다.</a:t>
             </a:r>
           </a:p>
         </p:txBody>
@@ -820,7 +834,7 @@
           <a:lstStyle/>
           <a:p>
             <a:r>
-              <a:t>복제 전에는 이 아래에 빈 디렉터리 하나뿐이었습니다. 지금 여덟 개가 있고 전부 복제 과정에서 생겼습니다. 5장에서 pdbseed와 chicago_pdb1을 미리 만들지 않아 실패했던 것과 정확히 대비됩니다. 최상위 이름이 대문자 BOSTON인 것에 주의하십시오. DB_UNIQUE_NAME이 소문자 boston인데 OMF가 대문자로 바꿔 씁니다. 5장에서 만든 것은 Boston이었습니다. 리눅스는 대소문자를 구별하므로 둘은 다른 디렉터리이고, 방식을 바꿀 때 옛 구조를 지우지 않으면 두 벌이 공존합니다.</a:t>
+              <a:t>OMF가 켜져 있어도 경로와 이름을 적어 파일을 만드는 것은 허용되고, 그 파일은 일반 파일로 관리됩니다. 반대로 사람이 o1_mf_ 형식의 이름을 직접 붙이려 하면 거부됩니다. 이 제약 덕분에 o1_mf_로 시작하는 파일은 데이터베이스가 만든 것이라고 믿을 수 있습니다. RMAN에서 복원할 때 SET NEWNAME에 TO NEW를 쓰면 위치만 정하고 이름은 OMF가 새로 짓게 할 수 있어서, 백업 스크립트에 파일 이름을 하드코딩하지 않아도 됩니다.</a:t>
             </a:r>
           </a:p>
         </p:txBody>
@@ -890,7 +904,7 @@
           <a:lstStyle/>
           <a:p>
             <a:r>
-              <a:t>사소해 보이는 선택이지만 근거가 분명합니다. 물리 복제본은 DB_NAME이 원본과 같아야 하므로, DB_NAME을 디렉터리 이름으로 쓰면 Primary와 모든 Standby가 같은 디렉터리 이름을 갖게 됩니다. 한 서버에 두 개의 Standby를 두는 구성에서는 그대로 충돌합니다. DB_UNIQUE_NAME은 구성 안에서 유일하도록 정의된 값이므로 디렉터리 이름으로 쓰기에 적합합니다. 이 규칙 덕분에 Standby를 추가할 때 경로를 따로 설계할 필요가 없습니다.</a:t>
+              <a:t>공식 교재는 Standby가 OMF를 쓰면 DB_FILE_NAME_CONVERT와 LOG_FILE_NAME_CONVERT를 설정하지 말라고 적어 둡니다. 금지 규칙으로 외우기보다 원리에서 출발하면 자연스럽습니다. convert는 Primary의 파일 이름을 입력으로 받아 일부를 바꾸는 방식이고, OMF는 Primary 이름을 참고하지 않고 Standby 쪽 위치와 DB_UNIQUE_NAME으로 이름을 새로 짓습니다. 입력이 Standby 설정뿐이니 Primary의 디렉터리 구조를 몰라도 되고, CDB와 PDB의 경로 차이도 GUID 계층이 흡수합니다.</a:t>
             </a:r>
           </a:p>
         </p:txBody>
@@ -960,7 +974,7 @@
           <a:lstStyle/>
           <a:p>
             <a:r>
-              <a:t>PDB는 이름을 바꿀 수도 있고 다른 CDB로 옮겨 붙일 수도 있습니다. 이름을 디렉터리로 쓰면 그때마다 디렉터리를 옮겨야 합니다. GUID는 PDB가 만들어질 때 정해져 바뀌지 않으므로 그런 문제가 없습니다. 대가는 가독성입니다. chicago_pdb1은 보기만 해도 알지만 59F053E7로 시작하는 이름은 그렇지 않습니다. V$PDBS를 조회해야 합니다. 한편 양쪽 GUID가 같다는 점은 실무에서 유용합니다. 서버가 달라도 GUID 부분을 기준으로 파일을 대조할 수 있습니다.</a:t>
+              <a:t>이름 검사는 복제본이 원본 파일을 덮어쓰지 못하게 막는 장치입니다. 경로 지정 방식에서 Primary와 Standby를 같은 경로 구조로 맞추기로 했다면 이름이 같을 수밖에 없어서 검사를 꺼야 했습니다. OMF 이름에는 DB_UNIQUE_NAME 디렉터리와 고유 문자열이 들어가므로 원본과 같아지지 않습니다. 검사를 끌 이유가 없고, 켜 두면 실수로 같은 서버의 원본 파일을 가리키는 설정이 섞였을 때 RMAN이 멈춰 줍니다. 실습 서버처럼 한 대에 여러 데이터베이스를 올리는 환경에서 특히 의미가 있습니다.</a:t>
             </a:r>
           </a:p>
         </p:txBody>
@@ -1030,7 +1044,7 @@
           <a:lstStyle/>
           <a:p>
             <a:r>
-              <a:t>규칙을 알면 이름만 보고도 그 파일이 무엇인지 알 수 있습니다. o1_mf_users_1l50qfor_.dbf는 users 테이블스페이스의 데이터 파일입니다. 다만 파일 번호가 이름에 없다는 점이 5장과 다릅니다. system01.dbf에는 01이 있었지만 OMF 이름에는 없습니다. 파일 번호를 알려면 V$DATAFILE을 조회해야 합니다. 장애 대응처럼 급한 상황에서 이 한 단계가 부담이 될 수 있습니다. 임시 파일의 확장자가 .tmp인 것도 5장과 다른 점입니다.</a:t>
+              <a:t>실무에서 흔한 상황은 오래 운영한 비OMF Primary 옆에 새 Standby를 붙이는 경우입니다. Standby 파일 이름은 Standby 쪽 파라미터로만 정해지므로 Primary가 어떤 방식이든 Standby는 OMF로 만들 수 있습니다. 반대로 OMF Primary에서 일반 파일 Standby를 만들려면 Primary의 OMF 경로를 Standby 경로로 바꾸는 규칙을 줘야 하는데, 고유 문자열이 섞인 이름이라 다루기 번거롭습니다. 혼합 구성에서 역할 전환 후 생기는 일은 6.10.3에서 이어서 봅니다.</a:t>
             </a:r>
           </a:p>
         </p:txBody>
@@ -1100,7 +1114,7 @@
           <a:lstStyle/>
           <a:p>
             <a:r>
-              <a:t>지시하지 않았는데 오라클이 알아서 이중화한 것입니다. 이중화 자체는 좋은 일이지만 용량 계산에 넣어야 합니다. 실측에서 두 디렉터리가 각각 1.4GB, 합계 2.8GB였습니다. 5장 구성에서는 1.4GB였습니다. 더 중요한 것은 FRA를 잠식한다는 점입니다. 한도 15,360MB 중 1,400MB, 9.11퍼센트가 온라인 로그입니다. 아카이브가 쓸 공간이 그만큼 줄어듭니다. 4장에서 봤듯 FRA가 가득 차면 Primary가 멈추므로 가벼운 문제가 아닙니다. 이중화를 원하지 않으면 DB_CREATE_ONLINE_LOG_DEST_1을 하나만 명시합니다.</a:t>
+              <a:t>RMAN은 복제본 데이터 파일 이름을 정할 때 위에서부터 차례로 확인하고 처음 찾은 지시를 씁니다. DB_CREATE_FILE_DEST는 마지막 순위라서 convert 값이 남아 있으면 OMF는 쓰이지 않고, 파일이 치환 결과 경로에 일반 이름으로 생깁니다. 오류도 나지 않아 눈치채기 어렵습니다. 5장에서 쓰던 Standby 스크립트나 spfile을 고쳐 OMF로 바꿀 때 가장 흔한 실수가 convert 줄을 하나 남겨 두는 것입니다. 복제 전에 스크립트와 pfile을 같이 훑어보는 것으로 막을 수 있습니다.</a:t>
             </a:r>
           </a:p>
         </p:txBody>
@@ -1170,7 +1184,7 @@
           <a:lstStyle/>
           <a:p>
             <a:r>
-              <a:t>데이터 파일과 로그 파일은 모두 OMF 규칙을 따랐는데 컨트롤 파일만 다릅니다. Standby인데 Primary 이름의 디렉터리를 쓰고 있고 o1_mf로 시작하는 이름도 아닙니다. 실습 01에서 boston 서버에 빈 Chicago 디렉터리가 있는 것을 보고 "5장의 잔재"라고 넘겼는데, 이제 그 디렉터리가 비어 있지 않습니다. 동작에는 지장이 없습니다. 파일은 boston에 있고 정상적으로 읽고 씁니다. 문제는 다른 데 있습니다.</a:t>
+              <a:t>테스트 서버 한 대에 검증용 Standby를 두 개 올리는 상황을 생각해 보겠습니다. 경로 지정 방식이라면 Standby마다 디렉터리 구조를 정하고 convert 쌍을 따로 만들어야 합니다. OMF에서는 두 Standby가 같은 DB_CREATE_FILE_DEST를 쓰더라도 DB_UNIQUE_NAME이 boston과 boston2로 다르니 디렉터리가 자동으로 나뉩니다. 다만 파일 배치 이외의 준비는 그대로 남습니다. Primary의 LOG_ARCHIVE_CONFIG, 전송 목적지, 리스너 등록은 3장과 4장에서 한 것처럼 Standby마다 따로 해야 합니다.</a:t>
             </a:r>
           </a:p>
         </p:txBody>
@@ -1240,7 +1254,7 @@
           <a:lstStyle/>
           <a:p>
             <a:r>
-              <a:t>OMF가 컨트롤 파일 이름을 정하는 것은 CONTROL_FILES가 비어 있을 때뿐입니다. 상속으로 값이 들어와 버렸으니 DB_CREATE_FILE_DEST가 있어도 소용이 없습니다. 5장 스크립트에는 set control_files가 있어서 이 문제가 없었습니다. OMF 편 가이드가 그 줄을 지우면서 대체 수단을 마련하지 않은 것이 결함입니다. 이것은 5장의 create spfile from memory에 이은 세 번째 가이드 결함이며, 이 과정에서 발견한 것 중 실무 영향이 가장 큽니다.</a:t>
+              <a:t>전체 흐름은 5장과 같습니다. Standby 인스턴스를 NOMOUNT로 띄우고 RMAN으로 target과 auxiliary에 연결해 DUPLICATE를 실행합니다. 달라지는 것은 준비량입니다. 5장에서 PDB 디렉터리를 빠뜨려 ORA-19505로 멈췄던 실패는 OMF에서는 생길 수 없습니다. 하위 디렉터리를 데이터베이스가 만들기 때문입니다. 초기 pfile에 DB_CREATE_FILE_DEST를 넣어 두는 데에도 이유가 있습니다. NOMOUNT 단계에서 경로가 검사되므로 잘못된 경로를 DUPLICATE 전에 발견할 수 있습니다.</a:t>
             </a:r>
           </a:p>
         </p:txBody>
@@ -1310,7 +1324,7 @@
           <a:lstStyle/>
           <a:p>
             <a:r>
-              <a:t>세 파라미터가 맞물리는 방식이 중요합니다. DB_CREATE_ONLINE_LOG_DEST_n을 지정하지 않으면 온라인 로그도 DB_CREATE_FILE_DEST 아래로 갑니다. 그런데 이때 DB_RECOVERY_FILE_DEST가 함께 설정되어 있으면 온라인 로그가 두 곳에 다중화됩니다. 지시하지 않았는데 알아서 이중화해 주는 것입니다. 이 규칙을 모르면 나중에 V$LOGFILE 조회 결과가 예상의 두 배로 나와 당황하게 됩니다. 6.6절에서 실측으로 확인합니다.</a:t>
+              <a:t>OMF에는 켜고 끄는 스위치가 따로 없습니다. DB_CREATE_FILE_DEST 같은 파라미터에 값이 있으면 이름을 생략한 파일 생성이 OMF로 처리되고, 값이 없으면 이름을 생략할 수 없을 뿐입니다. CREATE TABLESPACE에 크기만 적었을 때 ORA-02236이 나면 그 데이터베이스는 OMF 위치가 설정되지 않은 상태입니다. 4장에서 아카이브 목적지를 USE_DB_RECOVERY_FILE_DEST로 잡았다면 아카이브 로그는 이미 OMF 이름으로 쌓이고 있었다는 것도 함께 확인해 보면 OMF가 낯선 기능이 아니게 됩니다.</a:t>
             </a:r>
           </a:p>
         </p:txBody>
@@ -1380,7 +1394,7 @@
           <a:lstStyle/>
           <a:p>
             <a:r>
-              <a:t>첫 번째가 가장 위험합니다. Standby 서버에서 Chicago라는 디렉터리를 발견한 운영자가 "Primary 파일이 왜 여기 있지" 하고 지우는 상황을 상상해 보십시오. 컨트롤 파일이 사라지면 Standby는 마운트되지 않습니다. 반대 방향의 사고도 있습니다. 이 Standby를 폐기할 때 BOSTON 디렉터리만 지우면 컨트롤 파일이 남아 디스크를 차지합니다. 성능 문제는 없지만 운영 사고의 씨앗이 되는 종류의 문제입니다.</a:t>
+              <a:t>SPFILE 절은 Primary의 spfile을 복사한 다음 SET으로 준 값만 덮어씁니다. 그래서 Primary의 DB_CREATE_FILE_DEST가 비어 있으면 Standby도 비어 있게 되고, SET으로 명시해야 Standby가 OMF가 됩니다. 같은 성질 때문에 CONTROL_FILES도 Primary 값이 그대로 들어옵니다. 설치 문서 가운데는 convert 줄을 지우면서 CONTROL_FILES 줄까지 지운 것이 있는데, 그 결과는 6.7절에서 봅니다. 경로가 Primary와 같더라도 OMF 관련 값은 명시해 두면 스크립트만 보고 의도가 읽힙니다.</a:t>
             </a:r>
           </a:p>
         </p:txBody>
@@ -1450,7 +1464,7 @@
           <a:lstStyle/>
           <a:p>
             <a:r>
-              <a:t>CONTROL_FILES는 정적 파라미터이므로 SCOPE=SPFILE이어야 합니다. MEMORY나 BOTH로는 바꿀 수 없습니다. 순서의 목적은 파라미터와 파일 위치가 어긋나 있는 시간을 데이터베이스가 내려가 있는 동안으로 한정하는 것입니다. 파일을 먼저 옮기면 어긋난 상태로 종료를 시도하게 되고, 기동 시 ORA-00205를 만납니다. 이때 V$INSTANCE.STATUS는 STARTED입니다. 인스턴스는 떴고 마운트에서 멈춘 것이죠. 메시지가 STARTUP 출력 맨 끝에 붙어 나오므로 대충 보면 성공한 것처럼 보입니다.</a:t>
+              <a:t>위의 두 경우는 오류가 나서 오히려 다루기 쉽습니다. 두 번째 경우 RMAN은 배치 지시가 없다는 경고 RMAN-05538을 내고 원본과 같은 이름을 쓰려다 이름 검사에 걸립니다. 5장에서 convert를 빼고 실행했을 때와 같은 오류입니다. 아래 두 경우는 복제가 성공으로 끝납니다. 그래서 OMF 방식에서는 성공 메시지를 확인한 다음 파일 위치를 한 번 더 보는 단계가 필요합니다. 실습 2와 3이 위의 두 실패를 차례로 재현합니다.</a:t>
             </a:r>
           </a:p>
         </p:txBody>
@@ -1520,7 +1534,7 @@
           <a:lstStyle/>
           <a:p>
             <a:r>
-              <a:t>절충입니다. 컨트롤 파일 이름이 o1_mf 형태가 되지 않지만 위치는 일관되게 유지됩니다. 컨트롤 파일은 개수가 적고 이름이 바뀔 일도 없으므로 실무에서 받아들일 만합니다. 여기서 한 가지 더 배울 점이 있습니다. OMF를 쓴다고 mkdir이 완전히 사라지지는 않는다는 것입니다. OMF가 관리하지 않는 파일은 여전히 사람이 자리를 마련해야 합니다. 자동화의 범위를 정확히 아는 것이 자동화를 신뢰하는 것보다 중요합니다.</a:t>
+              <a:t>네 종류의 파일 이름을 UNION ALL로 한 번에 뽑아 경로 앞부분으로 묶어 보면 예외가 눈에 띕니다. 모든 행이 BOSTON 계층 아래에 있어야 하고, 한 줄이라도 벗어나면 그 파일 종류의 설정을 다시 봅니다. 로그 멤버 수는 FRA를 함께 설정했다면 2가 정상입니다. 운영체제에서 CHICAGO나 Chicago 같은 디렉터리가 Standby 서버에 새로 생겼는지도 확인합니다. 생겼다면 Primary에서 상속된 경로 파라미터가 있다는 신호입니다.</a:t>
             </a:r>
           </a:p>
         </p:txBody>
@@ -1590,7 +1604,7 @@
           <a:lstStyle/>
           <a:p>
             <a:r>
-              <a:t>5장에서는 create spfile from memory였고 여기서는 from pfile입니다. 둘 다 ORA-32002로 막힙니다. 그런데 이번 것이 더 위험합니다. 대상 pfile이 세 줄짜리이기 때문입니다. DUPLICATE가 애써 채워 넣은 파라미터를 세 줄로 되돌리는 셈이고, 이어지는 shutdown과 startup까지 실행하면 Standby는 db_unique_name조차 없는 상태로 뜨려 합니다. 오류가 오히려 다행인 경우입니다. 대신 다섯 파라미터가 살아 있는지 조회로 확인하면 됩니다.</a:t>
+              <a:t>컨트롤 파일은 OMF 대상이지만 조건부입니다. 컨트롤 파일을 처음 만드는 순간 CONTROL_FILES가 비어 있어야 OMF가 이름과 위치를 정합니다. 이렇게 만들어진 이름은 spfile의 CONTROL_FILES에 기록되고, 다음 기동부터는 일반 데이터베이스처럼 그 값을 읽습니다. CONTROL_FILES는 정적 파라미터라서 SCOPE=BOTH로 바꾸려 하면 거부되고, SPFILE에 기록한 뒤 재기동해야 반영됩니다. 이 두 가지 성질이 다음 슬라이드의 상속 문제와 교정 순서를 설명해 줍니다.</a:t>
             </a:r>
           </a:p>
         </p:txBody>
@@ -1660,7 +1674,7 @@
           <a:lstStyle/>
           <a:p>
             <a:r>
-              <a:t>마지막 줄이 핵심입니다. 담긴 내용은 완전히 같습니다. 파일 11개, 번호 1,3,4,5,6,7,8,9,10,11,12, 크기까지 동일합니다. 두 방식의 차이는 어디에 어떤 이름으로 두느냐뿐입니다. 성능 차이도, 복제 정확성의 차이도 없습니다. 따라서 선택 기준도 성능이 아니라 관리 방식입니다. 어느 쪽이 우리 조직의 운영 관행에 맞는가, 어느 쪽이 사람의 실수를 덜 부르는가로 판단해야 합니다.</a:t>
+              <a:t>경로 지정 방식 스크립트에는 SET CONTROL_FILES 줄이 있었습니다. OMF 방식으로 바꾸며 이 줄을 지우면 Primary의 값이 그대로 남고, Standby 서버의 같은 경로에 컨트롤 파일이 만들어집니다. 동작에는 문제가 없지만 관리 면에서 위험합니다. 운영자가 Standby 서버에서 Chicago 디렉터리를 보고 Primary 잔재라고 판단해 지우면 Standby는 다음 기동 때 마운트되지 않습니다. Primary의 컨트롤 파일이 OMF 이름이면 RMAN이 Standby 쪽에 새 OMF 이름으로 만드는 경우가 많지만, 확인 없이 가정하지는 않습니다.</a:t>
             </a:r>
           </a:p>
         </p:txBody>
@@ -1730,7 +1744,7 @@
           <a:lstStyle/>
           <a:p>
             <a:r>
-              <a:t>OMF는 사람이 관리할 항목을 줄입니다. 줄어든 만큼 실수도 줄어듭니다. 반대로 경로 지정은 통제를 줍니다. 스토리지 계층별로 파일을 나눠야 하거나 백업 스크립트가 파일 이름 규칙에 의존한다면 OMF의 무작위 문자열이 곤란해집니다. 둘 다 지정하면 OMF가 이기고 convert는 무시됩니다. 오류가 나지는 않지만 스크립트를 읽는 사람이 혼란스러워지므로 권하지 않습니다. 조직 표준으로 하나를 정하는 것이 가장 좋습니다.</a:t>
+              <a:t>가장 확실한 방법은 SPFILE 절에서 컨트롤 파일 경로를 직접 적는 것입니다. 이렇게 지정한 컨트롤 파일은 일반 이름이지만, OMF와 같은 BOSTON 계층 아래에 두면 모든 파일이 한 계층에 모여 관리 부담이 거의 없습니다. 직접 지정한 경로는 OMF가 관리하지 않으므로 디렉터리를 미리 만들어 두는 편이 안전합니다. PARAMETER_VALUE_CONVERT로 이름을 일괄 치환하는 방법도 있지만, 모든 파라미터 값의 문자열이 바뀌므로 의도하지 않은 값까지 바뀌지 않는지 확인해야 합니다.</a:t>
             </a:r>
           </a:p>
         </p:txBody>
@@ -1800,7 +1814,217 @@
           <a:lstStyle/>
           <a:p>
             <a:r>
-              <a:t>6장 실습을 마친 시점의 구성이 7장 이후의 전제입니다. 이후 장에서 Standby 파일 경로를 볼 때 o1_mf 형태가 나오는 것은 그 때문이며 오류가 아닙니다. 5장 트랜스크립트와 경로가 다른 것도 같은 이유입니다. Primary는 그대로 경로 지정 방식을 유지하므로, 앞으로도 양쪽 경로 형태가 다릅니다. 이것이 오히려 현실적입니다. 실무에서도 Primary와 Standby가 서로 다른 스토리지 구성을 쓰는 경우가 많습니다.</a:t>
+              <a:t>순서가 중요한 이유는 파라미터와 실제 파일 위치가 어긋나는 시간을 만들지 않기 위해서입니다. 새 값을 spfile에 먼저 기록해 두고, 인스턴스를 내린 상태에서 파일을 옮긴 뒤 기동합니다. 복사가 아닌 이동을 쓰는 것도 같은 맥락으로, 옛 위치에 사본이 남으면 나중에 정리하는 사람이 현재 파일을 지울 수 있습니다. CONTROL_FILES에 적힌 파일 중 하나만 없어도 마운트가 실패합니다. ORA-00205는 STARTUP 출력 맨 끝에 한 줄로 붙어 나오므로 Database mounted 문구가 있는지로 판정합니다.</a:t>
+            </a:r>
+          </a:p>
+        </p:txBody>
+      </p:sp>
+      <p:sp>
+        <p:nvSpPr>
+          <p:cNvPr id="4" name="Slide Number Placeholder 3"/>
+          <p:cNvSpPr>
+            <a:spLocks noGrp="1"/>
+          </p:cNvSpPr>
+          <p:nvPr>
+            <p:ph type="sldNum" idx="5" sz="quarter"/>
+          </p:nvPr>
+        </p:nvSpPr>
+        <p:spPr/>
+      </p:sp>
+    </p:spTree>
+  </p:cSld>
+  <p:clrMapOvr>
+    <a:masterClrMapping/>
+  </p:clrMapOvr>
+</p:notes>
+</file>
+
+<file path=ppt/notesSlides/notesSlide27.xml><?xml version="1.0" encoding="utf-8"?>
+<p:notes xmlns:a="http://schemas.openxmlformats.org/drawingml/2006/main" xmlns:p="http://schemas.openxmlformats.org/presentationml/2006/main" xmlns:r="http://schemas.openxmlformats.org/officeDocument/2006/relationships">
+  <p:cSld>
+    <p:spTree>
+      <p:nvGrpSpPr>
+        <p:cNvPr id="1" name=""/>
+        <p:cNvGrpSpPr/>
+        <p:nvPr/>
+      </p:nvGrpSpPr>
+      <p:grpSpPr>
+        <a:xfrm>
+          <a:off x="0" y="0"/>
+          <a:ext cx="0" cy="0"/>
+          <a:chOff x="0" y="0"/>
+          <a:chExt cx="0" cy="0"/>
+        </a:xfrm>
+      </p:grpSpPr>
+      <p:sp>
+        <p:nvSpPr>
+          <p:cNvPr id="2" name="Slide Image Placeholder 1"/>
+          <p:cNvSpPr>
+            <a:spLocks noGrp="1"/>
+          </p:cNvSpPr>
+          <p:nvPr>
+            <p:ph type="sldImg" idx="2"/>
+          </p:nvPr>
+        </p:nvSpPr>
+        <p:spPr/>
+      </p:sp>
+      <p:sp>
+        <p:nvSpPr>
+          <p:cNvPr id="3" name="Notes Placeholder 2"/>
+          <p:cNvSpPr>
+            <a:spLocks noGrp="1"/>
+          </p:cNvSpPr>
+          <p:nvPr>
+            <p:ph type="body" idx="3" sz="quarter"/>
+          </p:nvPr>
+        </p:nvSpPr>
+        <p:spPr/>
+        <p:txBody>
+          <a:bodyPr/>
+          <a:lstStyle/>
+          <a:p>
+            <a:r>
+              <a:t>설치 문서 중에는 복제가 끝난 뒤 초기 pfile로 spfile을 다시 만들라고 안내하는 것이 있습니다. 인스턴스가 이미 spfile로 돌고 있으면 ORA-32002로 거부되어 다행히 실행되지 않습니다. 만약 실행된다면 결과는 심각합니다. 초기 pfile은 세 줄짜리라 DB_UNIQUE_NAME, FAL_SERVER, LOG_ARCHIVE_CONFIG, STANDBY_FILE_MANAGEMENT, CONTROL_FILES가 모두 사라지고, 다음 기동 때 Standby는 자신을 chicago로 인식합니다. 복제 후에는 SHOW PARAMETER spfile로 spfile 사용 여부만 확인하고 변경은 ALTER SYSTEM으로 합니다.</a:t>
+            </a:r>
+          </a:p>
+        </p:txBody>
+      </p:sp>
+      <p:sp>
+        <p:nvSpPr>
+          <p:cNvPr id="4" name="Slide Number Placeholder 3"/>
+          <p:cNvSpPr>
+            <a:spLocks noGrp="1"/>
+          </p:cNvSpPr>
+          <p:nvPr>
+            <p:ph type="sldNum" idx="5" sz="quarter"/>
+          </p:nvPr>
+        </p:nvSpPr>
+        <p:spPr/>
+      </p:sp>
+    </p:spTree>
+  </p:cSld>
+  <p:clrMapOvr>
+    <a:masterClrMapping/>
+  </p:clrMapOvr>
+</p:notes>
+</file>
+
+<file path=ppt/notesSlides/notesSlide28.xml><?xml version="1.0" encoding="utf-8"?>
+<p:notes xmlns:a="http://schemas.openxmlformats.org/drawingml/2006/main" xmlns:p="http://schemas.openxmlformats.org/presentationml/2006/main" xmlns:r="http://schemas.openxmlformats.org/officeDocument/2006/relationships">
+  <p:cSld>
+    <p:spTree>
+      <p:nvGrpSpPr>
+        <p:cNvPr id="1" name=""/>
+        <p:cNvGrpSpPr/>
+        <p:nvPr/>
+      </p:nvGrpSpPr>
+      <p:grpSpPr>
+        <a:xfrm>
+          <a:off x="0" y="0"/>
+          <a:ext cx="0" cy="0"/>
+          <a:chOff x="0" y="0"/>
+          <a:chExt cx="0" cy="0"/>
+        </a:xfrm>
+      </p:grpSpPr>
+      <p:sp>
+        <p:nvSpPr>
+          <p:cNvPr id="2" name="Slide Image Placeholder 1"/>
+          <p:cNvSpPr>
+            <a:spLocks noGrp="1"/>
+          </p:cNvSpPr>
+          <p:nvPr>
+            <p:ph type="sldImg" idx="2"/>
+          </p:nvPr>
+        </p:nvSpPr>
+        <p:spPr/>
+      </p:sp>
+      <p:sp>
+        <p:nvSpPr>
+          <p:cNvPr id="3" name="Notes Placeholder 2"/>
+          <p:cNvSpPr>
+            <a:spLocks noGrp="1"/>
+          </p:cNvSpPr>
+          <p:nvPr>
+            <p:ph type="body" idx="3" sz="quarter"/>
+          </p:nvPr>
+        </p:nvSpPr>
+        <p:spPr/>
+        <p:txBody>
+          <a:bodyPr/>
+          <a:lstStyle/>
+          <a:p>
+            <a:r>
+              <a:t>운영 환경의 Data Guard는 ASM 위에 구성되는 경우가 많고, ASM에 만드는 파일은 기본적으로 OMF입니다. 이름 모양은 파일 시스템 OMF와 다릅니다. o1_mf_ 접두어 대신 태그와 두 개의 숫자가 붙는데, 숫자는 ASM 안의 파일 번호와 생성 시점에서 나온 값이라 사람이 정할 수 없습니다. 계층 구조는 같아서 DB_UNIQUE_NAME, PDB GUID, 파일 종류 순서로 내려갑니다. 디스크 그룹 관리 자체는 ADMIN 과정의 ASM 장에서 다루고, 이 과정의 실습은 파일 시스템으로 진행합니다.</a:t>
+            </a:r>
+          </a:p>
+        </p:txBody>
+      </p:sp>
+      <p:sp>
+        <p:nvSpPr>
+          <p:cNvPr id="4" name="Slide Number Placeholder 3"/>
+          <p:cNvSpPr>
+            <a:spLocks noGrp="1"/>
+          </p:cNvSpPr>
+          <p:nvPr>
+            <p:ph type="sldNum" idx="5" sz="quarter"/>
+          </p:nvPr>
+        </p:nvSpPr>
+        <p:spPr/>
+      </p:sp>
+    </p:spTree>
+  </p:cSld>
+  <p:clrMapOvr>
+    <a:masterClrMapping/>
+  </p:clrMapOvr>
+</p:notes>
+</file>
+
+<file path=ppt/notesSlides/notesSlide29.xml><?xml version="1.0" encoding="utf-8"?>
+<p:notes xmlns:a="http://schemas.openxmlformats.org/drawingml/2006/main" xmlns:p="http://schemas.openxmlformats.org/presentationml/2006/main" xmlns:r="http://schemas.openxmlformats.org/officeDocument/2006/relationships">
+  <p:cSld>
+    <p:spTree>
+      <p:nvGrpSpPr>
+        <p:cNvPr id="1" name=""/>
+        <p:cNvGrpSpPr/>
+        <p:nvPr/>
+      </p:nvGrpSpPr>
+      <p:grpSpPr>
+        <a:xfrm>
+          <a:off x="0" y="0"/>
+          <a:ext cx="0" cy="0"/>
+          <a:chOff x="0" y="0"/>
+          <a:chExt cx="0" cy="0"/>
+        </a:xfrm>
+      </p:grpSpPr>
+      <p:sp>
+        <p:nvSpPr>
+          <p:cNvPr id="2" name="Slide Image Placeholder 1"/>
+          <p:cNvSpPr>
+            <a:spLocks noGrp="1"/>
+          </p:cNvSpPr>
+          <p:nvPr>
+            <p:ph type="sldImg" idx="2"/>
+          </p:nvPr>
+        </p:nvSpPr>
+        <p:spPr/>
+      </p:sp>
+      <p:sp>
+        <p:nvSpPr>
+          <p:cNvPr id="3" name="Notes Placeholder 2"/>
+          <p:cNvSpPr>
+            <a:spLocks noGrp="1"/>
+          </p:cNvSpPr>
+          <p:nvPr>
+            <p:ph type="body" idx="3" sz="quarter"/>
+          </p:nvPr>
+        </p:nvSpPr>
+        <p:spPr/>
+        <p:txBody>
+          <a:bodyPr/>
+          <a:lstStyle/>
+          <a:p>
+            <a:r>
+              <a:t>공식 교재는 파일 시스템이라면 백업 복사로 Standby를 만들 수도 있지만 ASM이면 RMAN을 써야 한다고 정리합니다. 교재에는 DB_FILE_NAME_CONVERT로 +DATA를 +SBDAT로 바꾸는 예도 있는데, ASM 파일 이름의 뒷부분은 어차피 Standby에서 새로 정해지므로 Standby의 OMF 위치를 자기 디스크 그룹으로 주는 편이 단순합니다. ASM 환경에서는 리스너가 Grid 홈에서, 데이터베이스는 DB 홈에서 돌기 때문에 환경 변수를 잘못 잡아 명령이 엉뚱한 홈에서 실행되는 일이 잦습니다.</a:t>
             </a:r>
           </a:p>
         </p:txBody>
@@ -1870,7 +2094,497 @@
           <a:lstStyle/>
           <a:p>
             <a:r>
-              <a:t>흔한 오해가 OMF를 데이터베이스 속성으로 생각하는 것입니다. 그렇지 않습니다. 파라미터에 값이 있는 동안 만들어지는 파일이 OMF로 관리될 뿐입니다. 그래서 Primary가 OMF가 아니어도 Standby만 OMF로 만들 수 있습니다. 실습 환경이 정확히 그 경우입니다. chicago는 5장까지의 경로 지정 방식으로 만들어졌고 boston만 OMF입니다. 이 조합이 오히려 두 방식의 대비를 선명하게 해 줍니다. 같은 원본으로 두 가지 결과를 만들어 비교할 수 있으니까요.</a:t>
+              <a:t>경로 지정 방식으로 오래 운영한 서버에는 데이터 사전에서는 사라졌는데 디스크에는 남은 파일이 꽤 있습니다. 테이블스페이스를 지울 때 옵션을 빠뜨렸기 때문입니다. OMF 파일은 데이터베이스가 소유하므로 테이블스페이스나 로그 그룹을 지우면 파일도 함께 지워집니다. 기존 일반 파일을 OMF로 정리하고 싶다면 ALTER DATABASE MOVE DATAFILE을 TO 절 없이 실행하면 됩니다. DB_CREATE_FILE_DEST 아래로 온라인 상태에서 옮겨지고 이름도 OMF 형식으로 바뀝니다.</a:t>
+            </a:r>
+          </a:p>
+        </p:txBody>
+      </p:sp>
+      <p:sp>
+        <p:nvSpPr>
+          <p:cNvPr id="4" name="Slide Number Placeholder 3"/>
+          <p:cNvSpPr>
+            <a:spLocks noGrp="1"/>
+          </p:cNvSpPr>
+          <p:nvPr>
+            <p:ph type="sldNum" idx="5" sz="quarter"/>
+          </p:nvPr>
+        </p:nvSpPr>
+        <p:spPr/>
+      </p:sp>
+    </p:spTree>
+  </p:cSld>
+  <p:clrMapOvr>
+    <a:masterClrMapping/>
+  </p:clrMapOvr>
+</p:notes>
+</file>
+
+<file path=ppt/notesSlides/notesSlide30.xml><?xml version="1.0" encoding="utf-8"?>
+<p:notes xmlns:a="http://schemas.openxmlformats.org/drawingml/2006/main" xmlns:p="http://schemas.openxmlformats.org/presentationml/2006/main" xmlns:r="http://schemas.openxmlformats.org/officeDocument/2006/relationships">
+  <p:cSld>
+    <p:spTree>
+      <p:nvGrpSpPr>
+        <p:cNvPr id="1" name=""/>
+        <p:cNvGrpSpPr/>
+        <p:nvPr/>
+      </p:nvGrpSpPr>
+      <p:grpSpPr>
+        <a:xfrm>
+          <a:off x="0" y="0"/>
+          <a:ext cx="0" cy="0"/>
+          <a:chOff x="0" y="0"/>
+          <a:chExt cx="0" cy="0"/>
+        </a:xfrm>
+      </p:grpSpPr>
+      <p:sp>
+        <p:nvSpPr>
+          <p:cNvPr id="2" name="Slide Image Placeholder 1"/>
+          <p:cNvSpPr>
+            <a:spLocks noGrp="1"/>
+          </p:cNvSpPr>
+          <p:nvPr>
+            <p:ph type="sldImg" idx="2"/>
+          </p:nvPr>
+        </p:nvSpPr>
+        <p:spPr/>
+      </p:sp>
+      <p:sp>
+        <p:nvSpPr>
+          <p:cNvPr id="3" name="Notes Placeholder 2"/>
+          <p:cNvSpPr>
+            <a:spLocks noGrp="1"/>
+          </p:cNvSpPr>
+          <p:nvPr>
+            <p:ph type="body" idx="3" sz="quarter"/>
+          </p:nvPr>
+        </p:nvSpPr>
+        <p:spPr/>
+        <p:txBody>
+          <a:bodyPr/>
+          <a:lstStyle/>
+          <a:p>
+            <a:r>
+              <a:t>Standby를 만든 뒤에도 Primary에서는 데이터 파일이 계속 늘어납니다. AUTO로 두면 Redo Apply가 Standby에서도 같은 파일을 만들어 주는데, 이름은 Standby 쪽 설정으로 정해집니다. OMF Standby라면 Primary가 어느 디렉터리에 파일을 만들든 결과는 Standby의 OMF 위치입니다. 경로 지정 방식에서는 Primary가 새 마운트 지점을 쓰기 시작하면 convert 규칙이 그 경로를 덮지 못해 적용이 멈추거나 UNNAMED 파일이 생깁니다. 이 상황의 진단과 복구 절차는 8장에서 실습으로 다룹니다.</a:t>
+            </a:r>
+          </a:p>
+        </p:txBody>
+      </p:sp>
+      <p:sp>
+        <p:nvSpPr>
+          <p:cNvPr id="4" name="Slide Number Placeholder 3"/>
+          <p:cNvSpPr>
+            <a:spLocks noGrp="1"/>
+          </p:cNvSpPr>
+          <p:nvPr>
+            <p:ph type="sldNum" idx="5" sz="quarter"/>
+          </p:nvPr>
+        </p:nvSpPr>
+        <p:spPr/>
+      </p:sp>
+    </p:spTree>
+  </p:cSld>
+  <p:clrMapOvr>
+    <a:masterClrMapping/>
+  </p:clrMapOvr>
+</p:notes>
+</file>
+
+<file path=ppt/notesSlides/notesSlide31.xml><?xml version="1.0" encoding="utf-8"?>
+<p:notes xmlns:a="http://schemas.openxmlformats.org/drawingml/2006/main" xmlns:p="http://schemas.openxmlformats.org/presentationml/2006/main" xmlns:r="http://schemas.openxmlformats.org/officeDocument/2006/relationships">
+  <p:cSld>
+    <p:spTree>
+      <p:nvGrpSpPr>
+        <p:cNvPr id="1" name=""/>
+        <p:cNvGrpSpPr/>
+        <p:nvPr/>
+      </p:nvGrpSpPr>
+      <p:grpSpPr>
+        <a:xfrm>
+          <a:off x="0" y="0"/>
+          <a:ext cx="0" cy="0"/>
+          <a:chOff x="0" y="0"/>
+          <a:chExt cx="0" cy="0"/>
+        </a:xfrm>
+      </p:grpSpPr>
+      <p:sp>
+        <p:nvSpPr>
+          <p:cNvPr id="2" name="Slide Image Placeholder 1"/>
+          <p:cNvSpPr>
+            <a:spLocks noGrp="1"/>
+          </p:cNvSpPr>
+          <p:nvPr>
+            <p:ph type="sldImg" idx="2"/>
+          </p:nvPr>
+        </p:nvSpPr>
+        <p:spPr/>
+      </p:sp>
+      <p:sp>
+        <p:nvSpPr>
+          <p:cNvPr id="3" name="Notes Placeholder 2"/>
+          <p:cNvSpPr>
+            <a:spLocks noGrp="1"/>
+          </p:cNvSpPr>
+          <p:nvPr>
+            <p:ph type="body" idx="3" sz="quarter"/>
+          </p:nvPr>
+        </p:nvSpPr>
+        <p:spPr/>
+        <p:txBody>
+          <a:bodyPr/>
+          <a:lstStyle/>
+          <a:p>
+            <a:r>
+              <a:t>이 다섯 가지를 한 묶음으로 생각하면 설정 누락이 줄어듭니다. 특히 Primary에도 같은 설정을 해 두는 것이 중요한데, Switchover 뒤에는 지금의 Primary가 Standby가 되어 파일을 받아 만들어야 하기 때문입니다. 점검할 때는 양쪽에서 같은 V$PARAMETER 조회를 실행해 결과를 나란히 놓고 봅니다. 한쪽에만 convert 값이 남아 있는 상태가 가장 찾기 어렵습니다. 평소에는 아무 증상이 없다가 파일 추가나 역할 전환 때에야 드러나기 때문입니다.</a:t>
+            </a:r>
+          </a:p>
+        </p:txBody>
+      </p:sp>
+      <p:sp>
+        <p:nvSpPr>
+          <p:cNvPr id="4" name="Slide Number Placeholder 3"/>
+          <p:cNvSpPr>
+            <a:spLocks noGrp="1"/>
+          </p:cNvSpPr>
+          <p:nvPr>
+            <p:ph type="sldNum" idx="5" sz="quarter"/>
+          </p:nvPr>
+        </p:nvSpPr>
+        <p:spPr/>
+      </p:sp>
+    </p:spTree>
+  </p:cSld>
+  <p:clrMapOvr>
+    <a:masterClrMapping/>
+  </p:clrMapOvr>
+</p:notes>
+</file>
+
+<file path=ppt/notesSlides/notesSlide32.xml><?xml version="1.0" encoding="utf-8"?>
+<p:notes xmlns:a="http://schemas.openxmlformats.org/drawingml/2006/main" xmlns:p="http://schemas.openxmlformats.org/presentationml/2006/main" xmlns:r="http://schemas.openxmlformats.org/officeDocument/2006/relationships">
+  <p:cSld>
+    <p:spTree>
+      <p:nvGrpSpPr>
+        <p:cNvPr id="1" name=""/>
+        <p:cNvGrpSpPr/>
+        <p:nvPr/>
+      </p:nvGrpSpPr>
+      <p:grpSpPr>
+        <a:xfrm>
+          <a:off x="0" y="0"/>
+          <a:ext cx="0" cy="0"/>
+          <a:chOff x="0" y="0"/>
+          <a:chExt cx="0" cy="0"/>
+        </a:xfrm>
+      </p:grpSpPr>
+      <p:sp>
+        <p:nvSpPr>
+          <p:cNvPr id="2" name="Slide Image Placeholder 1"/>
+          <p:cNvSpPr>
+            <a:spLocks noGrp="1"/>
+          </p:cNvSpPr>
+          <p:nvPr>
+            <p:ph type="sldImg" idx="2"/>
+          </p:nvPr>
+        </p:nvSpPr>
+        <p:spPr/>
+      </p:sp>
+      <p:sp>
+        <p:nvSpPr>
+          <p:cNvPr id="3" name="Notes Placeholder 2"/>
+          <p:cNvSpPr>
+            <a:spLocks noGrp="1"/>
+          </p:cNvSpPr>
+          <p:nvPr>
+            <p:ph type="body" idx="3" sz="quarter"/>
+          </p:nvPr>
+        </p:nvSpPr>
+        <p:spPr/>
+        <p:txBody>
+          <a:bodyPr/>
+          <a:lstStyle/>
+          <a:p>
+            <a:r>
+              <a:t>두 방식으로 만든 Standby는 내용이 같은 물리 Standby입니다. 파일 번호도, 크기도, PDB GUID도 같고 달라지는 것은 이름과 위치뿐입니다. 그 차이가 준비 작업, 실패 양상, 이후 운영에서 조금씩 다른 결과를 냅니다. OMF가 모든 항목에서 유리한 것은 아닙니다. 파일 이름의 가독성은 경로 지정 방식이 낫고, 이름에 파일 번호가 들어 있어 운영자가 다루기도 편합니다. 어느 항목에 무게를 둘지는 조직의 운영 습관에 따라 달라집니다.</a:t>
+            </a:r>
+          </a:p>
+        </p:txBody>
+      </p:sp>
+      <p:sp>
+        <p:nvSpPr>
+          <p:cNvPr id="4" name="Slide Number Placeholder 3"/>
+          <p:cNvSpPr>
+            <a:spLocks noGrp="1"/>
+          </p:cNvSpPr>
+          <p:nvPr>
+            <p:ph type="sldNum" idx="5" sz="quarter"/>
+          </p:nvPr>
+        </p:nvSpPr>
+        <p:spPr/>
+      </p:sp>
+    </p:spTree>
+  </p:cSld>
+  <p:clrMapOvr>
+    <a:masterClrMapping/>
+  </p:clrMapOvr>
+</p:notes>
+</file>
+
+<file path=ppt/notesSlides/notesSlide33.xml><?xml version="1.0" encoding="utf-8"?>
+<p:notes xmlns:a="http://schemas.openxmlformats.org/drawingml/2006/main" xmlns:p="http://schemas.openxmlformats.org/presentationml/2006/main" xmlns:r="http://schemas.openxmlformats.org/officeDocument/2006/relationships">
+  <p:cSld>
+    <p:spTree>
+      <p:nvGrpSpPr>
+        <p:cNvPr id="1" name=""/>
+        <p:cNvGrpSpPr/>
+        <p:nvPr/>
+      </p:nvGrpSpPr>
+      <p:grpSpPr>
+        <a:xfrm>
+          <a:off x="0" y="0"/>
+          <a:ext cx="0" cy="0"/>
+          <a:chOff x="0" y="0"/>
+          <a:chExt cx="0" cy="0"/>
+        </a:xfrm>
+      </p:grpSpPr>
+      <p:sp>
+        <p:nvSpPr>
+          <p:cNvPr id="2" name="Slide Image Placeholder 1"/>
+          <p:cNvSpPr>
+            <a:spLocks noGrp="1"/>
+          </p:cNvSpPr>
+          <p:nvPr>
+            <p:ph type="sldImg" idx="2"/>
+          </p:nvPr>
+        </p:nvSpPr>
+        <p:spPr/>
+      </p:sp>
+      <p:sp>
+        <p:nvSpPr>
+          <p:cNvPr id="3" name="Notes Placeholder 2"/>
+          <p:cNvSpPr>
+            <a:spLocks noGrp="1"/>
+          </p:cNvSpPr>
+          <p:nvPr>
+            <p:ph type="body" idx="3" sz="quarter"/>
+          </p:nvPr>
+        </p:nvSpPr>
+        <p:spPr/>
+        <p:txBody>
+          <a:bodyPr/>
+          <a:lstStyle/>
+          <a:p>
+            <a:r>
+              <a:t>새로 구축한다면 OMF를 먼저 검토하는 것이 무난합니다. 반대로 파일 이름에 업무 의미를 담는 사내 규칙이 있거나, 파일마다 서로 다른 마운트 지점에 정밀하게 배치해야 하는 구성이라면 경로 지정 방식이 맞습니다. OMF는 데이터 파일을 한 위치로 모으기 때문입니다. 기존 모니터링이나 용량 점검 스크립트가 system01.dbf 같은 이름 패턴으로 파일을 찾고 있다면 OMF로 바꾸는 순간 조용히 결과가 비게 되므로, 전환 전에 반드시 확인합니다.</a:t>
+            </a:r>
+          </a:p>
+        </p:txBody>
+      </p:sp>
+      <p:sp>
+        <p:nvSpPr>
+          <p:cNvPr id="4" name="Slide Number Placeholder 3"/>
+          <p:cNvSpPr>
+            <a:spLocks noGrp="1"/>
+          </p:cNvSpPr>
+          <p:nvPr>
+            <p:ph type="sldNum" idx="5" sz="quarter"/>
+          </p:nvPr>
+        </p:nvSpPr>
+        <p:spPr/>
+      </p:sp>
+    </p:spTree>
+  </p:cSld>
+  <p:clrMapOvr>
+    <a:masterClrMapping/>
+  </p:clrMapOvr>
+</p:notes>
+</file>
+
+<file path=ppt/notesSlides/notesSlide34.xml><?xml version="1.0" encoding="utf-8"?>
+<p:notes xmlns:a="http://schemas.openxmlformats.org/drawingml/2006/main" xmlns:p="http://schemas.openxmlformats.org/presentationml/2006/main" xmlns:r="http://schemas.openxmlformats.org/officeDocument/2006/relationships">
+  <p:cSld>
+    <p:spTree>
+      <p:nvGrpSpPr>
+        <p:cNvPr id="1" name=""/>
+        <p:cNvGrpSpPr/>
+        <p:nvPr/>
+      </p:nvGrpSpPr>
+      <p:grpSpPr>
+        <a:xfrm>
+          <a:off x="0" y="0"/>
+          <a:ext cx="0" cy="0"/>
+          <a:chOff x="0" y="0"/>
+          <a:chExt cx="0" cy="0"/>
+        </a:xfrm>
+      </p:grpSpPr>
+      <p:sp>
+        <p:nvSpPr>
+          <p:cNvPr id="2" name="Slide Image Placeholder 1"/>
+          <p:cNvSpPr>
+            <a:spLocks noGrp="1"/>
+          </p:cNvSpPr>
+          <p:nvPr>
+            <p:ph type="sldImg" idx="2"/>
+          </p:nvPr>
+        </p:nvSpPr>
+        <p:spPr/>
+      </p:sp>
+      <p:sp>
+        <p:nvSpPr>
+          <p:cNvPr id="3" name="Notes Placeholder 2"/>
+          <p:cNvSpPr>
+            <a:spLocks noGrp="1"/>
+          </p:cNvSpPr>
+          <p:nvPr>
+            <p:ph type="body" idx="3" sz="quarter"/>
+          </p:nvPr>
+        </p:nvSpPr>
+        <p:spPr/>
+        <p:txBody>
+          <a:bodyPr/>
+          <a:lstStyle/>
+          <a:p>
+            <a:r>
+              <a:t>혼합 구성은 평소에는 아무 문제가 없어서 역할 전환을 해 보기 전까지 위험이 드러나지 않습니다. 전환 뒤 boston이 Primary가 되어 OMF 파일을 만들면, chicago는 Standby로서 그 파일을 자기 쪽에 만들어야 합니다. 이때 chicago에 OMF 위치가 없으면 OMF 경로를 일반 경로로 바꾸는 convert 규칙이 필요한데, 미리 맞춰 두기가 번거롭습니다. chicago에도 DB_CREATE_FILE_DEST를 설정해 두면 기존 파일은 그대로 두고 새 파일만 OMF로 만들어집니다.</a:t>
+            </a:r>
+          </a:p>
+        </p:txBody>
+      </p:sp>
+      <p:sp>
+        <p:nvSpPr>
+          <p:cNvPr id="4" name="Slide Number Placeholder 3"/>
+          <p:cNvSpPr>
+            <a:spLocks noGrp="1"/>
+          </p:cNvSpPr>
+          <p:nvPr>
+            <p:ph type="sldNum" idx="5" sz="quarter"/>
+          </p:nvPr>
+        </p:nvSpPr>
+        <p:spPr/>
+      </p:sp>
+    </p:spTree>
+  </p:cSld>
+  <p:clrMapOvr>
+    <a:masterClrMapping/>
+  </p:clrMapOvr>
+</p:notes>
+</file>
+
+<file path=ppt/notesSlides/notesSlide35.xml><?xml version="1.0" encoding="utf-8"?>
+<p:notes xmlns:a="http://schemas.openxmlformats.org/drawingml/2006/main" xmlns:p="http://schemas.openxmlformats.org/presentationml/2006/main" xmlns:r="http://schemas.openxmlformats.org/officeDocument/2006/relationships">
+  <p:cSld>
+    <p:spTree>
+      <p:nvGrpSpPr>
+        <p:cNvPr id="1" name=""/>
+        <p:cNvGrpSpPr/>
+        <p:nvPr/>
+      </p:nvGrpSpPr>
+      <p:grpSpPr>
+        <a:xfrm>
+          <a:off x="0" y="0"/>
+          <a:ext cx="0" cy="0"/>
+          <a:chOff x="0" y="0"/>
+          <a:chExt cx="0" cy="0"/>
+        </a:xfrm>
+      </p:grpSpPr>
+      <p:sp>
+        <p:nvSpPr>
+          <p:cNvPr id="2" name="Slide Image Placeholder 1"/>
+          <p:cNvSpPr>
+            <a:spLocks noGrp="1"/>
+          </p:cNvSpPr>
+          <p:nvPr>
+            <p:ph type="sldImg" idx="2"/>
+          </p:nvPr>
+        </p:nvSpPr>
+        <p:spPr/>
+      </p:sp>
+      <p:sp>
+        <p:nvSpPr>
+          <p:cNvPr id="3" name="Notes Placeholder 2"/>
+          <p:cNvSpPr>
+            <a:spLocks noGrp="1"/>
+          </p:cNvSpPr>
+          <p:nvPr>
+            <p:ph type="body" idx="3" sz="quarter"/>
+          </p:nvPr>
+        </p:nvSpPr>
+        <p:spPr/>
+        <p:txBody>
+          <a:bodyPr/>
+          <a:lstStyle/>
+          <a:p>
+            <a:r>
+              <a:t>오래 운영된 시스템에서 자주 만나는 구성입니다. 데이터 파일이 /data01부터 /data06까지 흩어져 있고 새 재해 복구 서버에는 큰 볼륨 하나만 있습니다. 경로 지정 방식이라면 치환 쌍 여섯 개에 PDB 디렉터리까지 대응시켜야 하지만 OMF는 한 줄입니다. 그래도 계획서에 세 가지는 꼭 들어가야 합니다. 컨트롤 파일 경로를 SET으로 명시할 것, 로그 다중화를 고려해 FRA 크기를 다시 잡을 것, Switchover 시험 전에 Primary에도 OMF 위치를 설정할 것입니다.</a:t>
+            </a:r>
+          </a:p>
+        </p:txBody>
+      </p:sp>
+      <p:sp>
+        <p:nvSpPr>
+          <p:cNvPr id="4" name="Slide Number Placeholder 3"/>
+          <p:cNvSpPr>
+            <a:spLocks noGrp="1"/>
+          </p:cNvSpPr>
+          <p:nvPr>
+            <p:ph type="sldNum" idx="5" sz="quarter"/>
+          </p:nvPr>
+        </p:nvSpPr>
+        <p:spPr/>
+      </p:sp>
+    </p:spTree>
+  </p:cSld>
+  <p:clrMapOvr>
+    <a:masterClrMapping/>
+  </p:clrMapOvr>
+</p:notes>
+</file>
+
+<file path=ppt/notesSlides/notesSlide36.xml><?xml version="1.0" encoding="utf-8"?>
+<p:notes xmlns:a="http://schemas.openxmlformats.org/drawingml/2006/main" xmlns:p="http://schemas.openxmlformats.org/presentationml/2006/main" xmlns:r="http://schemas.openxmlformats.org/officeDocument/2006/relationships">
+  <p:cSld>
+    <p:spTree>
+      <p:nvGrpSpPr>
+        <p:cNvPr id="1" name=""/>
+        <p:cNvGrpSpPr/>
+        <p:nvPr/>
+      </p:nvGrpSpPr>
+      <p:grpSpPr>
+        <a:xfrm>
+          <a:off x="0" y="0"/>
+          <a:ext cx="0" cy="0"/>
+          <a:chOff x="0" y="0"/>
+          <a:chExt cx="0" cy="0"/>
+        </a:xfrm>
+      </p:grpSpPr>
+      <p:sp>
+        <p:nvSpPr>
+          <p:cNvPr id="2" name="Slide Image Placeholder 1"/>
+          <p:cNvSpPr>
+            <a:spLocks noGrp="1"/>
+          </p:cNvSpPr>
+          <p:nvPr>
+            <p:ph type="sldImg" idx="2"/>
+          </p:nvPr>
+        </p:nvSpPr>
+        <p:spPr/>
+      </p:sp>
+      <p:sp>
+        <p:nvSpPr>
+          <p:cNvPr id="3" name="Notes Placeholder 2"/>
+          <p:cNvSpPr>
+            <a:spLocks noGrp="1"/>
+          </p:cNvSpPr>
+          <p:nvPr>
+            <p:ph type="body" idx="3" sz="quarter"/>
+          </p:nvPr>
+        </p:nvSpPr>
+        <p:spPr/>
+        <p:txBody>
+          <a:bodyPr/>
+          <a:lstStyle/>
+          <a:p>
+            <a:r>
+              <a:t>OMF는 이름을 사람이 정하지 않는 대신 몇 가지 운영 습관을 바꾸게 합니다. 파일을 옮길 때 운영체제 명령을 쓰지 않고 데이터베이스 명령을 씁니다. Standby를 재구축할 때마다 고유 문자열이 바뀌므로 운영 문서에 파일 이름을 적어 두면 금방 맞지 않게 됩니다. 정리 작업에서는 대소문자만 다른 Boston과 BOSTON 같은 디렉터리가 사고의 원인이 되기 쉽습니다. 디렉터리를 지우기 전에 V$CONTROLFILE, V$DATAFILE, V$LOGFILE에서 그 경로를 쓰는 파일이 없는지 먼저 조회합니다.</a:t>
             </a:r>
           </a:p>
         </p:txBody>
@@ -1940,7 +2654,7 @@
           <a:lstStyle/>
           <a:p>
             <a:r>
-              <a:t>사라진 다섯 줄 중 셋은 5장에서 실패를 통해 그 필요성을 확인했던 것들입니다. 그것들이 한 줄로 대체됩니다. nofilenamecheck는 대체되는 것이 아니라 그냥 필요 없어집니다. 이유는 다음 슬라이드에서 봅니다. 문제는 set control_files입니다. 이 줄이 사라졌는데 대체 수단이 없습니다. 가이드가 놓친 부분이고, 그 결과가 6.7절의 문제로 나타납니다. 지금은 "한 줄이 대체 없이 사라졌다"는 것만 기억해 두십시오.</a:t>
+              <a:t>설치 문서에 OMF로 만들었다고 적혀 있어도 실제로는 그렇지 않은 경우가 있습니다. DBCA의 datafileDestination 옵션은 파일을 둘 최상위 경로를 정할 뿐이라서, 템플릿이 정한 이름인 system01.dbf 같은 일반 파일이 만들어지고 DB_CREATE_FILE_DEST도 비어 있을 수 있습니다. 생성 후에 DB_CREATE_FILE_DEST를 설정하면 그 뒤에 만드는 파일부터 OMF가 되고 기존 파일은 일반 파일로 남습니다. 어느 쪽이든 V$DATAFILE의 이름을 직접 보고 판단하는 습관이 가장 확실합니다.</a:t>
             </a:r>
           </a:p>
         </p:txBody>
@@ -2010,7 +2724,7 @@
           <a:lstStyle/>
           <a:p>
             <a:r>
-              <a:t>5장에서 이 절이 필요했던 이유를 떠올려 보십시오. 두 노드가 같은 디렉터리 구조를 쓰고 파일 이름도 system01.dbf로 같았기 때문에 RMAN의 충돌 검사가 걸렸습니다. NOFILENAMECHECK는 "이름이 같아 보여도 다른 서버이니 괜찮다"고 승인해 주는 절이었습니다. OMF에서는 승인할 상황 자체가 생기지 않습니다. 원인을 없앤 것이지 검사를 끈 것이 아니라는 점이 중요합니다. 5장에서 "검사를 끄면 되겠다"는 오해가 왜 위험했는지도 여기서 다시 확인됩니다.</a:t>
+              <a:t>이 파라미터 하나만 설정해도 OMF는 동작합니다. 온라인 로그 전용 위치가 없으면 온라인 로그와 컨트롤 파일도 이 위치를 씁니다. 동적 파라미터라서 값을 바꾸면 그 뒤에 만드는 파일부터 새 위치에 생기고, 이미 있는 파일은 움직이지 않습니다. 세션 단위로 바꿔 특정 테이블스페이스만 다른 볼륨에 둘 수도 있지만, Standby는 Primary의 세션 설정을 모르므로 Standby에서는 그 파일도 Standby의 기본 위치에 만들어집니다.</a:t>
             </a:r>
           </a:p>
         </p:txBody>
@@ -2080,7 +2794,7 @@
           <a:lstStyle/>
           <a:p>
             <a:r>
-              <a:t>예상과 다른 결과입니다. DUPLICATE가 실패한 것이 아니라 인스턴스가 아예 뜨지 않았습니다. Process ID 0까지 출력되는데 프로세스가 만들어지지도 않았다는 뜻입니다. 주목할 것은 운영체제 오류 번호입니다. 2는 ENOENT로 경로가 없다는 뜻이고 13은 EACCES로 권한 문제입니다. 이 숫자 하나가 진단의 분기점입니다. 경로를 만들어야 하는지 권한을 고쳐야 하는지가 여기서 갈립니다. 오라클이 이 파라미터를 stat 시스템 콜로 실제 검증한다는 증거이기도 합니다.</a:t>
+              <a:t>로그 배치를 확실하게 통제하고 싶을 때 쓰는 파라미터입니다. 하나라도 설정되면 DB_CREATE_FILE_DEST와 FRA는 로그 배치에서 빠지고, 설정한 위치 수만큼 멤버가 만들어집니다. 로그를 한 벌만 두고 싶을 때도 이 파라미터 하나만 설정하는 방법을 씁니다. Standby Redo Log도 같은 규칙을 따르므로 ADD STANDBY LOGFILE에 그룹 번호와 크기만 주면 됩니다. 4장에서 배운 SRL 크기와 개수 규칙은 배치 방식과 상관없이 그대로 지켜야 합니다.</a:t>
             </a:r>
           </a:p>
         </p:txBody>
@@ -2150,7 +2864,7 @@
           <a:lstStyle/>
           <a:p>
             <a:r>
-              <a:t>첫 줄부터 5장과 다릅니다. 복제 명령까지 가지도 못하고 채널 할당에서 끝났습니다. c1은 할당됐지만 auxiliary 채널인 sby에서 막혔습니다. ORA-27101의 shared memory realm은 SGA를 가리킵니다. 인스턴스가 없으니 접속할 대상이 없는 것이죠. 여기서 주의할 점이 있습니다. ORA-01034는 3장에서도 만났습니다. 그때는 인스턴스를 아예 띄우지 않아서였고 지금은 띄우려다 실패해서입니다. 결과 메시지가 같으므로 Standby 쪽 STARTUP 출력을 봐야 갈립니다.</a:t>
+              <a:t>OMF로 Standby를 만든 뒤 가장 많이 놀라는 부분이 여기입니다. 온라인 로그 전용 위치를 주지 않고 DB_CREATE_FILE_DEST와 FRA를 둘 다 설정하면 온라인 로그와 SRL이 두 위치에 하나씩 만들어집니다. 다중화 자체는 바람직하지만, FRA 크기를 아카이브 로그만 생각하고 잡아 두었다면 로그 한 벌만큼 여유가 줄어듭니다. 온라인 로그는 지울 수 있는 파일이 아니어서 FRA의 회수 가능 공간에도 들어가지 않으니, 경보 기준과 크기를 함께 다시 봐야 합니다.</a:t>
             </a:r>
           </a:p>
         </p:txBody>
@@ -2220,7 +2934,7 @@
           <a:lstStyle/>
           <a:p>
             <a:r>
-              <a:t>경고 번호도 오류 번호도 11줄이라는 개수도 경로가 Chicago인 것도 같습니다. 다른 것은 스크립트뿐입니다. 5장에서는 convert가 없었고 지금은 db_create_file_dest가 없습니다. 이 사실이 알려 주는 것이 있습니다. RMAN에게 두 파라미터는 같은 질문에 대한 두 가지 대답입니다. 질문은 "복제한 파일을 어디에 둘 것인가"이고 둘 중 하나는 답해야 합니다. 아무 답도 하지 않으면 원본 경로를 그대로 쓰려 하고 이름 충돌 검사가 막습니다. 따라서 두 방식은 배타적입니다.</a:t>
+              <a:t>표로 정리하면 단순합니다. 온라인 로그 전용 위치가 있으면 그것이 이기고, 없으면 DB_CREATE_FILE_DEST와 FRA 가운데 값이 있는 곳마다 하나씩 만들어집니다. 컨트롤 파일도 같은 규칙을 따르지만 조건이 하나 붙습니다. 컨트롤 파일을 처음 만드는 시점에 CONTROL_FILES가 비어 있어야 합니다. 값이 이미 있으면 OMF 규칙은 적용되지 않는데, 이 조건이 6.7절의 컨트롤 파일 문제로 이어집니다. Primary와 Standby의 배치를 똑같이 맞출 필요는 없습니다.</a:t>
             </a:r>
           </a:p>
         </p:txBody>
@@ -2290,7 +3004,7 @@
           <a:lstStyle/>
           <a:p>
             <a:r>
-              <a:t>실패는 이르면 이를수록 좋습니다. 잘못을 알아채는 데 걸리는 시간도, 되돌리는 데 드는 수고도 적기 때문입니다. 5장의 두 번째 실패에서는 반쯤 복제된 파일을 지우고 처음부터 다시 해야 했습니다. 6장의 두 실패는 둘 다 깨끗합니다. 지울 것이 없습니다. 이것이 OMF를 고를 이유 중 하나입니다. 실무에서 구축 작업은 대개 정해진 시간 안에 끝내야 하는데, 실패 후 복구에 드는 시간이 짧다는 것은 생각보다 큰 가치입니다.</a:t>
+              <a:t>경로 지정 방식에서는 convert 결과 디렉터리가 없어도 인스턴스는 잘 뜨고, DUPLICATE가 파일을 만들 때에야 실패합니다. OMF 위치는 인스턴스가 기동할 때 검사하므로 오류가 훨씬 앞에서 나타납니다. 이때 인스턴스가 뜨지 않으니 RMAN에서는 ORA-01034 같은 접속 오류로만 보이는데, 원인은 Standby 쪽 기동 로그에 있습니다. 반대로 파라미터를 아예 빠뜨리면 검사할 값이 없어 기동은 정상이고, 문제는 DUPLICATE 단계까지 미뤄집니다.</a:t>
             </a:r>
           </a:p>
         </p:txBody>
@@ -5501,7 +6215,7 @@
                 </a:solidFill>
                 <a:latin typeface="맑은 고딕"/>
               </a:rPr>
-              <a:t>Physical Standby 생성 ②</a:t>
+              <a:t>Physical Standby 생성 ② OMF 방식</a:t>
             </a:r>
           </a:p>
         </p:txBody>
@@ -5540,7 +6254,7 @@
                 </a:solidFill>
                 <a:latin typeface="맑은 고딕"/>
               </a:rPr>
-              <a:t>OMF 방식 — 오라클에 맡기면 무엇이 달라지는가</a:t>
+              <a:t>파일 이름은 데이터베이스가, 위치는 관리자가</a:t>
             </a:r>
           </a:p>
         </p:txBody>
@@ -5579,7 +6293,7 @@
                 </a:solidFill>
                 <a:latin typeface="맑은 고딕"/>
               </a:rPr>
-              <a:t>디렉터리 자동 생성 · GUID · 로그 이중화 · 컨트롤 파일의 예외</a:t>
+              <a:t>제6장</a:t>
             </a:r>
           </a:p>
         </p:txBody>
@@ -5680,7 +6394,7 @@
                 </a:solidFill>
                 <a:latin typeface="맑은 고딕"/>
               </a:rPr>
-              <a:t>왜 NOFILENAMECHECK가 필요 없는가</a:t>
+              <a:t>DB_CREATE_FILE_DEST</a:t>
             </a:r>
           </a:p>
         </p:txBody>
@@ -5719,7 +6433,7 @@
                 </a:solidFill>
                 <a:latin typeface="맑은 고딕"/>
               </a:rPr>
-              <a:t>이름이 겹칠 수 없다</a:t>
+              <a:t>데이터 파일과 임시 파일의 기본 위치</a:t>
             </a:r>
           </a:p>
         </p:txBody>
@@ -5758,7 +6472,7 @@
                 </a:solidFill>
                 <a:latin typeface="맑은 고딕"/>
               </a:rPr>
-              <a:t>•  OMF 이름 : `o1_mf_system_1b50qfn7_.dbf`</a:t>
+              <a:t>•  값은 디렉터리 경로 또는 +디스크그룹</a:t>
             </a:r>
           </a:p>
           <a:p>
@@ -5774,7 +6488,7 @@
                 </a:solidFill>
                 <a:latin typeface="맑은 고딕"/>
               </a:rPr>
-              <a:t>•  `1b50qfn7` — 매번 새로 생성되는 유일 문자열</a:t>
+              <a:t>•  최상위 디렉터리는 미리 있어야 하고 쓰기 가능해야</a:t>
             </a:r>
           </a:p>
           <a:p>
@@ -5790,7 +6504,7 @@
                 </a:solidFill>
                 <a:latin typeface="맑은 고딕"/>
               </a:rPr>
-              <a:t>•  이름 충돌이 원천적으로 불가능하다</a:t>
+              <a:t>•  하위 디렉터리는 데이터베이스가 필요할 때 생성</a:t>
             </a:r>
           </a:p>
           <a:p>
@@ -5806,7 +6520,7 @@
                 </a:solidFill>
                 <a:latin typeface="맑은 고딕"/>
               </a:rPr>
-              <a:t>•  충돌 검사를 끌 이유도 없다</a:t>
+              <a:t>•  동적 파라미터, ALTER SESSION으로 예외 배치</a:t>
             </a:r>
           </a:p>
         </p:txBody>
@@ -5838,7 +6552,7 @@
         <p:spPr>
           <a:xfrm>
             <a:off x="0" y="0"/>
-            <a:ext cx="12191695" cy="6858000"/>
+            <a:ext cx="12191695" cy="1005840"/>
           </a:xfrm>
           <a:prstGeom prst="rect">
             <a:avLst/>
@@ -5881,8 +6595,8 @@
         </p:nvSpPr>
         <p:spPr>
           <a:xfrm>
-            <a:off x="822960" y="2011680"/>
-            <a:ext cx="10515600" cy="1097280"/>
+            <a:off x="548640" y="91440"/>
+            <a:ext cx="10972800" cy="777240"/>
           </a:xfrm>
           <a:prstGeom prst="rect">
             <a:avLst/>
@@ -5901,13 +6615,13 @@
               </a:spcAft>
             </a:pPr>
             <a:r>
-              <a:rPr sz="4000" b="1">
+              <a:rPr sz="2600" b="1">
                 <a:solidFill>
                   <a:srgbClr val="FFFFFF"/>
                 </a:solidFill>
                 <a:latin typeface="맑은 고딕"/>
               </a:rPr>
-              <a:t>6.4</a:t>
+              <a:t>DB_CREATE_ONLINE_LOG_DEST_n</a:t>
             </a:r>
           </a:p>
         </p:txBody>
@@ -5920,8 +6634,8 @@
         </p:nvSpPr>
         <p:spPr>
           <a:xfrm>
-            <a:off x="822960" y="3017520"/>
-            <a:ext cx="10515600" cy="914400"/>
+            <a:off x="640080" y="1078992"/>
+            <a:ext cx="10881360" cy="457200"/>
           </a:xfrm>
           <a:prstGeom prst="rect">
             <a:avLst/>
@@ -5940,71 +6654,27 @@
               </a:spcAft>
             </a:pPr>
             <a:r>
-              <a:rPr sz="2800" b="1">
-                <a:solidFill>
-                  <a:srgbClr val="FFFFFF"/>
-                </a:solidFill>
-                <a:latin typeface="맑은 고딕"/>
-              </a:rPr>
-              <a:t>실패 두 가지</a:t>
-            </a:r>
-          </a:p>
-        </p:txBody>
-      </p:sp>
-      <p:sp>
-        <p:nvSpPr>
-          <p:cNvPr id="5" name="Rectangle 4"/>
-          <p:cNvSpPr/>
-          <p:nvPr/>
-        </p:nvSpPr>
-        <p:spPr>
-          <a:xfrm>
-            <a:off x="822960" y="4114800"/>
-            <a:ext cx="5486400" cy="54864"/>
-          </a:xfrm>
-          <a:prstGeom prst="rect">
-            <a:avLst/>
-          </a:prstGeom>
-          <a:solidFill>
-            <a:srgbClr val="FFFFFF"/>
-          </a:solidFill>
-          <a:ln>
-            <a:noFill/>
-          </a:ln>
-          <a:effectLst/>
-        </p:spPr>
-        <p:style>
-          <a:lnRef idx="1">
-            <a:schemeClr val="accent1"/>
-          </a:lnRef>
-          <a:fillRef idx="3">
-            <a:schemeClr val="accent1"/>
-          </a:fillRef>
-          <a:effectRef idx="2">
-            <a:schemeClr val="accent1"/>
-          </a:effectRef>
-          <a:fontRef idx="minor">
-            <a:schemeClr val="lt1"/>
-          </a:fontRef>
-        </p:style>
-        <p:txBody>
-          <a:bodyPr rtlCol="0" anchor="ctr"/>
-          <a:lstStyle/>
-          <a:p>
-            <a:pPr algn="ctr"/>
-          </a:p>
-        </p:txBody>
-      </p:sp>
-      <p:sp>
-        <p:nvSpPr>
-          <p:cNvPr id="6" name="TextBox 5"/>
+              <a:rPr sz="1500" b="0">
+                <a:solidFill>
+                  <a:srgbClr val="5A6672"/>
+                </a:solidFill>
+                <a:latin typeface="맑은 고딕"/>
+              </a:rPr>
+              <a:t>온라인 로그와 컨트롤 파일 전용 위치</a:t>
+            </a:r>
+          </a:p>
+        </p:txBody>
+      </p:sp>
+      <p:sp>
+        <p:nvSpPr>
+          <p:cNvPr id="5" name="TextBox 4"/>
           <p:cNvSpPr txBox="1"/>
           <p:nvPr/>
         </p:nvSpPr>
         <p:spPr>
           <a:xfrm>
-            <a:off x="822960" y="4297680"/>
-            <a:ext cx="10058400" cy="2011680"/>
+            <a:off x="640080" y="1737360"/>
+            <a:ext cx="10881360" cy="4754880"/>
           </a:xfrm>
           <a:prstGeom prst="rect">
             <a:avLst/>
@@ -6019,49 +6689,65 @@
           <a:p>
             <a:pPr algn="l">
               <a:spcAft>
-                <a:spcPts val="800"/>
-              </a:spcAft>
-            </a:pPr>
-            <a:r>
-              <a:rPr sz="1600" b="0">
-                <a:solidFill>
-                  <a:srgbClr val="FFFFFF"/>
-                </a:solidFill>
-                <a:latin typeface="맑은 고딕"/>
-              </a:rPr>
-              <a:t>•  없는 디렉터리를 가리키면</a:t>
-            </a:r>
-          </a:p>
-          <a:p>
-            <a:pPr algn="l">
-              <a:spcAft>
-                <a:spcPts val="800"/>
-              </a:spcAft>
-            </a:pPr>
-            <a:r>
-              <a:rPr sz="1600" b="0">
-                <a:solidFill>
-                  <a:srgbClr val="FFFFFF"/>
-                </a:solidFill>
-                <a:latin typeface="맑은 고딕"/>
-              </a:rPr>
-              <a:t>•  지시를 아예 주지 않으면</a:t>
-            </a:r>
-          </a:p>
-          <a:p>
-            <a:pPr algn="l">
-              <a:spcAft>
-                <a:spcPts val="800"/>
-              </a:spcAft>
-            </a:pPr>
-            <a:r>
-              <a:rPr sz="1600" b="0">
-                <a:solidFill>
-                  <a:srgbClr val="FFFFFF"/>
-                </a:solidFill>
-                <a:latin typeface="맑은 고딕"/>
-              </a:rPr>
-              <a:t>•  실패 시점이 앞당겨진다</a:t>
+                <a:spcPts val="1000"/>
+              </a:spcAft>
+            </a:pPr>
+            <a:r>
+              <a:rPr sz="1700" b="0">
+                <a:solidFill>
+                  <a:srgbClr val="222222"/>
+                </a:solidFill>
+                <a:latin typeface="맑은 고딕"/>
+              </a:rPr>
+              <a:t>•  n은 1부터 5까지, 지정한 수만큼 다중화</a:t>
+            </a:r>
+          </a:p>
+          <a:p>
+            <a:pPr algn="l">
+              <a:spcAft>
+                <a:spcPts val="1000"/>
+              </a:spcAft>
+            </a:pPr>
+            <a:r>
+              <a:rPr sz="1700" b="0">
+                <a:solidFill>
+                  <a:srgbClr val="222222"/>
+                </a:solidFill>
+                <a:latin typeface="맑은 고딕"/>
+              </a:rPr>
+              <a:t>•  하나라도 있으면 로그는 이 위치에만 생성</a:t>
+            </a:r>
+          </a:p>
+          <a:p>
+            <a:pPr algn="l">
+              <a:spcAft>
+                <a:spcPts val="1000"/>
+              </a:spcAft>
+            </a:pPr>
+            <a:r>
+              <a:rPr sz="1700" b="0">
+                <a:solidFill>
+                  <a:srgbClr val="222222"/>
+                </a:solidFill>
+                <a:latin typeface="맑은 고딕"/>
+              </a:rPr>
+              <a:t>•  로그와 데이터를 다른 디스크에 둘 때 사용</a:t>
+            </a:r>
+          </a:p>
+          <a:p>
+            <a:pPr algn="l">
+              <a:spcAft>
+                <a:spcPts val="1000"/>
+              </a:spcAft>
+            </a:pPr>
+            <a:r>
+              <a:rPr sz="1700" b="0">
+                <a:solidFill>
+                  <a:srgbClr val="222222"/>
+                </a:solidFill>
+                <a:latin typeface="맑은 고딕"/>
+              </a:rPr>
+              <a:t>•  SRL도 같은 규칙, SIZE만 주면 멤버 생성</a:t>
             </a:r>
           </a:p>
         </p:txBody>
@@ -6162,7 +6848,7 @@
                 </a:solidFill>
                 <a:latin typeface="맑은 고딕"/>
               </a:rPr>
-              <a:t>첫 번째 실패</a:t>
+              <a:t>DB_RECOVERY_FILE_DEST와 FRA</a:t>
             </a:r>
           </a:p>
         </p:txBody>
@@ -6201,7 +6887,7 @@
                 </a:solidFill>
                 <a:latin typeface="맑은 고딕"/>
               </a:rPr>
-              <a:t>인스턴스가 뜨지 않는다</a:t>
+              <a:t>로그 다중화 위치로도 쓰인다</a:t>
             </a:r>
           </a:p>
         </p:txBody>
@@ -6240,7 +6926,7 @@
                 </a:solidFill>
                 <a:latin typeface="맑은 고딕"/>
               </a:rPr>
-              <a:t>•  `db_create_file_dest=/u03/nosuchdir`</a:t>
+              <a:t>•  DB_RECOVERY_FILE_DEST_SIZE와 짝으로 설정</a:t>
             </a:r>
           </a:p>
           <a:p>
@@ -6256,7 +6942,7 @@
                 </a:solidFill>
                 <a:latin typeface="맑은 고딕"/>
               </a:rPr>
-              <a:t>•  `ORA-01261` 값을 경로로 해석할 수 없다</a:t>
+              <a:t>•  FRA의 아카이브 로그와 백업은 항상 OMF 이름</a:t>
             </a:r>
           </a:p>
           <a:p>
@@ -6272,7 +6958,7 @@
                 </a:solidFill>
                 <a:latin typeface="맑은 고딕"/>
               </a:rPr>
-              <a:t>•  `ORA-01262` stat() 실패</a:t>
+              <a:t>•  FILE_DEST와 FRA가 모두 있으면 로그가 두 벌</a:t>
             </a:r>
           </a:p>
           <a:p>
@@ -6288,23 +6974,7 @@
                 </a:solidFill>
                 <a:latin typeface="맑은 고딕"/>
               </a:rPr>
-              <a:t>•  `Linux-x86_64 Error: 2` ENOENT — 운영체제 오류 번호가 그대로</a:t>
-            </a:r>
-          </a:p>
-          <a:p>
-            <a:pPr algn="l">
-              <a:spcAft>
-                <a:spcPts val="1000"/>
-              </a:spcAft>
-            </a:pPr>
-            <a:r>
-              <a:rPr sz="1700" b="0">
-                <a:solidFill>
-                  <a:srgbClr val="222222"/>
-                </a:solidFill>
-                <a:latin typeface="맑은 고딕"/>
-              </a:rPr>
-              <a:t>•  `ORA-01034` 결과적으로 인스턴스가 없다</a:t>
+              <a:t>•  지시하지 않아도 생기는 다중화, FRA 크기 재계산</a:t>
             </a:r>
           </a:p>
         </p:txBody>
@@ -6405,7 +7075,7 @@
                 </a:solidFill>
                 <a:latin typeface="맑은 고딕"/>
               </a:rPr>
-              <a:t>그 상태에서 RMAN을 실행하면</a:t>
+              <a:t>조합별 배치 결과</a:t>
             </a:r>
           </a:p>
         </p:txBody>
@@ -6444,7 +7114,7 @@
                 </a:solidFill>
                 <a:latin typeface="맑은 고딕"/>
               </a:rPr>
-              <a:t>채널 할당에서 끝난다</a:t>
+              <a:t>어느 파라미터에 값이 있는지가 결과를 정한다</a:t>
             </a:r>
           </a:p>
         </p:txBody>
@@ -6483,7 +7153,7 @@
                 </a:solidFill>
                 <a:latin typeface="맑은 고딕"/>
               </a:rPr>
-              <a:t>•  `RMAN-03002: failure of **allocate** command`</a:t>
+              <a:t>•  FILE_DEST만: 로그와 컨트롤 파일 1개씩</a:t>
             </a:r>
           </a:p>
           <a:p>
@@ -6499,7 +7169,7 @@
                 </a:solidFill>
                 <a:latin typeface="맑은 고딕"/>
               </a:rPr>
-              <a:t>•  5장은 모두 `failure of Duplicate Db command`였다</a:t>
+              <a:t>•  FILE_DEST + FRA: 두 위치에 1개씩</a:t>
             </a:r>
           </a:p>
           <a:p>
@@ -6515,7 +7185,7 @@
                 </a:solidFill>
                 <a:latin typeface="맑은 고딕"/>
               </a:rPr>
-              <a:t>•  `RMAN-06403` 접속을 얻지 못했다</a:t>
+              <a:t>•  LOG_DEST_1, _2: 그 두 위치에 1개씩</a:t>
             </a:r>
           </a:p>
           <a:p>
@@ -6531,7 +7201,23 @@
                 </a:solidFill>
                 <a:latin typeface="맑은 고딕"/>
               </a:rPr>
-              <a:t>•  `ORA-27101: shared memory realm does not exist` — **SGA가 없다**</a:t>
+              <a:t>•  LOG_DEST_1 + FRA: LOG_DEST_1에만</a:t>
+            </a:r>
+          </a:p>
+          <a:p>
+            <a:pPr algn="l">
+              <a:spcAft>
+                <a:spcPts val="1000"/>
+              </a:spcAft>
+            </a:pPr>
+            <a:r>
+              <a:rPr sz="1700" b="0">
+                <a:solidFill>
+                  <a:srgbClr val="222222"/>
+                </a:solidFill>
+                <a:latin typeface="맑은 고딕"/>
+              </a:rPr>
+              <a:t>•  컨트롤 파일 열은 CONTROL_FILES가 빈 경우만</a:t>
             </a:r>
           </a:p>
         </p:txBody>
@@ -6632,7 +7318,7 @@
                 </a:solidFill>
                 <a:latin typeface="맑은 고딕"/>
               </a:rPr>
-              <a:t>두 번째 실패</a:t>
+              <a:t>잘못된 경로가 드러나는 시점</a:t>
             </a:r>
           </a:p>
         </p:txBody>
@@ -6671,7 +7357,7 @@
                 </a:solidFill>
                 <a:latin typeface="맑은 고딕"/>
               </a:rPr>
-              <a:t>5장과 글자 하나까지 같다</a:t>
+              <a:t>OMF는 기동 단계에서 경로를 검사한다</a:t>
             </a:r>
           </a:p>
         </p:txBody>
@@ -6710,7 +7396,7 @@
                 </a:solidFill>
                 <a:latin typeface="맑은 고딕"/>
               </a:rPr>
-              <a:t>•  `db_create_file_dest`도 convert도 주지 않으면</a:t>
+              <a:t>•  실행 중 변경: ORA-02097 + ORA-01261로 거부</a:t>
             </a:r>
           </a:p>
           <a:p>
@@ -6726,7 +7412,7 @@
                 </a:solidFill>
                 <a:latin typeface="맑은 고딕"/>
               </a:rPr>
-              <a:t>•  `RMAN-05538: warning: implicitly using DB_FILE_NAME_CONVERT`</a:t>
+              <a:t>•  pfile의 없는 경로: NOMOUNT에서 ORA-01261, 01262</a:t>
             </a:r>
           </a:p>
           <a:p>
@@ -6742,7 +7428,7 @@
                 </a:solidFill>
                 <a:latin typeface="맑은 고딕"/>
               </a:rPr>
-              <a:t>•  `RMAN-05001` 11줄, 경로는 전부 `.../Chicago/...`</a:t>
+              <a:t>•  경로 지정 방식은 DUPLICATE 도중에야 드러남</a:t>
             </a:r>
           </a:p>
           <a:p>
@@ -6758,7 +7444,7 @@
                 </a:solidFill>
                 <a:latin typeface="맑은 고딕"/>
               </a:rPr>
-              <a:t>•  5장 첫 번째 실패와 **완전히 동일**</a:t>
+              <a:t>•  값이 아예 없으면 기동은 정상, 문제는 나중에</a:t>
             </a:r>
           </a:p>
         </p:txBody>
@@ -6790,7 +7476,7 @@
         <p:spPr>
           <a:xfrm>
             <a:off x="0" y="0"/>
-            <a:ext cx="12191695" cy="1005840"/>
+            <a:ext cx="12191695" cy="6858000"/>
           </a:xfrm>
           <a:prstGeom prst="rect">
             <a:avLst/>
@@ -6833,8 +7519,8 @@
         </p:nvSpPr>
         <p:spPr>
           <a:xfrm>
-            <a:off x="548640" y="91440"/>
-            <a:ext cx="10972800" cy="777240"/>
+            <a:off x="822960" y="2011680"/>
+            <a:ext cx="10515600" cy="1097280"/>
           </a:xfrm>
           <a:prstGeom prst="rect">
             <a:avLst/>
@@ -6853,13 +7539,13 @@
               </a:spcAft>
             </a:pPr>
             <a:r>
-              <a:rPr sz="2600" b="1">
+              <a:rPr sz="4000" b="1">
                 <a:solidFill>
                   <a:srgbClr val="FFFFFF"/>
                 </a:solidFill>
                 <a:latin typeface="맑은 고딕"/>
               </a:rPr>
-              <a:t>실패 시점이 앞당겨진다</a:t>
+              <a:t>6.4</a:t>
             </a:r>
           </a:p>
         </p:txBody>
@@ -6872,8 +7558,8 @@
         </p:nvSpPr>
         <p:spPr>
           <a:xfrm>
-            <a:off x="640080" y="1078992"/>
-            <a:ext cx="10881360" cy="457200"/>
+            <a:off x="822960" y="3017520"/>
+            <a:ext cx="10515600" cy="914400"/>
           </a:xfrm>
           <a:prstGeom prst="rect">
             <a:avLst/>
@@ -6892,27 +7578,71 @@
               </a:spcAft>
             </a:pPr>
             <a:r>
-              <a:rPr sz="1500" b="0">
-                <a:solidFill>
-                  <a:srgbClr val="5A6672"/>
-                </a:solidFill>
-                <a:latin typeface="맑은 고딕"/>
-              </a:rPr>
-              <a:t>이것이 OMF의 이점</a:t>
-            </a:r>
-          </a:p>
-        </p:txBody>
-      </p:sp>
-      <p:sp>
-        <p:nvSpPr>
-          <p:cNvPr id="5" name="TextBox 4"/>
+              <a:rPr sz="2800" b="1">
+                <a:solidFill>
+                  <a:srgbClr val="FFFFFF"/>
+                </a:solidFill>
+                <a:latin typeface="맑은 고딕"/>
+              </a:rPr>
+              <a:t>OMF 파일 이름 규칙</a:t>
+            </a:r>
+          </a:p>
+        </p:txBody>
+      </p:sp>
+      <p:sp>
+        <p:nvSpPr>
+          <p:cNvPr id="5" name="Rectangle 4"/>
+          <p:cNvSpPr/>
+          <p:nvPr/>
+        </p:nvSpPr>
+        <p:spPr>
+          <a:xfrm>
+            <a:off x="822960" y="4114800"/>
+            <a:ext cx="5486400" cy="54864"/>
+          </a:xfrm>
+          <a:prstGeom prst="rect">
+            <a:avLst/>
+          </a:prstGeom>
+          <a:solidFill>
+            <a:srgbClr val="FFFFFF"/>
+          </a:solidFill>
+          <a:ln>
+            <a:noFill/>
+          </a:ln>
+          <a:effectLst/>
+        </p:spPr>
+        <p:style>
+          <a:lnRef idx="1">
+            <a:schemeClr val="accent1"/>
+          </a:lnRef>
+          <a:fillRef idx="3">
+            <a:schemeClr val="accent1"/>
+          </a:fillRef>
+          <a:effectRef idx="2">
+            <a:schemeClr val="accent1"/>
+          </a:effectRef>
+          <a:fontRef idx="minor">
+            <a:schemeClr val="lt1"/>
+          </a:fontRef>
+        </p:style>
+        <p:txBody>
+          <a:bodyPr rtlCol="0" anchor="ctr"/>
+          <a:lstStyle/>
+          <a:p>
+            <a:pPr algn="ctr"/>
+          </a:p>
+        </p:txBody>
+      </p:sp>
+      <p:sp>
+        <p:nvSpPr>
+          <p:cNvPr id="6" name="TextBox 5"/>
           <p:cNvSpPr txBox="1"/>
           <p:nvPr/>
         </p:nvSpPr>
         <p:spPr>
           <a:xfrm>
-            <a:off x="640080" y="1737360"/>
-            <a:ext cx="10881360" cy="4754880"/>
+            <a:off x="822960" y="4297680"/>
+            <a:ext cx="10058400" cy="2011680"/>
           </a:xfrm>
           <a:prstGeom prst="rect">
             <a:avLst/>
@@ -6927,65 +7657,49 @@
           <a:p>
             <a:pPr algn="l">
               <a:spcAft>
-                <a:spcPts val="1000"/>
-              </a:spcAft>
-            </a:pPr>
-            <a:r>
-              <a:rPr sz="1700" b="0">
-                <a:solidFill>
-                  <a:srgbClr val="222222"/>
-                </a:solidFill>
-                <a:latin typeface="맑은 고딕"/>
-              </a:rPr>
-              <a:t>•  5장 : 파일 세 개를 이미 복사한 뒤 실패 → 정리하고 재시작</a:t>
-            </a:r>
-          </a:p>
-          <a:p>
-            <a:pPr algn="l">
-              <a:spcAft>
-                <a:spcPts val="1000"/>
-              </a:spcAft>
-            </a:pPr>
-            <a:r>
-              <a:rPr sz="1700" b="0">
-                <a:solidFill>
-                  <a:srgbClr val="222222"/>
-                </a:solidFill>
-                <a:latin typeface="맑은 고딕"/>
-              </a:rPr>
-              <a:t>•  6장 : 인스턴스 기동 전 또는 마운트 직후 실패 → **잔재 없음**</a:t>
-            </a:r>
-          </a:p>
-          <a:p>
-            <a:pPr algn="l">
-              <a:spcAft>
-                <a:spcPts val="1000"/>
-              </a:spcAft>
-            </a:pPr>
-            <a:r>
-              <a:rPr sz="1700" b="0">
-                <a:solidFill>
-                  <a:srgbClr val="222222"/>
-                </a:solidFill>
-                <a:latin typeface="맑은 고딕"/>
-              </a:rPr>
-              <a:t>•  근거 : `DB_CREATE_FILE_DEST`는 stat()으로 검증된다</a:t>
-            </a:r>
-          </a:p>
-          <a:p>
-            <a:pPr algn="l">
-              <a:spcAft>
-                <a:spcPts val="1000"/>
-              </a:spcAft>
-            </a:pPr>
-            <a:r>
-              <a:rPr sz="1700" b="0">
-                <a:solidFill>
-                  <a:srgbClr val="222222"/>
-                </a:solidFill>
-                <a:latin typeface="맑은 고딕"/>
-              </a:rPr>
-              <a:t>•  convert는 문자열 치환 규칙이라 검증할 대상이 없다</a:t>
+                <a:spcPts val="800"/>
+              </a:spcAft>
+            </a:pPr>
+            <a:r>
+              <a:rPr sz="1600" b="0">
+                <a:solidFill>
+                  <a:srgbClr val="FFFFFF"/>
+                </a:solidFill>
+                <a:latin typeface="맑은 고딕"/>
+              </a:rPr>
+              <a:t>•  디렉터리 계층</a:t>
+            </a:r>
+          </a:p>
+          <a:p>
+            <a:pPr algn="l">
+              <a:spcAft>
+                <a:spcPts val="800"/>
+              </a:spcAft>
+            </a:pPr>
+            <a:r>
+              <a:rPr sz="1600" b="0">
+                <a:solidFill>
+                  <a:srgbClr val="FFFFFF"/>
+                </a:solidFill>
+                <a:latin typeface="맑은 고딕"/>
+              </a:rPr>
+              <a:t>•  DB_UNIQUE_NAME과 PDB GUID</a:t>
+            </a:r>
+          </a:p>
+          <a:p>
+            <a:pPr algn="l">
+              <a:spcAft>
+                <a:spcPts val="800"/>
+              </a:spcAft>
+            </a:pPr>
+            <a:r>
+              <a:rPr sz="1600" b="0">
+                <a:solidFill>
+                  <a:srgbClr val="FFFFFF"/>
+                </a:solidFill>
+                <a:latin typeface="맑은 고딕"/>
+              </a:rPr>
+              <a:t>•  파일 이름 형식</a:t>
             </a:r>
           </a:p>
         </p:txBody>
@@ -7017,7 +7731,7 @@
         <p:spPr>
           <a:xfrm>
             <a:off x="0" y="0"/>
-            <a:ext cx="12191695" cy="6858000"/>
+            <a:ext cx="12191695" cy="1005840"/>
           </a:xfrm>
           <a:prstGeom prst="rect">
             <a:avLst/>
@@ -7060,8 +7774,8 @@
         </p:nvSpPr>
         <p:spPr>
           <a:xfrm>
-            <a:off x="822960" y="2011680"/>
-            <a:ext cx="10515600" cy="1097280"/>
+            <a:off x="548640" y="91440"/>
+            <a:ext cx="10972800" cy="777240"/>
           </a:xfrm>
           <a:prstGeom prst="rect">
             <a:avLst/>
@@ -7080,13 +7794,13 @@
               </a:spcAft>
             </a:pPr>
             <a:r>
-              <a:rPr sz="4000" b="1">
+              <a:rPr sz="2600" b="1">
                 <a:solidFill>
                   <a:srgbClr val="FFFFFF"/>
                 </a:solidFill>
                 <a:latin typeface="맑은 고딕"/>
               </a:rPr>
-              <a:t>6.5</a:t>
+              <a:t>디렉터리 계층</a:t>
             </a:r>
           </a:p>
         </p:txBody>
@@ -7099,8 +7813,8 @@
         </p:nvSpPr>
         <p:spPr>
           <a:xfrm>
-            <a:off x="822960" y="3017520"/>
-            <a:ext cx="10515600" cy="914400"/>
+            <a:off x="640080" y="1078992"/>
+            <a:ext cx="10881360" cy="457200"/>
           </a:xfrm>
           <a:prstGeom prst="rect">
             <a:avLst/>
@@ -7119,71 +7833,27 @@
               </a:spcAft>
             </a:pPr>
             <a:r>
-              <a:rPr sz="2800" b="1">
-                <a:solidFill>
-                  <a:srgbClr val="FFFFFF"/>
-                </a:solidFill>
-                <a:latin typeface="맑은 고딕"/>
-              </a:rPr>
-              <a:t>성공한 OMF DUPLICATE</a:t>
-            </a:r>
-          </a:p>
-        </p:txBody>
-      </p:sp>
-      <p:sp>
-        <p:nvSpPr>
-          <p:cNvPr id="5" name="Rectangle 4"/>
-          <p:cNvSpPr/>
-          <p:nvPr/>
-        </p:nvSpPr>
-        <p:spPr>
-          <a:xfrm>
-            <a:off x="822960" y="4114800"/>
-            <a:ext cx="5486400" cy="54864"/>
-          </a:xfrm>
-          <a:prstGeom prst="rect">
-            <a:avLst/>
-          </a:prstGeom>
-          <a:solidFill>
-            <a:srgbClr val="FFFFFF"/>
-          </a:solidFill>
-          <a:ln>
-            <a:noFill/>
-          </a:ln>
-          <a:effectLst/>
-        </p:spPr>
-        <p:style>
-          <a:lnRef idx="1">
-            <a:schemeClr val="accent1"/>
-          </a:lnRef>
-          <a:fillRef idx="3">
-            <a:schemeClr val="accent1"/>
-          </a:fillRef>
-          <a:effectRef idx="2">
-            <a:schemeClr val="accent1"/>
-          </a:effectRef>
-          <a:fontRef idx="minor">
-            <a:schemeClr val="lt1"/>
-          </a:fontRef>
-        </p:style>
-        <p:txBody>
-          <a:bodyPr rtlCol="0" anchor="ctr"/>
-          <a:lstStyle/>
-          <a:p>
-            <a:pPr algn="ctr"/>
-          </a:p>
-        </p:txBody>
-      </p:sp>
-      <p:sp>
-        <p:nvSpPr>
-          <p:cNvPr id="6" name="TextBox 5"/>
+              <a:rPr sz="1500" b="0">
+                <a:solidFill>
+                  <a:srgbClr val="5A6672"/>
+                </a:solidFill>
+                <a:latin typeface="맑은 고딕"/>
+              </a:rPr>
+              <a:t>기본위치 / DB_UNIQUE_NAME / 종류 / 파일</a:t>
+            </a:r>
+          </a:p>
+        </p:txBody>
+      </p:sp>
+      <p:sp>
+        <p:nvSpPr>
+          <p:cNvPr id="5" name="TextBox 4"/>
           <p:cNvSpPr txBox="1"/>
           <p:nvPr/>
         </p:nvSpPr>
         <p:spPr>
           <a:xfrm>
-            <a:off x="822960" y="4297680"/>
-            <a:ext cx="10058400" cy="2011680"/>
+            <a:off x="640080" y="1737360"/>
+            <a:ext cx="10881360" cy="4754880"/>
           </a:xfrm>
           <a:prstGeom prst="rect">
             <a:avLst/>
@@ -7198,49 +7868,65 @@
           <a:p>
             <a:pPr algn="l">
               <a:spcAft>
-                <a:spcPts val="800"/>
-              </a:spcAft>
-            </a:pPr>
-            <a:r>
-              <a:rPr sz="1600" b="0">
-                <a:solidFill>
-                  <a:srgbClr val="FFFFFF"/>
-                </a:solidFill>
-                <a:latin typeface="맑은 고딕"/>
-              </a:rPr>
-              <a:t>•  판정 기준은 같다</a:t>
-            </a:r>
-          </a:p>
-          <a:p>
-            <a:pPr algn="l">
-              <a:spcAft>
-                <a:spcPts val="800"/>
-              </a:spcAft>
-            </a:pPr>
-            <a:r>
-              <a:rPr sz="1600" b="0">
-                <a:solidFill>
-                  <a:srgbClr val="FFFFFF"/>
-                </a:solidFill>
-                <a:latin typeface="맑은 고딕"/>
-              </a:rPr>
-              <a:t>•  로그에서 OMF의 작동을 본다</a:t>
-            </a:r>
-          </a:p>
-          <a:p>
-            <a:pPr algn="l">
-              <a:spcAft>
-                <a:spcPts val="800"/>
-              </a:spcAft>
-            </a:pPr>
-            <a:r>
-              <a:rPr sz="1600" b="0">
-                <a:solidFill>
-                  <a:srgbClr val="FFFFFF"/>
-                </a:solidFill>
-                <a:latin typeface="맑은 고딕"/>
-              </a:rPr>
-              <a:t>•  재실행하면 RMAN-05537</a:t>
+                <a:spcPts val="1000"/>
+              </a:spcAft>
+            </a:pPr>
+            <a:r>
+              <a:rPr sz="1700" b="0">
+                <a:solidFill>
+                  <a:srgbClr val="222222"/>
+                </a:solidFill>
+                <a:latin typeface="맑은 고딕"/>
+              </a:rPr>
+              <a:t>•  두 번째 단계는 DB_UNIQUE_NAME의 대문자</a:t>
+            </a:r>
+          </a:p>
+          <a:p>
+            <a:pPr algn="l">
+              <a:spcAft>
+                <a:spcPts val="1000"/>
+              </a:spcAft>
+            </a:pPr>
+            <a:r>
+              <a:rPr sz="1700" b="0">
+                <a:solidFill>
+                  <a:srgbClr val="222222"/>
+                </a:solidFill>
+                <a:latin typeface="맑은 고딕"/>
+              </a:rPr>
+              <a:t>•  종류: datafile, onlinelog, controlfile</a:t>
+            </a:r>
+          </a:p>
+          <a:p>
+            <a:pPr algn="l">
+              <a:spcAft>
+                <a:spcPts val="1000"/>
+              </a:spcAft>
+            </a:pPr>
+            <a:r>
+              <a:rPr sz="1700" b="0">
+                <a:solidFill>
+                  <a:srgbClr val="222222"/>
+                </a:solidFill>
+                <a:latin typeface="맑은 고딕"/>
+              </a:rPr>
+              <a:t>•  FRA: archivelog, backupset 아래 날짜 디렉터리</a:t>
+            </a:r>
+          </a:p>
+          <a:p>
+            <a:pPr algn="l">
+              <a:spcAft>
+                <a:spcPts val="1000"/>
+              </a:spcAft>
+            </a:pPr>
+            <a:r>
+              <a:rPr sz="1700" b="0">
+                <a:solidFill>
+                  <a:srgbClr val="222222"/>
+                </a:solidFill>
+                <a:latin typeface="맑은 고딕"/>
+              </a:rPr>
+              <a:t>•  PDB 파일은 GUID 디렉터리 아래 datafile</a:t>
             </a:r>
           </a:p>
         </p:txBody>
@@ -7341,7 +8027,7 @@
                 </a:solidFill>
                 <a:latin typeface="맑은 고딕"/>
               </a:rPr>
-              <a:t>성공 판정</a:t>
+              <a:t>DB_UNIQUE_NAME과 GUID를 쓰는 이유</a:t>
             </a:r>
           </a:p>
         </p:txBody>
@@ -7380,7 +8066,7 @@
                 </a:solidFill>
                 <a:latin typeface="맑은 고딕"/>
               </a:rPr>
-              <a:t>방식이 달라도 기준은 같다</a:t>
+              <a:t>같은 DB_NAME, 다른 디렉터리</a:t>
             </a:r>
           </a:p>
         </p:txBody>
@@ -7419,7 +8105,7 @@
                 </a:solidFill>
                 <a:latin typeface="맑은 고딕"/>
               </a:rPr>
-              <a:t>•  `rc=0`</a:t>
+              <a:t>•  Primary와 Standby는 DB_NAME이 같음</a:t>
             </a:r>
           </a:p>
           <a:p>
@@ -7435,7 +8121,7 @@
                 </a:solidFill>
                 <a:latin typeface="맑은 고딕"/>
               </a:rPr>
-              <a:t>•  `grep -cE 'RMAN-|ORA-'` = **0**</a:t>
+              <a:t>•  DB_UNIQUE_NAME만 달리 주면 디렉터리가 갈림</a:t>
             </a:r>
           </a:p>
           <a:p>
@@ -7451,7 +8137,7 @@
                 </a:solidFill>
                 <a:latin typeface="맑은 고딕"/>
               </a:rPr>
-              <a:t>•  `Finished Duplicate Db` 존재</a:t>
+              <a:t>•  Boston과 BOSTON은 리눅스에서 다른 디렉터리</a:t>
             </a:r>
           </a:p>
           <a:p>
@@ -7467,7 +8153,7 @@
                 </a:solidFill>
                 <a:latin typeface="맑은 고딕"/>
               </a:rPr>
-              <a:t>•  실측 : 390줄 로그, 49번 Starting, 383번 Finished</a:t>
+              <a:t>•  PDB GUID는 Primary와 Standby가 동일</a:t>
             </a:r>
           </a:p>
         </p:txBody>
@@ -7568,7 +8254,7 @@
                 </a:solidFill>
                 <a:latin typeface="맑은 고딕"/>
               </a:rPr>
-              <a:t>로그가 보여 주는 OMF</a:t>
+              <a:t>파일 이름 형식</a:t>
             </a:r>
           </a:p>
         </p:txBody>
@@ -7607,7 +8293,7 @@
                 </a:solidFill>
                 <a:latin typeface="맑은 고딕"/>
               </a:rPr>
-              <a:t>이름 자체가 바뀐다</a:t>
+              <a:t>o1_mf_ 접두어와 8자리 고유 문자열</a:t>
             </a:r>
           </a:p>
         </p:txBody>
@@ -7646,7 +8332,7 @@
                 </a:solidFill>
                 <a:latin typeface="맑은 고딕"/>
               </a:rPr>
-              <a:t>•  `input  .../Chicago/sysaux01.dbf`</a:t>
+              <a:t>•  데이터 파일: o1_mf_테이블스페이스_고유_.dbf</a:t>
             </a:r>
           </a:p>
           <a:p>
@@ -7662,7 +8348,7 @@
                 </a:solidFill>
                 <a:latin typeface="맑은 고딕"/>
               </a:rPr>
-              <a:t>•  `output .../BOSTON/datafile/o1_mf_sysaux_1c50qfn7_.dbf`</a:t>
+              <a:t>•  임시 파일은 .tmp, 로그와 SRL은 그룹 번호 .log</a:t>
             </a:r>
           </a:p>
           <a:p>
@@ -7678,7 +8364,7 @@
                 </a:solidFill>
                 <a:latin typeface="맑은 고딕"/>
               </a:rPr>
-              <a:t>•  5장은 경로 접두만 바뀌고 이름은 그대로였다</a:t>
+              <a:t>•  컨트롤 파일은 고유 문자열만, .ctl</a:t>
             </a:r>
           </a:p>
           <a:p>
@@ -7694,7 +8380,23 @@
                 </a:solidFill>
                 <a:latin typeface="맑은 고딕"/>
               </a:rPr>
-              <a:t>•  261번 줄에 서른두 자리 16진수 디렉터리가 등장한다</a:t>
+              <a:t>•  파일 번호는 이름에 없어 V$DATAFILE로 확인</a:t>
+            </a:r>
+          </a:p>
+          <a:p>
+            <a:pPr algn="l">
+              <a:spcAft>
+                <a:spcPts val="1000"/>
+              </a:spcAft>
+            </a:pPr>
+            <a:r>
+              <a:rPr sz="1700" b="0">
+                <a:solidFill>
+                  <a:srgbClr val="222222"/>
+                </a:solidFill>
+                <a:latin typeface="맑은 고딕"/>
+              </a:rPr>
+              <a:t>•  로그와 SRL 구분은 V$LOGFILE.TYPE으로</a:t>
             </a:r>
           </a:p>
         </p:txBody>
@@ -7795,7 +8497,7 @@
                 </a:solidFill>
                 <a:latin typeface="맑은 고딕"/>
               </a:rPr>
-              <a:t>재실행하면</a:t>
+              <a:t>OMF 이름을 직접 다룰 때</a:t>
             </a:r>
           </a:p>
         </p:txBody>
@@ -7834,7 +8536,7 @@
                 </a:solidFill>
                 <a:latin typeface="맑은 고딕"/>
               </a:rPr>
-              <a:t>RMAN-05537</a:t>
+              <a:t>OMF 이름은 데이터베이스만 붙인다</a:t>
             </a:r>
           </a:p>
         </p:txBody>
@@ -7873,7 +8575,7 @@
                 </a:solidFill>
                 <a:latin typeface="맑은 고딕"/>
               </a:rPr>
-              <a:t>•  성공한 뒤 같은 스크립트를 다시 실행하면</a:t>
+              <a:t>•  OMF DB에서도 이름을 적으면 일반 파일로 생성</a:t>
             </a:r>
           </a:p>
           <a:p>
@@ -7889,7 +8591,7 @@
                 </a:solidFill>
                 <a:latin typeface="맑은 고딕"/>
               </a:rPr>
-              <a:t>•  `RMAN-05537: ... auxiliary instance is started with spfile cannot use SPFILE clause`</a:t>
+              <a:t>•  o1_mf_ 형식 이름을 사람이 쓰면 ORA-01276</a:t>
             </a:r>
           </a:p>
           <a:p>
@@ -7905,7 +8607,7 @@
                 </a:solidFill>
                 <a:latin typeface="맑은 고딕"/>
               </a:rPr>
-              <a:t>•  5장의 RMAN-05500(마운트 상태)과 **다른 오류**</a:t>
+              <a:t>•  일반 파일의 OMF 전환: MOVE DATAFILE, TO NEW</a:t>
             </a:r>
           </a:p>
           <a:p>
@@ -7921,7 +8623,7 @@
                 </a:solidFill>
                 <a:latin typeface="맑은 고딕"/>
               </a:rPr>
-              <a:t>•  Standby는 손상되지 않는다 — 시작 전에 중단</a:t>
+              <a:t>•  운영체제에서 OMF 파일 이름을 바꾸지 않음</a:t>
             </a:r>
           </a:p>
         </p:txBody>
@@ -8022,7 +8724,7 @@
                 </a:solidFill>
                 <a:latin typeface="맑은 고딕"/>
               </a:rPr>
-              <a:t>학습 목표 (Objectives)</a:t>
+              <a:t>학습 목표</a:t>
             </a:r>
           </a:p>
         </p:txBody>
@@ -8061,7 +8763,7 @@
                 </a:solidFill>
                 <a:latin typeface="맑은 고딕"/>
               </a:rPr>
-              <a:t>•  OMF 세 파라미터의 역할을 구분하고 서로 어떻게 맞물리는지 설명한다.</a:t>
+              <a:t>•  OMF가 관리하는 파일과 수명 관리 방식을 설명한다</a:t>
             </a:r>
           </a:p>
           <a:p>
@@ -8077,7 +8779,7 @@
                 </a:solidFill>
                 <a:latin typeface="맑은 고딕"/>
               </a:rPr>
-              <a:t>•  OMF 방식 스크립트와 5장 스크립트의 차이를 절 단위로 대조한다.</a:t>
+              <a:t>•  OMF 파라미터 조합별 파일 배치를 판단한다</a:t>
             </a:r>
           </a:p>
           <a:p>
@@ -8093,7 +8795,7 @@
                 </a:solidFill>
                 <a:latin typeface="맑은 고딕"/>
               </a:rPr>
-              <a:t>•  `DB_CREATE_FILE_DEST`가 잘못됐을 때와 없을 때의 오류를 구분한다.</a:t>
+              <a:t>•  OMF 디렉터리 계층과 이름 형식을 읽는다</a:t>
             </a:r>
           </a:p>
           <a:p>
@@ -8109,7 +8811,7 @@
                 </a:solidFill>
                 <a:latin typeface="맑은 고딕"/>
               </a:rPr>
-              <a:t>•  OMF가 만든 디렉터리 구조를 읽고 PDB의 GUID 디렉터리를 설명한다.</a:t>
+              <a:t>•  OMF Standby에 convert가 필요 없는 이유를 설명한다</a:t>
             </a:r>
           </a:p>
           <a:p>
@@ -8125,7 +8827,7 @@
                 </a:solidFill>
                 <a:latin typeface="맑은 고딕"/>
               </a:rPr>
-              <a:t>•  OMF 파일 이름 규칙을 해독하고 파일 번호를 확인하는 방법을 안다.</a:t>
+              <a:t>•  SPFILE 절의 CONTROL_FILES 상속을 예방·교정한다</a:t>
             </a:r>
           </a:p>
           <a:p>
@@ -8141,23 +8843,7 @@
                 </a:solidFill>
                 <a:latin typeface="맑은 고딕"/>
               </a:rPr>
-              <a:t>•  컨트롤 파일이 OMF의 예외인 이유를 설명하고 상속된 값을 바로잡는다.</a:t>
-            </a:r>
-          </a:p>
-          <a:p>
-            <a:pPr algn="l">
-              <a:spcAft>
-                <a:spcPts val="1000"/>
-              </a:spcAft>
-            </a:pPr>
-            <a:r>
-              <a:rPr sz="1600" b="0">
-                <a:solidFill>
-                  <a:srgbClr val="222222"/>
-                </a:solidFill>
-                <a:latin typeface="맑은 고딕"/>
-              </a:rPr>
-              <a:t>•  두 방식의 장단점을 근거와 함께 비교하고 선택 기준을 제시한다.</a:t>
+              <a:t>•  ASM, AUTO와의 관계를 알고 두 방식 중 하나를 고른다</a:t>
             </a:r>
           </a:p>
         </p:txBody>
@@ -8258,7 +8944,7 @@
                 </a:solidFill>
                 <a:latin typeface="맑은 고딕"/>
               </a:rPr>
-              <a:t>6.6</a:t>
+              <a:t>6.5</a:t>
             </a:r>
           </a:p>
         </p:txBody>
@@ -8297,7 +8983,7 @@
                 </a:solidFill>
                 <a:latin typeface="맑은 고딕"/>
               </a:rPr>
-              <a:t>OMF가 만든 구조</a:t>
+              <a:t>convert 파라미터가 필요 없는 이유</a:t>
             </a:r>
           </a:p>
         </p:txBody>
@@ -8380,7 +9066,7 @@
                 </a:solidFill>
                 <a:latin typeface="맑은 고딕"/>
               </a:rPr>
-              <a:t>•  디렉터리 트리</a:t>
+              <a:t>•  변환하는 방식과 새로 짓는 방식</a:t>
             </a:r>
           </a:p>
           <a:p>
@@ -8396,7 +9082,7 @@
                 </a:solidFill>
                 <a:latin typeface="맑은 고딕"/>
               </a:rPr>
-              <a:t>•  PDB의 GUID</a:t>
+              <a:t>•  NOFILENAMECHECK</a:t>
             </a:r>
           </a:p>
           <a:p>
@@ -8412,7 +9098,7 @@
                 </a:solidFill>
                 <a:latin typeface="맑은 고딕"/>
               </a:rPr>
-              <a:t>•  파일 이름 규칙과 로그 이중화</a:t>
+              <a:t>•  함께 주었을 때의 우선순위</a:t>
             </a:r>
           </a:p>
         </p:txBody>
@@ -8513,7 +9199,7 @@
                 </a:solidFill>
                 <a:latin typeface="맑은 고딕"/>
               </a:rPr>
-              <a:t>mkdir을 한 번도 하지 않았다</a:t>
+              <a:t>이름을 변환하는 방식과 새로 짓는 방식</a:t>
             </a:r>
           </a:p>
         </p:txBody>
@@ -8552,7 +9238,7 @@
                 </a:solidFill>
                 <a:latin typeface="맑은 고딕"/>
               </a:rPr>
-              <a:t>여덟 개 디렉터리</a:t>
+              <a:t>입력이 다르면 설정도 달라진다</a:t>
             </a:r>
           </a:p>
         </p:txBody>
@@ -8591,7 +9277,7 @@
                 </a:solidFill>
                 <a:latin typeface="맑은 고딕"/>
               </a:rPr>
-              <a:t>•  `/u03/app/oracle/oradata/BOSTON/`</a:t>
+              <a:t>•  convert: Primary 이름을 받아 문자열 치환</a:t>
             </a:r>
           </a:p>
           <a:p>
@@ -8607,7 +9293,7 @@
                 </a:solidFill>
                 <a:latin typeface="맑은 고딕"/>
               </a:rPr>
-              <a:t>•  `BOSTON/datafile` · `BOSTON/onlinelog`</a:t>
+              <a:t>•  OMF: Standby 파라미터로 새 이름을 생성</a:t>
             </a:r>
           </a:p>
           <a:p>
@@ -8623,7 +9309,7 @@
                 </a:solidFill>
                 <a:latin typeface="맑은 고딕"/>
               </a:rPr>
-              <a:t>•  `BOSTON/59F036501C3B321DE0633CE110ACEFEB/datafile`</a:t>
+              <a:t>•  Primary 경로가 몇 갈래든 Standby 설정은 한 줄</a:t>
             </a:r>
           </a:p>
           <a:p>
@@ -8639,7 +9325,7 @@
                 </a:solidFill>
                 <a:latin typeface="맑은 고딕"/>
               </a:rPr>
-              <a:t>•  `BOSTON/59F053E76FBD3BA1E0633CE110ACE7E5/datafile`</a:t>
+              <a:t>•  치환 쌍 누락으로 인한 실패가 구조적으로 사라짐</a:t>
             </a:r>
           </a:p>
         </p:txBody>
@@ -8740,7 +9426,7 @@
                 </a:solidFill>
                 <a:latin typeface="맑은 고딕"/>
               </a:rPr>
-              <a:t>왜 DB_UNIQUE_NAME인가</a:t>
+              <a:t>NOFILENAMECHECK가 필요 없는 이유</a:t>
             </a:r>
           </a:p>
         </p:txBody>
@@ -8779,7 +9465,7 @@
                 </a:solidFill>
                 <a:latin typeface="맑은 고딕"/>
               </a:rPr>
-              <a:t>DB_NAME이었다면</a:t>
+              <a:t>이름 검사가 그대로 통과한다</a:t>
             </a:r>
           </a:p>
         </p:txBody>
@@ -8818,7 +9504,7 @@
                 </a:solidFill>
                 <a:latin typeface="맑은 고딕"/>
               </a:rPr>
-              <a:t>•  `DB_NAME`을 썼다면 Standby 디렉터리도 `CHICAGO`</a:t>
+              <a:t>•  DUPLICATE는 원본과 같은 이름이면 RMAN-05001</a:t>
             </a:r>
           </a:p>
           <a:p>
@@ -8834,7 +9520,7 @@
                 </a:solidFill>
                 <a:latin typeface="맑은 고딕"/>
               </a:rPr>
-              <a:t>•  Primary와 구별할 수 없다</a:t>
+              <a:t>•  같은 구조를 쓰는 경로 지정 방식은 검사를 꺼야 함</a:t>
             </a:r>
           </a:p>
           <a:p>
@@ -8850,7 +9536,7 @@
                 </a:solidFill>
                 <a:latin typeface="맑은 고딕"/>
               </a:rPr>
-              <a:t>•  한 서버에 Standby를 여러 개 두면 서로 충돌한다</a:t>
+              <a:t>•  OMF 이름은 원본과 같아질 수 없음</a:t>
             </a:r>
           </a:p>
           <a:p>
@@ -8866,7 +9552,7 @@
                 </a:solidFill>
                 <a:latin typeface="맑은 고딕"/>
               </a:rPr>
-              <a:t>•  `DB_UNIQUE_NAME`만 다르게 주면 자동 분리</a:t>
+              <a:t>•  검사를 켜 둔 상태가 더 안전</a:t>
             </a:r>
           </a:p>
         </p:txBody>
@@ -8967,7 +9653,7 @@
                 </a:solidFill>
                 <a:latin typeface="맑은 고딕"/>
               </a:rPr>
-              <a:t>서른두 자리의 정체</a:t>
+              <a:t>Primary가 OMF가 아니어도 된다</a:t>
             </a:r>
           </a:p>
         </p:txBody>
@@ -9006,7 +9692,7 @@
                 </a:solidFill>
                 <a:latin typeface="맑은 고딕"/>
               </a:rPr>
-              <a:t>PDB의 GUID</a:t>
+              <a:t>Standby 이름은 Standby 설정으로 정해진다</a:t>
             </a:r>
           </a:p>
         </p:txBody>
@@ -9045,7 +9731,7 @@
                 </a:solidFill>
                 <a:latin typeface="맑은 고딕"/>
               </a:rPr>
-              <a:t>•  `V$PDBS.GUID`와 디렉터리 이름이 일치한다</a:t>
+              <a:t>•  일반 파일 Primary에서 OMF Standby 생성 가능</a:t>
             </a:r>
           </a:p>
           <a:p>
@@ -9061,7 +9747,7 @@
                 </a:solidFill>
                 <a:latin typeface="맑은 고딕"/>
               </a:rPr>
-              <a:t>•  `59F0365...` = PDB$SEED / `59F053E...` = CHICAGO_PDB1</a:t>
+              <a:t>•  반대 조합은 OMF 경로를 바꾸는 convert 규칙 필요</a:t>
             </a:r>
           </a:p>
           <a:p>
@@ -9077,7 +9763,7 @@
                 </a:solidFill>
                 <a:latin typeface="맑은 고딕"/>
               </a:rPr>
-              <a:t>•  **Primary와 Standby의 GUID가 완전히 같다**</a:t>
+              <a:t>•  새 Standby 구축은 파일 관리를 정리할 기회</a:t>
             </a:r>
           </a:p>
           <a:p>
@@ -9093,7 +9779,7 @@
                 </a:solidFill>
                 <a:latin typeface="맑은 고딕"/>
               </a:rPr>
-              <a:t>•  이름 대신 GUID를 쓰는 이유 : PDB 이름은 바뀔 수 있다</a:t>
+              <a:t>•  혼합 구성은 역할 전환 뒤를 함께 고려</a:t>
             </a:r>
           </a:p>
         </p:txBody>
@@ -9194,7 +9880,7 @@
                 </a:solidFill>
                 <a:latin typeface="맑은 고딕"/>
               </a:rPr>
-              <a:t>파일 이름 읽는 법</a:t>
+              <a:t>OMF와 convert를 함께 주면</a:t>
             </a:r>
           </a:p>
         </p:txBody>
@@ -9233,7 +9919,7 @@
                 </a:solidFill>
                 <a:latin typeface="맑은 고딕"/>
               </a:rPr>
-              <a:t>o1_mf_sysaux_1c50qfn7_.dbf</a:t>
+              <a:t>RMAN 이름 결정 우선순위</a:t>
             </a:r>
           </a:p>
         </p:txBody>
@@ -9272,7 +9958,7 @@
                 </a:solidFill>
                 <a:latin typeface="맑은 고딕"/>
               </a:rPr>
-              <a:t>•  `o1_mf` OMF 고정 접두어</a:t>
+              <a:t>•  SET NEWNAME</a:t>
             </a:r>
           </a:p>
           <a:p>
@@ -9288,7 +9974,7 @@
                 </a:solidFill>
                 <a:latin typeface="맑은 고딕"/>
               </a:rPr>
-              <a:t>•  `sysaux` 테이블스페이스 이름 (로그는 그룹 번호)</a:t>
+              <a:t>•  CONFIGURE AUXNAME</a:t>
             </a:r>
           </a:p>
           <a:p>
@@ -9304,7 +9990,7 @@
                 </a:solidFill>
                 <a:latin typeface="맑은 고딕"/>
               </a:rPr>
-              <a:t>•  `1c50qfn7` 유일 문자열 — 매번 다르다</a:t>
+              <a:t>•  DB_FILE_NAME_CONVERT</a:t>
             </a:r>
           </a:p>
           <a:p>
@@ -9320,7 +10006,7 @@
                 </a:solidFill>
                 <a:latin typeface="맑은 고딕"/>
               </a:rPr>
-              <a:t>•  `.dbf` 데이터 / `.log` 로그 / `.tmp` 임시</a:t>
+              <a:t>•  DB_CREATE_FILE_DEST (가장 낮음)</a:t>
             </a:r>
           </a:p>
           <a:p>
@@ -9336,7 +10022,7 @@
                 </a:solidFill>
                 <a:latin typeface="맑은 고딕"/>
               </a:rPr>
-              <a:t>•  **파일 번호는 이름에 없다** → `V$DATAFILE` 조회</a:t>
+              <a:t>•  convert가 남아 있으면 OMF 이름이 붙지 않음</a:t>
             </a:r>
           </a:p>
         </p:txBody>
@@ -9437,7 +10123,7 @@
                 </a:solidFill>
                 <a:latin typeface="맑은 고딕"/>
               </a:rPr>
-              <a:t>뜻밖의 결과</a:t>
+              <a:t>같은 서버에 두 번째 Standby 추가</a:t>
             </a:r>
           </a:p>
         </p:txBody>
@@ -9476,7 +10162,7 @@
                 </a:solidFill>
                 <a:latin typeface="맑은 고딕"/>
               </a:rPr>
-              <a:t>로그가 두 벌이다</a:t>
+              <a:t>실무 시나리오</a:t>
             </a:r>
           </a:p>
         </p:txBody>
@@ -9515,7 +10201,7 @@
                 </a:solidFill>
                 <a:latin typeface="맑은 고딕"/>
               </a:rPr>
-              <a:t>•  `V$LOGFILE` **14행** — 5장에서는 7행</a:t>
+              <a:t>•  최상위 경로는 같게, DB_UNIQUE_NAME만 다르게</a:t>
             </a:r>
           </a:p>
           <a:p>
@@ -9531,7 +10217,7 @@
                 </a:solidFill>
                 <a:latin typeface="맑은 고딕"/>
               </a:rPr>
-              <a:t>•  그룹은 7개 그대로, 멤버가 2개씩</a:t>
+              <a:t>•  파일은 BOSTON, BOSTON2로 자동 분리</a:t>
             </a:r>
           </a:p>
           <a:p>
@@ -9547,7 +10233,7 @@
                 </a:solidFill>
                 <a:latin typeface="맑은 고딕"/>
               </a:rPr>
-              <a:t>•  한 벌은 `DB_CREATE_FILE_DEST`, 다른 한 벌은 **FRA**</a:t>
+              <a:t>•  LOG_ARCHIVE_CONFIG 목록에 두 Standby 모두</a:t>
             </a:r>
           </a:p>
           <a:p>
@@ -9563,7 +10249,7 @@
                 </a:solidFill>
                 <a:latin typeface="맑은 고딕"/>
               </a:rPr>
-              <a:t>•  조건 : `DB_CREATE_ONLINE_LOG_DEST_n` 미지정 + FRA 설정</a:t>
+              <a:t>•  리스너 정적 등록과 서비스 이름은 각각 필요</a:t>
             </a:r>
           </a:p>
         </p:txBody>
@@ -9664,7 +10350,7 @@
                 </a:solidFill>
                 <a:latin typeface="맑은 고딕"/>
               </a:rPr>
-              <a:t>6.7</a:t>
+              <a:t>6.6</a:t>
             </a:r>
           </a:p>
         </p:txBody>
@@ -9703,7 +10389,7 @@
                 </a:solidFill>
                 <a:latin typeface="맑은 고딕"/>
               </a:rPr>
-              <a:t>컨트롤 파일 — OMF의 예외</a:t>
+              <a:t>OMF 방식 DUPLICATE의 흐름과 차이</a:t>
             </a:r>
           </a:p>
         </p:txBody>
@@ -9786,7 +10472,7 @@
                 </a:solidFill>
                 <a:latin typeface="맑은 고딕"/>
               </a:rPr>
-              <a:t>•  상속된 CONTROL_FILES</a:t>
+              <a:t>•  Standby 서버 준비</a:t>
             </a:r>
           </a:p>
           <a:p>
@@ -9802,7 +10488,7 @@
                 </a:solidFill>
                 <a:latin typeface="맑은 고딕"/>
               </a:rPr>
-              <a:t>•  왜 OMF가 이기지 못하는가</a:t>
+              <a:t>•  SPFILE 절에서 달라지는 것</a:t>
             </a:r>
           </a:p>
           <a:p>
@@ -9818,7 +10504,7 @@
                 </a:solidFill>
                 <a:latin typeface="맑은 고딕"/>
               </a:rPr>
-              <a:t>•  교정 절차</a:t>
+              <a:t>•  실패 양상과 복제 후 점검</a:t>
             </a:r>
           </a:p>
         </p:txBody>
@@ -9919,7 +10605,7 @@
                 </a:solidFill>
                 <a:latin typeface="맑은 고딕"/>
               </a:rPr>
-              <a:t>Standby에 Chicago 디렉터리가</a:t>
+              <a:t>Standby 서버 준비</a:t>
             </a:r>
           </a:p>
         </p:txBody>
@@ -9958,7 +10644,7 @@
                 </a:solidFill>
                 <a:latin typeface="맑은 고딕"/>
               </a:rPr>
-              <a:t>컨트롤 파일만 예외다</a:t>
+              <a:t>미리 만들 디렉터리가 최상위 둘로 줄어든다</a:t>
             </a:r>
           </a:p>
         </p:txBody>
@@ -9997,7 +10683,7 @@
                 </a:solidFill>
                 <a:latin typeface="맑은 고딕"/>
               </a:rPr>
-              <a:t>•  `/u03/app/oracle/oradata/Chicago/control01.ctl`</a:t>
+              <a:t>•  OMF 위치와 FRA 최상위 경로만 준비</a:t>
             </a:r>
           </a:p>
           <a:p>
@@ -10013,7 +10699,7 @@
                 </a:solidFill>
                 <a:latin typeface="맑은 고딕"/>
               </a:rPr>
-              <a:t>•  `/u03/app/oracle/fast_recovery_area/CHICAGO/control02.ctl`</a:t>
+              <a:t>•  BOSTON, datafile, PDB GUID는 복제 중 생성</a:t>
             </a:r>
           </a:p>
           <a:p>
@@ -10029,7 +10715,7 @@
                 </a:solidFill>
                 <a:latin typeface="맑은 고딕"/>
               </a:rPr>
-              <a:t>•  OMF 이름 규칙도 적용되지 않았다</a:t>
+              <a:t>•  adump처럼 OMF 밖의 디렉터리는 여전히 수동</a:t>
             </a:r>
           </a:p>
           <a:p>
@@ -10045,7 +10731,7 @@
                 </a:solidFill>
                 <a:latin typeface="맑은 고딕"/>
               </a:rPr>
-              <a:t>•  파일은 실제로 boston 서버에 있다 (각 19,021,824바이트)</a:t>
+              <a:t>•  초기 pfile에 db_create_file_dest 한 줄 추가</a:t>
             </a:r>
           </a:p>
         </p:txBody>
@@ -10146,7 +10832,7 @@
                 </a:solidFill>
                 <a:latin typeface="맑은 고딕"/>
               </a:rPr>
-              <a:t>원인은 파라미터 상속</a:t>
+              <a:t>SPFILE 절에서 달라지는 것</a:t>
             </a:r>
           </a:p>
         </p:txBody>
@@ -10185,7 +10871,7 @@
                 </a:solidFill>
                 <a:latin typeface="맑은 고딕"/>
               </a:rPr>
-              <a:t>OMF가 개입할 여지가 없다</a:t>
+              <a:t>빠지는 줄과 들어가는 줄</a:t>
             </a:r>
           </a:p>
         </p:txBody>
@@ -10224,7 +10910,7 @@
                 </a:solidFill>
                 <a:latin typeface="맑은 고딕"/>
               </a:rPr>
-              <a:t>•  `CONTROL_FILES`는 Primary spfile에 값이 있다</a:t>
+              <a:t>•  빠짐: PARAMETER_VALUE_CONVERT, convert 2종</a:t>
             </a:r>
           </a:p>
           <a:p>
@@ -10240,7 +10926,7 @@
                 </a:solidFill>
                 <a:latin typeface="맑은 고딕"/>
               </a:rPr>
-              <a:t>•  SPFILE 절이 그 값을 그대로 가져온다</a:t>
+              <a:t>•  빠짐: NOFILENAMECHECK</a:t>
             </a:r>
           </a:p>
           <a:p>
@@ -10256,7 +10942,7 @@
                 </a:solidFill>
                 <a:latin typeface="맑은 고딕"/>
               </a:rPr>
-              <a:t>•  스크립트에 `set control_files`도 `parameter_value_convert`도 없다</a:t>
+              <a:t>•  추가: DB_CREATE_FILE_DEST, FRA 위치와 크기</a:t>
             </a:r>
           </a:p>
           <a:p>
@@ -10272,7 +10958,23 @@
                 </a:solidFill>
                 <a:latin typeface="맑은 고딕"/>
               </a:rPr>
-              <a:t>•  **`CONTROL_FILES`에 값이 있으면 OMF는 개입하지 않는다**</a:t>
+              <a:t>•  유지 권장: SET CONTROL_FILES</a:t>
+            </a:r>
+          </a:p>
+          <a:p>
+            <a:pPr algn="l">
+              <a:spcAft>
+                <a:spcPts val="1000"/>
+              </a:spcAft>
+            </a:pPr>
+            <a:r>
+              <a:rPr sz="1700" b="0">
+                <a:solidFill>
+                  <a:srgbClr val="222222"/>
+                </a:solidFill>
+                <a:latin typeface="맑은 고딕"/>
+              </a:rPr>
+              <a:t>•  적지 않은 값은 Primary spfile 값이 그대로</a:t>
             </a:r>
           </a:p>
         </p:txBody>
@@ -10373,7 +11075,7 @@
                 </a:solidFill>
                 <a:latin typeface="맑은 고딕"/>
               </a:rPr>
-              <a:t>그대로 두면</a:t>
+              <a:t>실패 양상의 차이</a:t>
             </a:r>
           </a:p>
         </p:txBody>
@@ -10412,7 +11114,7 @@
                 </a:solidFill>
                 <a:latin typeface="맑은 고딕"/>
               </a:rPr>
-              <a:t>세 가지 문제</a:t>
+              <a:t>오류가 나는 경우와 조용히 지나가는 경우</a:t>
             </a:r>
           </a:p>
         </p:txBody>
@@ -10451,7 +11153,7 @@
                 </a:solidFill>
                 <a:latin typeface="맑은 고딕"/>
               </a:rPr>
-              <a:t>•  **오해** — 운영자가 Primary 잔재로 오인해 지울 수 있다</a:t>
+              <a:t>•  없는 OMF 경로: NOMOUNT 실패, RMAN은 ORA-01034</a:t>
             </a:r>
           </a:p>
           <a:p>
@@ -10467,7 +11169,7 @@
                 </a:solidFill>
                 <a:latin typeface="맑은 고딕"/>
               </a:rPr>
-              <a:t>•  **정리 누락** — 폐기 시 BOSTON만 지우면 컨트롤 파일이 남는다</a:t>
+              <a:t>•  OMF도 convert도 없음: RMAN-05538 후 05001</a:t>
             </a:r>
           </a:p>
           <a:p>
@@ -10483,7 +11185,7 @@
                 </a:solidFill>
                 <a:latin typeface="맑은 고딕"/>
               </a:rPr>
-              <a:t>•  **일관성 붕괴** — OMF를 쓰기로 했으면 예외가 없는 편이 낫다</a:t>
+              <a:t>•  convert 잔존: 오류 없이 일반 이름으로 생성</a:t>
             </a:r>
           </a:p>
           <a:p>
@@ -10499,7 +11201,7 @@
                 </a:solidFill>
                 <a:latin typeface="맑은 고딕"/>
               </a:rPr>
-              <a:t>•  성능에는 영향이 없다</a:t>
+              <a:t>•  CONTROL_FILES 미지정: 오류 없이 Primary 경로</a:t>
             </a:r>
           </a:p>
         </p:txBody>
@@ -10600,7 +11302,7 @@
                 </a:solidFill>
                 <a:latin typeface="맑은 고딕"/>
               </a:rPr>
-              <a:t>이 장의 구성 (Agenda)</a:t>
+              <a:t>Agenda</a:t>
             </a:r>
           </a:p>
         </p:txBody>
@@ -10639,7 +11341,7 @@
                 </a:solidFill>
                 <a:latin typeface="맑은 고딕"/>
               </a:rPr>
-              <a:t>•  6.2  OMF란 무엇인가</a:t>
+              <a:t>•  6.2  OMF가 해결하는 문제  /  6.3  OMF 파라미터와 배치 규칙</a:t>
             </a:r>
           </a:p>
           <a:p>
@@ -10655,7 +11357,7 @@
                 </a:solidFill>
                 <a:latin typeface="맑은 고딕"/>
               </a:rPr>
-              <a:t>•  6.3  스크립트가 어떻게 달라지는가</a:t>
+              <a:t>•  6.4  OMF 파일 이름 규칙</a:t>
             </a:r>
           </a:p>
           <a:p>
@@ -10671,7 +11373,7 @@
                 </a:solidFill>
                 <a:latin typeface="맑은 고딕"/>
               </a:rPr>
-              <a:t>•  6.4  실패 두 가지</a:t>
+              <a:t>•  6.5  convert 파라미터가 필요 없는 이유</a:t>
             </a:r>
           </a:p>
           <a:p>
@@ -10687,7 +11389,7 @@
                 </a:solidFill>
                 <a:latin typeface="맑은 고딕"/>
               </a:rPr>
-              <a:t>•  6.5  성공한 OMF DUPLICATE</a:t>
+              <a:t>•  6.6  OMF 방식 DUPLICATE  /  6.7  컨트롤 파일과 CONTROL_FILES</a:t>
             </a:r>
           </a:p>
           <a:p>
@@ -10703,7 +11405,7 @@
                 </a:solidFill>
                 <a:latin typeface="맑은 고딕"/>
               </a:rPr>
-              <a:t>•  6.6  OMF가 만든 구조</a:t>
+              <a:t>•  6.8  ASM  /  6.9  STANDBY_FILE_MANAGEMENT=AUTO</a:t>
             </a:r>
           </a:p>
           <a:p>
@@ -10719,39 +11421,7 @@
                 </a:solidFill>
                 <a:latin typeface="맑은 고딕"/>
               </a:rPr>
-              <a:t>•  6.7  컨트롤 파일 — OMF의 예외</a:t>
-            </a:r>
-          </a:p>
-          <a:p>
-            <a:pPr algn="l">
-              <a:spcAft>
-                <a:spcPts val="1000"/>
-              </a:spcAft>
-            </a:pPr>
-            <a:r>
-              <a:rPr sz="1600" b="0">
-                <a:solidFill>
-                  <a:srgbClr val="222222"/>
-                </a:solidFill>
-                <a:latin typeface="맑은 고딕"/>
-              </a:rPr>
-              <a:t>•  6.8  가이드 후속 단계 검증</a:t>
-            </a:r>
-          </a:p>
-          <a:p>
-            <a:pPr algn="l">
-              <a:spcAft>
-                <a:spcPts val="1000"/>
-              </a:spcAft>
-            </a:pPr>
-            <a:r>
-              <a:rPr sz="1600" b="0">
-                <a:solidFill>
-                  <a:srgbClr val="222222"/>
-                </a:solidFill>
-                <a:latin typeface="맑은 고딕"/>
-              </a:rPr>
-              <a:t>•  6.9  두 방식의 비교</a:t>
+              <a:t>•  6.10  두 방식의 비교와 선택  /  6.11  운영 시 주의점</a:t>
             </a:r>
           </a:p>
         </p:txBody>
@@ -10852,7 +11522,7 @@
                 </a:solidFill>
                 <a:latin typeface="맑은 고딕"/>
               </a:rPr>
-              <a:t>교정 — 순서가 전부다</a:t>
+              <a:t>복제 직후 파일 배치 점검</a:t>
             </a:r>
           </a:p>
         </p:txBody>
@@ -10891,7 +11561,7 @@
                 </a:solidFill>
                 <a:latin typeface="맑은 고딕"/>
               </a:rPr>
-              <a:t>네 단계</a:t>
+              <a:t>Best Practice</a:t>
             </a:r>
           </a:p>
         </p:txBody>
@@ -10930,7 +11600,7 @@
                 </a:solidFill>
                 <a:latin typeface="맑은 고딕"/>
               </a:rPr>
-              <a:t>•  ① `mkdir -p .../BOSTON/controlfile` (양쪽)</a:t>
+              <a:t>•  데이터, 임시, 로그, 컨트롤 파일 이름을 한 번에 조회</a:t>
             </a:r>
           </a:p>
           <a:p>
@@ -10946,7 +11616,7 @@
                 </a:solidFill>
                 <a:latin typeface="맑은 고딕"/>
               </a:rPr>
-              <a:t>•  ② `ALTER SYSTEM SET control_files=... SCOPE=SPFILE`</a:t>
+              <a:t>•  모두 기본위치/BOSTON 아래인지 확인</a:t>
             </a:r>
           </a:p>
           <a:p>
@@ -10962,7 +11632,7 @@
                 </a:solidFill>
                 <a:latin typeface="맑은 고딕"/>
               </a:rPr>
-              <a:t>•  ③ 적용 중지 → `SHUTDOWN IMMEDIATE`</a:t>
+              <a:t>•  convert 값이 비어 있는지 확인</a:t>
             </a:r>
           </a:p>
           <a:p>
@@ -10978,7 +11648,7 @@
                 </a:solidFill>
                 <a:latin typeface="맑은 고딕"/>
               </a:rPr>
-              <a:t>•  ④ `mv`로 파일 이동 → `STARTUP MOUNT` → ADG 복귀</a:t>
+              <a:t>•  V$LOG.MEMBERS로 다중화 확인</a:t>
             </a:r>
           </a:p>
           <a:p>
@@ -10994,7 +11664,7 @@
                 </a:solidFill>
                 <a:latin typeface="맑은 고딕"/>
               </a:rPr>
-              <a:t>•  순서를 어기면 `ORA-00205`</a:t>
+              <a:t>•  Standby 서버에 Primary 이름 디렉터리가 생겼는지</a:t>
             </a:r>
           </a:p>
         </p:txBody>
@@ -11026,7 +11696,7 @@
         <p:spPr>
           <a:xfrm>
             <a:off x="0" y="0"/>
-            <a:ext cx="12191695" cy="1005840"/>
+            <a:ext cx="12191695" cy="6858000"/>
           </a:xfrm>
           <a:prstGeom prst="rect">
             <a:avLst/>
@@ -11069,8 +11739,8 @@
         </p:nvSpPr>
         <p:spPr>
           <a:xfrm>
-            <a:off x="548640" y="91440"/>
-            <a:ext cx="10972800" cy="777240"/>
+            <a:off x="822960" y="2011680"/>
+            <a:ext cx="10515600" cy="1097280"/>
           </a:xfrm>
           <a:prstGeom prst="rect">
             <a:avLst/>
@@ -11089,13 +11759,13 @@
               </a:spcAft>
             </a:pPr>
             <a:r>
-              <a:rPr sz="2600" b="1">
+              <a:rPr sz="4000" b="1">
                 <a:solidFill>
                   <a:srgbClr val="FFFFFF"/>
                 </a:solidFill>
                 <a:latin typeface="맑은 고딕"/>
               </a:rPr>
-              <a:t>근본 해법</a:t>
+              <a:t>6.7</a:t>
             </a:r>
           </a:p>
         </p:txBody>
@@ -11108,8 +11778,8 @@
         </p:nvSpPr>
         <p:spPr>
           <a:xfrm>
-            <a:off x="640080" y="1078992"/>
-            <a:ext cx="10881360" cy="457200"/>
+            <a:off x="822960" y="3017520"/>
+            <a:ext cx="10515600" cy="914400"/>
           </a:xfrm>
           <a:prstGeom prst="rect">
             <a:avLst/>
@@ -11128,27 +11798,71 @@
               </a:spcAft>
             </a:pPr>
             <a:r>
-              <a:rPr sz="1500" b="0">
-                <a:solidFill>
-                  <a:srgbClr val="5A6672"/>
-                </a:solidFill>
-                <a:latin typeface="맑은 고딕"/>
-              </a:rPr>
-              <a:t>스크립트에 한 줄</a:t>
-            </a:r>
-          </a:p>
-        </p:txBody>
-      </p:sp>
-      <p:sp>
-        <p:nvSpPr>
-          <p:cNvPr id="5" name="TextBox 4"/>
+              <a:rPr sz="2800" b="1">
+                <a:solidFill>
+                  <a:srgbClr val="FFFFFF"/>
+                </a:solidFill>
+                <a:latin typeface="맑은 고딕"/>
+              </a:rPr>
+              <a:t>컨트롤 파일 위치와 CONTROL_FILES</a:t>
+            </a:r>
+          </a:p>
+        </p:txBody>
+      </p:sp>
+      <p:sp>
+        <p:nvSpPr>
+          <p:cNvPr id="5" name="Rectangle 4"/>
+          <p:cNvSpPr/>
+          <p:nvPr/>
+        </p:nvSpPr>
+        <p:spPr>
+          <a:xfrm>
+            <a:off x="822960" y="4114800"/>
+            <a:ext cx="5486400" cy="54864"/>
+          </a:xfrm>
+          <a:prstGeom prst="rect">
+            <a:avLst/>
+          </a:prstGeom>
+          <a:solidFill>
+            <a:srgbClr val="FFFFFF"/>
+          </a:solidFill>
+          <a:ln>
+            <a:noFill/>
+          </a:ln>
+          <a:effectLst/>
+        </p:spPr>
+        <p:style>
+          <a:lnRef idx="1">
+            <a:schemeClr val="accent1"/>
+          </a:lnRef>
+          <a:fillRef idx="3">
+            <a:schemeClr val="accent1"/>
+          </a:fillRef>
+          <a:effectRef idx="2">
+            <a:schemeClr val="accent1"/>
+          </a:effectRef>
+          <a:fontRef idx="minor">
+            <a:schemeClr val="lt1"/>
+          </a:fontRef>
+        </p:style>
+        <p:txBody>
+          <a:bodyPr rtlCol="0" anchor="ctr"/>
+          <a:lstStyle/>
+          <a:p>
+            <a:pPr algn="ctr"/>
+          </a:p>
+        </p:txBody>
+      </p:sp>
+      <p:sp>
+        <p:nvSpPr>
+          <p:cNvPr id="6" name="TextBox 5"/>
           <p:cNvSpPr txBox="1"/>
           <p:nvPr/>
         </p:nvSpPr>
         <p:spPr>
           <a:xfrm>
-            <a:off x="640080" y="1737360"/>
-            <a:ext cx="10881360" cy="4754880"/>
+            <a:off x="822960" y="4297680"/>
+            <a:ext cx="10058400" cy="2011680"/>
           </a:xfrm>
           <a:prstGeom prst="rect">
             <a:avLst/>
@@ -11163,65 +11877,49 @@
           <a:p>
             <a:pPr algn="l">
               <a:spcAft>
-                <a:spcPts val="1000"/>
-              </a:spcAft>
-            </a:pPr>
-            <a:r>
-              <a:rPr sz="1700" b="0">
-                <a:solidFill>
-                  <a:srgbClr val="222222"/>
-                </a:solidFill>
-                <a:latin typeface="맑은 고딕"/>
-              </a:rPr>
-              <a:t>•  `set control_files = '.../BOSTON/controlfile/control01.ctl', '...'`</a:t>
-            </a:r>
-          </a:p>
-          <a:p>
-            <a:pPr algn="l">
-              <a:spcAft>
-                <a:spcPts val="1000"/>
-              </a:spcAft>
-            </a:pPr>
-            <a:r>
-              <a:rPr sz="1700" b="0">
-                <a:solidFill>
-                  <a:srgbClr val="222222"/>
-                </a:solidFill>
-                <a:latin typeface="맑은 고딕"/>
-              </a:rPr>
-              <a:t>•  매번 사후 교정하는 것보다 낫다</a:t>
-            </a:r>
-          </a:p>
-          <a:p>
-            <a:pPr algn="l">
-              <a:spcAft>
-                <a:spcPts val="1000"/>
-              </a:spcAft>
-            </a:pPr>
-            <a:r>
-              <a:rPr sz="1700" b="0">
-                <a:solidFill>
-                  <a:srgbClr val="222222"/>
-                </a:solidFill>
-                <a:latin typeface="맑은 고딕"/>
-              </a:rPr>
-              <a:t>•  컨트롤 파일만 OMF 이름 규칙을 따르지 않는다</a:t>
-            </a:r>
-          </a:p>
-          <a:p>
-            <a:pPr algn="l">
-              <a:spcAft>
-                <a:spcPts val="1000"/>
-              </a:spcAft>
-            </a:pPr>
-            <a:r>
-              <a:rPr sz="1700" b="0">
-                <a:solidFill>
-                  <a:srgbClr val="222222"/>
-                </a:solidFill>
-                <a:latin typeface="맑은 고딕"/>
-              </a:rPr>
-              <a:t>•  그 디렉터리는 미리 만들어야 한다 — OMF라도 mkdir이 완전히 사라지진 않는다</a:t>
+                <a:spcPts val="800"/>
+              </a:spcAft>
+            </a:pPr>
+            <a:r>
+              <a:rPr sz="1600" b="0">
+                <a:solidFill>
+                  <a:srgbClr val="FFFFFF"/>
+                </a:solidFill>
+                <a:latin typeface="맑은 고딕"/>
+              </a:rPr>
+              <a:t>•  OMF가 컨트롤 파일 이름을 정하는 조건</a:t>
+            </a:r>
+          </a:p>
+          <a:p>
+            <a:pPr algn="l">
+              <a:spcAft>
+                <a:spcPts val="800"/>
+              </a:spcAft>
+            </a:pPr>
+            <a:r>
+              <a:rPr sz="1600" b="0">
+                <a:solidFill>
+                  <a:srgbClr val="FFFFFF"/>
+                </a:solidFill>
+                <a:latin typeface="맑은 고딕"/>
+              </a:rPr>
+              <a:t>•  SPFILE 절 상속 문제와 예방</a:t>
+            </a:r>
+          </a:p>
+          <a:p>
+            <a:pPr algn="l">
+              <a:spcAft>
+                <a:spcPts val="800"/>
+              </a:spcAft>
+            </a:pPr>
+            <a:r>
+              <a:rPr sz="1600" b="0">
+                <a:solidFill>
+                  <a:srgbClr val="FFFFFF"/>
+                </a:solidFill>
+                <a:latin typeface="맑은 고딕"/>
+              </a:rPr>
+              <a:t>•  옮기는 순서</a:t>
             </a:r>
           </a:p>
         </p:txBody>
@@ -11253,7 +11951,7 @@
         <p:spPr>
           <a:xfrm>
             <a:off x="0" y="0"/>
-            <a:ext cx="12191695" cy="6858000"/>
+            <a:ext cx="12191695" cy="1005840"/>
           </a:xfrm>
           <a:prstGeom prst="rect">
             <a:avLst/>
@@ -11296,8 +11994,8 @@
         </p:nvSpPr>
         <p:spPr>
           <a:xfrm>
-            <a:off x="822960" y="2011680"/>
-            <a:ext cx="10515600" cy="1097280"/>
+            <a:off x="548640" y="91440"/>
+            <a:ext cx="10972800" cy="777240"/>
           </a:xfrm>
           <a:prstGeom prst="rect">
             <a:avLst/>
@@ -11316,13 +12014,13 @@
               </a:spcAft>
             </a:pPr>
             <a:r>
-              <a:rPr sz="4000" b="1">
+              <a:rPr sz="2600" b="1">
                 <a:solidFill>
                   <a:srgbClr val="FFFFFF"/>
                 </a:solidFill>
                 <a:latin typeface="맑은 고딕"/>
               </a:rPr>
-              <a:t>6.9</a:t>
+              <a:t>OMF가 컨트롤 파일 이름을 정하는 조건</a:t>
             </a:r>
           </a:p>
         </p:txBody>
@@ -11335,8 +12033,8 @@
         </p:nvSpPr>
         <p:spPr>
           <a:xfrm>
-            <a:off x="822960" y="3017520"/>
-            <a:ext cx="10515600" cy="914400"/>
+            <a:off x="640080" y="1078992"/>
+            <a:ext cx="10881360" cy="457200"/>
           </a:xfrm>
           <a:prstGeom prst="rect">
             <a:avLst/>
@@ -11355,71 +12053,27 @@
               </a:spcAft>
             </a:pPr>
             <a:r>
-              <a:rPr sz="2800" b="1">
-                <a:solidFill>
-                  <a:srgbClr val="FFFFFF"/>
-                </a:solidFill>
-                <a:latin typeface="맑은 고딕"/>
-              </a:rPr>
-              <a:t>두 방식의 비교</a:t>
-            </a:r>
-          </a:p>
-        </p:txBody>
-      </p:sp>
-      <p:sp>
-        <p:nvSpPr>
-          <p:cNvPr id="5" name="Rectangle 4"/>
-          <p:cNvSpPr/>
-          <p:nvPr/>
-        </p:nvSpPr>
-        <p:spPr>
-          <a:xfrm>
-            <a:off x="822960" y="4114800"/>
-            <a:ext cx="5486400" cy="54864"/>
-          </a:xfrm>
-          <a:prstGeom prst="rect">
-            <a:avLst/>
-          </a:prstGeom>
-          <a:solidFill>
-            <a:srgbClr val="FFFFFF"/>
-          </a:solidFill>
-          <a:ln>
-            <a:noFill/>
-          </a:ln>
-          <a:effectLst/>
-        </p:spPr>
-        <p:style>
-          <a:lnRef idx="1">
-            <a:schemeClr val="accent1"/>
-          </a:lnRef>
-          <a:fillRef idx="3">
-            <a:schemeClr val="accent1"/>
-          </a:fillRef>
-          <a:effectRef idx="2">
-            <a:schemeClr val="accent1"/>
-          </a:effectRef>
-          <a:fontRef idx="minor">
-            <a:schemeClr val="lt1"/>
-          </a:fontRef>
-        </p:style>
-        <p:txBody>
-          <a:bodyPr rtlCol="0" anchor="ctr"/>
-          <a:lstStyle/>
-          <a:p>
-            <a:pPr algn="ctr"/>
-          </a:p>
-        </p:txBody>
-      </p:sp>
-      <p:sp>
-        <p:nvSpPr>
-          <p:cNvPr id="6" name="TextBox 5"/>
+              <a:rPr sz="1500" b="0">
+                <a:solidFill>
+                  <a:srgbClr val="5A6672"/>
+                </a:solidFill>
+                <a:latin typeface="맑은 고딕"/>
+              </a:rPr>
+              <a:t>CONTROL_FILES가 비어 있을 때뿐</a:t>
+            </a:r>
+          </a:p>
+        </p:txBody>
+      </p:sp>
+      <p:sp>
+        <p:nvSpPr>
+          <p:cNvPr id="5" name="TextBox 4"/>
           <p:cNvSpPr txBox="1"/>
           <p:nvPr/>
         </p:nvSpPr>
         <p:spPr>
           <a:xfrm>
-            <a:off x="822960" y="4297680"/>
-            <a:ext cx="10058400" cy="2011680"/>
+            <a:off x="640080" y="1737360"/>
+            <a:ext cx="10881360" cy="4754880"/>
           </a:xfrm>
           <a:prstGeom prst="rect">
             <a:avLst/>
@@ -11434,49 +12088,49 @@
           <a:p>
             <a:pPr algn="l">
               <a:spcAft>
-                <a:spcPts val="800"/>
-              </a:spcAft>
-            </a:pPr>
-            <a:r>
-              <a:rPr sz="1600" b="0">
-                <a:solidFill>
-                  <a:srgbClr val="FFFFFF"/>
-                </a:solidFill>
-                <a:latin typeface="맑은 고딕"/>
-              </a:rPr>
-              <a:t>•  열두 항목 대조</a:t>
-            </a:r>
-          </a:p>
-          <a:p>
-            <a:pPr algn="l">
-              <a:spcAft>
-                <a:spcPts val="800"/>
-              </a:spcAft>
-            </a:pPr>
-            <a:r>
-              <a:rPr sz="1600" b="0">
-                <a:solidFill>
-                  <a:srgbClr val="FFFFFF"/>
-                </a:solidFill>
-                <a:latin typeface="맑은 고딕"/>
-              </a:rPr>
-              <a:t>•  선택 기준</a:t>
-            </a:r>
-          </a:p>
-          <a:p>
-            <a:pPr algn="l">
-              <a:spcAft>
-                <a:spcPts val="800"/>
-              </a:spcAft>
-            </a:pPr>
-            <a:r>
-              <a:rPr sz="1600" b="0">
-                <a:solidFill>
-                  <a:srgbClr val="FFFFFF"/>
-                </a:solidFill>
-                <a:latin typeface="맑은 고딕"/>
-              </a:rPr>
-              <a:t>•  7장 이후의 기준 상태</a:t>
+                <a:spcPts val="1000"/>
+              </a:spcAft>
+            </a:pPr>
+            <a:r>
+              <a:rPr sz="1700" b="0">
+                <a:solidFill>
+                  <a:srgbClr val="222222"/>
+                </a:solidFill>
+                <a:latin typeface="맑은 고딕"/>
+              </a:rPr>
+              <a:t>•  값이 있으면 DB_CREATE_FILE_DEST보다 우선</a:t>
+            </a:r>
+          </a:p>
+          <a:p>
+            <a:pPr algn="l">
+              <a:spcAft>
+                <a:spcPts val="1000"/>
+              </a:spcAft>
+            </a:pPr>
+            <a:r>
+              <a:rPr sz="1700" b="0">
+                <a:solidFill>
+                  <a:srgbClr val="222222"/>
+                </a:solidFill>
+                <a:latin typeface="맑은 고딕"/>
+              </a:rPr>
+              <a:t>•  OMF로 만들면 이름이 spfile에 자동 기록</a:t>
+            </a:r>
+          </a:p>
+          <a:p>
+            <a:pPr algn="l">
+              <a:spcAft>
+                <a:spcPts val="1000"/>
+              </a:spcAft>
+            </a:pPr>
+            <a:r>
+              <a:rPr sz="1700" b="0">
+                <a:solidFill>
+                  <a:srgbClr val="222222"/>
+                </a:solidFill>
+                <a:latin typeface="맑은 고딕"/>
+              </a:rPr>
+              <a:t>•  정적 파라미터, SCOPE=SPFILE과 재기동 필요</a:t>
             </a:r>
           </a:p>
         </p:txBody>
@@ -11577,7 +12231,7 @@
                 </a:solidFill>
                 <a:latin typeface="맑은 고딕"/>
               </a:rPr>
-              <a:t>가이드의 후속 단계</a:t>
+              <a:t>SPFILE 절의 상속이 만드는 문제</a:t>
             </a:r>
           </a:p>
         </p:txBody>
@@ -11616,7 +12270,7 @@
                 </a:solidFill>
                 <a:latin typeface="맑은 고딕"/>
               </a:rPr>
-              <a:t>ORA-32002가 다행이다</a:t>
+              <a:t>데이터 파일은 BOSTON, 컨트롤 파일만 Chicago</a:t>
             </a:r>
           </a:p>
         </p:txBody>
@@ -11655,7 +12309,7 @@
                 </a:solidFill>
                 <a:latin typeface="맑은 고딕"/>
               </a:rPr>
-              <a:t>•  `create spfile from pfile='.../initboston.ora'` → **ORA-32002**</a:t>
+              <a:t>•  SPFILE 절이 Primary의 CONTROL_FILES를 복사</a:t>
             </a:r>
           </a:p>
           <a:p>
@@ -11671,7 +12325,7 @@
                 </a:solidFill>
                 <a:latin typeface="맑은 고딕"/>
               </a:rPr>
-              <a:t>•  성공했다면 세 줄짜리 pfile로 spfile을 덮어썼을 것</a:t>
+              <a:t>•  SET CONTROL_FILES가 없으면 그 경로에 생성</a:t>
             </a:r>
           </a:p>
           <a:p>
@@ -11687,7 +12341,7 @@
                 </a:solidFill>
                 <a:latin typeface="맑은 고딕"/>
               </a:rPr>
-              <a:t>•  사라졌을 값 : `db_unique_name` · `fal_server` · `log_archive_config` · `standby_file_management` · `control_files` 등</a:t>
+              <a:t>•  오류 없이 복제 성공으로 끝남</a:t>
             </a:r>
           </a:p>
           <a:p>
@@ -11703,7 +12357,7 @@
                 </a:solidFill>
                 <a:latin typeface="맑은 고딕"/>
               </a:rPr>
-              <a:t>•  이어지는 `shutdown` / `startup`까지 갔다면 구성이 해체된다</a:t>
+              <a:t>•  잔재로 오인해 지우면 Standby가 마운트 불가</a:t>
             </a:r>
           </a:p>
         </p:txBody>
@@ -11804,7 +12458,7 @@
                 </a:solidFill>
                 <a:latin typeface="맑은 고딕"/>
               </a:rPr>
-              <a:t>열두 항목 대조</a:t>
+              <a:t>처음부터 피하는 방법</a:t>
             </a:r>
           </a:p>
         </p:txBody>
@@ -11843,7 +12497,7 @@
                 </a:solidFill>
                 <a:latin typeface="맑은 고딕"/>
               </a:rPr>
-              <a:t>무엇이 같고 무엇이 다른가</a:t>
+              <a:t>SPFILE 절에 Standby 경로를 직접 적는다</a:t>
             </a:r>
           </a:p>
         </p:txBody>
@@ -11882,7 +12536,7 @@
                 </a:solidFill>
                 <a:latin typeface="맑은 고딕"/>
               </a:rPr>
-              <a:t>•  다른 것 : 배치 지시 · 디렉터리 이름 · PDB 디렉터리 · 파일 이름 · 로그 멤버 수 · 컨트롤 파일 처리</a:t>
+              <a:t>•  SET CONTROL_FILES로 BOSTON 계층 경로 지정</a:t>
             </a:r>
           </a:p>
           <a:p>
@@ -11898,7 +12552,7 @@
                 </a:solidFill>
                 <a:latin typeface="맑은 고딕"/>
               </a:rPr>
-              <a:t>•  같은 것 : **데이터 파일 개수 11개 · 번호 · 크기**</a:t>
+              <a:t>•  다중화가 필요하면 FRA 쪽 경로 추가</a:t>
             </a:r>
           </a:p>
           <a:p>
@@ -11914,7 +12568,7 @@
                 </a:solidFill>
                 <a:latin typeface="맑은 고딕"/>
               </a:rPr>
-              <a:t>•  로그 길이 418줄 vs 390줄</a:t>
+              <a:t>•  지정한 디렉터리는 미리 생성</a:t>
             </a:r>
           </a:p>
           <a:p>
@@ -11930,7 +12584,7 @@
                 </a:solidFill>
                 <a:latin typeface="맑은 고딕"/>
               </a:rPr>
-              <a:t>•  실패 발견 시점 : 전송 도중 vs 기동 시점</a:t>
+              <a:t>•  PARAMETER_VALUE_CONVERT는 영향 범위 확인 후</a:t>
             </a:r>
           </a:p>
         </p:txBody>
@@ -12031,7 +12685,7 @@
                 </a:solidFill>
                 <a:latin typeface="맑은 고딕"/>
               </a:rPr>
-              <a:t>어느 쪽을 고를 것인가</a:t>
+              <a:t>이미 만들어진 뒤 옮기는 순서</a:t>
             </a:r>
           </a:p>
         </p:txBody>
@@ -12070,7 +12724,7 @@
                 </a:solidFill>
                 <a:latin typeface="맑은 고딕"/>
               </a:rPr>
-              <a:t>환경이 결정한다</a:t>
+              <a:t>파라미터 먼저, 파일은 내린 상태에서</a:t>
             </a:r>
           </a:p>
         </p:txBody>
@@ -12109,7 +12763,7 @@
                 </a:solidFill>
                 <a:latin typeface="맑은 고딕"/>
               </a:rPr>
-              <a:t>•  OMF : PDB를 자주 추가 · Standby 여러 개 · 자동화 · 이른 실패 발견</a:t>
+              <a:t>•  ALTER SYSTEM SET control_files ... SCOPE=SPFILE</a:t>
             </a:r>
           </a:p>
           <a:p>
@@ -12125,7 +12779,7 @@
                 </a:solidFill>
                 <a:latin typeface="맑은 고딕"/>
               </a:rPr>
-              <a:t>•  경로 지정 : 배치 표준이 확고 · 스토리지 계층 분리 · 이름 규칙 의존</a:t>
+              <a:t>•  적용 중지 후 SHUTDOWN IMMEDIATE</a:t>
             </a:r>
           </a:p>
           <a:p>
@@ -12141,7 +12795,7 @@
                 </a:solidFill>
                 <a:latin typeface="맑은 고딕"/>
               </a:rPr>
-              <a:t>•  둘 다 주면 **OMF가 이긴다** (convert는 무시된다)</a:t>
+              <a:t>•  운영체제에서 파일 이동(mv), 사본을 남기지 않음</a:t>
             </a:r>
           </a:p>
           <a:p>
@@ -12157,7 +12811,23 @@
                 </a:solidFill>
                 <a:latin typeface="맑은 고딕"/>
               </a:rPr>
-              <a:t>•  섞어 쓰지 말고 하나를 골라 일관되게</a:t>
+              <a:t>•  STARTUP MOUNT 후 V$CONTROLFILE 확인</a:t>
+            </a:r>
+          </a:p>
+          <a:p>
+            <a:pPr algn="l">
+              <a:spcAft>
+                <a:spcPts val="1000"/>
+              </a:spcAft>
+            </a:pPr>
+            <a:r>
+              <a:rPr sz="1700" b="0">
+                <a:solidFill>
+                  <a:srgbClr val="222222"/>
+                </a:solidFill>
+                <a:latin typeface="맑은 고딕"/>
+              </a:rPr>
+              <a:t>•  하나라도 없으면 ORA-00205, STARTED에 머묾</a:t>
             </a:r>
           </a:p>
         </p:txBody>
@@ -12258,7 +12928,7 @@
                 </a:solidFill>
                 <a:latin typeface="맑은 고딕"/>
               </a:rPr>
-              <a:t>7장 이후의 기준 상태</a:t>
+              <a:t>복제 후 spfile을 다시 만들지 않는다</a:t>
             </a:r>
           </a:p>
         </p:txBody>
@@ -12297,7 +12967,7 @@
                 </a:solidFill>
                 <a:latin typeface="맑은 고딕"/>
               </a:rPr>
-              <a:t>여기서부터 OMF다</a:t>
+              <a:t>Note</a:t>
             </a:r>
           </a:p>
         </p:txBody>
@@ -12336,7 +13006,7 @@
                 </a:solidFill>
                 <a:latin typeface="맑은 고딕"/>
               </a:rPr>
-              <a:t>•  boston : `READ ONLY WITH APPLY`, DBID 1852041610</a:t>
+              <a:t>•  일부 문서의 CREATE SPFILE FROM PFILE 단계</a:t>
             </a:r>
           </a:p>
           <a:p>
@@ -12352,7 +13022,7 @@
                 </a:solidFill>
                 <a:latin typeface="맑은 고딕"/>
               </a:rPr>
-              <a:t>•  데이터 파일 `/u03/app/oracle/oradata/BOSTON/**/o1_mf_*.dbf`</a:t>
+              <a:t>•  spfile로 기동 중이면 ORA-32002로 거부</a:t>
             </a:r>
           </a:p>
           <a:p>
@@ -12368,7 +13038,7 @@
                 </a:solidFill>
                 <a:latin typeface="맑은 고딕"/>
               </a:rPr>
-              <a:t>•  컨트롤 파일 `BOSTON/controlfile/` (교정 완료)</a:t>
+              <a:t>•  성공한다면 DUPLICATE가 SET한 값이 모두 사라짐</a:t>
             </a:r>
           </a:p>
           <a:p>
@@ -12384,7 +13054,7 @@
                 </a:solidFill>
                 <a:latin typeface="맑은 고딕"/>
               </a:rPr>
-              <a:t>•  chicago : 경로 지정 방식 그대로 유지</a:t>
+              <a:t>•  SPFILE 절이 Standby spfile까지 만들어 둠</a:t>
             </a:r>
           </a:p>
         </p:txBody>
@@ -12416,7 +13086,7 @@
         <p:spPr>
           <a:xfrm>
             <a:off x="0" y="0"/>
-            <a:ext cx="12191695" cy="1005840"/>
+            <a:ext cx="12191695" cy="6858000"/>
           </a:xfrm>
           <a:prstGeom prst="rect">
             <a:avLst/>
@@ -12459,8 +13129,8 @@
         </p:nvSpPr>
         <p:spPr>
           <a:xfrm>
-            <a:off x="548640" y="91440"/>
-            <a:ext cx="10972800" cy="777240"/>
+            <a:off x="822960" y="2011680"/>
+            <a:ext cx="10515600" cy="1097280"/>
           </a:xfrm>
           <a:prstGeom prst="rect">
             <a:avLst/>
@@ -12479,13 +13149,13 @@
               </a:spcAft>
             </a:pPr>
             <a:r>
-              <a:rPr sz="2600" b="1">
+              <a:rPr sz="4000" b="1">
                 <a:solidFill>
                   <a:srgbClr val="FFFFFF"/>
                 </a:solidFill>
                 <a:latin typeface="맑은 고딕"/>
               </a:rPr>
-              <a:t>퀴즈 (Quiz)</a:t>
+              <a:t>6.8</a:t>
             </a:r>
           </a:p>
         </p:txBody>
@@ -12498,8 +13168,8 @@
         </p:nvSpPr>
         <p:spPr>
           <a:xfrm>
-            <a:off x="640080" y="1371600"/>
-            <a:ext cx="10881360" cy="5120640"/>
+            <a:off x="822960" y="3017520"/>
+            <a:ext cx="10515600" cy="914400"/>
           </a:xfrm>
           <a:prstGeom prst="rect">
             <a:avLst/>
@@ -12514,97 +13184,116 @@
           <a:p>
             <a:pPr algn="l">
               <a:spcAft>
-                <a:spcPts val="1000"/>
+                <a:spcPts val="600"/>
+              </a:spcAft>
+            </a:pPr>
+            <a:r>
+              <a:rPr sz="2800" b="1">
+                <a:solidFill>
+                  <a:srgbClr val="FFFFFF"/>
+                </a:solidFill>
+                <a:latin typeface="맑은 고딕"/>
+              </a:rPr>
+              <a:t>ASM 환경과 OMF</a:t>
+            </a:r>
+          </a:p>
+        </p:txBody>
+      </p:sp>
+      <p:sp>
+        <p:nvSpPr>
+          <p:cNvPr id="5" name="Rectangle 4"/>
+          <p:cNvSpPr/>
+          <p:nvPr/>
+        </p:nvSpPr>
+        <p:spPr>
+          <a:xfrm>
+            <a:off x="822960" y="4114800"/>
+            <a:ext cx="5486400" cy="54864"/>
+          </a:xfrm>
+          <a:prstGeom prst="rect">
+            <a:avLst/>
+          </a:prstGeom>
+          <a:solidFill>
+            <a:srgbClr val="FFFFFF"/>
+          </a:solidFill>
+          <a:ln>
+            <a:noFill/>
+          </a:ln>
+          <a:effectLst/>
+        </p:spPr>
+        <p:style>
+          <a:lnRef idx="1">
+            <a:schemeClr val="accent1"/>
+          </a:lnRef>
+          <a:fillRef idx="3">
+            <a:schemeClr val="accent1"/>
+          </a:fillRef>
+          <a:effectRef idx="2">
+            <a:schemeClr val="accent1"/>
+          </a:effectRef>
+          <a:fontRef idx="minor">
+            <a:schemeClr val="lt1"/>
+          </a:fontRef>
+        </p:style>
+        <p:txBody>
+          <a:bodyPr rtlCol="0" anchor="ctr"/>
+          <a:lstStyle/>
+          <a:p>
+            <a:pPr algn="ctr"/>
+          </a:p>
+        </p:txBody>
+      </p:sp>
+      <p:sp>
+        <p:nvSpPr>
+          <p:cNvPr id="6" name="TextBox 5"/>
+          <p:cNvSpPr txBox="1"/>
+          <p:nvPr/>
+        </p:nvSpPr>
+        <p:spPr>
+          <a:xfrm>
+            <a:off x="822960" y="4297680"/>
+            <a:ext cx="10058400" cy="2011680"/>
+          </a:xfrm>
+          <a:prstGeom prst="rect">
+            <a:avLst/>
+          </a:prstGeom>
+          <a:noFill/>
+        </p:spPr>
+        <p:txBody>
+          <a:bodyPr wrap="square">
+            <a:spAutoFit/>
+          </a:bodyPr>
+          <a:lstStyle/>
+          <a:p>
+            <a:pPr algn="l">
+              <a:spcAft>
+                <a:spcPts val="800"/>
               </a:spcAft>
             </a:pPr>
             <a:r>
               <a:rPr sz="1600" b="0">
                 <a:solidFill>
-                  <a:srgbClr val="222222"/>
-                </a:solidFill>
-                <a:latin typeface="맑은 고딕"/>
-              </a:rPr>
-              <a:t>•  Q1. `NOFILENAMECHECK`가 OMF 방식에서 필요 없는 이유를 파일 이름 규칙과 연결해 설명하라.</a:t>
-            </a:r>
-          </a:p>
-          <a:p>
-            <a:pPr algn="l">
-              <a:spcAft>
-                <a:spcPts val="1000"/>
+                  <a:srgbClr val="FFFFFF"/>
+                </a:solidFill>
+                <a:latin typeface="맑은 고딕"/>
+              </a:rPr>
+              <a:t>•  ASM에서는 OMF가 기본</a:t>
+            </a:r>
+          </a:p>
+          <a:p>
+            <a:pPr algn="l">
+              <a:spcAft>
+                <a:spcPts val="800"/>
               </a:spcAft>
             </a:pPr>
             <a:r>
               <a:rPr sz="1600" b="0">
                 <a:solidFill>
-                  <a:srgbClr val="222222"/>
-                </a:solidFill>
-                <a:latin typeface="맑은 고딕"/>
-              </a:rPr>
-              <a:t>•  Q2. `db_create_file_dest`에 없는 경로를 주었을 때와 아예 주지 않았을 때의 오류가 어떻게 다른가?</a:t>
-            </a:r>
-          </a:p>
-          <a:p>
-            <a:pPr algn="l">
-              <a:spcAft>
-                <a:spcPts val="1000"/>
-              </a:spcAft>
-            </a:pPr>
-            <a:r>
-              <a:rPr sz="1600" b="0">
-                <a:solidFill>
-                  <a:srgbClr val="222222"/>
-                </a:solidFill>
-                <a:latin typeface="맑은 고딕"/>
-              </a:rPr>
-              <a:t>•  Q3. `BOSTON` 디렉터리 이름이 `DB_NAME`이 아니라 `DB_UNIQUE_NAME`에서 온다는 사실이 왜 중요한가?</a:t>
-            </a:r>
-          </a:p>
-          <a:p>
-            <a:pPr algn="l">
-              <a:spcAft>
-                <a:spcPts val="1000"/>
-              </a:spcAft>
-            </a:pPr>
-            <a:r>
-              <a:rPr sz="1600" b="0">
-                <a:solidFill>
-                  <a:srgbClr val="222222"/>
-                </a:solidFill>
-                <a:latin typeface="맑은 고딕"/>
-              </a:rPr>
-              <a:t>•  Q4. PDB 디렉터리에 이름 대신 GUID를 쓰는 이유와 그 대가는 무엇인가?</a:t>
-            </a:r>
-          </a:p>
-          <a:p>
-            <a:pPr algn="l">
-              <a:spcAft>
-                <a:spcPts val="1000"/>
-              </a:spcAft>
-            </a:pPr>
-            <a:r>
-              <a:rPr sz="1600" b="0">
-                <a:solidFill>
-                  <a:srgbClr val="222222"/>
-                </a:solidFill>
-                <a:latin typeface="맑은 고딕"/>
-              </a:rPr>
-              <a:t>•  Q5. 온라인 로그가 그룹당 두 멤버로 만들어진 조건은 무엇이며, 원하지 않으면 어떻게 하는가?</a:t>
-            </a:r>
-          </a:p>
-          <a:p>
-            <a:pPr algn="l">
-              <a:spcAft>
-                <a:spcPts val="1000"/>
-              </a:spcAft>
-            </a:pPr>
-            <a:r>
-              <a:rPr sz="1600" b="0">
-                <a:solidFill>
-                  <a:srgbClr val="222222"/>
-                </a:solidFill>
-                <a:latin typeface="맑은 고딕"/>
-              </a:rPr>
-              <a:t>•  Q6. 컨트롤 파일이 OMF 규칙을 따르지 않은 이유와, 그대로 두면 생기는 문제 세 가지를 들라.</a:t>
+                  <a:srgbClr val="FFFFFF"/>
+                </a:solidFill>
+                <a:latin typeface="맑은 고딕"/>
+              </a:rPr>
+              <a:t>•  ASM Standby를 만드는 방법</a:t>
             </a:r>
           </a:p>
         </p:txBody>
@@ -12705,7 +13394,7 @@
                 </a:solidFill>
                 <a:latin typeface="맑은 고딕"/>
               </a:rPr>
-              <a:t>요약 (Summary)</a:t>
+              <a:t>ASM에서는 OMF가 기본 동작</a:t>
             </a:r>
           </a:p>
         </p:txBody>
@@ -12718,8 +13407,8 @@
         </p:nvSpPr>
         <p:spPr>
           <a:xfrm>
-            <a:off x="640080" y="1371600"/>
-            <a:ext cx="10881360" cy="5120640"/>
+            <a:off x="640080" y="1078992"/>
+            <a:ext cx="10881360" cy="457200"/>
           </a:xfrm>
           <a:prstGeom prst="rect">
             <a:avLst/>
@@ -12734,17 +13423,56 @@
           <a:p>
             <a:pPr algn="l">
               <a:spcAft>
+                <a:spcPts val="600"/>
+              </a:spcAft>
+            </a:pPr>
+            <a:r>
+              <a:rPr sz="1500" b="0">
+                <a:solidFill>
+                  <a:srgbClr val="5A6672"/>
+                </a:solidFill>
+                <a:latin typeface="맑은 고딕"/>
+              </a:rPr>
+              <a:t>+디스크그룹/DB_UNIQUE_NAME/종류/태그.번호.인카네이션</a:t>
+            </a:r>
+          </a:p>
+        </p:txBody>
+      </p:sp>
+      <p:sp>
+        <p:nvSpPr>
+          <p:cNvPr id="5" name="TextBox 4"/>
+          <p:cNvSpPr txBox="1"/>
+          <p:nvPr/>
+        </p:nvSpPr>
+        <p:spPr>
+          <a:xfrm>
+            <a:off x="640080" y="1737360"/>
+            <a:ext cx="10881360" cy="4754880"/>
+          </a:xfrm>
+          <a:prstGeom prst="rect">
+            <a:avLst/>
+          </a:prstGeom>
+          <a:noFill/>
+        </p:spPr>
+        <p:txBody>
+          <a:bodyPr wrap="square">
+            <a:spAutoFit/>
+          </a:bodyPr>
+          <a:lstStyle/>
+          <a:p>
+            <a:pPr algn="l">
+              <a:spcAft>
                 <a:spcPts val="1000"/>
               </a:spcAft>
             </a:pPr>
             <a:r>
-              <a:rPr sz="1600" b="0">
+              <a:rPr sz="1700" b="0">
                 <a:solidFill>
                   <a:srgbClr val="222222"/>
                 </a:solidFill>
                 <a:latin typeface="맑은 고딕"/>
               </a:rPr>
-              <a:t>•  OMF는 `DB_CREATE_FILE_DEST` 하나로 파일 배치를 오라클에 맡긴다. 켜고 끄는 스위치가 아니라 파일 단위 규칙이다.</a:t>
+              <a:t>•  DB_CREATE_FILE_DEST='+DATA', FRA='+FRA'</a:t>
             </a:r>
           </a:p>
           <a:p>
@@ -12754,13 +13482,13 @@
               </a:spcAft>
             </a:pPr>
             <a:r>
-              <a:rPr sz="1600" b="0">
+              <a:rPr sz="1700" b="0">
                 <a:solidFill>
                   <a:srgbClr val="222222"/>
                 </a:solidFill>
                 <a:latin typeface="맑은 고딕"/>
               </a:rPr>
-              <a:t>•  Primary가 OMF가 아니어도 Standby만 OMF로 만들 수 있다. 실습 환경이 그 경우다.</a:t>
+              <a:t>•  예: +DATA/BOSTON/DATAFILE/SYSTEM.257.1149876543</a:t>
             </a:r>
           </a:p>
           <a:p>
@@ -12770,13 +13498,13 @@
               </a:spcAft>
             </a:pPr>
             <a:r>
-              <a:rPr sz="1600" b="0">
+              <a:rPr sz="1700" b="0">
                 <a:solidFill>
                   <a:srgbClr val="222222"/>
                 </a:solidFill>
                 <a:latin typeface="맑은 고딕"/>
               </a:rPr>
-              <a:t>•  스크립트에서 다섯 절이 사라지고 세 절이 생긴다. `set control_files`만 대체 수단이 없다.</a:t>
+              <a:t>•  PDB 파일은 GUID 디렉터리 아래, 계층은 동일</a:t>
             </a:r>
           </a:p>
           <a:p>
@@ -12786,237 +13514,13 @@
               </a:spcAft>
             </a:pPr>
             <a:r>
-              <a:rPr sz="1600" b="0">
+              <a:rPr sz="1700" b="0">
                 <a:solidFill>
                   <a:srgbClr val="222222"/>
                 </a:solidFill>
                 <a:latin typeface="맑은 고딕"/>
               </a:rPr>
-              <a:t>•  `NOFILENAMECHECK`가 불필요한 이유는 OMF 이름의 유일 문자열 때문에 충돌이 불가능해서다.</a:t>
-            </a:r>
-          </a:p>
-          <a:p>
-            <a:pPr algn="l">
-              <a:spcAft>
-                <a:spcPts val="1000"/>
-              </a:spcAft>
-            </a:pPr>
-            <a:r>
-              <a:rPr sz="1600" b="0">
-                <a:solidFill>
-                  <a:srgbClr val="222222"/>
-                </a:solidFill>
-                <a:latin typeface="맑은 고딕"/>
-              </a:rPr>
-              <a:t>•  없는 경로 → 인스턴스가 뜨지 않는다. ORA-01261 + ORA-01262 + `Linux-x86_64 Error: 2` + ORA-01034.</a:t>
-            </a:r>
-          </a:p>
-          <a:p>
-            <a:pPr algn="l">
-              <a:spcAft>
-                <a:spcPts val="1000"/>
-              </a:spcAft>
-            </a:pPr>
-            <a:r>
-              <a:rPr sz="1600" b="0">
-                <a:solidFill>
-                  <a:srgbClr val="222222"/>
-                </a:solidFill>
-                <a:latin typeface="맑은 고딕"/>
-              </a:rPr>
-              <a:t>•  `Linux-x86_64 Error: 2`는 ENOENT(경로 없음), 13은 EACCES(권한). 이 숫자가 진단의 분기점이다.</a:t>
-            </a:r>
-          </a:p>
-          <a:p>
-            <a:pPr algn="l">
-              <a:spcAft>
-                <a:spcPts val="1000"/>
-              </a:spcAft>
-            </a:pPr>
-            <a:r>
-              <a:rPr sz="1600" b="0">
-                <a:solidFill>
-                  <a:srgbClr val="222222"/>
-                </a:solidFill>
-                <a:latin typeface="맑은 고딕"/>
-              </a:rPr>
-              <a:t>•  인스턴스가 없으면 RMAN은 `failure of allocate command` + RMAN-06403 + ORA-27101로 끝난다.</a:t>
-            </a:r>
-          </a:p>
-          <a:p>
-            <a:pPr algn="l">
-              <a:spcAft>
-                <a:spcPts val="1000"/>
-              </a:spcAft>
-            </a:pPr>
-            <a:r>
-              <a:rPr sz="1600" b="0">
-                <a:solidFill>
-                  <a:srgbClr val="222222"/>
-                </a:solidFill>
-                <a:latin typeface="맑은 고딕"/>
-              </a:rPr>
-              <a:t>•  배치 지시를 주지 않으면 5장 첫 실패와 동일한 RMAN-05538 + RMAN-05001 11줄이 난다.</a:t>
-            </a:r>
-          </a:p>
-          <a:p>
-            <a:pPr algn="l">
-              <a:spcAft>
-                <a:spcPts val="1000"/>
-              </a:spcAft>
-            </a:pPr>
-            <a:r>
-              <a:rPr sz="1600" b="0">
-                <a:solidFill>
-                  <a:srgbClr val="222222"/>
-                </a:solidFill>
-                <a:latin typeface="맑은 고딕"/>
-              </a:rPr>
-              <a:t>•  성공 실행은 390줄, `rc=0`, 오류 0줄, 49번 Starting / 383번 Finished.</a:t>
-            </a:r>
-          </a:p>
-          <a:p>
-            <a:pPr algn="l">
-              <a:spcAft>
-                <a:spcPts val="1000"/>
-              </a:spcAft>
-            </a:pPr>
-            <a:r>
-              <a:rPr sz="1600" b="0">
-                <a:solidFill>
-                  <a:srgbClr val="222222"/>
-                </a:solidFill>
-                <a:latin typeface="맑은 고딕"/>
-              </a:rPr>
-              <a:t>•  재실행하면 RMAN-05537. 5장의 RMAN-05500과 다르며 Standby는 손상되지 않는다.</a:t>
-            </a:r>
-          </a:p>
-          <a:p>
-            <a:pPr algn="l">
-              <a:spcAft>
-                <a:spcPts val="1000"/>
-              </a:spcAft>
-            </a:pPr>
-            <a:r>
-              <a:rPr sz="1600" b="0">
-                <a:solidFill>
-                  <a:srgbClr val="222222"/>
-                </a:solidFill>
-                <a:latin typeface="맑은 고딕"/>
-              </a:rPr>
-              <a:t>•  OMF는 mkdir 없이 여덟 개 디렉터리를 만든다. 최상위는 `DB_UNIQUE_NAME`의 대문자.</a:t>
-            </a:r>
-          </a:p>
-          <a:p>
-            <a:pPr algn="l">
-              <a:spcAft>
-                <a:spcPts val="1000"/>
-              </a:spcAft>
-            </a:pPr>
-            <a:r>
-              <a:rPr sz="1600" b="0">
-                <a:solidFill>
-                  <a:srgbClr val="222222"/>
-                </a:solidFill>
-                <a:latin typeface="맑은 고딕"/>
-              </a:rPr>
-              <a:t>•  PDB 파일은 PDB의 GUID 디렉터리 아래 놓이며 GUID는 Primary와 Standby가 동일하다.</a:t>
-            </a:r>
-          </a:p>
-          <a:p>
-            <a:pPr algn="l">
-              <a:spcAft>
-                <a:spcPts val="1000"/>
-              </a:spcAft>
-            </a:pPr>
-            <a:r>
-              <a:rPr sz="1600" b="0">
-                <a:solidFill>
-                  <a:srgbClr val="222222"/>
-                </a:solidFill>
-                <a:latin typeface="맑은 고딕"/>
-              </a:rPr>
-              <a:t>•  이름 규칙은 `o1_mf_&lt;테이블스페이스&gt;_&lt;유일문자열&gt;_.&lt;확장자&gt;`. 파일 번호는 이름에 없다.</a:t>
-            </a:r>
-          </a:p>
-          <a:p>
-            <a:pPr algn="l">
-              <a:spcAft>
-                <a:spcPts val="1000"/>
-              </a:spcAft>
-            </a:pPr>
-            <a:r>
-              <a:rPr sz="1600" b="0">
-                <a:solidFill>
-                  <a:srgbClr val="222222"/>
-                </a:solidFill>
-                <a:latin typeface="맑은 고딕"/>
-              </a:rPr>
-              <a:t>•  FRA가 설정되어 있으면 온라인 로그가 두 곳에 다중화된다. 실측 14행, FRA 1,400MB(9.11퍼센트).</a:t>
-            </a:r>
-          </a:p>
-          <a:p>
-            <a:pPr algn="l">
-              <a:spcAft>
-                <a:spcPts val="1000"/>
-              </a:spcAft>
-            </a:pPr>
-            <a:r>
-              <a:rPr sz="1600" b="0">
-                <a:solidFill>
-                  <a:srgbClr val="222222"/>
-                </a:solidFill>
-                <a:latin typeface="맑은 고딕"/>
-              </a:rPr>
-              <a:t>•  컨트롤 파일은 예외다. `CONTROL_FILES`가 상속되어 Standby에 `Chicago`·`CHICAGO`가 생긴다.</a:t>
-            </a:r>
-          </a:p>
-          <a:p>
-            <a:pPr algn="l">
-              <a:spcAft>
-                <a:spcPts val="1000"/>
-              </a:spcAft>
-            </a:pPr>
-            <a:r>
-              <a:rPr sz="1600" b="0">
-                <a:solidFill>
-                  <a:srgbClr val="222222"/>
-                </a:solidFill>
-                <a:latin typeface="맑은 고딕"/>
-              </a:rPr>
-              <a:t>•  교정 순서는 SCOPE=SPFILE 변경 → 종료 → `mv` → 기동. 어기면 ORA-00205.</a:t>
-            </a:r>
-          </a:p>
-          <a:p>
-            <a:pPr algn="l">
-              <a:spcAft>
-                <a:spcPts val="1000"/>
-              </a:spcAft>
-            </a:pPr>
-            <a:r>
-              <a:rPr sz="1600" b="0">
-                <a:solidFill>
-                  <a:srgbClr val="222222"/>
-                </a:solidFill>
-                <a:latin typeface="맑은 고딕"/>
-              </a:rPr>
-              <a:t>•  가이드의 `create spfile from pfile`은 ORA-32002로 막힌다. 성공했다면 구성이 해체됐을 것이다.</a:t>
-            </a:r>
-          </a:p>
-          <a:p>
-            <a:pPr algn="l">
-              <a:spcAft>
-                <a:spcPts val="1000"/>
-              </a:spcAft>
-            </a:pPr>
-            <a:r>
-              <a:rPr sz="1600" b="0">
-                <a:solidFill>
-                  <a:srgbClr val="222222"/>
-                </a:solidFill>
-                <a:latin typeface="맑은 고딕"/>
-              </a:rPr>
-              <a:t>•  두 방식의 결과물은 내용상 동일하다. 파일 11개, 번호, 크기까지 같다.</a:t>
+              <a:t>•  읽기 쉬운 이름이 필요하면 별칭(alias)</a:t>
             </a:r>
           </a:p>
         </p:txBody>
@@ -13117,7 +13621,7 @@
                 </a:solidFill>
                 <a:latin typeface="맑은 고딕"/>
               </a:rPr>
-              <a:t>실습 개요 (Practice Overview)</a:t>
+              <a:t>ASM Standby를 만드는 방법</a:t>
             </a:r>
           </a:p>
         </p:txBody>
@@ -13130,8 +13634,8 @@
         </p:nvSpPr>
         <p:spPr>
           <a:xfrm>
-            <a:off x="640080" y="1371600"/>
-            <a:ext cx="10881360" cy="5120640"/>
+            <a:off x="640080" y="1078992"/>
+            <a:ext cx="10881360" cy="457200"/>
           </a:xfrm>
           <a:prstGeom prst="rect">
             <a:avLst/>
@@ -13146,17 +13650,56 @@
           <a:p>
             <a:pPr algn="l">
               <a:spcAft>
+                <a:spcPts val="600"/>
+              </a:spcAft>
+            </a:pPr>
+            <a:r>
+              <a:rPr sz="1500" b="0">
+                <a:solidFill>
+                  <a:srgbClr val="5A6672"/>
+                </a:solidFill>
+                <a:latin typeface="맑은 고딕"/>
+              </a:rPr>
+              <a:t>RMAN이 필수, convert보다 OMF 설정</a:t>
+            </a:r>
+          </a:p>
+        </p:txBody>
+      </p:sp>
+      <p:sp>
+        <p:nvSpPr>
+          <p:cNvPr id="5" name="TextBox 4"/>
+          <p:cNvSpPr txBox="1"/>
+          <p:nvPr/>
+        </p:nvSpPr>
+        <p:spPr>
+          <a:xfrm>
+            <a:off x="640080" y="1737360"/>
+            <a:ext cx="10881360" cy="4754880"/>
+          </a:xfrm>
+          <a:prstGeom prst="rect">
+            <a:avLst/>
+          </a:prstGeom>
+          <a:noFill/>
+        </p:spPr>
+        <p:txBody>
+          <a:bodyPr wrap="square">
+            <a:spAutoFit/>
+          </a:bodyPr>
+          <a:lstStyle/>
+          <a:p>
+            <a:pPr algn="l">
+              <a:spcAft>
                 <a:spcPts val="1000"/>
               </a:spcAft>
             </a:pPr>
             <a:r>
-              <a:rPr sz="1600" b="0">
+              <a:rPr sz="1700" b="0">
                 <a:solidFill>
                   <a:srgbClr val="222222"/>
                 </a:solidFill>
                 <a:latin typeface="맑은 고딕"/>
               </a:rPr>
-              <a:t>•  실습 01 — OMF 파라미터와 기준 상태: 세 파라미터를 확인하고 5장 구성을 기록한다. ORA-02097을 재현한다.</a:t>
+              <a:t>•  ASM 파일은 운영체제 명령으로 복사 불가</a:t>
             </a:r>
           </a:p>
           <a:p>
@@ -13166,13 +13709,13 @@
               </a:spcAft>
             </a:pPr>
             <a:r>
-              <a:rPr sz="1600" b="0">
+              <a:rPr sz="1700" b="0">
                 <a:solidFill>
                   <a:srgbClr val="222222"/>
                 </a:solidFill>
                 <a:latin typeface="맑은 고딕"/>
               </a:rPr>
-              <a:t>•  실습 02 — 없는 디렉터리 실패 재현: ORA-01261 계열과 RMAN-06403을 확인하고 5장과 대조한다.</a:t>
+              <a:t>•  Standby의 DB_CREATE_FILE_DEST에 자기 디스크 그룹</a:t>
             </a:r>
           </a:p>
           <a:p>
@@ -13182,13 +13725,13 @@
               </a:spcAft>
             </a:pPr>
             <a:r>
-              <a:rPr sz="1600" b="0">
+              <a:rPr sz="1700" b="0">
                 <a:solidFill>
                   <a:srgbClr val="222222"/>
                 </a:solidFill>
                 <a:latin typeface="맑은 고딕"/>
               </a:rPr>
-              <a:t>•  실습 03 — 파라미터 누락 실패 재현: RMAN-05538·RMAN-05001을 5장 결과와 글자 단위로 비교한다.</a:t>
+              <a:t>•  디스크 그룹 이름이 달라도 convert 불필요</a:t>
             </a:r>
           </a:p>
           <a:p>
@@ -13198,13 +13741,13 @@
               </a:spcAft>
             </a:pPr>
             <a:r>
-              <a:rPr sz="1600" b="0">
+              <a:rPr sz="1700" b="0">
                 <a:solidFill>
                   <a:srgbClr val="222222"/>
                 </a:solidFill>
                 <a:latin typeface="맑은 고딕"/>
               </a:rPr>
-              <a:t>•  실습 04 — OMF DUPLICATE 실행: 390줄 로그를 읽고 재실행 시 RMAN-05537을 확인한다.</a:t>
+              <a:t>•  Primary ASM, Standby 파일 시스템 조합도 가능</a:t>
             </a:r>
           </a:p>
           <a:p>
@@ -13214,61 +13757,13 @@
               </a:spcAft>
             </a:pPr>
             <a:r>
-              <a:rPr sz="1600" b="0">
+              <a:rPr sz="1700" b="0">
                 <a:solidFill>
                   <a:srgbClr val="222222"/>
                 </a:solidFill>
                 <a:latin typeface="맑은 고딕"/>
               </a:rPr>
-              <a:t>•  실습 05 — OMF 구조 해부: 디렉터리·GUID·이름 규칙·로그 이중화를 확인하고 ORA-16000·ORA-02236을 재현한다.</a:t>
-            </a:r>
-          </a:p>
-          <a:p>
-            <a:pPr algn="l">
-              <a:spcAft>
-                <a:spcPts val="1000"/>
-              </a:spcAft>
-            </a:pPr>
-            <a:r>
-              <a:rPr sz="1600" b="0">
-                <a:solidFill>
-                  <a:srgbClr val="222222"/>
-                </a:solidFill>
-                <a:latin typeface="맑은 고딕"/>
-              </a:rPr>
-              <a:t>•  실습 06 — 컨트롤 파일 교정: 상속된 값을 BOSTON 경로로 옮기고 ORA-00205를 재현한다.</a:t>
-            </a:r>
-          </a:p>
-          <a:p>
-            <a:pPr algn="l">
-              <a:spcAft>
-                <a:spcPts val="1000"/>
-              </a:spcAft>
-            </a:pPr>
-            <a:r>
-              <a:rPr sz="1600" b="0">
-                <a:solidFill>
-                  <a:srgbClr val="222222"/>
-                </a:solidFill>
-                <a:latin typeface="맑은 고딕"/>
-              </a:rPr>
-              <a:t>•  실습 07 — 두 방식 비교와 ADG 검증: 열두 항목을 대조하고 기준 상태 복귀를 확인한다.</a:t>
-            </a:r>
-          </a:p>
-          <a:p>
-            <a:pPr algn="l">
-              <a:spcAft>
-                <a:spcPts val="1000"/>
-              </a:spcAft>
-            </a:pPr>
-            <a:r>
-              <a:rPr sz="1600" b="0">
-                <a:solidFill>
-                  <a:srgbClr val="222222"/>
-                </a:solidFill>
-                <a:latin typeface="맑은 고딕"/>
-              </a:rPr>
-              <a:t>•  실습 02·03·04는 Standby를 실제로 헌다. 개인 실습 환경에서만, VM 스냅샷을 뜬 뒤 수행한다.</a:t>
+              <a:t>•  Grid 홈과 DB 홈 환경 변수 구분, oraenv 사용</a:t>
             </a:r>
           </a:p>
         </p:txBody>
@@ -13408,7 +13903,7 @@
                 </a:solidFill>
                 <a:latin typeface="맑은 고딕"/>
               </a:rPr>
-              <a:t>OMF란 무엇인가</a:t>
+              <a:t>OMF가 해결하는 문제</a:t>
             </a:r>
           </a:p>
         </p:txBody>
@@ -13491,7 +13986,7 @@
                 </a:solidFill>
                 <a:latin typeface="맑은 고딕"/>
               </a:rPr>
-              <a:t>•  세 파라미터</a:t>
+              <a:t>•  경로 지정 방식에서 사람이 맡던 일</a:t>
             </a:r>
           </a:p>
           <a:p>
@@ -13507,7 +14002,7 @@
                 </a:solidFill>
                 <a:latin typeface="맑은 고딕"/>
               </a:rPr>
-              <a:t>•  켜고 끄는 스위치가 아니다</a:t>
+              <a:t>•  OMF의 정의와 대상 파일</a:t>
             </a:r>
           </a:p>
           <a:p>
@@ -13523,7 +14018,2377 @@
                 </a:solidFill>
                 <a:latin typeface="맑은 고딕"/>
               </a:rPr>
-              <a:t>•  Primary가 OMF가 아니어도 된다</a:t>
+              <a:t>•  파일 수명 관리</a:t>
+            </a:r>
+          </a:p>
+        </p:txBody>
+      </p:sp>
+    </p:spTree>
+  </p:cSld>
+  <p:clrMapOvr>
+    <a:masterClrMapping/>
+  </p:clrMapOvr>
+</p:sld>
+</file>
+
+<file path=ppt/slides/slide40.xml><?xml version="1.0" encoding="utf-8"?>
+<p:sld xmlns:a="http://schemas.openxmlformats.org/drawingml/2006/main" xmlns:p="http://schemas.openxmlformats.org/presentationml/2006/main" xmlns:r="http://schemas.openxmlformats.org/officeDocument/2006/relationships">
+  <p:cSld>
+    <p:spTree>
+      <p:nvGrpSpPr>
+        <p:cNvPr id="1" name=""/>
+        <p:cNvGrpSpPr/>
+        <p:nvPr/>
+      </p:nvGrpSpPr>
+      <p:grpSpPr/>
+      <p:sp>
+        <p:nvSpPr>
+          <p:cNvPr id="2" name="Rectangle 1"/>
+          <p:cNvSpPr/>
+          <p:nvPr/>
+        </p:nvSpPr>
+        <p:spPr>
+          <a:xfrm>
+            <a:off x="0" y="0"/>
+            <a:ext cx="12191695" cy="6858000"/>
+          </a:xfrm>
+          <a:prstGeom prst="rect">
+            <a:avLst/>
+          </a:prstGeom>
+          <a:solidFill>
+            <a:srgbClr val="C0392B"/>
+          </a:solidFill>
+          <a:ln>
+            <a:noFill/>
+          </a:ln>
+          <a:effectLst/>
+        </p:spPr>
+        <p:style>
+          <a:lnRef idx="1">
+            <a:schemeClr val="accent1"/>
+          </a:lnRef>
+          <a:fillRef idx="3">
+            <a:schemeClr val="accent1"/>
+          </a:fillRef>
+          <a:effectRef idx="2">
+            <a:schemeClr val="accent1"/>
+          </a:effectRef>
+          <a:fontRef idx="minor">
+            <a:schemeClr val="lt1"/>
+          </a:fontRef>
+        </p:style>
+        <p:txBody>
+          <a:bodyPr rtlCol="0" anchor="ctr"/>
+          <a:lstStyle/>
+          <a:p>
+            <a:pPr algn="ctr"/>
+          </a:p>
+        </p:txBody>
+      </p:sp>
+      <p:sp>
+        <p:nvSpPr>
+          <p:cNvPr id="3" name="TextBox 2"/>
+          <p:cNvSpPr txBox="1"/>
+          <p:nvPr/>
+        </p:nvSpPr>
+        <p:spPr>
+          <a:xfrm>
+            <a:off x="822960" y="2011680"/>
+            <a:ext cx="10515600" cy="1097280"/>
+          </a:xfrm>
+          <a:prstGeom prst="rect">
+            <a:avLst/>
+          </a:prstGeom>
+          <a:noFill/>
+        </p:spPr>
+        <p:txBody>
+          <a:bodyPr wrap="square">
+            <a:spAutoFit/>
+          </a:bodyPr>
+          <a:lstStyle/>
+          <a:p>
+            <a:pPr algn="l">
+              <a:spcAft>
+                <a:spcPts val="600"/>
+              </a:spcAft>
+            </a:pPr>
+            <a:r>
+              <a:rPr sz="4000" b="1">
+                <a:solidFill>
+                  <a:srgbClr val="FFFFFF"/>
+                </a:solidFill>
+                <a:latin typeface="맑은 고딕"/>
+              </a:rPr>
+              <a:t>6.9</a:t>
+            </a:r>
+          </a:p>
+        </p:txBody>
+      </p:sp>
+      <p:sp>
+        <p:nvSpPr>
+          <p:cNvPr id="4" name="TextBox 3"/>
+          <p:cNvSpPr txBox="1"/>
+          <p:nvPr/>
+        </p:nvSpPr>
+        <p:spPr>
+          <a:xfrm>
+            <a:off x="822960" y="3017520"/>
+            <a:ext cx="10515600" cy="914400"/>
+          </a:xfrm>
+          <a:prstGeom prst="rect">
+            <a:avLst/>
+          </a:prstGeom>
+          <a:noFill/>
+        </p:spPr>
+        <p:txBody>
+          <a:bodyPr wrap="square">
+            <a:spAutoFit/>
+          </a:bodyPr>
+          <a:lstStyle/>
+          <a:p>
+            <a:pPr algn="l">
+              <a:spcAft>
+                <a:spcPts val="600"/>
+              </a:spcAft>
+            </a:pPr>
+            <a:r>
+              <a:rPr sz="2800" b="1">
+                <a:solidFill>
+                  <a:srgbClr val="FFFFFF"/>
+                </a:solidFill>
+                <a:latin typeface="맑은 고딕"/>
+              </a:rPr>
+              <a:t>STANDBY_FILE_MANAGEMENT=AUTO와 OMF</a:t>
+            </a:r>
+          </a:p>
+        </p:txBody>
+      </p:sp>
+      <p:sp>
+        <p:nvSpPr>
+          <p:cNvPr id="5" name="Rectangle 4"/>
+          <p:cNvSpPr/>
+          <p:nvPr/>
+        </p:nvSpPr>
+        <p:spPr>
+          <a:xfrm>
+            <a:off x="822960" y="4114800"/>
+            <a:ext cx="5486400" cy="54864"/>
+          </a:xfrm>
+          <a:prstGeom prst="rect">
+            <a:avLst/>
+          </a:prstGeom>
+          <a:solidFill>
+            <a:srgbClr val="FFFFFF"/>
+          </a:solidFill>
+          <a:ln>
+            <a:noFill/>
+          </a:ln>
+          <a:effectLst/>
+        </p:spPr>
+        <p:style>
+          <a:lnRef idx="1">
+            <a:schemeClr val="accent1"/>
+          </a:lnRef>
+          <a:fillRef idx="3">
+            <a:schemeClr val="accent1"/>
+          </a:fillRef>
+          <a:effectRef idx="2">
+            <a:schemeClr val="accent1"/>
+          </a:effectRef>
+          <a:fontRef idx="minor">
+            <a:schemeClr val="lt1"/>
+          </a:fontRef>
+        </p:style>
+        <p:txBody>
+          <a:bodyPr rtlCol="0" anchor="ctr"/>
+          <a:lstStyle/>
+          <a:p>
+            <a:pPr algn="ctr"/>
+          </a:p>
+        </p:txBody>
+      </p:sp>
+      <p:sp>
+        <p:nvSpPr>
+          <p:cNvPr id="6" name="TextBox 5"/>
+          <p:cNvSpPr txBox="1"/>
+          <p:nvPr/>
+        </p:nvSpPr>
+        <p:spPr>
+          <a:xfrm>
+            <a:off x="822960" y="4297680"/>
+            <a:ext cx="10058400" cy="2011680"/>
+          </a:xfrm>
+          <a:prstGeom prst="rect">
+            <a:avLst/>
+          </a:prstGeom>
+          <a:noFill/>
+        </p:spPr>
+        <p:txBody>
+          <a:bodyPr wrap="square">
+            <a:spAutoFit/>
+          </a:bodyPr>
+          <a:lstStyle/>
+          <a:p>
+            <a:pPr algn="l">
+              <a:spcAft>
+                <a:spcPts val="800"/>
+              </a:spcAft>
+            </a:pPr>
+            <a:r>
+              <a:rPr sz="1600" b="0">
+                <a:solidFill>
+                  <a:srgbClr val="FFFFFF"/>
+                </a:solidFill>
+                <a:latin typeface="맑은 고딕"/>
+              </a:rPr>
+              <a:t>•  Primary 파일 추가의 자동 반영</a:t>
+            </a:r>
+          </a:p>
+          <a:p>
+            <a:pPr algn="l">
+              <a:spcAft>
+                <a:spcPts val="800"/>
+              </a:spcAft>
+            </a:pPr>
+            <a:r>
+              <a:rPr sz="1600" b="0">
+                <a:solidFill>
+                  <a:srgbClr val="FFFFFF"/>
+                </a:solidFill>
+                <a:latin typeface="맑은 고딕"/>
+              </a:rPr>
+              <a:t>•  OMF Standby의 기본 파라미터 묶음</a:t>
+            </a:r>
+          </a:p>
+        </p:txBody>
+      </p:sp>
+    </p:spTree>
+  </p:cSld>
+  <p:clrMapOvr>
+    <a:masterClrMapping/>
+  </p:clrMapOvr>
+</p:sld>
+</file>
+
+<file path=ppt/slides/slide41.xml><?xml version="1.0" encoding="utf-8"?>
+<p:sld xmlns:a="http://schemas.openxmlformats.org/drawingml/2006/main" xmlns:p="http://schemas.openxmlformats.org/presentationml/2006/main" xmlns:r="http://schemas.openxmlformats.org/officeDocument/2006/relationships">
+  <p:cSld>
+    <p:spTree>
+      <p:nvGrpSpPr>
+        <p:cNvPr id="1" name=""/>
+        <p:cNvGrpSpPr/>
+        <p:nvPr/>
+      </p:nvGrpSpPr>
+      <p:grpSpPr/>
+      <p:sp>
+        <p:nvSpPr>
+          <p:cNvPr id="2" name="Rectangle 1"/>
+          <p:cNvSpPr/>
+          <p:nvPr/>
+        </p:nvSpPr>
+        <p:spPr>
+          <a:xfrm>
+            <a:off x="0" y="0"/>
+            <a:ext cx="12191695" cy="1005840"/>
+          </a:xfrm>
+          <a:prstGeom prst="rect">
+            <a:avLst/>
+          </a:prstGeom>
+          <a:solidFill>
+            <a:srgbClr val="C0392B"/>
+          </a:solidFill>
+          <a:ln>
+            <a:noFill/>
+          </a:ln>
+          <a:effectLst/>
+        </p:spPr>
+        <p:style>
+          <a:lnRef idx="1">
+            <a:schemeClr val="accent1"/>
+          </a:lnRef>
+          <a:fillRef idx="3">
+            <a:schemeClr val="accent1"/>
+          </a:fillRef>
+          <a:effectRef idx="2">
+            <a:schemeClr val="accent1"/>
+          </a:effectRef>
+          <a:fontRef idx="minor">
+            <a:schemeClr val="lt1"/>
+          </a:fontRef>
+        </p:style>
+        <p:txBody>
+          <a:bodyPr rtlCol="0" anchor="ctr"/>
+          <a:lstStyle/>
+          <a:p>
+            <a:pPr algn="ctr"/>
+          </a:p>
+        </p:txBody>
+      </p:sp>
+      <p:sp>
+        <p:nvSpPr>
+          <p:cNvPr id="3" name="TextBox 2"/>
+          <p:cNvSpPr txBox="1"/>
+          <p:nvPr/>
+        </p:nvSpPr>
+        <p:spPr>
+          <a:xfrm>
+            <a:off x="548640" y="91440"/>
+            <a:ext cx="10972800" cy="777240"/>
+          </a:xfrm>
+          <a:prstGeom prst="rect">
+            <a:avLst/>
+          </a:prstGeom>
+          <a:noFill/>
+        </p:spPr>
+        <p:txBody>
+          <a:bodyPr wrap="square">
+            <a:spAutoFit/>
+          </a:bodyPr>
+          <a:lstStyle/>
+          <a:p>
+            <a:pPr algn="l">
+              <a:spcAft>
+                <a:spcPts val="600"/>
+              </a:spcAft>
+            </a:pPr>
+            <a:r>
+              <a:rPr sz="2600" b="1">
+                <a:solidFill>
+                  <a:srgbClr val="FFFFFF"/>
+                </a:solidFill>
+                <a:latin typeface="맑은 고딕"/>
+              </a:rPr>
+              <a:t>AUTO와 OMF의 궁합</a:t>
+            </a:r>
+          </a:p>
+        </p:txBody>
+      </p:sp>
+      <p:sp>
+        <p:nvSpPr>
+          <p:cNvPr id="4" name="TextBox 3"/>
+          <p:cNvSpPr txBox="1"/>
+          <p:nvPr/>
+        </p:nvSpPr>
+        <p:spPr>
+          <a:xfrm>
+            <a:off x="640080" y="1078992"/>
+            <a:ext cx="10881360" cy="457200"/>
+          </a:xfrm>
+          <a:prstGeom prst="rect">
+            <a:avLst/>
+          </a:prstGeom>
+          <a:noFill/>
+        </p:spPr>
+        <p:txBody>
+          <a:bodyPr wrap="square">
+            <a:spAutoFit/>
+          </a:bodyPr>
+          <a:lstStyle/>
+          <a:p>
+            <a:pPr algn="l">
+              <a:spcAft>
+                <a:spcPts val="600"/>
+              </a:spcAft>
+            </a:pPr>
+            <a:r>
+              <a:rPr sz="1500" b="0">
+                <a:solidFill>
+                  <a:srgbClr val="5A6672"/>
+                </a:solidFill>
+                <a:latin typeface="맑은 고딕"/>
+              </a:rPr>
+              <a:t>Primary의 파일 추가가 Standby에서 OMF 이름으로</a:t>
+            </a:r>
+          </a:p>
+        </p:txBody>
+      </p:sp>
+      <p:sp>
+        <p:nvSpPr>
+          <p:cNvPr id="5" name="TextBox 4"/>
+          <p:cNvSpPr txBox="1"/>
+          <p:nvPr/>
+        </p:nvSpPr>
+        <p:spPr>
+          <a:xfrm>
+            <a:off x="640080" y="1737360"/>
+            <a:ext cx="10881360" cy="4754880"/>
+          </a:xfrm>
+          <a:prstGeom prst="rect">
+            <a:avLst/>
+          </a:prstGeom>
+          <a:noFill/>
+        </p:spPr>
+        <p:txBody>
+          <a:bodyPr wrap="square">
+            <a:spAutoFit/>
+          </a:bodyPr>
+          <a:lstStyle/>
+          <a:p>
+            <a:pPr algn="l">
+              <a:spcAft>
+                <a:spcPts val="1000"/>
+              </a:spcAft>
+            </a:pPr>
+            <a:r>
+              <a:rPr sz="1700" b="0">
+                <a:solidFill>
+                  <a:srgbClr val="222222"/>
+                </a:solidFill>
+                <a:latin typeface="맑은 고딕"/>
+              </a:rPr>
+              <a:t>•  AUTO: Primary 파일 추가·삭제를 Standby가 따라 함</a:t>
+            </a:r>
+          </a:p>
+          <a:p>
+            <a:pPr algn="l">
+              <a:spcAft>
+                <a:spcPts val="1000"/>
+              </a:spcAft>
+            </a:pPr>
+            <a:r>
+              <a:rPr sz="1700" b="0">
+                <a:solidFill>
+                  <a:srgbClr val="222222"/>
+                </a:solidFill>
+                <a:latin typeface="맑은 고딕"/>
+              </a:rPr>
+              <a:t>•  이름은 Standby 파라미터가 결정</a:t>
+            </a:r>
+          </a:p>
+          <a:p>
+            <a:pPr algn="l">
+              <a:spcAft>
+                <a:spcPts val="1000"/>
+              </a:spcAft>
+            </a:pPr>
+            <a:r>
+              <a:rPr sz="1700" b="0">
+                <a:solidFill>
+                  <a:srgbClr val="222222"/>
+                </a:solidFill>
+                <a:latin typeface="맑은 고딕"/>
+              </a:rPr>
+              <a:t>•  OMF → convert → 같은 경로 순으로 적용</a:t>
+            </a:r>
+          </a:p>
+          <a:p>
+            <a:pPr algn="l">
+              <a:spcAft>
+                <a:spcPts val="1000"/>
+              </a:spcAft>
+            </a:pPr>
+            <a:r>
+              <a:rPr sz="1700" b="0">
+                <a:solidFill>
+                  <a:srgbClr val="222222"/>
+                </a:solidFill>
+                <a:latin typeface="맑은 고딕"/>
+              </a:rPr>
+              <a:t>•  경로 지정 방식은 규칙 밖 경로에서 적용 실패</a:t>
+            </a:r>
+          </a:p>
+          <a:p>
+            <a:pPr algn="l">
+              <a:spcAft>
+                <a:spcPts val="1000"/>
+              </a:spcAft>
+            </a:pPr>
+            <a:r>
+              <a:rPr sz="1700" b="0">
+                <a:solidFill>
+                  <a:srgbClr val="222222"/>
+                </a:solidFill>
+                <a:latin typeface="맑은 고딕"/>
+              </a:rPr>
+              <a:t>•  상세 동작과 복구는 8장</a:t>
+            </a:r>
+          </a:p>
+        </p:txBody>
+      </p:sp>
+    </p:spTree>
+  </p:cSld>
+  <p:clrMapOvr>
+    <a:masterClrMapping/>
+  </p:clrMapOvr>
+</p:sld>
+</file>
+
+<file path=ppt/slides/slide42.xml><?xml version="1.0" encoding="utf-8"?>
+<p:sld xmlns:a="http://schemas.openxmlformats.org/drawingml/2006/main" xmlns:p="http://schemas.openxmlformats.org/presentationml/2006/main" xmlns:r="http://schemas.openxmlformats.org/officeDocument/2006/relationships">
+  <p:cSld>
+    <p:spTree>
+      <p:nvGrpSpPr>
+        <p:cNvPr id="1" name=""/>
+        <p:cNvGrpSpPr/>
+        <p:nvPr/>
+      </p:nvGrpSpPr>
+      <p:grpSpPr/>
+      <p:sp>
+        <p:nvSpPr>
+          <p:cNvPr id="2" name="Rectangle 1"/>
+          <p:cNvSpPr/>
+          <p:nvPr/>
+        </p:nvSpPr>
+        <p:spPr>
+          <a:xfrm>
+            <a:off x="0" y="0"/>
+            <a:ext cx="12191695" cy="1005840"/>
+          </a:xfrm>
+          <a:prstGeom prst="rect">
+            <a:avLst/>
+          </a:prstGeom>
+          <a:solidFill>
+            <a:srgbClr val="C0392B"/>
+          </a:solidFill>
+          <a:ln>
+            <a:noFill/>
+          </a:ln>
+          <a:effectLst/>
+        </p:spPr>
+        <p:style>
+          <a:lnRef idx="1">
+            <a:schemeClr val="accent1"/>
+          </a:lnRef>
+          <a:fillRef idx="3">
+            <a:schemeClr val="accent1"/>
+          </a:fillRef>
+          <a:effectRef idx="2">
+            <a:schemeClr val="accent1"/>
+          </a:effectRef>
+          <a:fontRef idx="minor">
+            <a:schemeClr val="lt1"/>
+          </a:fontRef>
+        </p:style>
+        <p:txBody>
+          <a:bodyPr rtlCol="0" anchor="ctr"/>
+          <a:lstStyle/>
+          <a:p>
+            <a:pPr algn="ctr"/>
+          </a:p>
+        </p:txBody>
+      </p:sp>
+      <p:sp>
+        <p:nvSpPr>
+          <p:cNvPr id="3" name="TextBox 2"/>
+          <p:cNvSpPr txBox="1"/>
+          <p:nvPr/>
+        </p:nvSpPr>
+        <p:spPr>
+          <a:xfrm>
+            <a:off x="548640" y="91440"/>
+            <a:ext cx="10972800" cy="777240"/>
+          </a:xfrm>
+          <a:prstGeom prst="rect">
+            <a:avLst/>
+          </a:prstGeom>
+          <a:noFill/>
+        </p:spPr>
+        <p:txBody>
+          <a:bodyPr wrap="square">
+            <a:spAutoFit/>
+          </a:bodyPr>
+          <a:lstStyle/>
+          <a:p>
+            <a:pPr algn="l">
+              <a:spcAft>
+                <a:spcPts val="600"/>
+              </a:spcAft>
+            </a:pPr>
+            <a:r>
+              <a:rPr sz="2600" b="1">
+                <a:solidFill>
+                  <a:srgbClr val="FFFFFF"/>
+                </a:solidFill>
+                <a:latin typeface="맑은 고딕"/>
+              </a:rPr>
+              <a:t>OMF Standby의 기본 파라미터 묶음</a:t>
+            </a:r>
+          </a:p>
+        </p:txBody>
+      </p:sp>
+      <p:sp>
+        <p:nvSpPr>
+          <p:cNvPr id="4" name="TextBox 3"/>
+          <p:cNvSpPr txBox="1"/>
+          <p:nvPr/>
+        </p:nvSpPr>
+        <p:spPr>
+          <a:xfrm>
+            <a:off x="640080" y="1078992"/>
+            <a:ext cx="10881360" cy="457200"/>
+          </a:xfrm>
+          <a:prstGeom prst="rect">
+            <a:avLst/>
+          </a:prstGeom>
+          <a:noFill/>
+        </p:spPr>
+        <p:txBody>
+          <a:bodyPr wrap="square">
+            <a:spAutoFit/>
+          </a:bodyPr>
+          <a:lstStyle/>
+          <a:p>
+            <a:pPr algn="l">
+              <a:spcAft>
+                <a:spcPts val="600"/>
+              </a:spcAft>
+            </a:pPr>
+            <a:r>
+              <a:rPr sz="1500" b="0">
+                <a:solidFill>
+                  <a:srgbClr val="5A6672"/>
+                </a:solidFill>
+                <a:latin typeface="맑은 고딕"/>
+              </a:rPr>
+              <a:t>Best Practice</a:t>
+            </a:r>
+          </a:p>
+        </p:txBody>
+      </p:sp>
+      <p:sp>
+        <p:nvSpPr>
+          <p:cNvPr id="5" name="TextBox 4"/>
+          <p:cNvSpPr txBox="1"/>
+          <p:nvPr/>
+        </p:nvSpPr>
+        <p:spPr>
+          <a:xfrm>
+            <a:off x="640080" y="1737360"/>
+            <a:ext cx="10881360" cy="4754880"/>
+          </a:xfrm>
+          <a:prstGeom prst="rect">
+            <a:avLst/>
+          </a:prstGeom>
+          <a:noFill/>
+        </p:spPr>
+        <p:txBody>
+          <a:bodyPr wrap="square">
+            <a:spAutoFit/>
+          </a:bodyPr>
+          <a:lstStyle/>
+          <a:p>
+            <a:pPr algn="l">
+              <a:spcAft>
+                <a:spcPts val="1000"/>
+              </a:spcAft>
+            </a:pPr>
+            <a:r>
+              <a:rPr sz="1700" b="0">
+                <a:solidFill>
+                  <a:srgbClr val="222222"/>
+                </a:solidFill>
+                <a:latin typeface="맑은 고딕"/>
+              </a:rPr>
+              <a:t>•  DB_CREATE_FILE_DEST, FRA 위치와 크기</a:t>
+            </a:r>
+          </a:p>
+          <a:p>
+            <a:pPr algn="l">
+              <a:spcAft>
+                <a:spcPts val="1000"/>
+              </a:spcAft>
+            </a:pPr>
+            <a:r>
+              <a:rPr sz="1700" b="0">
+                <a:solidFill>
+                  <a:srgbClr val="222222"/>
+                </a:solidFill>
+                <a:latin typeface="맑은 고딕"/>
+              </a:rPr>
+              <a:t>•  STANDBY_FILE_MANAGEMENT=AUTO</a:t>
+            </a:r>
+          </a:p>
+          <a:p>
+            <a:pPr algn="l">
+              <a:spcAft>
+                <a:spcPts val="1000"/>
+              </a:spcAft>
+            </a:pPr>
+            <a:r>
+              <a:rPr sz="1700" b="0">
+                <a:solidFill>
+                  <a:srgbClr val="222222"/>
+                </a:solidFill>
+                <a:latin typeface="맑은 고딕"/>
+              </a:rPr>
+              <a:t>•  convert 두 파라미터는 비워 둠</a:t>
+            </a:r>
+          </a:p>
+          <a:p>
+            <a:pPr algn="l">
+              <a:spcAft>
+                <a:spcPts val="1000"/>
+              </a:spcAft>
+            </a:pPr>
+            <a:r>
+              <a:rPr sz="1700" b="0">
+                <a:solidFill>
+                  <a:srgbClr val="222222"/>
+                </a:solidFill>
+                <a:latin typeface="맑은 고딕"/>
+              </a:rPr>
+              <a:t>•  같은 설정을 Primary에도</a:t>
+            </a:r>
+          </a:p>
+          <a:p>
+            <a:pPr algn="l">
+              <a:spcAft>
+                <a:spcPts val="1000"/>
+              </a:spcAft>
+            </a:pPr>
+            <a:r>
+              <a:rPr sz="1700" b="0">
+                <a:solidFill>
+                  <a:srgbClr val="222222"/>
+                </a:solidFill>
+                <a:latin typeface="맑은 고딕"/>
+              </a:rPr>
+              <a:t>•  양쪽 값을 같은 조회로 나란히 비교</a:t>
+            </a:r>
+          </a:p>
+        </p:txBody>
+      </p:sp>
+    </p:spTree>
+  </p:cSld>
+  <p:clrMapOvr>
+    <a:masterClrMapping/>
+  </p:clrMapOvr>
+</p:sld>
+</file>
+
+<file path=ppt/slides/slide43.xml><?xml version="1.0" encoding="utf-8"?>
+<p:sld xmlns:a="http://schemas.openxmlformats.org/drawingml/2006/main" xmlns:p="http://schemas.openxmlformats.org/presentationml/2006/main" xmlns:r="http://schemas.openxmlformats.org/officeDocument/2006/relationships">
+  <p:cSld>
+    <p:spTree>
+      <p:nvGrpSpPr>
+        <p:cNvPr id="1" name=""/>
+        <p:cNvGrpSpPr/>
+        <p:nvPr/>
+      </p:nvGrpSpPr>
+      <p:grpSpPr/>
+      <p:sp>
+        <p:nvSpPr>
+          <p:cNvPr id="2" name="Rectangle 1"/>
+          <p:cNvSpPr/>
+          <p:nvPr/>
+        </p:nvSpPr>
+        <p:spPr>
+          <a:xfrm>
+            <a:off x="0" y="0"/>
+            <a:ext cx="12191695" cy="6858000"/>
+          </a:xfrm>
+          <a:prstGeom prst="rect">
+            <a:avLst/>
+          </a:prstGeom>
+          <a:solidFill>
+            <a:srgbClr val="C0392B"/>
+          </a:solidFill>
+          <a:ln>
+            <a:noFill/>
+          </a:ln>
+          <a:effectLst/>
+        </p:spPr>
+        <p:style>
+          <a:lnRef idx="1">
+            <a:schemeClr val="accent1"/>
+          </a:lnRef>
+          <a:fillRef idx="3">
+            <a:schemeClr val="accent1"/>
+          </a:fillRef>
+          <a:effectRef idx="2">
+            <a:schemeClr val="accent1"/>
+          </a:effectRef>
+          <a:fontRef idx="minor">
+            <a:schemeClr val="lt1"/>
+          </a:fontRef>
+        </p:style>
+        <p:txBody>
+          <a:bodyPr rtlCol="0" anchor="ctr"/>
+          <a:lstStyle/>
+          <a:p>
+            <a:pPr algn="ctr"/>
+          </a:p>
+        </p:txBody>
+      </p:sp>
+      <p:sp>
+        <p:nvSpPr>
+          <p:cNvPr id="3" name="TextBox 2"/>
+          <p:cNvSpPr txBox="1"/>
+          <p:nvPr/>
+        </p:nvSpPr>
+        <p:spPr>
+          <a:xfrm>
+            <a:off x="822960" y="2011680"/>
+            <a:ext cx="10515600" cy="1097280"/>
+          </a:xfrm>
+          <a:prstGeom prst="rect">
+            <a:avLst/>
+          </a:prstGeom>
+          <a:noFill/>
+        </p:spPr>
+        <p:txBody>
+          <a:bodyPr wrap="square">
+            <a:spAutoFit/>
+          </a:bodyPr>
+          <a:lstStyle/>
+          <a:p>
+            <a:pPr algn="l">
+              <a:spcAft>
+                <a:spcPts val="600"/>
+              </a:spcAft>
+            </a:pPr>
+            <a:r>
+              <a:rPr sz="4000" b="1">
+                <a:solidFill>
+                  <a:srgbClr val="FFFFFF"/>
+                </a:solidFill>
+                <a:latin typeface="맑은 고딕"/>
+              </a:rPr>
+              <a:t>6.10</a:t>
+            </a:r>
+          </a:p>
+        </p:txBody>
+      </p:sp>
+      <p:sp>
+        <p:nvSpPr>
+          <p:cNvPr id="4" name="TextBox 3"/>
+          <p:cNvSpPr txBox="1"/>
+          <p:nvPr/>
+        </p:nvSpPr>
+        <p:spPr>
+          <a:xfrm>
+            <a:off x="822960" y="3017520"/>
+            <a:ext cx="10515600" cy="914400"/>
+          </a:xfrm>
+          <a:prstGeom prst="rect">
+            <a:avLst/>
+          </a:prstGeom>
+          <a:noFill/>
+        </p:spPr>
+        <p:txBody>
+          <a:bodyPr wrap="square">
+            <a:spAutoFit/>
+          </a:bodyPr>
+          <a:lstStyle/>
+          <a:p>
+            <a:pPr algn="l">
+              <a:spcAft>
+                <a:spcPts val="600"/>
+              </a:spcAft>
+            </a:pPr>
+            <a:r>
+              <a:rPr sz="2800" b="1">
+                <a:solidFill>
+                  <a:srgbClr val="FFFFFF"/>
+                </a:solidFill>
+                <a:latin typeface="맑은 고딕"/>
+              </a:rPr>
+              <a:t>두 방식의 비교와 선택</a:t>
+            </a:r>
+          </a:p>
+        </p:txBody>
+      </p:sp>
+      <p:sp>
+        <p:nvSpPr>
+          <p:cNvPr id="5" name="Rectangle 4"/>
+          <p:cNvSpPr/>
+          <p:nvPr/>
+        </p:nvSpPr>
+        <p:spPr>
+          <a:xfrm>
+            <a:off x="822960" y="4114800"/>
+            <a:ext cx="5486400" cy="54864"/>
+          </a:xfrm>
+          <a:prstGeom prst="rect">
+            <a:avLst/>
+          </a:prstGeom>
+          <a:solidFill>
+            <a:srgbClr val="FFFFFF"/>
+          </a:solidFill>
+          <a:ln>
+            <a:noFill/>
+          </a:ln>
+          <a:effectLst/>
+        </p:spPr>
+        <p:style>
+          <a:lnRef idx="1">
+            <a:schemeClr val="accent1"/>
+          </a:lnRef>
+          <a:fillRef idx="3">
+            <a:schemeClr val="accent1"/>
+          </a:fillRef>
+          <a:effectRef idx="2">
+            <a:schemeClr val="accent1"/>
+          </a:effectRef>
+          <a:fontRef idx="minor">
+            <a:schemeClr val="lt1"/>
+          </a:fontRef>
+        </p:style>
+        <p:txBody>
+          <a:bodyPr rtlCol="0" anchor="ctr"/>
+          <a:lstStyle/>
+          <a:p>
+            <a:pPr algn="ctr"/>
+          </a:p>
+        </p:txBody>
+      </p:sp>
+      <p:sp>
+        <p:nvSpPr>
+          <p:cNvPr id="6" name="TextBox 5"/>
+          <p:cNvSpPr txBox="1"/>
+          <p:nvPr/>
+        </p:nvSpPr>
+        <p:spPr>
+          <a:xfrm>
+            <a:off x="822960" y="4297680"/>
+            <a:ext cx="10058400" cy="2011680"/>
+          </a:xfrm>
+          <a:prstGeom prst="rect">
+            <a:avLst/>
+          </a:prstGeom>
+          <a:noFill/>
+        </p:spPr>
+        <p:txBody>
+          <a:bodyPr wrap="square">
+            <a:spAutoFit/>
+          </a:bodyPr>
+          <a:lstStyle/>
+          <a:p>
+            <a:pPr algn="l">
+              <a:spcAft>
+                <a:spcPts val="800"/>
+              </a:spcAft>
+            </a:pPr>
+            <a:r>
+              <a:rPr sz="1600" b="0">
+                <a:solidFill>
+                  <a:srgbClr val="FFFFFF"/>
+                </a:solidFill>
+                <a:latin typeface="맑은 고딕"/>
+              </a:rPr>
+              <a:t>•  항목별 비교</a:t>
+            </a:r>
+          </a:p>
+          <a:p>
+            <a:pPr algn="l">
+              <a:spcAft>
+                <a:spcPts val="800"/>
+              </a:spcAft>
+            </a:pPr>
+            <a:r>
+              <a:rPr sz="1600" b="0">
+                <a:solidFill>
+                  <a:srgbClr val="FFFFFF"/>
+                </a:solidFill>
+                <a:latin typeface="맑은 고딕"/>
+              </a:rPr>
+              <a:t>•  선택 기준</a:t>
+            </a:r>
+          </a:p>
+          <a:p>
+            <a:pPr algn="l">
+              <a:spcAft>
+                <a:spcPts val="800"/>
+              </a:spcAft>
+            </a:pPr>
+            <a:r>
+              <a:rPr sz="1600" b="0">
+                <a:solidFill>
+                  <a:srgbClr val="FFFFFF"/>
+                </a:solidFill>
+                <a:latin typeface="맑은 고딕"/>
+              </a:rPr>
+              <a:t>•  혼합 구성과 역할 전환</a:t>
+            </a:r>
+          </a:p>
+        </p:txBody>
+      </p:sp>
+    </p:spTree>
+  </p:cSld>
+  <p:clrMapOvr>
+    <a:masterClrMapping/>
+  </p:clrMapOvr>
+</p:sld>
+</file>
+
+<file path=ppt/slides/slide44.xml><?xml version="1.0" encoding="utf-8"?>
+<p:sld xmlns:a="http://schemas.openxmlformats.org/drawingml/2006/main" xmlns:p="http://schemas.openxmlformats.org/presentationml/2006/main" xmlns:r="http://schemas.openxmlformats.org/officeDocument/2006/relationships">
+  <p:cSld>
+    <p:spTree>
+      <p:nvGrpSpPr>
+        <p:cNvPr id="1" name=""/>
+        <p:cNvGrpSpPr/>
+        <p:nvPr/>
+      </p:nvGrpSpPr>
+      <p:grpSpPr/>
+      <p:sp>
+        <p:nvSpPr>
+          <p:cNvPr id="2" name="Rectangle 1"/>
+          <p:cNvSpPr/>
+          <p:nvPr/>
+        </p:nvSpPr>
+        <p:spPr>
+          <a:xfrm>
+            <a:off x="0" y="0"/>
+            <a:ext cx="12191695" cy="1005840"/>
+          </a:xfrm>
+          <a:prstGeom prst="rect">
+            <a:avLst/>
+          </a:prstGeom>
+          <a:solidFill>
+            <a:srgbClr val="C0392B"/>
+          </a:solidFill>
+          <a:ln>
+            <a:noFill/>
+          </a:ln>
+          <a:effectLst/>
+        </p:spPr>
+        <p:style>
+          <a:lnRef idx="1">
+            <a:schemeClr val="accent1"/>
+          </a:lnRef>
+          <a:fillRef idx="3">
+            <a:schemeClr val="accent1"/>
+          </a:fillRef>
+          <a:effectRef idx="2">
+            <a:schemeClr val="accent1"/>
+          </a:effectRef>
+          <a:fontRef idx="minor">
+            <a:schemeClr val="lt1"/>
+          </a:fontRef>
+        </p:style>
+        <p:txBody>
+          <a:bodyPr rtlCol="0" anchor="ctr"/>
+          <a:lstStyle/>
+          <a:p>
+            <a:pPr algn="ctr"/>
+          </a:p>
+        </p:txBody>
+      </p:sp>
+      <p:sp>
+        <p:nvSpPr>
+          <p:cNvPr id="3" name="TextBox 2"/>
+          <p:cNvSpPr txBox="1"/>
+          <p:nvPr/>
+        </p:nvSpPr>
+        <p:spPr>
+          <a:xfrm>
+            <a:off x="548640" y="91440"/>
+            <a:ext cx="10972800" cy="777240"/>
+          </a:xfrm>
+          <a:prstGeom prst="rect">
+            <a:avLst/>
+          </a:prstGeom>
+          <a:noFill/>
+        </p:spPr>
+        <p:txBody>
+          <a:bodyPr wrap="square">
+            <a:spAutoFit/>
+          </a:bodyPr>
+          <a:lstStyle/>
+          <a:p>
+            <a:pPr algn="l">
+              <a:spcAft>
+                <a:spcPts val="600"/>
+              </a:spcAft>
+            </a:pPr>
+            <a:r>
+              <a:rPr sz="2600" b="1">
+                <a:solidFill>
+                  <a:srgbClr val="FFFFFF"/>
+                </a:solidFill>
+                <a:latin typeface="맑은 고딕"/>
+              </a:rPr>
+              <a:t>항목별 비교</a:t>
+            </a:r>
+          </a:p>
+        </p:txBody>
+      </p:sp>
+      <p:sp>
+        <p:nvSpPr>
+          <p:cNvPr id="4" name="TextBox 3"/>
+          <p:cNvSpPr txBox="1"/>
+          <p:nvPr/>
+        </p:nvSpPr>
+        <p:spPr>
+          <a:xfrm>
+            <a:off x="640080" y="1078992"/>
+            <a:ext cx="10881360" cy="457200"/>
+          </a:xfrm>
+          <a:prstGeom prst="rect">
+            <a:avLst/>
+          </a:prstGeom>
+          <a:noFill/>
+        </p:spPr>
+        <p:txBody>
+          <a:bodyPr wrap="square">
+            <a:spAutoFit/>
+          </a:bodyPr>
+          <a:lstStyle/>
+          <a:p>
+            <a:pPr algn="l">
+              <a:spcAft>
+                <a:spcPts val="600"/>
+              </a:spcAft>
+            </a:pPr>
+            <a:r>
+              <a:rPr sz="1500" b="0">
+                <a:solidFill>
+                  <a:srgbClr val="5A6672"/>
+                </a:solidFill>
+                <a:latin typeface="맑은 고딕"/>
+              </a:rPr>
+              <a:t>결과물은 같고 이름을 정하는 주체가 다르다</a:t>
+            </a:r>
+          </a:p>
+        </p:txBody>
+      </p:sp>
+      <p:sp>
+        <p:nvSpPr>
+          <p:cNvPr id="5" name="TextBox 4"/>
+          <p:cNvSpPr txBox="1"/>
+          <p:nvPr/>
+        </p:nvSpPr>
+        <p:spPr>
+          <a:xfrm>
+            <a:off x="640080" y="1737360"/>
+            <a:ext cx="10881360" cy="4754880"/>
+          </a:xfrm>
+          <a:prstGeom prst="rect">
+            <a:avLst/>
+          </a:prstGeom>
+          <a:noFill/>
+        </p:spPr>
+        <p:txBody>
+          <a:bodyPr wrap="square">
+            <a:spAutoFit/>
+          </a:bodyPr>
+          <a:lstStyle/>
+          <a:p>
+            <a:pPr algn="l">
+              <a:spcAft>
+                <a:spcPts val="1000"/>
+              </a:spcAft>
+            </a:pPr>
+            <a:r>
+              <a:rPr sz="1700" b="0">
+                <a:solidFill>
+                  <a:srgbClr val="222222"/>
+                </a:solidFill>
+                <a:latin typeface="맑은 고딕"/>
+              </a:rPr>
+              <a:t>•  이름 결정: convert 치환 대 Standby에서 생성</a:t>
+            </a:r>
+          </a:p>
+          <a:p>
+            <a:pPr algn="l">
+              <a:spcAft>
+                <a:spcPts val="1000"/>
+              </a:spcAft>
+            </a:pPr>
+            <a:r>
+              <a:rPr sz="1700" b="0">
+                <a:solidFill>
+                  <a:srgbClr val="222222"/>
+                </a:solidFill>
+                <a:latin typeface="맑은 고딕"/>
+              </a:rPr>
+              <a:t>•  사전 준비: 모든 하위 디렉터리 대 최상위만</a:t>
+            </a:r>
+          </a:p>
+          <a:p>
+            <a:pPr algn="l">
+              <a:spcAft>
+                <a:spcPts val="1000"/>
+              </a:spcAft>
+            </a:pPr>
+            <a:r>
+              <a:rPr sz="1700" b="0">
+                <a:solidFill>
+                  <a:srgbClr val="222222"/>
+                </a:solidFill>
+                <a:latin typeface="맑은 고딕"/>
+              </a:rPr>
+              <a:t>•  가독성: system01.dbf 대 o1_mf_ 규칙 이름</a:t>
+            </a:r>
+          </a:p>
+          <a:p>
+            <a:pPr algn="l">
+              <a:spcAft>
+                <a:spcPts val="1000"/>
+              </a:spcAft>
+            </a:pPr>
+            <a:r>
+              <a:rPr sz="1700" b="0">
+                <a:solidFill>
+                  <a:srgbClr val="222222"/>
+                </a:solidFill>
+                <a:latin typeface="맑은 고딕"/>
+              </a:rPr>
+              <a:t>•  오류 시점: DUPLICATE 도중 대 NOMOUNT 기동</a:t>
+            </a:r>
+          </a:p>
+          <a:p>
+            <a:pPr algn="l">
+              <a:spcAft>
+                <a:spcPts val="1000"/>
+              </a:spcAft>
+            </a:pPr>
+            <a:r>
+              <a:rPr sz="1700" b="0">
+                <a:solidFill>
+                  <a:srgbClr val="222222"/>
+                </a:solidFill>
+                <a:latin typeface="맑은 고딕"/>
+              </a:rPr>
+              <a:t>•  구조 변경 반영: 규칙 의존 대 자동</a:t>
+            </a:r>
+          </a:p>
+        </p:txBody>
+      </p:sp>
+    </p:spTree>
+  </p:cSld>
+  <p:clrMapOvr>
+    <a:masterClrMapping/>
+  </p:clrMapOvr>
+</p:sld>
+</file>
+
+<file path=ppt/slides/slide45.xml><?xml version="1.0" encoding="utf-8"?>
+<p:sld xmlns:a="http://schemas.openxmlformats.org/drawingml/2006/main" xmlns:p="http://schemas.openxmlformats.org/presentationml/2006/main" xmlns:r="http://schemas.openxmlformats.org/officeDocument/2006/relationships">
+  <p:cSld>
+    <p:spTree>
+      <p:nvGrpSpPr>
+        <p:cNvPr id="1" name=""/>
+        <p:cNvGrpSpPr/>
+        <p:nvPr/>
+      </p:nvGrpSpPr>
+      <p:grpSpPr/>
+      <p:sp>
+        <p:nvSpPr>
+          <p:cNvPr id="2" name="Rectangle 1"/>
+          <p:cNvSpPr/>
+          <p:nvPr/>
+        </p:nvSpPr>
+        <p:spPr>
+          <a:xfrm>
+            <a:off x="0" y="0"/>
+            <a:ext cx="12191695" cy="1005840"/>
+          </a:xfrm>
+          <a:prstGeom prst="rect">
+            <a:avLst/>
+          </a:prstGeom>
+          <a:solidFill>
+            <a:srgbClr val="C0392B"/>
+          </a:solidFill>
+          <a:ln>
+            <a:noFill/>
+          </a:ln>
+          <a:effectLst/>
+        </p:spPr>
+        <p:style>
+          <a:lnRef idx="1">
+            <a:schemeClr val="accent1"/>
+          </a:lnRef>
+          <a:fillRef idx="3">
+            <a:schemeClr val="accent1"/>
+          </a:fillRef>
+          <a:effectRef idx="2">
+            <a:schemeClr val="accent1"/>
+          </a:effectRef>
+          <a:fontRef idx="minor">
+            <a:schemeClr val="lt1"/>
+          </a:fontRef>
+        </p:style>
+        <p:txBody>
+          <a:bodyPr rtlCol="0" anchor="ctr"/>
+          <a:lstStyle/>
+          <a:p>
+            <a:pPr algn="ctr"/>
+          </a:p>
+        </p:txBody>
+      </p:sp>
+      <p:sp>
+        <p:nvSpPr>
+          <p:cNvPr id="3" name="TextBox 2"/>
+          <p:cNvSpPr txBox="1"/>
+          <p:nvPr/>
+        </p:nvSpPr>
+        <p:spPr>
+          <a:xfrm>
+            <a:off x="548640" y="91440"/>
+            <a:ext cx="10972800" cy="777240"/>
+          </a:xfrm>
+          <a:prstGeom prst="rect">
+            <a:avLst/>
+          </a:prstGeom>
+          <a:noFill/>
+        </p:spPr>
+        <p:txBody>
+          <a:bodyPr wrap="square">
+            <a:spAutoFit/>
+          </a:bodyPr>
+          <a:lstStyle/>
+          <a:p>
+            <a:pPr algn="l">
+              <a:spcAft>
+                <a:spcPts val="600"/>
+              </a:spcAft>
+            </a:pPr>
+            <a:r>
+              <a:rPr sz="2600" b="1">
+                <a:solidFill>
+                  <a:srgbClr val="FFFFFF"/>
+                </a:solidFill>
+                <a:latin typeface="맑은 고딕"/>
+              </a:rPr>
+              <a:t>선택 기준</a:t>
+            </a:r>
+          </a:p>
+        </p:txBody>
+      </p:sp>
+      <p:sp>
+        <p:nvSpPr>
+          <p:cNvPr id="4" name="TextBox 3"/>
+          <p:cNvSpPr txBox="1"/>
+          <p:nvPr/>
+        </p:nvSpPr>
+        <p:spPr>
+          <a:xfrm>
+            <a:off x="640080" y="1078992"/>
+            <a:ext cx="10881360" cy="457200"/>
+          </a:xfrm>
+          <a:prstGeom prst="rect">
+            <a:avLst/>
+          </a:prstGeom>
+          <a:noFill/>
+        </p:spPr>
+        <p:txBody>
+          <a:bodyPr wrap="square">
+            <a:spAutoFit/>
+          </a:bodyPr>
+          <a:lstStyle/>
+          <a:p>
+            <a:pPr algn="l">
+              <a:spcAft>
+                <a:spcPts val="600"/>
+              </a:spcAft>
+            </a:pPr>
+            <a:r>
+              <a:rPr sz="1500" b="0">
+                <a:solidFill>
+                  <a:srgbClr val="5A6672"/>
+                </a:solidFill>
+                <a:latin typeface="맑은 고딕"/>
+              </a:rPr>
+              <a:t>새 구축은 OMF부터 검토</a:t>
+            </a:r>
+          </a:p>
+        </p:txBody>
+      </p:sp>
+      <p:sp>
+        <p:nvSpPr>
+          <p:cNvPr id="5" name="TextBox 4"/>
+          <p:cNvSpPr txBox="1"/>
+          <p:nvPr/>
+        </p:nvSpPr>
+        <p:spPr>
+          <a:xfrm>
+            <a:off x="640080" y="1737360"/>
+            <a:ext cx="10881360" cy="4754880"/>
+          </a:xfrm>
+          <a:prstGeom prst="rect">
+            <a:avLst/>
+          </a:prstGeom>
+          <a:noFill/>
+        </p:spPr>
+        <p:txBody>
+          <a:bodyPr wrap="square">
+            <a:spAutoFit/>
+          </a:bodyPr>
+          <a:lstStyle/>
+          <a:p>
+            <a:pPr algn="l">
+              <a:spcAft>
+                <a:spcPts val="1000"/>
+              </a:spcAft>
+            </a:pPr>
+            <a:r>
+              <a:rPr sz="1700" b="0">
+                <a:solidFill>
+                  <a:srgbClr val="222222"/>
+                </a:solidFill>
+                <a:latin typeface="맑은 고딕"/>
+              </a:rPr>
+              <a:t>•  신규 Standby: OMF가 준비와 유지 부담이 작음</a:t>
+            </a:r>
+          </a:p>
+          <a:p>
+            <a:pPr algn="l">
+              <a:spcAft>
+                <a:spcPts val="1000"/>
+              </a:spcAft>
+            </a:pPr>
+            <a:r>
+              <a:rPr sz="1700" b="0">
+                <a:solidFill>
+                  <a:srgbClr val="222222"/>
+                </a:solidFill>
+                <a:latin typeface="맑은 고딕"/>
+              </a:rPr>
+              <a:t>•  ASM 저장소: 이미 OMF, 디스크 그룹만 맞춤</a:t>
+            </a:r>
+          </a:p>
+          <a:p>
+            <a:pPr algn="l">
+              <a:spcAft>
+                <a:spcPts val="1000"/>
+              </a:spcAft>
+            </a:pPr>
+            <a:r>
+              <a:rPr sz="1700" b="0">
+                <a:solidFill>
+                  <a:srgbClr val="222222"/>
+                </a:solidFill>
+                <a:latin typeface="맑은 고딕"/>
+              </a:rPr>
+              <a:t>•  파일별 정밀 배치나 명명 규칙이 있으면 경로 지정</a:t>
+            </a:r>
+          </a:p>
+          <a:p>
+            <a:pPr algn="l">
+              <a:spcAft>
+                <a:spcPts val="1000"/>
+              </a:spcAft>
+            </a:pPr>
+            <a:r>
+              <a:rPr sz="1700" b="0">
+                <a:solidFill>
+                  <a:srgbClr val="222222"/>
+                </a:solidFill>
+                <a:latin typeface="맑은 고딕"/>
+              </a:rPr>
+              <a:t>•  이름 패턴에 기댄 스크립트는 전환 전 점검</a:t>
+            </a:r>
+          </a:p>
+        </p:txBody>
+      </p:sp>
+    </p:spTree>
+  </p:cSld>
+  <p:clrMapOvr>
+    <a:masterClrMapping/>
+  </p:clrMapOvr>
+</p:sld>
+</file>
+
+<file path=ppt/slides/slide46.xml><?xml version="1.0" encoding="utf-8"?>
+<p:sld xmlns:a="http://schemas.openxmlformats.org/drawingml/2006/main" xmlns:p="http://schemas.openxmlformats.org/presentationml/2006/main" xmlns:r="http://schemas.openxmlformats.org/officeDocument/2006/relationships">
+  <p:cSld>
+    <p:spTree>
+      <p:nvGrpSpPr>
+        <p:cNvPr id="1" name=""/>
+        <p:cNvGrpSpPr/>
+        <p:nvPr/>
+      </p:nvGrpSpPr>
+      <p:grpSpPr/>
+      <p:sp>
+        <p:nvSpPr>
+          <p:cNvPr id="2" name="Rectangle 1"/>
+          <p:cNvSpPr/>
+          <p:nvPr/>
+        </p:nvSpPr>
+        <p:spPr>
+          <a:xfrm>
+            <a:off x="0" y="0"/>
+            <a:ext cx="12191695" cy="1005840"/>
+          </a:xfrm>
+          <a:prstGeom prst="rect">
+            <a:avLst/>
+          </a:prstGeom>
+          <a:solidFill>
+            <a:srgbClr val="C0392B"/>
+          </a:solidFill>
+          <a:ln>
+            <a:noFill/>
+          </a:ln>
+          <a:effectLst/>
+        </p:spPr>
+        <p:style>
+          <a:lnRef idx="1">
+            <a:schemeClr val="accent1"/>
+          </a:lnRef>
+          <a:fillRef idx="3">
+            <a:schemeClr val="accent1"/>
+          </a:fillRef>
+          <a:effectRef idx="2">
+            <a:schemeClr val="accent1"/>
+          </a:effectRef>
+          <a:fontRef idx="minor">
+            <a:schemeClr val="lt1"/>
+          </a:fontRef>
+        </p:style>
+        <p:txBody>
+          <a:bodyPr rtlCol="0" anchor="ctr"/>
+          <a:lstStyle/>
+          <a:p>
+            <a:pPr algn="ctr"/>
+          </a:p>
+        </p:txBody>
+      </p:sp>
+      <p:sp>
+        <p:nvSpPr>
+          <p:cNvPr id="3" name="TextBox 2"/>
+          <p:cNvSpPr txBox="1"/>
+          <p:nvPr/>
+        </p:nvSpPr>
+        <p:spPr>
+          <a:xfrm>
+            <a:off x="548640" y="91440"/>
+            <a:ext cx="10972800" cy="777240"/>
+          </a:xfrm>
+          <a:prstGeom prst="rect">
+            <a:avLst/>
+          </a:prstGeom>
+          <a:noFill/>
+        </p:spPr>
+        <p:txBody>
+          <a:bodyPr wrap="square">
+            <a:spAutoFit/>
+          </a:bodyPr>
+          <a:lstStyle/>
+          <a:p>
+            <a:pPr algn="l">
+              <a:spcAft>
+                <a:spcPts val="600"/>
+              </a:spcAft>
+            </a:pPr>
+            <a:r>
+              <a:rPr sz="2600" b="1">
+                <a:solidFill>
+                  <a:srgbClr val="FFFFFF"/>
+                </a:solidFill>
+                <a:latin typeface="맑은 고딕"/>
+              </a:rPr>
+              <a:t>혼합 구성과 역할 전환</a:t>
+            </a:r>
+          </a:p>
+        </p:txBody>
+      </p:sp>
+      <p:sp>
+        <p:nvSpPr>
+          <p:cNvPr id="4" name="TextBox 3"/>
+          <p:cNvSpPr txBox="1"/>
+          <p:nvPr/>
+        </p:nvSpPr>
+        <p:spPr>
+          <a:xfrm>
+            <a:off x="640080" y="1078992"/>
+            <a:ext cx="10881360" cy="457200"/>
+          </a:xfrm>
+          <a:prstGeom prst="rect">
+            <a:avLst/>
+          </a:prstGeom>
+          <a:noFill/>
+        </p:spPr>
+        <p:txBody>
+          <a:bodyPr wrap="square">
+            <a:spAutoFit/>
+          </a:bodyPr>
+          <a:lstStyle/>
+          <a:p>
+            <a:pPr algn="l">
+              <a:spcAft>
+                <a:spcPts val="600"/>
+              </a:spcAft>
+            </a:pPr>
+            <a:r>
+              <a:rPr sz="1500" b="0">
+                <a:solidFill>
+                  <a:srgbClr val="5A6672"/>
+                </a:solidFill>
+                <a:latin typeface="맑은 고딕"/>
+              </a:rPr>
+              <a:t>Switchover 뒤에는 방향이 바뀐다</a:t>
+            </a:r>
+          </a:p>
+        </p:txBody>
+      </p:sp>
+      <p:sp>
+        <p:nvSpPr>
+          <p:cNvPr id="5" name="TextBox 4"/>
+          <p:cNvSpPr txBox="1"/>
+          <p:nvPr/>
+        </p:nvSpPr>
+        <p:spPr>
+          <a:xfrm>
+            <a:off x="640080" y="1737360"/>
+            <a:ext cx="10881360" cy="4754880"/>
+          </a:xfrm>
+          <a:prstGeom prst="rect">
+            <a:avLst/>
+          </a:prstGeom>
+          <a:noFill/>
+        </p:spPr>
+        <p:txBody>
+          <a:bodyPr wrap="square">
+            <a:spAutoFit/>
+          </a:bodyPr>
+          <a:lstStyle/>
+          <a:p>
+            <a:pPr algn="l">
+              <a:spcAft>
+                <a:spcPts val="1000"/>
+              </a:spcAft>
+            </a:pPr>
+            <a:r>
+              <a:rPr sz="1700" b="0">
+                <a:solidFill>
+                  <a:srgbClr val="222222"/>
+                </a:solidFill>
+                <a:latin typeface="맑은 고딕"/>
+              </a:rPr>
+              <a:t>•  평소: 일반 Primary, OMF Standby로 문제없음</a:t>
+            </a:r>
+          </a:p>
+          <a:p>
+            <a:pPr algn="l">
+              <a:spcAft>
+                <a:spcPts val="1000"/>
+              </a:spcAft>
+            </a:pPr>
+            <a:r>
+              <a:rPr sz="1700" b="0">
+                <a:solidFill>
+                  <a:srgbClr val="222222"/>
+                </a:solidFill>
+                <a:latin typeface="맑은 고딕"/>
+              </a:rPr>
+              <a:t>•  전환 후: boston이 OMF 파일 생성, chicago가 수신</a:t>
+            </a:r>
+          </a:p>
+          <a:p>
+            <a:pPr algn="l">
+              <a:spcAft>
+                <a:spcPts val="1000"/>
+              </a:spcAft>
+            </a:pPr>
+            <a:r>
+              <a:rPr sz="1700" b="0">
+                <a:solidFill>
+                  <a:srgbClr val="222222"/>
+                </a:solidFill>
+                <a:latin typeface="맑은 고딕"/>
+              </a:rPr>
+              <a:t>•  chicago에 OMF 위치가 없으면 convert 필요</a:t>
+            </a:r>
+          </a:p>
+          <a:p>
+            <a:pPr algn="l">
+              <a:spcAft>
+                <a:spcPts val="1000"/>
+              </a:spcAft>
+            </a:pPr>
+            <a:r>
+              <a:rPr sz="1700" b="0">
+                <a:solidFill>
+                  <a:srgbClr val="222222"/>
+                </a:solidFill>
+                <a:latin typeface="맑은 고딕"/>
+              </a:rPr>
+              <a:t>•  chicago에도 DB_CREATE_FILE_DEST를 설정</a:t>
+            </a:r>
+          </a:p>
+        </p:txBody>
+      </p:sp>
+    </p:spTree>
+  </p:cSld>
+  <p:clrMapOvr>
+    <a:masterClrMapping/>
+  </p:clrMapOvr>
+</p:sld>
+</file>
+
+<file path=ppt/slides/slide47.xml><?xml version="1.0" encoding="utf-8"?>
+<p:sld xmlns:a="http://schemas.openxmlformats.org/drawingml/2006/main" xmlns:p="http://schemas.openxmlformats.org/presentationml/2006/main" xmlns:r="http://schemas.openxmlformats.org/officeDocument/2006/relationships">
+  <p:cSld>
+    <p:spTree>
+      <p:nvGrpSpPr>
+        <p:cNvPr id="1" name=""/>
+        <p:cNvGrpSpPr/>
+        <p:nvPr/>
+      </p:nvGrpSpPr>
+      <p:grpSpPr/>
+      <p:sp>
+        <p:nvSpPr>
+          <p:cNvPr id="2" name="Rectangle 1"/>
+          <p:cNvSpPr/>
+          <p:nvPr/>
+        </p:nvSpPr>
+        <p:spPr>
+          <a:xfrm>
+            <a:off x="0" y="0"/>
+            <a:ext cx="12191695" cy="1005840"/>
+          </a:xfrm>
+          <a:prstGeom prst="rect">
+            <a:avLst/>
+          </a:prstGeom>
+          <a:solidFill>
+            <a:srgbClr val="C0392B"/>
+          </a:solidFill>
+          <a:ln>
+            <a:noFill/>
+          </a:ln>
+          <a:effectLst/>
+        </p:spPr>
+        <p:style>
+          <a:lnRef idx="1">
+            <a:schemeClr val="accent1"/>
+          </a:lnRef>
+          <a:fillRef idx="3">
+            <a:schemeClr val="accent1"/>
+          </a:fillRef>
+          <a:effectRef idx="2">
+            <a:schemeClr val="accent1"/>
+          </a:effectRef>
+          <a:fontRef idx="minor">
+            <a:schemeClr val="lt1"/>
+          </a:fontRef>
+        </p:style>
+        <p:txBody>
+          <a:bodyPr rtlCol="0" anchor="ctr"/>
+          <a:lstStyle/>
+          <a:p>
+            <a:pPr algn="ctr"/>
+          </a:p>
+        </p:txBody>
+      </p:sp>
+      <p:sp>
+        <p:nvSpPr>
+          <p:cNvPr id="3" name="TextBox 2"/>
+          <p:cNvSpPr txBox="1"/>
+          <p:nvPr/>
+        </p:nvSpPr>
+        <p:spPr>
+          <a:xfrm>
+            <a:off x="548640" y="91440"/>
+            <a:ext cx="10972800" cy="777240"/>
+          </a:xfrm>
+          <a:prstGeom prst="rect">
+            <a:avLst/>
+          </a:prstGeom>
+          <a:noFill/>
+        </p:spPr>
+        <p:txBody>
+          <a:bodyPr wrap="square">
+            <a:spAutoFit/>
+          </a:bodyPr>
+          <a:lstStyle/>
+          <a:p>
+            <a:pPr algn="l">
+              <a:spcAft>
+                <a:spcPts val="600"/>
+              </a:spcAft>
+            </a:pPr>
+            <a:r>
+              <a:rPr sz="2600" b="1">
+                <a:solidFill>
+                  <a:srgbClr val="FFFFFF"/>
+                </a:solidFill>
+                <a:latin typeface="맑은 고딕"/>
+              </a:rPr>
+              <a:t>비OMF Primary 옆에 OMF Standby</a:t>
+            </a:r>
+          </a:p>
+        </p:txBody>
+      </p:sp>
+      <p:sp>
+        <p:nvSpPr>
+          <p:cNvPr id="4" name="TextBox 3"/>
+          <p:cNvSpPr txBox="1"/>
+          <p:nvPr/>
+        </p:nvSpPr>
+        <p:spPr>
+          <a:xfrm>
+            <a:off x="640080" y="1078992"/>
+            <a:ext cx="10881360" cy="457200"/>
+          </a:xfrm>
+          <a:prstGeom prst="rect">
+            <a:avLst/>
+          </a:prstGeom>
+          <a:noFill/>
+        </p:spPr>
+        <p:txBody>
+          <a:bodyPr wrap="square">
+            <a:spAutoFit/>
+          </a:bodyPr>
+          <a:lstStyle/>
+          <a:p>
+            <a:pPr algn="l">
+              <a:spcAft>
+                <a:spcPts val="600"/>
+              </a:spcAft>
+            </a:pPr>
+            <a:r>
+              <a:rPr sz="1500" b="0">
+                <a:solidFill>
+                  <a:srgbClr val="5A6672"/>
+                </a:solidFill>
+                <a:latin typeface="맑은 고딕"/>
+              </a:rPr>
+              <a:t>실무 시나리오</a:t>
+            </a:r>
+          </a:p>
+        </p:txBody>
+      </p:sp>
+      <p:sp>
+        <p:nvSpPr>
+          <p:cNvPr id="5" name="TextBox 4"/>
+          <p:cNvSpPr txBox="1"/>
+          <p:nvPr/>
+        </p:nvSpPr>
+        <p:spPr>
+          <a:xfrm>
+            <a:off x="640080" y="1737360"/>
+            <a:ext cx="10881360" cy="4754880"/>
+          </a:xfrm>
+          <a:prstGeom prst="rect">
+            <a:avLst/>
+          </a:prstGeom>
+          <a:noFill/>
+        </p:spPr>
+        <p:txBody>
+          <a:bodyPr wrap="square">
+            <a:spAutoFit/>
+          </a:bodyPr>
+          <a:lstStyle/>
+          <a:p>
+            <a:pPr algn="l">
+              <a:spcAft>
+                <a:spcPts val="1000"/>
+              </a:spcAft>
+            </a:pPr>
+            <a:r>
+              <a:rPr sz="1700" b="0">
+                <a:solidFill>
+                  <a:srgbClr val="222222"/>
+                </a:solidFill>
+                <a:latin typeface="맑은 고딕"/>
+              </a:rPr>
+              <a:t>•  Primary: 여섯 마운트 지점에 일반 파일</a:t>
+            </a:r>
+          </a:p>
+          <a:p>
+            <a:pPr algn="l">
+              <a:spcAft>
+                <a:spcPts val="1000"/>
+              </a:spcAft>
+            </a:pPr>
+            <a:r>
+              <a:rPr sz="1700" b="0">
+                <a:solidFill>
+                  <a:srgbClr val="222222"/>
+                </a:solidFill>
+                <a:latin typeface="맑은 고딕"/>
+              </a:rPr>
+              <a:t>•  재해 복구 서버: 큰 볼륨 하나</a:t>
+            </a:r>
+          </a:p>
+          <a:p>
+            <a:pPr algn="l">
+              <a:spcAft>
+                <a:spcPts val="1000"/>
+              </a:spcAft>
+            </a:pPr>
+            <a:r>
+              <a:rPr sz="1700" b="0">
+                <a:solidFill>
+                  <a:srgbClr val="222222"/>
+                </a:solidFill>
+                <a:latin typeface="맑은 고딕"/>
+              </a:rPr>
+              <a:t>•  Standby DB_CREATE_FILE_DEST 한 줄로 해결</a:t>
+            </a:r>
+          </a:p>
+          <a:p>
+            <a:pPr algn="l">
+              <a:spcAft>
+                <a:spcPts val="1000"/>
+              </a:spcAft>
+            </a:pPr>
+            <a:r>
+              <a:rPr sz="1700" b="0">
+                <a:solidFill>
+                  <a:srgbClr val="222222"/>
+                </a:solidFill>
+                <a:latin typeface="맑은 고딕"/>
+              </a:rPr>
+              <a:t>•  계획서: CONTROL_FILES, FRA 크기, Primary OMF 설정</a:t>
+            </a:r>
+          </a:p>
+        </p:txBody>
+      </p:sp>
+    </p:spTree>
+  </p:cSld>
+  <p:clrMapOvr>
+    <a:masterClrMapping/>
+  </p:clrMapOvr>
+</p:sld>
+</file>
+
+<file path=ppt/slides/slide48.xml><?xml version="1.0" encoding="utf-8"?>
+<p:sld xmlns:a="http://schemas.openxmlformats.org/drawingml/2006/main" xmlns:p="http://schemas.openxmlformats.org/presentationml/2006/main" xmlns:r="http://schemas.openxmlformats.org/officeDocument/2006/relationships">
+  <p:cSld>
+    <p:spTree>
+      <p:nvGrpSpPr>
+        <p:cNvPr id="1" name=""/>
+        <p:cNvGrpSpPr/>
+        <p:nvPr/>
+      </p:nvGrpSpPr>
+      <p:grpSpPr/>
+      <p:sp>
+        <p:nvSpPr>
+          <p:cNvPr id="2" name="Rectangle 1"/>
+          <p:cNvSpPr/>
+          <p:nvPr/>
+        </p:nvSpPr>
+        <p:spPr>
+          <a:xfrm>
+            <a:off x="0" y="0"/>
+            <a:ext cx="12191695" cy="6858000"/>
+          </a:xfrm>
+          <a:prstGeom prst="rect">
+            <a:avLst/>
+          </a:prstGeom>
+          <a:solidFill>
+            <a:srgbClr val="C0392B"/>
+          </a:solidFill>
+          <a:ln>
+            <a:noFill/>
+          </a:ln>
+          <a:effectLst/>
+        </p:spPr>
+        <p:style>
+          <a:lnRef idx="1">
+            <a:schemeClr val="accent1"/>
+          </a:lnRef>
+          <a:fillRef idx="3">
+            <a:schemeClr val="accent1"/>
+          </a:fillRef>
+          <a:effectRef idx="2">
+            <a:schemeClr val="accent1"/>
+          </a:effectRef>
+          <a:fontRef idx="minor">
+            <a:schemeClr val="lt1"/>
+          </a:fontRef>
+        </p:style>
+        <p:txBody>
+          <a:bodyPr rtlCol="0" anchor="ctr"/>
+          <a:lstStyle/>
+          <a:p>
+            <a:pPr algn="ctr"/>
+          </a:p>
+        </p:txBody>
+      </p:sp>
+      <p:sp>
+        <p:nvSpPr>
+          <p:cNvPr id="3" name="TextBox 2"/>
+          <p:cNvSpPr txBox="1"/>
+          <p:nvPr/>
+        </p:nvSpPr>
+        <p:spPr>
+          <a:xfrm>
+            <a:off x="822960" y="2011680"/>
+            <a:ext cx="10515600" cy="1097280"/>
+          </a:xfrm>
+          <a:prstGeom prst="rect">
+            <a:avLst/>
+          </a:prstGeom>
+          <a:noFill/>
+        </p:spPr>
+        <p:txBody>
+          <a:bodyPr wrap="square">
+            <a:spAutoFit/>
+          </a:bodyPr>
+          <a:lstStyle/>
+          <a:p>
+            <a:pPr algn="l">
+              <a:spcAft>
+                <a:spcPts val="600"/>
+              </a:spcAft>
+            </a:pPr>
+            <a:r>
+              <a:rPr sz="4000" b="1">
+                <a:solidFill>
+                  <a:srgbClr val="FFFFFF"/>
+                </a:solidFill>
+                <a:latin typeface="맑은 고딕"/>
+              </a:rPr>
+              <a:t>6.11</a:t>
+            </a:r>
+          </a:p>
+        </p:txBody>
+      </p:sp>
+      <p:sp>
+        <p:nvSpPr>
+          <p:cNvPr id="4" name="TextBox 3"/>
+          <p:cNvSpPr txBox="1"/>
+          <p:nvPr/>
+        </p:nvSpPr>
+        <p:spPr>
+          <a:xfrm>
+            <a:off x="822960" y="3017520"/>
+            <a:ext cx="10515600" cy="914400"/>
+          </a:xfrm>
+          <a:prstGeom prst="rect">
+            <a:avLst/>
+          </a:prstGeom>
+          <a:noFill/>
+        </p:spPr>
+        <p:txBody>
+          <a:bodyPr wrap="square">
+            <a:spAutoFit/>
+          </a:bodyPr>
+          <a:lstStyle/>
+          <a:p>
+            <a:pPr algn="l">
+              <a:spcAft>
+                <a:spcPts val="600"/>
+              </a:spcAft>
+            </a:pPr>
+            <a:r>
+              <a:rPr sz="2800" b="1">
+                <a:solidFill>
+                  <a:srgbClr val="FFFFFF"/>
+                </a:solidFill>
+                <a:latin typeface="맑은 고딕"/>
+              </a:rPr>
+              <a:t>운영 시 주의점</a:t>
+            </a:r>
+          </a:p>
+        </p:txBody>
+      </p:sp>
+      <p:sp>
+        <p:nvSpPr>
+          <p:cNvPr id="5" name="Rectangle 4"/>
+          <p:cNvSpPr/>
+          <p:nvPr/>
+        </p:nvSpPr>
+        <p:spPr>
+          <a:xfrm>
+            <a:off x="822960" y="4114800"/>
+            <a:ext cx="5486400" cy="54864"/>
+          </a:xfrm>
+          <a:prstGeom prst="rect">
+            <a:avLst/>
+          </a:prstGeom>
+          <a:solidFill>
+            <a:srgbClr val="FFFFFF"/>
+          </a:solidFill>
+          <a:ln>
+            <a:noFill/>
+          </a:ln>
+          <a:effectLst/>
+        </p:spPr>
+        <p:style>
+          <a:lnRef idx="1">
+            <a:schemeClr val="accent1"/>
+          </a:lnRef>
+          <a:fillRef idx="3">
+            <a:schemeClr val="accent1"/>
+          </a:fillRef>
+          <a:effectRef idx="2">
+            <a:schemeClr val="accent1"/>
+          </a:effectRef>
+          <a:fontRef idx="minor">
+            <a:schemeClr val="lt1"/>
+          </a:fontRef>
+        </p:style>
+        <p:txBody>
+          <a:bodyPr rtlCol="0" anchor="ctr"/>
+          <a:lstStyle/>
+          <a:p>
+            <a:pPr algn="ctr"/>
+          </a:p>
+        </p:txBody>
+      </p:sp>
+      <p:sp>
+        <p:nvSpPr>
+          <p:cNvPr id="6" name="TextBox 5"/>
+          <p:cNvSpPr txBox="1"/>
+          <p:nvPr/>
+        </p:nvSpPr>
+        <p:spPr>
+          <a:xfrm>
+            <a:off x="822960" y="4297680"/>
+            <a:ext cx="10058400" cy="2011680"/>
+          </a:xfrm>
+          <a:prstGeom prst="rect">
+            <a:avLst/>
+          </a:prstGeom>
+          <a:noFill/>
+        </p:spPr>
+        <p:txBody>
+          <a:bodyPr wrap="square">
+            <a:spAutoFit/>
+          </a:bodyPr>
+          <a:lstStyle/>
+          <a:p>
+            <a:pPr algn="l">
+              <a:spcAft>
+                <a:spcPts val="800"/>
+              </a:spcAft>
+            </a:pPr>
+            <a:r>
+              <a:rPr sz="1600" b="0">
+                <a:solidFill>
+                  <a:srgbClr val="FFFFFF"/>
+                </a:solidFill>
+                <a:latin typeface="맑은 고딕"/>
+              </a:rPr>
+              <a:t>•  권한, 이동, FRA, 정리, 점검</a:t>
+            </a:r>
+          </a:p>
+        </p:txBody>
+      </p:sp>
+    </p:spTree>
+  </p:cSld>
+  <p:clrMapOvr>
+    <a:masterClrMapping/>
+  </p:clrMapOvr>
+</p:sld>
+</file>
+
+<file path=ppt/slides/slide49.xml><?xml version="1.0" encoding="utf-8"?>
+<p:sld xmlns:a="http://schemas.openxmlformats.org/drawingml/2006/main" xmlns:p="http://schemas.openxmlformats.org/presentationml/2006/main" xmlns:r="http://schemas.openxmlformats.org/officeDocument/2006/relationships">
+  <p:cSld>
+    <p:spTree>
+      <p:nvGrpSpPr>
+        <p:cNvPr id="1" name=""/>
+        <p:cNvGrpSpPr/>
+        <p:nvPr/>
+      </p:nvGrpSpPr>
+      <p:grpSpPr/>
+      <p:sp>
+        <p:nvSpPr>
+          <p:cNvPr id="2" name="Rectangle 1"/>
+          <p:cNvSpPr/>
+          <p:nvPr/>
+        </p:nvSpPr>
+        <p:spPr>
+          <a:xfrm>
+            <a:off x="0" y="0"/>
+            <a:ext cx="12191695" cy="1005840"/>
+          </a:xfrm>
+          <a:prstGeom prst="rect">
+            <a:avLst/>
+          </a:prstGeom>
+          <a:solidFill>
+            <a:srgbClr val="C0392B"/>
+          </a:solidFill>
+          <a:ln>
+            <a:noFill/>
+          </a:ln>
+          <a:effectLst/>
+        </p:spPr>
+        <p:style>
+          <a:lnRef idx="1">
+            <a:schemeClr val="accent1"/>
+          </a:lnRef>
+          <a:fillRef idx="3">
+            <a:schemeClr val="accent1"/>
+          </a:fillRef>
+          <a:effectRef idx="2">
+            <a:schemeClr val="accent1"/>
+          </a:effectRef>
+          <a:fontRef idx="minor">
+            <a:schemeClr val="lt1"/>
+          </a:fontRef>
+        </p:style>
+        <p:txBody>
+          <a:bodyPr rtlCol="0" anchor="ctr"/>
+          <a:lstStyle/>
+          <a:p>
+            <a:pPr algn="ctr"/>
+          </a:p>
+        </p:txBody>
+      </p:sp>
+      <p:sp>
+        <p:nvSpPr>
+          <p:cNvPr id="3" name="TextBox 2"/>
+          <p:cNvSpPr txBox="1"/>
+          <p:nvPr/>
+        </p:nvSpPr>
+        <p:spPr>
+          <a:xfrm>
+            <a:off x="548640" y="91440"/>
+            <a:ext cx="10972800" cy="777240"/>
+          </a:xfrm>
+          <a:prstGeom prst="rect">
+            <a:avLst/>
+          </a:prstGeom>
+          <a:noFill/>
+        </p:spPr>
+        <p:txBody>
+          <a:bodyPr wrap="square">
+            <a:spAutoFit/>
+          </a:bodyPr>
+          <a:lstStyle/>
+          <a:p>
+            <a:pPr algn="l">
+              <a:spcAft>
+                <a:spcPts val="600"/>
+              </a:spcAft>
+            </a:pPr>
+            <a:r>
+              <a:rPr sz="2600" b="1">
+                <a:solidFill>
+                  <a:srgbClr val="FFFFFF"/>
+                </a:solidFill>
+                <a:latin typeface="맑은 고딕"/>
+              </a:rPr>
+              <a:t>운영 시 주의점</a:t>
+            </a:r>
+          </a:p>
+        </p:txBody>
+      </p:sp>
+      <p:sp>
+        <p:nvSpPr>
+          <p:cNvPr id="4" name="TextBox 3"/>
+          <p:cNvSpPr txBox="1"/>
+          <p:nvPr/>
+        </p:nvSpPr>
+        <p:spPr>
+          <a:xfrm>
+            <a:off x="640080" y="1078992"/>
+            <a:ext cx="10881360" cy="457200"/>
+          </a:xfrm>
+          <a:prstGeom prst="rect">
+            <a:avLst/>
+          </a:prstGeom>
+          <a:noFill/>
+        </p:spPr>
+        <p:txBody>
+          <a:bodyPr wrap="square">
+            <a:spAutoFit/>
+          </a:bodyPr>
+          <a:lstStyle/>
+          <a:p>
+            <a:pPr algn="l">
+              <a:spcAft>
+                <a:spcPts val="600"/>
+              </a:spcAft>
+            </a:pPr>
+            <a:r>
+              <a:rPr sz="1500" b="0">
+                <a:solidFill>
+                  <a:srgbClr val="5A6672"/>
+                </a:solidFill>
+                <a:latin typeface="맑은 고딕"/>
+              </a:rPr>
+              <a:t>파일 이름을 사람이 정하지 않는 대가</a:t>
+            </a:r>
+          </a:p>
+        </p:txBody>
+      </p:sp>
+      <p:sp>
+        <p:nvSpPr>
+          <p:cNvPr id="5" name="TextBox 4"/>
+          <p:cNvSpPr txBox="1"/>
+          <p:nvPr/>
+        </p:nvSpPr>
+        <p:spPr>
+          <a:xfrm>
+            <a:off x="640080" y="1737360"/>
+            <a:ext cx="10881360" cy="4754880"/>
+          </a:xfrm>
+          <a:prstGeom prst="rect">
+            <a:avLst/>
+          </a:prstGeom>
+          <a:noFill/>
+        </p:spPr>
+        <p:txBody>
+          <a:bodyPr wrap="square">
+            <a:spAutoFit/>
+          </a:bodyPr>
+          <a:lstStyle/>
+          <a:p>
+            <a:pPr algn="l">
+              <a:spcAft>
+                <a:spcPts val="1000"/>
+              </a:spcAft>
+            </a:pPr>
+            <a:r>
+              <a:rPr sz="1700" b="0">
+                <a:solidFill>
+                  <a:srgbClr val="222222"/>
+                </a:solidFill>
+                <a:latin typeface="맑은 고딕"/>
+              </a:rPr>
+              <a:t>•  OMF 경로 소유자와 권한을 양쪽 같은 기준으로</a:t>
+            </a:r>
+          </a:p>
+          <a:p>
+            <a:pPr algn="l">
+              <a:spcAft>
+                <a:spcPts val="1000"/>
+              </a:spcAft>
+            </a:pPr>
+            <a:r>
+              <a:rPr sz="1700" b="0">
+                <a:solidFill>
+                  <a:srgbClr val="222222"/>
+                </a:solidFill>
+                <a:latin typeface="맑은 고딕"/>
+              </a:rPr>
+              <a:t>•  OMF 파일은 MOVE DATAFILE이나 RMAN으로만 이동</a:t>
+            </a:r>
+          </a:p>
+          <a:p>
+            <a:pPr algn="l">
+              <a:spcAft>
+                <a:spcPts val="1000"/>
+              </a:spcAft>
+            </a:pPr>
+            <a:r>
+              <a:rPr sz="1700" b="0">
+                <a:solidFill>
+                  <a:srgbClr val="222222"/>
+                </a:solidFill>
+                <a:latin typeface="맑은 고딕"/>
+              </a:rPr>
+              <a:t>•  FRA 경보 기준을 로그 다중화 기준으로 재설정</a:t>
+            </a:r>
+          </a:p>
+          <a:p>
+            <a:pPr algn="l">
+              <a:spcAft>
+                <a:spcPts val="1000"/>
+              </a:spcAft>
+            </a:pPr>
+            <a:r>
+              <a:rPr sz="1700" b="0">
+                <a:solidFill>
+                  <a:srgbClr val="222222"/>
+                </a:solidFill>
+                <a:latin typeface="맑은 고딕"/>
+              </a:rPr>
+              <a:t>•  Primary 이름 디렉터리는 V$ 조회 후 정리</a:t>
+            </a:r>
+          </a:p>
+          <a:p>
+            <a:pPr algn="l">
+              <a:spcAft>
+                <a:spcPts val="1000"/>
+              </a:spcAft>
+            </a:pPr>
+            <a:r>
+              <a:rPr sz="1700" b="0">
+                <a:solidFill>
+                  <a:srgbClr val="222222"/>
+                </a:solidFill>
+                <a:latin typeface="맑은 고딕"/>
+              </a:rPr>
+              <a:t>•  운영 문서는 파일 이름 대신 번호와 테이블스페이스로</a:t>
             </a:r>
           </a:p>
         </p:txBody>
@@ -13624,7 +16489,7 @@
                 </a:solidFill>
                 <a:latin typeface="맑은 고딕"/>
               </a:rPr>
-              <a:t>5장의 실패가 남긴 질문</a:t>
+              <a:t>경로 지정 방식에서 관리자가 맡던 일</a:t>
             </a:r>
           </a:p>
         </p:txBody>
@@ -13663,7 +16528,7 @@
                 </a:solidFill>
                 <a:latin typeface="맑은 고딕"/>
               </a:rPr>
-              <a:t>디렉터리는 누가 만드는가</a:t>
+              <a:t>Standby 이름은 Primary 이름의 문자열 치환</a:t>
             </a:r>
           </a:p>
         </p:txBody>
@@ -13702,7 +16567,7 @@
                 </a:solidFill>
                 <a:latin typeface="맑은 고딕"/>
               </a:rPr>
-              <a:t>•  5장 두 번째 실패 — `pdbseed` 디렉터리가 없어 ORA-19505</a:t>
+              <a:t>•  convert 규칙이 Primary 디렉터리를 모두 덮어야 함</a:t>
             </a:r>
           </a:p>
           <a:p>
@@ -13718,7 +16583,7 @@
                 </a:solidFill>
                 <a:latin typeface="맑은 고딕"/>
               </a:rPr>
-              <a:t>•  convert 규칙은 문자열만 바꾼다. 경로의 존재는 확인하지 않는다</a:t>
+              <a:t>•  치환 결과 디렉터리는 Standby에 미리 생성</a:t>
             </a:r>
           </a:p>
           <a:p>
@@ -13734,7 +16599,7 @@
                 </a:solidFill>
                 <a:latin typeface="맑은 고딕"/>
               </a:rPr>
-              <a:t>•  PDB를 추가할 때마다 사람이 디렉터리를 만들어야 한다</a:t>
+              <a:t>•  CONTROL_FILES 별도 지정, 필요하면 NOFILENAMECHECK</a:t>
             </a:r>
           </a:p>
           <a:p>
@@ -13750,7 +16615,791 @@
                 </a:solidFill>
                 <a:latin typeface="맑은 고딕"/>
               </a:rPr>
-              <a:t>•  OMF는 이 책임을 오라클에 넘긴다</a:t>
+              <a:t>•  Primary에 새 경로가 생기면 규칙도 다시 손봄</a:t>
+            </a:r>
+          </a:p>
+        </p:txBody>
+      </p:sp>
+    </p:spTree>
+  </p:cSld>
+  <p:clrMapOvr>
+    <a:masterClrMapping/>
+  </p:clrMapOvr>
+</p:sld>
+</file>
+
+<file path=ppt/slides/slide50.xml><?xml version="1.0" encoding="utf-8"?>
+<p:sld xmlns:a="http://schemas.openxmlformats.org/drawingml/2006/main" xmlns:p="http://schemas.openxmlformats.org/presentationml/2006/main" xmlns:r="http://schemas.openxmlformats.org/officeDocument/2006/relationships">
+  <p:cSld>
+    <p:spTree>
+      <p:nvGrpSpPr>
+        <p:cNvPr id="1" name=""/>
+        <p:cNvGrpSpPr/>
+        <p:nvPr/>
+      </p:nvGrpSpPr>
+      <p:grpSpPr/>
+      <p:sp>
+        <p:nvSpPr>
+          <p:cNvPr id="2" name="Rectangle 1"/>
+          <p:cNvSpPr/>
+          <p:nvPr/>
+        </p:nvSpPr>
+        <p:spPr>
+          <a:xfrm>
+            <a:off x="0" y="0"/>
+            <a:ext cx="12191695" cy="1005840"/>
+          </a:xfrm>
+          <a:prstGeom prst="rect">
+            <a:avLst/>
+          </a:prstGeom>
+          <a:solidFill>
+            <a:srgbClr val="C0392B"/>
+          </a:solidFill>
+          <a:ln>
+            <a:noFill/>
+          </a:ln>
+          <a:effectLst/>
+        </p:spPr>
+        <p:style>
+          <a:lnRef idx="1">
+            <a:schemeClr val="accent1"/>
+          </a:lnRef>
+          <a:fillRef idx="3">
+            <a:schemeClr val="accent1"/>
+          </a:fillRef>
+          <a:effectRef idx="2">
+            <a:schemeClr val="accent1"/>
+          </a:effectRef>
+          <a:fontRef idx="minor">
+            <a:schemeClr val="lt1"/>
+          </a:fontRef>
+        </p:style>
+        <p:txBody>
+          <a:bodyPr rtlCol="0" anchor="ctr"/>
+          <a:lstStyle/>
+          <a:p>
+            <a:pPr algn="ctr"/>
+          </a:p>
+        </p:txBody>
+      </p:sp>
+      <p:sp>
+        <p:nvSpPr>
+          <p:cNvPr id="3" name="TextBox 2"/>
+          <p:cNvSpPr txBox="1"/>
+          <p:nvPr/>
+        </p:nvSpPr>
+        <p:spPr>
+          <a:xfrm>
+            <a:off x="548640" y="91440"/>
+            <a:ext cx="10972800" cy="777240"/>
+          </a:xfrm>
+          <a:prstGeom prst="rect">
+            <a:avLst/>
+          </a:prstGeom>
+          <a:noFill/>
+        </p:spPr>
+        <p:txBody>
+          <a:bodyPr wrap="square">
+            <a:spAutoFit/>
+          </a:bodyPr>
+          <a:lstStyle/>
+          <a:p>
+            <a:pPr algn="l">
+              <a:spcAft>
+                <a:spcPts val="600"/>
+              </a:spcAft>
+            </a:pPr>
+            <a:r>
+              <a:rPr sz="2600" b="1">
+                <a:solidFill>
+                  <a:srgbClr val="FFFFFF"/>
+                </a:solidFill>
+                <a:latin typeface="맑은 고딕"/>
+              </a:rPr>
+              <a:t>요약</a:t>
+            </a:r>
+          </a:p>
+        </p:txBody>
+      </p:sp>
+      <p:sp>
+        <p:nvSpPr>
+          <p:cNvPr id="4" name="TextBox 3"/>
+          <p:cNvSpPr txBox="1"/>
+          <p:nvPr/>
+        </p:nvSpPr>
+        <p:spPr>
+          <a:xfrm>
+            <a:off x="640080" y="1371600"/>
+            <a:ext cx="10881360" cy="5120640"/>
+          </a:xfrm>
+          <a:prstGeom prst="rect">
+            <a:avLst/>
+          </a:prstGeom>
+          <a:noFill/>
+        </p:spPr>
+        <p:txBody>
+          <a:bodyPr wrap="square">
+            <a:spAutoFit/>
+          </a:bodyPr>
+          <a:lstStyle/>
+          <a:p>
+            <a:pPr algn="l">
+              <a:spcAft>
+                <a:spcPts val="1000"/>
+              </a:spcAft>
+            </a:pPr>
+            <a:r>
+              <a:rPr sz="1600" b="0">
+                <a:solidFill>
+                  <a:srgbClr val="222222"/>
+                </a:solidFill>
+                <a:latin typeface="맑은 고딕"/>
+              </a:rPr>
+              <a:t>•  OMF: 위치만 주면 이름·생성·삭제는 데이터베이스가</a:t>
+            </a:r>
+          </a:p>
+          <a:p>
+            <a:pPr algn="l">
+              <a:spcAft>
+                <a:spcPts val="1000"/>
+              </a:spcAft>
+            </a:pPr>
+            <a:r>
+              <a:rPr sz="1600" b="0">
+                <a:solidFill>
+                  <a:srgbClr val="222222"/>
+                </a:solidFill>
+                <a:latin typeface="맑은 고딕"/>
+              </a:rPr>
+              <a:t>•  FILE_DEST + FRA면 로그와 컨트롤 파일 두 벌</a:t>
+            </a:r>
+          </a:p>
+          <a:p>
+            <a:pPr algn="l">
+              <a:spcAft>
+                <a:spcPts val="1000"/>
+              </a:spcAft>
+            </a:pPr>
+            <a:r>
+              <a:rPr sz="1600" b="0">
+                <a:solidFill>
+                  <a:srgbClr val="222222"/>
+                </a:solidFill>
+                <a:latin typeface="맑은 고딕"/>
+              </a:rPr>
+              <a:t>•  경로: 기본위치/DB_UNIQUE_NAME/(GUID)/종류/o1_mf_</a:t>
+            </a:r>
+          </a:p>
+          <a:p>
+            <a:pPr algn="l">
+              <a:spcAft>
+                <a:spcPts val="1000"/>
+              </a:spcAft>
+            </a:pPr>
+            <a:r>
+              <a:rPr sz="1600" b="0">
+                <a:solidFill>
+                  <a:srgbClr val="222222"/>
+                </a:solidFill>
+                <a:latin typeface="맑은 고딕"/>
+              </a:rPr>
+              <a:t>•  convert는 치환, OMF는 생성, 함께 두면 convert 우선</a:t>
+            </a:r>
+          </a:p>
+          <a:p>
+            <a:pPr algn="l">
+              <a:spcAft>
+                <a:spcPts val="1000"/>
+              </a:spcAft>
+            </a:pPr>
+            <a:r>
+              <a:rPr sz="1600" b="0">
+                <a:solidFill>
+                  <a:srgbClr val="222222"/>
+                </a:solidFill>
+                <a:latin typeface="맑은 고딕"/>
+              </a:rPr>
+              <a:t>•  SPFILE 절은 CONTROL_FILES를 상속, 직접 지정</a:t>
+            </a:r>
+          </a:p>
+          <a:p>
+            <a:pPr algn="l">
+              <a:spcAft>
+                <a:spcPts val="1000"/>
+              </a:spcAft>
+            </a:pPr>
+            <a:r>
+              <a:rPr sz="1600" b="0">
+                <a:solidFill>
+                  <a:srgbClr val="222222"/>
+                </a:solidFill>
+                <a:latin typeface="맑은 고딕"/>
+              </a:rPr>
+              <a:t>•  ASM은 OMF가 기본, AUTO와 함께 Primary에도 설정</a:t>
+            </a:r>
+          </a:p>
+        </p:txBody>
+      </p:sp>
+    </p:spTree>
+  </p:cSld>
+  <p:clrMapOvr>
+    <a:masterClrMapping/>
+  </p:clrMapOvr>
+</p:sld>
+</file>
+
+<file path=ppt/slides/slide51.xml><?xml version="1.0" encoding="utf-8"?>
+<p:sld xmlns:a="http://schemas.openxmlformats.org/drawingml/2006/main" xmlns:p="http://schemas.openxmlformats.org/presentationml/2006/main" xmlns:r="http://schemas.openxmlformats.org/officeDocument/2006/relationships">
+  <p:cSld>
+    <p:spTree>
+      <p:nvGrpSpPr>
+        <p:cNvPr id="1" name=""/>
+        <p:cNvGrpSpPr/>
+        <p:nvPr/>
+      </p:nvGrpSpPr>
+      <p:grpSpPr/>
+      <p:sp>
+        <p:nvSpPr>
+          <p:cNvPr id="2" name="Rectangle 1"/>
+          <p:cNvSpPr/>
+          <p:nvPr/>
+        </p:nvSpPr>
+        <p:spPr>
+          <a:xfrm>
+            <a:off x="0" y="0"/>
+            <a:ext cx="12191695" cy="1005840"/>
+          </a:xfrm>
+          <a:prstGeom prst="rect">
+            <a:avLst/>
+          </a:prstGeom>
+          <a:solidFill>
+            <a:srgbClr val="C0392B"/>
+          </a:solidFill>
+          <a:ln>
+            <a:noFill/>
+          </a:ln>
+          <a:effectLst/>
+        </p:spPr>
+        <p:style>
+          <a:lnRef idx="1">
+            <a:schemeClr val="accent1"/>
+          </a:lnRef>
+          <a:fillRef idx="3">
+            <a:schemeClr val="accent1"/>
+          </a:fillRef>
+          <a:effectRef idx="2">
+            <a:schemeClr val="accent1"/>
+          </a:effectRef>
+          <a:fontRef idx="minor">
+            <a:schemeClr val="lt1"/>
+          </a:fontRef>
+        </p:style>
+        <p:txBody>
+          <a:bodyPr rtlCol="0" anchor="ctr"/>
+          <a:lstStyle/>
+          <a:p>
+            <a:pPr algn="ctr"/>
+          </a:p>
+        </p:txBody>
+      </p:sp>
+      <p:sp>
+        <p:nvSpPr>
+          <p:cNvPr id="3" name="TextBox 2"/>
+          <p:cNvSpPr txBox="1"/>
+          <p:nvPr/>
+        </p:nvSpPr>
+        <p:spPr>
+          <a:xfrm>
+            <a:off x="548640" y="91440"/>
+            <a:ext cx="10972800" cy="777240"/>
+          </a:xfrm>
+          <a:prstGeom prst="rect">
+            <a:avLst/>
+          </a:prstGeom>
+          <a:noFill/>
+        </p:spPr>
+        <p:txBody>
+          <a:bodyPr wrap="square">
+            <a:spAutoFit/>
+          </a:bodyPr>
+          <a:lstStyle/>
+          <a:p>
+            <a:pPr algn="l">
+              <a:spcAft>
+                <a:spcPts val="600"/>
+              </a:spcAft>
+            </a:pPr>
+            <a:r>
+              <a:rPr sz="2600" b="1">
+                <a:solidFill>
+                  <a:srgbClr val="FFFFFF"/>
+                </a:solidFill>
+                <a:latin typeface="맑은 고딕"/>
+              </a:rPr>
+              <a:t>퀴즈 (1/2)</a:t>
+            </a:r>
+          </a:p>
+        </p:txBody>
+      </p:sp>
+      <p:sp>
+        <p:nvSpPr>
+          <p:cNvPr id="4" name="TextBox 3"/>
+          <p:cNvSpPr txBox="1"/>
+          <p:nvPr/>
+        </p:nvSpPr>
+        <p:spPr>
+          <a:xfrm>
+            <a:off x="640080" y="1371600"/>
+            <a:ext cx="10881360" cy="5120640"/>
+          </a:xfrm>
+          <a:prstGeom prst="rect">
+            <a:avLst/>
+          </a:prstGeom>
+          <a:noFill/>
+        </p:spPr>
+        <p:txBody>
+          <a:bodyPr wrap="square">
+            <a:spAutoFit/>
+          </a:bodyPr>
+          <a:lstStyle/>
+          <a:p>
+            <a:pPr algn="l">
+              <a:spcAft>
+                <a:spcPts val="1000"/>
+              </a:spcAft>
+            </a:pPr>
+            <a:r>
+              <a:rPr sz="1600" b="0">
+                <a:solidFill>
+                  <a:srgbClr val="222222"/>
+                </a:solidFill>
+                <a:latin typeface="맑은 고딕"/>
+              </a:rPr>
+              <a:t>•  Q1. FILE_DEST와 FRA만 설정 시 로그 멤버 수는? → 2개</a:t>
+            </a:r>
+          </a:p>
+          <a:p>
+            <a:pPr algn="l">
+              <a:spcAft>
+                <a:spcPts val="1000"/>
+              </a:spcAft>
+            </a:pPr>
+            <a:r>
+              <a:rPr sz="1600" b="0">
+                <a:solidFill>
+                  <a:srgbClr val="222222"/>
+                </a:solidFill>
+                <a:latin typeface="맑은 고딕"/>
+              </a:rPr>
+              <a:t>•  Q2. Standby SYSTEM 파일의 디렉터리는? → BOSTON/datafile</a:t>
+            </a:r>
+          </a:p>
+          <a:p>
+            <a:pPr algn="l">
+              <a:spcAft>
+                <a:spcPts val="1000"/>
+              </a:spcAft>
+            </a:pPr>
+            <a:r>
+              <a:rPr sz="1600" b="0">
+                <a:solidFill>
+                  <a:srgbClr val="222222"/>
+                </a:solidFill>
+                <a:latin typeface="맑은 고딕"/>
+              </a:rPr>
+              <a:t>•  Q3. NOFILENAMECHECK가 필요 없는 이유는? → 이름이 겹칠 수 없음</a:t>
+            </a:r>
+          </a:p>
+        </p:txBody>
+      </p:sp>
+    </p:spTree>
+  </p:cSld>
+  <p:clrMapOvr>
+    <a:masterClrMapping/>
+  </p:clrMapOvr>
+</p:sld>
+</file>
+
+<file path=ppt/slides/slide52.xml><?xml version="1.0" encoding="utf-8"?>
+<p:sld xmlns:a="http://schemas.openxmlformats.org/drawingml/2006/main" xmlns:p="http://schemas.openxmlformats.org/presentationml/2006/main" xmlns:r="http://schemas.openxmlformats.org/officeDocument/2006/relationships">
+  <p:cSld>
+    <p:spTree>
+      <p:nvGrpSpPr>
+        <p:cNvPr id="1" name=""/>
+        <p:cNvGrpSpPr/>
+        <p:nvPr/>
+      </p:nvGrpSpPr>
+      <p:grpSpPr/>
+      <p:sp>
+        <p:nvSpPr>
+          <p:cNvPr id="2" name="Rectangle 1"/>
+          <p:cNvSpPr/>
+          <p:nvPr/>
+        </p:nvSpPr>
+        <p:spPr>
+          <a:xfrm>
+            <a:off x="0" y="0"/>
+            <a:ext cx="12191695" cy="1005840"/>
+          </a:xfrm>
+          <a:prstGeom prst="rect">
+            <a:avLst/>
+          </a:prstGeom>
+          <a:solidFill>
+            <a:srgbClr val="C0392B"/>
+          </a:solidFill>
+          <a:ln>
+            <a:noFill/>
+          </a:ln>
+          <a:effectLst/>
+        </p:spPr>
+        <p:style>
+          <a:lnRef idx="1">
+            <a:schemeClr val="accent1"/>
+          </a:lnRef>
+          <a:fillRef idx="3">
+            <a:schemeClr val="accent1"/>
+          </a:fillRef>
+          <a:effectRef idx="2">
+            <a:schemeClr val="accent1"/>
+          </a:effectRef>
+          <a:fontRef idx="minor">
+            <a:schemeClr val="lt1"/>
+          </a:fontRef>
+        </p:style>
+        <p:txBody>
+          <a:bodyPr rtlCol="0" anchor="ctr"/>
+          <a:lstStyle/>
+          <a:p>
+            <a:pPr algn="ctr"/>
+          </a:p>
+        </p:txBody>
+      </p:sp>
+      <p:sp>
+        <p:nvSpPr>
+          <p:cNvPr id="3" name="TextBox 2"/>
+          <p:cNvSpPr txBox="1"/>
+          <p:nvPr/>
+        </p:nvSpPr>
+        <p:spPr>
+          <a:xfrm>
+            <a:off x="548640" y="91440"/>
+            <a:ext cx="10972800" cy="777240"/>
+          </a:xfrm>
+          <a:prstGeom prst="rect">
+            <a:avLst/>
+          </a:prstGeom>
+          <a:noFill/>
+        </p:spPr>
+        <p:txBody>
+          <a:bodyPr wrap="square">
+            <a:spAutoFit/>
+          </a:bodyPr>
+          <a:lstStyle/>
+          <a:p>
+            <a:pPr algn="l">
+              <a:spcAft>
+                <a:spcPts val="600"/>
+              </a:spcAft>
+            </a:pPr>
+            <a:r>
+              <a:rPr sz="2600" b="1">
+                <a:solidFill>
+                  <a:srgbClr val="FFFFFF"/>
+                </a:solidFill>
+                <a:latin typeface="맑은 고딕"/>
+              </a:rPr>
+              <a:t>퀴즈 (2/2)</a:t>
+            </a:r>
+          </a:p>
+        </p:txBody>
+      </p:sp>
+      <p:sp>
+        <p:nvSpPr>
+          <p:cNvPr id="4" name="TextBox 3"/>
+          <p:cNvSpPr txBox="1"/>
+          <p:nvPr/>
+        </p:nvSpPr>
+        <p:spPr>
+          <a:xfrm>
+            <a:off x="640080" y="1371600"/>
+            <a:ext cx="10881360" cy="5120640"/>
+          </a:xfrm>
+          <a:prstGeom prst="rect">
+            <a:avLst/>
+          </a:prstGeom>
+          <a:noFill/>
+        </p:spPr>
+        <p:txBody>
+          <a:bodyPr wrap="square">
+            <a:spAutoFit/>
+          </a:bodyPr>
+          <a:lstStyle/>
+          <a:p>
+            <a:pPr algn="l">
+              <a:spcAft>
+                <a:spcPts val="1000"/>
+              </a:spcAft>
+            </a:pPr>
+            <a:r>
+              <a:rPr sz="1600" b="0">
+                <a:solidFill>
+                  <a:srgbClr val="222222"/>
+                </a:solidFill>
+                <a:latin typeface="맑은 고딕"/>
+              </a:rPr>
+              <a:t>•  Q4. 컨트롤 파일만 Chicago에 생긴 원인은? → CONTROL_FILES 상속</a:t>
+            </a:r>
+          </a:p>
+          <a:p>
+            <a:pPr algn="l">
+              <a:spcAft>
+                <a:spcPts val="1000"/>
+              </a:spcAft>
+            </a:pPr>
+            <a:r>
+              <a:rPr sz="1600" b="0">
+                <a:solidFill>
+                  <a:srgbClr val="222222"/>
+                </a:solidFill>
+                <a:latin typeface="맑은 고딕"/>
+              </a:rPr>
+              <a:t>•  Q5. OMF와 convert를 함께 주면? → convert가 우선</a:t>
+            </a:r>
+          </a:p>
+          <a:p>
+            <a:pPr algn="l">
+              <a:spcAft>
+                <a:spcPts val="1000"/>
+              </a:spcAft>
+            </a:pPr>
+            <a:r>
+              <a:rPr sz="1600" b="0">
+                <a:solidFill>
+                  <a:srgbClr val="222222"/>
+                </a:solidFill>
+                <a:latin typeface="맑은 고딕"/>
+              </a:rPr>
+              <a:t>•  Q6. 혼합 구성의 Switchover 대비는? → chicago에도 OMF 위치</a:t>
+            </a:r>
+          </a:p>
+        </p:txBody>
+      </p:sp>
+    </p:spTree>
+  </p:cSld>
+  <p:clrMapOvr>
+    <a:masterClrMapping/>
+  </p:clrMapOvr>
+</p:sld>
+</file>
+
+<file path=ppt/slides/slide53.xml><?xml version="1.0" encoding="utf-8"?>
+<p:sld xmlns:a="http://schemas.openxmlformats.org/drawingml/2006/main" xmlns:p="http://schemas.openxmlformats.org/presentationml/2006/main" xmlns:r="http://schemas.openxmlformats.org/officeDocument/2006/relationships">
+  <p:cSld>
+    <p:spTree>
+      <p:nvGrpSpPr>
+        <p:cNvPr id="1" name=""/>
+        <p:cNvGrpSpPr/>
+        <p:nvPr/>
+      </p:nvGrpSpPr>
+      <p:grpSpPr/>
+      <p:sp>
+        <p:nvSpPr>
+          <p:cNvPr id="2" name="Rectangle 1"/>
+          <p:cNvSpPr/>
+          <p:nvPr/>
+        </p:nvSpPr>
+        <p:spPr>
+          <a:xfrm>
+            <a:off x="0" y="0"/>
+            <a:ext cx="12191695" cy="1005840"/>
+          </a:xfrm>
+          <a:prstGeom prst="rect">
+            <a:avLst/>
+          </a:prstGeom>
+          <a:solidFill>
+            <a:srgbClr val="C0392B"/>
+          </a:solidFill>
+          <a:ln>
+            <a:noFill/>
+          </a:ln>
+          <a:effectLst/>
+        </p:spPr>
+        <p:style>
+          <a:lnRef idx="1">
+            <a:schemeClr val="accent1"/>
+          </a:lnRef>
+          <a:fillRef idx="3">
+            <a:schemeClr val="accent1"/>
+          </a:fillRef>
+          <a:effectRef idx="2">
+            <a:schemeClr val="accent1"/>
+          </a:effectRef>
+          <a:fontRef idx="minor">
+            <a:schemeClr val="lt1"/>
+          </a:fontRef>
+        </p:style>
+        <p:txBody>
+          <a:bodyPr rtlCol="0" anchor="ctr"/>
+          <a:lstStyle/>
+          <a:p>
+            <a:pPr algn="ctr"/>
+          </a:p>
+        </p:txBody>
+      </p:sp>
+      <p:sp>
+        <p:nvSpPr>
+          <p:cNvPr id="3" name="TextBox 2"/>
+          <p:cNvSpPr txBox="1"/>
+          <p:nvPr/>
+        </p:nvSpPr>
+        <p:spPr>
+          <a:xfrm>
+            <a:off x="548640" y="91440"/>
+            <a:ext cx="10972800" cy="777240"/>
+          </a:xfrm>
+          <a:prstGeom prst="rect">
+            <a:avLst/>
+          </a:prstGeom>
+          <a:noFill/>
+        </p:spPr>
+        <p:txBody>
+          <a:bodyPr wrap="square">
+            <a:spAutoFit/>
+          </a:bodyPr>
+          <a:lstStyle/>
+          <a:p>
+            <a:pPr algn="l">
+              <a:spcAft>
+                <a:spcPts val="600"/>
+              </a:spcAft>
+            </a:pPr>
+            <a:r>
+              <a:rPr sz="2600" b="1">
+                <a:solidFill>
+                  <a:srgbClr val="FFFFFF"/>
+                </a:solidFill>
+                <a:latin typeface="맑은 고딕"/>
+              </a:rPr>
+              <a:t>실습 개요</a:t>
+            </a:r>
+          </a:p>
+        </p:txBody>
+      </p:sp>
+      <p:sp>
+        <p:nvSpPr>
+          <p:cNvPr id="4" name="TextBox 3"/>
+          <p:cNvSpPr txBox="1"/>
+          <p:nvPr/>
+        </p:nvSpPr>
+        <p:spPr>
+          <a:xfrm>
+            <a:off x="640080" y="1371600"/>
+            <a:ext cx="10881360" cy="5120640"/>
+          </a:xfrm>
+          <a:prstGeom prst="rect">
+            <a:avLst/>
+          </a:prstGeom>
+          <a:noFill/>
+        </p:spPr>
+        <p:txBody>
+          <a:bodyPr wrap="square">
+            <a:spAutoFit/>
+          </a:bodyPr>
+          <a:lstStyle/>
+          <a:p>
+            <a:pPr algn="l">
+              <a:spcAft>
+                <a:spcPts val="1000"/>
+              </a:spcAft>
+            </a:pPr>
+            <a:r>
+              <a:rPr sz="1600" b="0">
+                <a:solidFill>
+                  <a:srgbClr val="222222"/>
+                </a:solidFill>
+                <a:latin typeface="맑은 고딕"/>
+              </a:rPr>
+              <a:t>•  01 OMF 파라미터와 기준 상태 (6.3)</a:t>
+            </a:r>
+          </a:p>
+          <a:p>
+            <a:pPr algn="l">
+              <a:spcAft>
+                <a:spcPts val="1000"/>
+              </a:spcAft>
+            </a:pPr>
+            <a:r>
+              <a:rPr sz="1600" b="0">
+                <a:solidFill>
+                  <a:srgbClr val="222222"/>
+                </a:solidFill>
+                <a:latin typeface="맑은 고딕"/>
+              </a:rPr>
+              <a:t>•  02 없는 디렉터리 / 03 파라미터 누락 실패 재현 (6.3.5, 6.6.4)</a:t>
+            </a:r>
+          </a:p>
+          <a:p>
+            <a:pPr algn="l">
+              <a:spcAft>
+                <a:spcPts val="1000"/>
+              </a:spcAft>
+            </a:pPr>
+            <a:r>
+              <a:rPr sz="1600" b="0">
+                <a:solidFill>
+                  <a:srgbClr val="222222"/>
+                </a:solidFill>
+                <a:latin typeface="맑은 고딕"/>
+              </a:rPr>
+              <a:t>•  04 OMF 방식 DUPLICATE 실행 (6.6)</a:t>
+            </a:r>
+          </a:p>
+          <a:p>
+            <a:pPr algn="l">
+              <a:spcAft>
+                <a:spcPts val="1000"/>
+              </a:spcAft>
+            </a:pPr>
+            <a:r>
+              <a:rPr sz="1600" b="0">
+                <a:solidFill>
+                  <a:srgbClr val="222222"/>
+                </a:solidFill>
+                <a:latin typeface="맑은 고딕"/>
+              </a:rPr>
+              <a:t>•  05 OMF 구조 해부: 계층, GUID, 이름, 다중화 (6.3.4, 6.4)</a:t>
+            </a:r>
+          </a:p>
+          <a:p>
+            <a:pPr algn="l">
+              <a:spcAft>
+                <a:spcPts val="1000"/>
+              </a:spcAft>
+            </a:pPr>
+            <a:r>
+              <a:rPr sz="1600" b="0">
+                <a:solidFill>
+                  <a:srgbClr val="222222"/>
+                </a:solidFill>
+                <a:latin typeface="맑은 고딕"/>
+              </a:rPr>
+              <a:t>•  06 컨트롤 파일 교정 (6.7)</a:t>
+            </a:r>
+          </a:p>
+          <a:p>
+            <a:pPr algn="l">
+              <a:spcAft>
+                <a:spcPts val="1000"/>
+              </a:spcAft>
+            </a:pPr>
+            <a:r>
+              <a:rPr sz="1600" b="0">
+                <a:solidFill>
+                  <a:srgbClr val="222222"/>
+                </a:solidFill>
+                <a:latin typeface="맑은 고딕"/>
+              </a:rPr>
+              <a:t>•  07 두 방식 비교와 ADG 검증 (6.7.4, 6.10)</a:t>
             </a:r>
           </a:p>
         </p:txBody>
@@ -13851,7 +17500,7 @@
                 </a:solidFill>
                 <a:latin typeface="맑은 고딕"/>
               </a:rPr>
-              <a:t>OMF의 세 파라미터</a:t>
+              <a:t>OMF의 정의와 대상 파일</a:t>
             </a:r>
           </a:p>
         </p:txBody>
@@ -13890,7 +17539,7 @@
                 </a:solidFill>
                 <a:latin typeface="맑은 고딕"/>
               </a:rPr>
-              <a:t>무엇이 어디로 가는가</a:t>
+              <a:t>위치만 주면 이름은 데이터베이스가 짓는다</a:t>
             </a:r>
           </a:p>
         </p:txBody>
@@ -13929,7 +17578,7 @@
                 </a:solidFill>
                 <a:latin typeface="맑은 고딕"/>
               </a:rPr>
-              <a:t>•  `DB_CREATE_FILE_DEST` — 데이터·임시 파일. 실습 `/u03/app/oracle/oradata`</a:t>
+              <a:t>•  데이터 파일, 임시 파일, 온라인 로그, SRL</a:t>
             </a:r>
           </a:p>
           <a:p>
@@ -13945,7 +17594,7 @@
                 </a:solidFill>
                 <a:latin typeface="맑은 고딕"/>
               </a:rPr>
-              <a:t>•  `DB_CREATE_ONLINE_LOG_DEST_n` — 온라인 로그·컨트롤 파일. **미지정**</a:t>
+              <a:t>•  컨트롤 파일은 CONTROL_FILES가 비어 있을 때만</a:t>
             </a:r>
           </a:p>
           <a:p>
@@ -13961,7 +17610,7 @@
                 </a:solidFill>
                 <a:latin typeface="맑은 고딕"/>
               </a:rPr>
-              <a:t>•  `DB_RECOVERY_FILE_DEST` — FRA. 실습 15GB</a:t>
+              <a:t>•  FRA의 아카이브 로그, 백업, Flashback 로그</a:t>
             </a:r>
           </a:p>
           <a:p>
@@ -13977,7 +17626,23 @@
                 </a:solidFill>
                 <a:latin typeface="맑은 고딕"/>
               </a:rPr>
-              <a:t>•  로그 목적지를 지정하지 않으면 `DB_CREATE_FILE_DEST` 아래로 간다</a:t>
+              <a:t>•  패스워드 파일, 경보 로그, 트레이스는 대상 아님</a:t>
+            </a:r>
+          </a:p>
+          <a:p>
+            <a:pPr algn="l">
+              <a:spcAft>
+                <a:spcPts val="1000"/>
+              </a:spcAft>
+            </a:pPr>
+            <a:r>
+              <a:rPr sz="1700" b="0">
+                <a:solidFill>
+                  <a:srgbClr val="222222"/>
+                </a:solidFill>
+                <a:latin typeface="맑은 고딕"/>
+              </a:rPr>
+              <a:t>•  파라미터가 비어 있으면 이름 생략 시 ORA-02236</a:t>
             </a:r>
           </a:p>
         </p:txBody>
@@ -14078,7 +17743,7 @@
                 </a:solidFill>
                 <a:latin typeface="맑은 고딕"/>
               </a:rPr>
-              <a:t>켜고 끄는 스위치가 아니다</a:t>
+              <a:t>OMF 파일의 수명 관리</a:t>
             </a:r>
           </a:p>
         </p:txBody>
@@ -14117,7 +17782,7 @@
                 </a:solidFill>
                 <a:latin typeface="맑은 고딕"/>
               </a:rPr>
-              <a:t>파일 단위 규칙</a:t>
+              <a:t>만든 파일은 지우는 것까지 책임진다</a:t>
             </a:r>
           </a:p>
         </p:txBody>
@@ -14156,7 +17821,7 @@
                 </a:solidFill>
                 <a:latin typeface="맑은 고딕"/>
               </a:rPr>
-              <a:t>•  `DB_CREATE_FILE_DEST`에 값이 있으면 그 이후 만들어지는 파일이 OMF</a:t>
+              <a:t>•  DROP TABLESPACE 시 OMF 데이터 파일도 삭제</a:t>
             </a:r>
           </a:p>
           <a:p>
@@ -14172,7 +17837,7 @@
                 </a:solidFill>
                 <a:latin typeface="맑은 고딕"/>
               </a:rPr>
-              <a:t>•  데이터베이스 단위 스위치가 아니라 파일 단위 규칙</a:t>
+              <a:t>•  일반 파일은 INCLUDING ... DATAFILES 없으면 남음</a:t>
             </a:r>
           </a:p>
           <a:p>
@@ -14188,7 +17853,7 @@
                 </a:solidFill>
                 <a:latin typeface="맑은 고딕"/>
               </a:rPr>
-              <a:t>•  한 데이터베이스에 OMF 파일과 비OMF 파일이 섞일 수 있다</a:t>
+              <a:t>•  DROP LOGFILE GROUP도 OMF 멤버 파일 삭제</a:t>
             </a:r>
           </a:p>
           <a:p>
@@ -14204,7 +17869,23 @@
                 </a:solidFill>
                 <a:latin typeface="맑은 고딕"/>
               </a:rPr>
-              <a:t>•  실습 환경 : chicago 비OMF / boston OMF</a:t>
+              <a:t>•  OMF 파일과 일반 파일의 공존은 정상</a:t>
+            </a:r>
+          </a:p>
+          <a:p>
+            <a:pPr algn="l">
+              <a:spcAft>
+                <a:spcPts val="1000"/>
+              </a:spcAft>
+            </a:pPr>
+            <a:r>
+              <a:rPr sz="1700" b="0">
+                <a:solidFill>
+                  <a:srgbClr val="222222"/>
+                </a:solidFill>
+                <a:latin typeface="맑은 고딕"/>
+              </a:rPr>
+              <a:t>•  MOVE DATAFILE을 TO 없이 쓰면 OMF로 이동</a:t>
             </a:r>
           </a:p>
         </p:txBody>
@@ -14236,7 +17917,7 @@
         <p:spPr>
           <a:xfrm>
             <a:off x="0" y="0"/>
-            <a:ext cx="12191695" cy="6858000"/>
+            <a:ext cx="12191695" cy="1005840"/>
           </a:xfrm>
           <a:prstGeom prst="rect">
             <a:avLst/>
@@ -14279,8 +17960,8 @@
         </p:nvSpPr>
         <p:spPr>
           <a:xfrm>
-            <a:off x="822960" y="2011680"/>
-            <a:ext cx="10515600" cy="1097280"/>
+            <a:off x="548640" y="91440"/>
+            <a:ext cx="10972800" cy="777240"/>
           </a:xfrm>
           <a:prstGeom prst="rect">
             <a:avLst/>
@@ -14299,13 +17980,13 @@
               </a:spcAft>
             </a:pPr>
             <a:r>
-              <a:rPr sz="4000" b="1">
+              <a:rPr sz="2600" b="1">
                 <a:solidFill>
                   <a:srgbClr val="FFFFFF"/>
                 </a:solidFill>
                 <a:latin typeface="맑은 고딕"/>
               </a:rPr>
-              <a:t>6.3</a:t>
+              <a:t>DBCA로 만든 데이터베이스가 OMF인가</a:t>
             </a:r>
           </a:p>
         </p:txBody>
@@ -14318,8 +17999,8 @@
         </p:nvSpPr>
         <p:spPr>
           <a:xfrm>
-            <a:off x="822960" y="3017520"/>
-            <a:ext cx="10515600" cy="914400"/>
+            <a:off x="640080" y="1078992"/>
+            <a:ext cx="10881360" cy="457200"/>
           </a:xfrm>
           <a:prstGeom prst="rect">
             <a:avLst/>
@@ -14338,71 +18019,27 @@
               </a:spcAft>
             </a:pPr>
             <a:r>
-              <a:rPr sz="2800" b="1">
-                <a:solidFill>
-                  <a:srgbClr val="FFFFFF"/>
-                </a:solidFill>
-                <a:latin typeface="맑은 고딕"/>
-              </a:rPr>
-              <a:t>스크립트가 어떻게 달라지는가</a:t>
-            </a:r>
-          </a:p>
-        </p:txBody>
-      </p:sp>
-      <p:sp>
-        <p:nvSpPr>
-          <p:cNvPr id="5" name="Rectangle 4"/>
-          <p:cNvSpPr/>
-          <p:nvPr/>
-        </p:nvSpPr>
-        <p:spPr>
-          <a:xfrm>
-            <a:off x="822960" y="4114800"/>
-            <a:ext cx="5486400" cy="54864"/>
-          </a:xfrm>
-          <a:prstGeom prst="rect">
-            <a:avLst/>
-          </a:prstGeom>
-          <a:solidFill>
-            <a:srgbClr val="FFFFFF"/>
-          </a:solidFill>
-          <a:ln>
-            <a:noFill/>
-          </a:ln>
-          <a:effectLst/>
-        </p:spPr>
-        <p:style>
-          <a:lnRef idx="1">
-            <a:schemeClr val="accent1"/>
-          </a:lnRef>
-          <a:fillRef idx="3">
-            <a:schemeClr val="accent1"/>
-          </a:fillRef>
-          <a:effectRef idx="2">
-            <a:schemeClr val="accent1"/>
-          </a:effectRef>
-          <a:fontRef idx="minor">
-            <a:schemeClr val="lt1"/>
-          </a:fontRef>
-        </p:style>
-        <p:txBody>
-          <a:bodyPr rtlCol="0" anchor="ctr"/>
-          <a:lstStyle/>
-          <a:p>
-            <a:pPr algn="ctr"/>
-          </a:p>
-        </p:txBody>
-      </p:sp>
-      <p:sp>
-        <p:nvSpPr>
-          <p:cNvPr id="6" name="TextBox 5"/>
+              <a:rPr sz="1500" b="0">
+                <a:solidFill>
+                  <a:srgbClr val="5A6672"/>
+                </a:solidFill>
+                <a:latin typeface="맑은 고딕"/>
+              </a:rPr>
+              <a:t>최상위 경로 지정과 OMF는 다른 설정</a:t>
+            </a:r>
+          </a:p>
+        </p:txBody>
+      </p:sp>
+      <p:sp>
+        <p:nvSpPr>
+          <p:cNvPr id="5" name="TextBox 4"/>
           <p:cNvSpPr txBox="1"/>
           <p:nvPr/>
         </p:nvSpPr>
         <p:spPr>
           <a:xfrm>
-            <a:off x="822960" y="4297680"/>
-            <a:ext cx="10058400" cy="2011680"/>
+            <a:off x="640080" y="1737360"/>
+            <a:ext cx="10881360" cy="4754880"/>
           </a:xfrm>
           <a:prstGeom prst="rect">
             <a:avLst/>
@@ -14417,49 +18054,65 @@
           <a:p>
             <a:pPr algn="l">
               <a:spcAft>
-                <a:spcPts val="800"/>
-              </a:spcAft>
-            </a:pPr>
-            <a:r>
-              <a:rPr sz="1600" b="0">
-                <a:solidFill>
-                  <a:srgbClr val="FFFFFF"/>
-                </a:solidFill>
-                <a:latin typeface="맑은 고딕"/>
-              </a:rPr>
-              <a:t>•  사라지는 다섯 절</a:t>
-            </a:r>
-          </a:p>
-          <a:p>
-            <a:pPr algn="l">
-              <a:spcAft>
-                <a:spcPts val="800"/>
-              </a:spcAft>
-            </a:pPr>
-            <a:r>
-              <a:rPr sz="1600" b="0">
-                <a:solidFill>
-                  <a:srgbClr val="FFFFFF"/>
-                </a:solidFill>
-                <a:latin typeface="맑은 고딕"/>
-              </a:rPr>
-              <a:t>•  새로 생기는 세 절</a:t>
-            </a:r>
-          </a:p>
-          <a:p>
-            <a:pPr algn="l">
-              <a:spcAft>
-                <a:spcPts val="800"/>
-              </a:spcAft>
-            </a:pPr>
-            <a:r>
-              <a:rPr sz="1600" b="0">
-                <a:solidFill>
-                  <a:srgbClr val="FFFFFF"/>
-                </a:solidFill>
-                <a:latin typeface="맑은 고딕"/>
-              </a:rPr>
-              <a:t>•  초기 pfile 한 줄</a:t>
+                <a:spcPts val="1000"/>
+              </a:spcAft>
+            </a:pPr>
+            <a:r>
+              <a:rPr sz="1700" b="0">
+                <a:solidFill>
+                  <a:srgbClr val="222222"/>
+                </a:solidFill>
+                <a:latin typeface="맑은 고딕"/>
+              </a:rPr>
+              <a:t>•  datafileDestination만으로 OMF가 되지 않음</a:t>
+            </a:r>
+          </a:p>
+          <a:p>
+            <a:pPr algn="l">
+              <a:spcAft>
+                <a:spcPts val="1000"/>
+              </a:spcAft>
+            </a:pPr>
+            <a:r>
+              <a:rPr sz="1700" b="0">
+                <a:solidFill>
+                  <a:srgbClr val="222222"/>
+                </a:solidFill>
+                <a:latin typeface="맑은 고딕"/>
+              </a:rPr>
+              <a:t>•  기본 템플릿은 system01.dbf 같은 이름으로 생성</a:t>
+            </a:r>
+          </a:p>
+          <a:p>
+            <a:pPr algn="l">
+              <a:spcAft>
+                <a:spcPts val="1000"/>
+              </a:spcAft>
+            </a:pPr>
+            <a:r>
+              <a:rPr sz="1700" b="0">
+                <a:solidFill>
+                  <a:srgbClr val="222222"/>
+                </a:solidFill>
+                <a:latin typeface="맑은 고딕"/>
+              </a:rPr>
+              <a:t>•  OMF로 만들려면 useOMF true 또는 생성 후 설정</a:t>
+            </a:r>
+          </a:p>
+          <a:p>
+            <a:pPr algn="l">
+              <a:spcAft>
+                <a:spcPts val="1000"/>
+              </a:spcAft>
+            </a:pPr>
+            <a:r>
+              <a:rPr sz="1700" b="0">
+                <a:solidFill>
+                  <a:srgbClr val="222222"/>
+                </a:solidFill>
+                <a:latin typeface="맑은 고딕"/>
+              </a:rPr>
+              <a:t>•  판단은 V$DATAFILE 이름의 o1_mf_ 접두어로</a:t>
             </a:r>
           </a:p>
         </p:txBody>
@@ -14491,7 +18144,7 @@
         <p:spPr>
           <a:xfrm>
             <a:off x="0" y="0"/>
-            <a:ext cx="12191695" cy="1005840"/>
+            <a:ext cx="12191695" cy="6858000"/>
           </a:xfrm>
           <a:prstGeom prst="rect">
             <a:avLst/>
@@ -14534,8 +18187,8 @@
         </p:nvSpPr>
         <p:spPr>
           <a:xfrm>
-            <a:off x="548640" y="91440"/>
-            <a:ext cx="10972800" cy="777240"/>
+            <a:off x="822960" y="2011680"/>
+            <a:ext cx="10515600" cy="1097280"/>
           </a:xfrm>
           <a:prstGeom prst="rect">
             <a:avLst/>
@@ -14554,13 +18207,13 @@
               </a:spcAft>
             </a:pPr>
             <a:r>
-              <a:rPr sz="2600" b="1">
+              <a:rPr sz="4000" b="1">
                 <a:solidFill>
                   <a:srgbClr val="FFFFFF"/>
                 </a:solidFill>
                 <a:latin typeface="맑은 고딕"/>
               </a:rPr>
-              <a:t>다섯이 사라지고 셋이 생긴다</a:t>
+              <a:t>6.3</a:t>
             </a:r>
           </a:p>
         </p:txBody>
@@ -14573,8 +18226,8 @@
         </p:nvSpPr>
         <p:spPr>
           <a:xfrm>
-            <a:off x="640080" y="1078992"/>
-            <a:ext cx="10881360" cy="457200"/>
+            <a:off x="822960" y="3017520"/>
+            <a:ext cx="10515600" cy="914400"/>
           </a:xfrm>
           <a:prstGeom prst="rect">
             <a:avLst/>
@@ -14593,27 +18246,71 @@
               </a:spcAft>
             </a:pPr>
             <a:r>
-              <a:rPr sz="1500" b="0">
-                <a:solidFill>
-                  <a:srgbClr val="5A6672"/>
-                </a:solidFill>
-                <a:latin typeface="맑은 고딕"/>
-              </a:rPr>
-              <a:t>스크립트 대조</a:t>
-            </a:r>
-          </a:p>
-        </p:txBody>
-      </p:sp>
-      <p:sp>
-        <p:nvSpPr>
-          <p:cNvPr id="5" name="TextBox 4"/>
+              <a:rPr sz="2800" b="1">
+                <a:solidFill>
+                  <a:srgbClr val="FFFFFF"/>
+                </a:solidFill>
+                <a:latin typeface="맑은 고딕"/>
+              </a:rPr>
+              <a:t>OMF 파라미터와 파일 배치 규칙</a:t>
+            </a:r>
+          </a:p>
+        </p:txBody>
+      </p:sp>
+      <p:sp>
+        <p:nvSpPr>
+          <p:cNvPr id="5" name="Rectangle 4"/>
+          <p:cNvSpPr/>
+          <p:nvPr/>
+        </p:nvSpPr>
+        <p:spPr>
+          <a:xfrm>
+            <a:off x="822960" y="4114800"/>
+            <a:ext cx="5486400" cy="54864"/>
+          </a:xfrm>
+          <a:prstGeom prst="rect">
+            <a:avLst/>
+          </a:prstGeom>
+          <a:solidFill>
+            <a:srgbClr val="FFFFFF"/>
+          </a:solidFill>
+          <a:ln>
+            <a:noFill/>
+          </a:ln>
+          <a:effectLst/>
+        </p:spPr>
+        <p:style>
+          <a:lnRef idx="1">
+            <a:schemeClr val="accent1"/>
+          </a:lnRef>
+          <a:fillRef idx="3">
+            <a:schemeClr val="accent1"/>
+          </a:fillRef>
+          <a:effectRef idx="2">
+            <a:schemeClr val="accent1"/>
+          </a:effectRef>
+          <a:fontRef idx="minor">
+            <a:schemeClr val="lt1"/>
+          </a:fontRef>
+        </p:style>
+        <p:txBody>
+          <a:bodyPr rtlCol="0" anchor="ctr"/>
+          <a:lstStyle/>
+          <a:p>
+            <a:pPr algn="ctr"/>
+          </a:p>
+        </p:txBody>
+      </p:sp>
+      <p:sp>
+        <p:nvSpPr>
+          <p:cNvPr id="6" name="TextBox 5"/>
           <p:cNvSpPr txBox="1"/>
           <p:nvPr/>
         </p:nvSpPr>
         <p:spPr>
           <a:xfrm>
-            <a:off x="640080" y="1737360"/>
-            <a:ext cx="10881360" cy="4754880"/>
+            <a:off x="822960" y="4297680"/>
+            <a:ext cx="10058400" cy="2011680"/>
           </a:xfrm>
           <a:prstGeom prst="rect">
             <a:avLst/>
@@ -14628,65 +18325,49 @@
           <a:p>
             <a:pPr algn="l">
               <a:spcAft>
-                <a:spcPts val="1000"/>
-              </a:spcAft>
-            </a:pPr>
-            <a:r>
-              <a:rPr sz="1700" b="0">
-                <a:solidFill>
-                  <a:srgbClr val="222222"/>
-                </a:solidFill>
-                <a:latin typeface="맑은 고딕"/>
-              </a:rPr>
-              <a:t>•  사라짐 : `parameter_value_convert` · `db_file_name_convert` · `log_file_name_convert` · `control_files` · `nofilenamecheck`</a:t>
-            </a:r>
-          </a:p>
-          <a:p>
-            <a:pPr algn="l">
-              <a:spcAft>
-                <a:spcPts val="1000"/>
-              </a:spcAft>
-            </a:pPr>
-            <a:r>
-              <a:rPr sz="1700" b="0">
-                <a:solidFill>
-                  <a:srgbClr val="222222"/>
-                </a:solidFill>
-                <a:latin typeface="맑은 고딕"/>
-              </a:rPr>
-              <a:t>•  생김 : `db_create_file_dest` · `db_recovery_file_dest` · `db_recovery_file_dest_size`</a:t>
-            </a:r>
-          </a:p>
-          <a:p>
-            <a:pPr algn="l">
-              <a:spcAft>
-                <a:spcPts val="1000"/>
-              </a:spcAft>
-            </a:pPr>
-            <a:r>
-              <a:rPr sz="1700" b="0">
-                <a:solidFill>
-                  <a:srgbClr val="222222"/>
-                </a:solidFill>
-                <a:latin typeface="맑은 고딕"/>
-              </a:rPr>
-              <a:t>•  두 convert를 `db_create_file_dest` 하나가 대신한다</a:t>
-            </a:r>
-          </a:p>
-          <a:p>
-            <a:pPr algn="l">
-              <a:spcAft>
-                <a:spcPts val="1000"/>
-              </a:spcAft>
-            </a:pPr>
-            <a:r>
-              <a:rPr sz="1700" b="0">
-                <a:solidFill>
-                  <a:srgbClr val="222222"/>
-                </a:solidFill>
-                <a:latin typeface="맑은 고딕"/>
-              </a:rPr>
-              <a:t>•  `set control_files`만은 대신하는 것이 **없다** → 6.7절</a:t>
+                <a:spcPts val="800"/>
+              </a:spcAft>
+            </a:pPr>
+            <a:r>
+              <a:rPr sz="1600" b="0">
+                <a:solidFill>
+                  <a:srgbClr val="FFFFFF"/>
+                </a:solidFill>
+                <a:latin typeface="맑은 고딕"/>
+              </a:rPr>
+              <a:t>•  DB_CREATE_FILE_DEST</a:t>
+            </a:r>
+          </a:p>
+          <a:p>
+            <a:pPr algn="l">
+              <a:spcAft>
+                <a:spcPts val="800"/>
+              </a:spcAft>
+            </a:pPr>
+            <a:r>
+              <a:rPr sz="1600" b="0">
+                <a:solidFill>
+                  <a:srgbClr val="FFFFFF"/>
+                </a:solidFill>
+                <a:latin typeface="맑은 고딕"/>
+              </a:rPr>
+              <a:t>•  DB_CREATE_ONLINE_LOG_DEST_n</a:t>
+            </a:r>
+          </a:p>
+          <a:p>
+            <a:pPr algn="l">
+              <a:spcAft>
+                <a:spcPts val="800"/>
+              </a:spcAft>
+            </a:pPr>
+            <a:r>
+              <a:rPr sz="1600" b="0">
+                <a:solidFill>
+                  <a:srgbClr val="FFFFFF"/>
+                </a:solidFill>
+                <a:latin typeface="맑은 고딕"/>
+              </a:rPr>
+              <a:t>•  DB_RECOVERY_FILE_DEST와 조합별 배치</a:t>
             </a:r>
           </a:p>
         </p:txBody>
